--- a/docs/GIDIA_VA_Course_Project_Presentations.pptx
+++ b/docs/GIDIA_VA_Course_Project_Presentations.pptx
@@ -5,10 +5,10 @@
     <p:sldMasterId id="2147483648" r:id="rId1"/>
   </p:sldMasterIdLst>
   <p:notesMasterIdLst>
-    <p:notesMasterId r:id="rId15"/>
+    <p:notesMasterId r:id="rId18"/>
   </p:notesMasterIdLst>
   <p:handoutMasterIdLst>
-    <p:handoutMasterId r:id="rId16"/>
+    <p:handoutMasterId r:id="rId19"/>
   </p:handoutMasterIdLst>
   <p:sldIdLst>
     <p:sldId id="257" r:id="rId2"/>
@@ -17,13 +17,16 @@
     <p:sldId id="403" r:id="rId5"/>
     <p:sldId id="318" r:id="rId6"/>
     <p:sldId id="411" r:id="rId7"/>
-    <p:sldId id="405" r:id="rId8"/>
-    <p:sldId id="409" r:id="rId9"/>
-    <p:sldId id="412" r:id="rId10"/>
-    <p:sldId id="413" r:id="rId11"/>
-    <p:sldId id="383" r:id="rId12"/>
-    <p:sldId id="404" r:id="rId13"/>
-    <p:sldId id="287" r:id="rId14"/>
+    <p:sldId id="414" r:id="rId8"/>
+    <p:sldId id="405" r:id="rId9"/>
+    <p:sldId id="409" r:id="rId10"/>
+    <p:sldId id="412" r:id="rId11"/>
+    <p:sldId id="413" r:id="rId12"/>
+    <p:sldId id="415" r:id="rId13"/>
+    <p:sldId id="416" r:id="rId14"/>
+    <p:sldId id="383" r:id="rId15"/>
+    <p:sldId id="404" r:id="rId16"/>
+    <p:sldId id="287" r:id="rId17"/>
   </p:sldIdLst>
   <p:sldSz cx="9144000" cy="6858000" type="screen4x3"/>
   <p:notesSz cx="6858000" cy="9144000"/>
@@ -764,6 +767,236 @@
   <p:cSld>
     <p:spTree>
       <p:nvGrpSpPr>
+        <p:cNvPr id="1" name="">
+          <a:extLst>
+            <a:ext uri="{FF2B5EF4-FFF2-40B4-BE49-F238E27FC236}">
+              <a16:creationId xmlns:a16="http://schemas.microsoft.com/office/drawing/2014/main" id="{A4F9270A-DA4B-D6B3-1A4F-AC85BE5F2D7E}"/>
+            </a:ext>
+          </a:extLst>
+        </p:cNvPr>
+        <p:cNvGrpSpPr/>
+        <p:nvPr/>
+      </p:nvGrpSpPr>
+      <p:grpSpPr>
+        <a:xfrm>
+          <a:off x="0" y="0"/>
+          <a:ext cx="0" cy="0"/>
+          <a:chOff x="0" y="0"/>
+          <a:chExt cx="0" cy="0"/>
+        </a:xfrm>
+      </p:grpSpPr>
+      <p:sp>
+        <p:nvSpPr>
+          <p:cNvPr id="2" name="Marcador de imagen de diapositiva 1">
+            <a:extLst>
+              <a:ext uri="{FF2B5EF4-FFF2-40B4-BE49-F238E27FC236}">
+                <a16:creationId xmlns:a16="http://schemas.microsoft.com/office/drawing/2014/main" id="{F00F5546-FA97-3766-B1FC-A47DE9795541}"/>
+              </a:ext>
+            </a:extLst>
+          </p:cNvPr>
+          <p:cNvSpPr>
+            <a:spLocks noGrp="1" noRot="1" noChangeAspect="1"/>
+          </p:cNvSpPr>
+          <p:nvPr>
+            <p:ph type="sldImg"/>
+          </p:nvPr>
+        </p:nvSpPr>
+        <p:spPr/>
+        <p:txBody>
+          <a:bodyPr/>
+          <a:lstStyle/>
+          <a:p>
+            <a:endParaRPr lang="es-ES" dirty="0"/>
+          </a:p>
+        </p:txBody>
+      </p:sp>
+      <p:sp>
+        <p:nvSpPr>
+          <p:cNvPr id="3" name="Marcador de notas 2">
+            <a:extLst>
+              <a:ext uri="{FF2B5EF4-FFF2-40B4-BE49-F238E27FC236}">
+                <a16:creationId xmlns:a16="http://schemas.microsoft.com/office/drawing/2014/main" id="{7D4517E9-EA07-54A2-DBB7-3635C5A646F4}"/>
+              </a:ext>
+            </a:extLst>
+          </p:cNvPr>
+          <p:cNvSpPr>
+            <a:spLocks noGrp="1"/>
+          </p:cNvSpPr>
+          <p:nvPr>
+            <p:ph type="body" idx="1"/>
+          </p:nvPr>
+        </p:nvSpPr>
+        <p:spPr/>
+        <p:txBody>
+          <a:bodyPr/>
+          <a:lstStyle/>
+          <a:p>
+            <a:endParaRPr lang="es-ES" dirty="0"/>
+          </a:p>
+        </p:txBody>
+      </p:sp>
+      <p:sp>
+        <p:nvSpPr>
+          <p:cNvPr id="4" name="Marcador de número de diapositiva 3">
+            <a:extLst>
+              <a:ext uri="{FF2B5EF4-FFF2-40B4-BE49-F238E27FC236}">
+                <a16:creationId xmlns:a16="http://schemas.microsoft.com/office/drawing/2014/main" id="{1974EE48-B9C3-3420-C006-3474E81EDC5E}"/>
+              </a:ext>
+            </a:extLst>
+          </p:cNvPr>
+          <p:cNvSpPr>
+            <a:spLocks noGrp="1"/>
+          </p:cNvSpPr>
+          <p:nvPr>
+            <p:ph type="sldNum" sz="quarter" idx="10"/>
+          </p:nvPr>
+        </p:nvSpPr>
+        <p:spPr/>
+        <p:txBody>
+          <a:bodyPr/>
+          <a:lstStyle/>
+          <a:p>
+            <a:fld id="{05D135E5-457A-4183-A722-09BD01DC1252}" type="slidenum">
+              <a:rPr lang="es-ES" smtClean="0"/>
+              <a:t>12</a:t>
+            </a:fld>
+            <a:endParaRPr lang="es-ES" dirty="0"/>
+          </a:p>
+        </p:txBody>
+      </p:sp>
+    </p:spTree>
+    <p:extLst>
+      <p:ext uri="{BB962C8B-B14F-4D97-AF65-F5344CB8AC3E}">
+        <p14:creationId xmlns:p14="http://schemas.microsoft.com/office/powerpoint/2010/main" val="2621593514"/>
+      </p:ext>
+    </p:extLst>
+  </p:cSld>
+  <p:clrMapOvr>
+    <a:masterClrMapping/>
+  </p:clrMapOvr>
+</p:notes>
+</file>
+
+<file path=ppt/notesSlides/notesSlide11.xml><?xml version="1.0" encoding="utf-8"?>
+<p:notes xmlns:a="http://schemas.openxmlformats.org/drawingml/2006/main" xmlns:r="http://schemas.openxmlformats.org/officeDocument/2006/relationships" xmlns:p="http://schemas.openxmlformats.org/presentationml/2006/main">
+  <p:cSld>
+    <p:spTree>
+      <p:nvGrpSpPr>
+        <p:cNvPr id="1" name="">
+          <a:extLst>
+            <a:ext uri="{FF2B5EF4-FFF2-40B4-BE49-F238E27FC236}">
+              <a16:creationId xmlns:a16="http://schemas.microsoft.com/office/drawing/2014/main" id="{608E4D33-155B-BD0B-9082-931E380F7456}"/>
+            </a:ext>
+          </a:extLst>
+        </p:cNvPr>
+        <p:cNvGrpSpPr/>
+        <p:nvPr/>
+      </p:nvGrpSpPr>
+      <p:grpSpPr>
+        <a:xfrm>
+          <a:off x="0" y="0"/>
+          <a:ext cx="0" cy="0"/>
+          <a:chOff x="0" y="0"/>
+          <a:chExt cx="0" cy="0"/>
+        </a:xfrm>
+      </p:grpSpPr>
+      <p:sp>
+        <p:nvSpPr>
+          <p:cNvPr id="2" name="Marcador de imagen de diapositiva 1">
+            <a:extLst>
+              <a:ext uri="{FF2B5EF4-FFF2-40B4-BE49-F238E27FC236}">
+                <a16:creationId xmlns:a16="http://schemas.microsoft.com/office/drawing/2014/main" id="{82CE4934-B702-5646-10D4-1D649A658807}"/>
+              </a:ext>
+            </a:extLst>
+          </p:cNvPr>
+          <p:cNvSpPr>
+            <a:spLocks noGrp="1" noRot="1" noChangeAspect="1"/>
+          </p:cNvSpPr>
+          <p:nvPr>
+            <p:ph type="sldImg"/>
+          </p:nvPr>
+        </p:nvSpPr>
+        <p:spPr/>
+        <p:txBody>
+          <a:bodyPr/>
+          <a:lstStyle/>
+          <a:p>
+            <a:endParaRPr lang="es-ES" dirty="0"/>
+          </a:p>
+        </p:txBody>
+      </p:sp>
+      <p:sp>
+        <p:nvSpPr>
+          <p:cNvPr id="3" name="Marcador de notas 2">
+            <a:extLst>
+              <a:ext uri="{FF2B5EF4-FFF2-40B4-BE49-F238E27FC236}">
+                <a16:creationId xmlns:a16="http://schemas.microsoft.com/office/drawing/2014/main" id="{78B3B6D4-DA43-3FB4-35B2-4951DB4102C4}"/>
+              </a:ext>
+            </a:extLst>
+          </p:cNvPr>
+          <p:cNvSpPr>
+            <a:spLocks noGrp="1"/>
+          </p:cNvSpPr>
+          <p:nvPr>
+            <p:ph type="body" idx="1"/>
+          </p:nvPr>
+        </p:nvSpPr>
+        <p:spPr/>
+        <p:txBody>
+          <a:bodyPr/>
+          <a:lstStyle/>
+          <a:p>
+            <a:endParaRPr lang="es-ES" dirty="0"/>
+          </a:p>
+        </p:txBody>
+      </p:sp>
+      <p:sp>
+        <p:nvSpPr>
+          <p:cNvPr id="4" name="Marcador de número de diapositiva 3">
+            <a:extLst>
+              <a:ext uri="{FF2B5EF4-FFF2-40B4-BE49-F238E27FC236}">
+                <a16:creationId xmlns:a16="http://schemas.microsoft.com/office/drawing/2014/main" id="{7CFF2683-54CE-3710-F794-F81D49D4BD00}"/>
+              </a:ext>
+            </a:extLst>
+          </p:cNvPr>
+          <p:cNvSpPr>
+            <a:spLocks noGrp="1"/>
+          </p:cNvSpPr>
+          <p:nvPr>
+            <p:ph type="sldNum" sz="quarter" idx="10"/>
+          </p:nvPr>
+        </p:nvSpPr>
+        <p:spPr/>
+        <p:txBody>
+          <a:bodyPr/>
+          <a:lstStyle/>
+          <a:p>
+            <a:fld id="{05D135E5-457A-4183-A722-09BD01DC1252}" type="slidenum">
+              <a:rPr lang="es-ES" smtClean="0"/>
+              <a:t>13</a:t>
+            </a:fld>
+            <a:endParaRPr lang="es-ES" dirty="0"/>
+          </a:p>
+        </p:txBody>
+      </p:sp>
+    </p:spTree>
+    <p:extLst>
+      <p:ext uri="{BB962C8B-B14F-4D97-AF65-F5344CB8AC3E}">
+        <p14:creationId xmlns:p14="http://schemas.microsoft.com/office/powerpoint/2010/main" val="623444326"/>
+      </p:ext>
+    </p:extLst>
+  </p:cSld>
+  <p:clrMapOvr>
+    <a:masterClrMapping/>
+  </p:clrMapOvr>
+</p:notes>
+</file>
+
+<file path=ppt/notesSlides/notesSlide12.xml><?xml version="1.0" encoding="utf-8"?>
+<p:notes xmlns:a="http://schemas.openxmlformats.org/drawingml/2006/main" xmlns:r="http://schemas.openxmlformats.org/officeDocument/2006/relationships" xmlns:p="http://schemas.openxmlformats.org/presentationml/2006/main">
+  <p:cSld>
+    <p:spTree>
+      <p:nvGrpSpPr>
         <p:cNvPr id="1" name=""/>
         <p:cNvGrpSpPr/>
         <p:nvPr/>
@@ -831,7 +1064,98 @@
           <a:p>
             <a:fld id="{05D135E5-457A-4183-A722-09BD01DC1252}" type="slidenum">
               <a:rPr lang="es-ES" smtClean="0"/>
-              <a:t>12</a:t>
+              <a:t>14</a:t>
+            </a:fld>
+            <a:endParaRPr lang="es-ES" dirty="0"/>
+          </a:p>
+        </p:txBody>
+      </p:sp>
+    </p:spTree>
+    <p:extLst>
+      <p:ext uri="{BB962C8B-B14F-4D97-AF65-F5344CB8AC3E}">
+        <p14:creationId xmlns:p14="http://schemas.microsoft.com/office/powerpoint/2010/main" val="556698752"/>
+      </p:ext>
+    </p:extLst>
+  </p:cSld>
+  <p:clrMapOvr>
+    <a:masterClrMapping/>
+  </p:clrMapOvr>
+</p:notes>
+</file>
+
+<file path=ppt/notesSlides/notesSlide13.xml><?xml version="1.0" encoding="utf-8"?>
+<p:notes xmlns:a="http://schemas.openxmlformats.org/drawingml/2006/main" xmlns:r="http://schemas.openxmlformats.org/officeDocument/2006/relationships" xmlns:p="http://schemas.openxmlformats.org/presentationml/2006/main">
+  <p:cSld>
+    <p:spTree>
+      <p:nvGrpSpPr>
+        <p:cNvPr id="1" name=""/>
+        <p:cNvGrpSpPr/>
+        <p:nvPr/>
+      </p:nvGrpSpPr>
+      <p:grpSpPr>
+        <a:xfrm>
+          <a:off x="0" y="0"/>
+          <a:ext cx="0" cy="0"/>
+          <a:chOff x="0" y="0"/>
+          <a:chExt cx="0" cy="0"/>
+        </a:xfrm>
+      </p:grpSpPr>
+      <p:sp>
+        <p:nvSpPr>
+          <p:cNvPr id="2" name="Marcador de imagen de diapositiva 1"/>
+          <p:cNvSpPr>
+            <a:spLocks noGrp="1" noRot="1" noChangeAspect="1"/>
+          </p:cNvSpPr>
+          <p:nvPr>
+            <p:ph type="sldImg"/>
+          </p:nvPr>
+        </p:nvSpPr>
+        <p:spPr/>
+        <p:txBody>
+          <a:bodyPr/>
+          <a:lstStyle/>
+          <a:p>
+            <a:endParaRPr lang="es-ES" dirty="0"/>
+          </a:p>
+        </p:txBody>
+      </p:sp>
+      <p:sp>
+        <p:nvSpPr>
+          <p:cNvPr id="3" name="Marcador de notas 2"/>
+          <p:cNvSpPr>
+            <a:spLocks noGrp="1"/>
+          </p:cNvSpPr>
+          <p:nvPr>
+            <p:ph type="body" idx="1"/>
+          </p:nvPr>
+        </p:nvSpPr>
+        <p:spPr/>
+        <p:txBody>
+          <a:bodyPr/>
+          <a:lstStyle/>
+          <a:p>
+            <a:endParaRPr lang="es-ES" dirty="0"/>
+          </a:p>
+        </p:txBody>
+      </p:sp>
+      <p:sp>
+        <p:nvSpPr>
+          <p:cNvPr id="4" name="Marcador de número de diapositiva 3"/>
+          <p:cNvSpPr>
+            <a:spLocks noGrp="1"/>
+          </p:cNvSpPr>
+          <p:nvPr>
+            <p:ph type="sldNum" sz="quarter" idx="10"/>
+          </p:nvPr>
+        </p:nvSpPr>
+        <p:spPr/>
+        <p:txBody>
+          <a:bodyPr/>
+          <a:lstStyle/>
+          <a:p>
+            <a:fld id="{05D135E5-457A-4183-A722-09BD01DC1252}" type="slidenum">
+              <a:rPr lang="es-ES" smtClean="0"/>
+              <a:t>15</a:t>
             </a:fld>
             <a:endParaRPr lang="es-ES" dirty="0"/>
           </a:p>
@@ -996,7 +1320,29 @@
           <a:bodyPr/>
           <a:lstStyle/>
           <a:p>
-            <a:endParaRPr lang="es-ES"/>
+            <a:pPr marL="171450" indent="-171450">
+              <a:buFontTx/>
+              <a:buChar char="-"/>
+            </a:pPr>
+            <a:r>
+              <a:rPr lang="es-ES" dirty="0"/>
+              <a:t>Morado -&gt; Métodos Híbridos (Detección + Segmentación)</a:t>
+            </a:r>
+          </a:p>
+          <a:p>
+            <a:pPr marL="171450" indent="-171450">
+              <a:buFontTx/>
+              <a:buChar char="-"/>
+            </a:pPr>
+            <a:r>
+              <a:rPr lang="es-ES" dirty="0"/>
+              <a:t>Naranja -&gt; Calibración/</a:t>
+            </a:r>
+            <a:r>
+              <a:rPr lang="es-ES" dirty="0" err="1"/>
+              <a:t>Geomtería</a:t>
+            </a:r>
+            <a:endParaRPr lang="es-ES" dirty="0"/>
           </a:p>
         </p:txBody>
       </p:sp>
@@ -1156,6 +1502,121 @@
   <p:cSld>
     <p:spTree>
       <p:nvGrpSpPr>
+        <p:cNvPr id="1" name="">
+          <a:extLst>
+            <a:ext uri="{FF2B5EF4-FFF2-40B4-BE49-F238E27FC236}">
+              <a16:creationId xmlns:a16="http://schemas.microsoft.com/office/drawing/2014/main" id="{1683E4B4-2AD9-5E21-26AB-66ABCDF3D719}"/>
+            </a:ext>
+          </a:extLst>
+        </p:cNvPr>
+        <p:cNvGrpSpPr/>
+        <p:nvPr/>
+      </p:nvGrpSpPr>
+      <p:grpSpPr>
+        <a:xfrm>
+          <a:off x="0" y="0"/>
+          <a:ext cx="0" cy="0"/>
+          <a:chOff x="0" y="0"/>
+          <a:chExt cx="0" cy="0"/>
+        </a:xfrm>
+      </p:grpSpPr>
+      <p:sp>
+        <p:nvSpPr>
+          <p:cNvPr id="2" name="Marcador de imagen de diapositiva 1">
+            <a:extLst>
+              <a:ext uri="{FF2B5EF4-FFF2-40B4-BE49-F238E27FC236}">
+                <a16:creationId xmlns:a16="http://schemas.microsoft.com/office/drawing/2014/main" id="{8DBB4248-D368-6261-88B3-E392ADDA03A9}"/>
+              </a:ext>
+            </a:extLst>
+          </p:cNvPr>
+          <p:cNvSpPr>
+            <a:spLocks noGrp="1" noRot="1" noChangeAspect="1"/>
+          </p:cNvSpPr>
+          <p:nvPr>
+            <p:ph type="sldImg"/>
+          </p:nvPr>
+        </p:nvSpPr>
+        <p:spPr/>
+        <p:txBody>
+          <a:bodyPr/>
+          <a:lstStyle/>
+          <a:p>
+            <a:endParaRPr lang="es-ES" dirty="0"/>
+          </a:p>
+        </p:txBody>
+      </p:sp>
+      <p:sp>
+        <p:nvSpPr>
+          <p:cNvPr id="3" name="Marcador de notas 2">
+            <a:extLst>
+              <a:ext uri="{FF2B5EF4-FFF2-40B4-BE49-F238E27FC236}">
+                <a16:creationId xmlns:a16="http://schemas.microsoft.com/office/drawing/2014/main" id="{AB4BD80B-23D5-11C7-01A2-C039937E8D8E}"/>
+              </a:ext>
+            </a:extLst>
+          </p:cNvPr>
+          <p:cNvSpPr>
+            <a:spLocks noGrp="1"/>
+          </p:cNvSpPr>
+          <p:nvPr>
+            <p:ph type="body" idx="1"/>
+          </p:nvPr>
+        </p:nvSpPr>
+        <p:spPr/>
+        <p:txBody>
+          <a:bodyPr/>
+          <a:lstStyle/>
+          <a:p>
+            <a:endParaRPr lang="es-ES" dirty="0"/>
+          </a:p>
+        </p:txBody>
+      </p:sp>
+      <p:sp>
+        <p:nvSpPr>
+          <p:cNvPr id="4" name="Marcador de número de diapositiva 3">
+            <a:extLst>
+              <a:ext uri="{FF2B5EF4-FFF2-40B4-BE49-F238E27FC236}">
+                <a16:creationId xmlns:a16="http://schemas.microsoft.com/office/drawing/2014/main" id="{51570D81-D34D-8768-2617-AEB56BA0BB49}"/>
+              </a:ext>
+            </a:extLst>
+          </p:cNvPr>
+          <p:cNvSpPr>
+            <a:spLocks noGrp="1"/>
+          </p:cNvSpPr>
+          <p:nvPr>
+            <p:ph type="sldNum" sz="quarter" idx="10"/>
+          </p:nvPr>
+        </p:nvSpPr>
+        <p:spPr/>
+        <p:txBody>
+          <a:bodyPr/>
+          <a:lstStyle/>
+          <a:p>
+            <a:fld id="{05D135E5-457A-4183-A722-09BD01DC1252}" type="slidenum">
+              <a:rPr lang="es-ES" smtClean="0"/>
+              <a:t>7</a:t>
+            </a:fld>
+            <a:endParaRPr lang="es-ES" dirty="0"/>
+          </a:p>
+        </p:txBody>
+      </p:sp>
+    </p:spTree>
+    <p:extLst>
+      <p:ext uri="{BB962C8B-B14F-4D97-AF65-F5344CB8AC3E}">
+        <p14:creationId xmlns:p14="http://schemas.microsoft.com/office/powerpoint/2010/main" val="3525781236"/>
+      </p:ext>
+    </p:extLst>
+  </p:cSld>
+  <p:clrMapOvr>
+    <a:masterClrMapping/>
+  </p:clrMapOvr>
+</p:notes>
+</file>
+
+<file path=ppt/notesSlides/notesSlide6.xml><?xml version="1.0" encoding="utf-8"?>
+<p:notes xmlns:a="http://schemas.openxmlformats.org/drawingml/2006/main" xmlns:r="http://schemas.openxmlformats.org/officeDocument/2006/relationships" xmlns:p="http://schemas.openxmlformats.org/presentationml/2006/main">
+  <p:cSld>
+    <p:spTree>
+      <p:nvGrpSpPr>
         <p:cNvPr id="1" name=""/>
         <p:cNvGrpSpPr/>
         <p:nvPr/>
@@ -1223,7 +1684,7 @@
           <a:p>
             <a:fld id="{05D135E5-457A-4183-A722-09BD01DC1252}" type="slidenum">
               <a:rPr lang="es-ES" smtClean="0"/>
-              <a:t>7</a:t>
+              <a:t>8</a:t>
             </a:fld>
             <a:endParaRPr lang="es-ES" dirty="0"/>
           </a:p>
@@ -1242,7 +1703,7 @@
 </p:notes>
 </file>
 
-<file path=ppt/notesSlides/notesSlide6.xml><?xml version="1.0" encoding="utf-8"?>
+<file path=ppt/notesSlides/notesSlide7.xml><?xml version="1.0" encoding="utf-8"?>
 <p:notes xmlns:a="http://schemas.openxmlformats.org/drawingml/2006/main" xmlns:r="http://schemas.openxmlformats.org/officeDocument/2006/relationships" xmlns:p="http://schemas.openxmlformats.org/presentationml/2006/main">
   <p:cSld>
     <p:spTree>
@@ -1311,6 +1772,53 @@
           <a:bodyPr/>
           <a:lstStyle/>
           <a:p>
+            <a:pPr marL="171450" indent="-171450">
+              <a:buFontTx/>
+              <a:buChar char="-"/>
+            </a:pPr>
+            <a:r>
+              <a:rPr lang="es-ES" dirty="0" err="1"/>
+              <a:t>Grounding</a:t>
+            </a:r>
+            <a:r>
+              <a:rPr lang="es-ES" dirty="0"/>
+              <a:t> DINO -&gt; </a:t>
+            </a:r>
+            <a:r>
+              <a:rPr lang="es-ES" dirty="0" err="1"/>
+              <a:t>Object</a:t>
+            </a:r>
+            <a:r>
+              <a:rPr lang="es-ES" dirty="0"/>
+              <a:t> </a:t>
+            </a:r>
+            <a:r>
+              <a:rPr lang="es-ES" dirty="0" err="1"/>
+              <a:t>Detection</a:t>
+            </a:r>
+            <a:endParaRPr lang="es-ES" dirty="0"/>
+          </a:p>
+          <a:p>
+            <a:pPr marL="171450" indent="-171450">
+              <a:buFontTx/>
+              <a:buChar char="-"/>
+            </a:pPr>
+            <a:r>
+              <a:rPr lang="es-ES" dirty="0"/>
+              <a:t>SAM -&gt; precise </a:t>
+            </a:r>
+            <a:r>
+              <a:rPr lang="es-ES" dirty="0" err="1"/>
+              <a:t>segmentation</a:t>
+            </a:r>
+            <a:r>
+              <a:rPr lang="es-ES" dirty="0"/>
+              <a:t> </a:t>
+            </a:r>
+            <a:r>
+              <a:rPr lang="es-ES" dirty="0" err="1"/>
+              <a:t>masks</a:t>
+            </a:r>
             <a:endParaRPr lang="es-ES" dirty="0"/>
           </a:p>
         </p:txBody>
@@ -1338,7 +1846,7 @@
           <a:p>
             <a:fld id="{05D135E5-457A-4183-A722-09BD01DC1252}" type="slidenum">
               <a:rPr lang="es-ES" smtClean="0"/>
-              <a:t>8</a:t>
+              <a:t>9</a:t>
             </a:fld>
             <a:endParaRPr lang="es-ES" dirty="0"/>
           </a:p>
@@ -1357,7 +1865,7 @@
 </p:notes>
 </file>
 
-<file path=ppt/notesSlides/notesSlide7.xml><?xml version="1.0" encoding="utf-8"?>
+<file path=ppt/notesSlides/notesSlide8.xml><?xml version="1.0" encoding="utf-8"?>
 <p:notes xmlns:a="http://schemas.openxmlformats.org/drawingml/2006/main" xmlns:r="http://schemas.openxmlformats.org/officeDocument/2006/relationships" xmlns:p="http://schemas.openxmlformats.org/presentationml/2006/main">
   <p:cSld>
     <p:spTree>
@@ -1453,7 +1961,7 @@
           <a:p>
             <a:fld id="{05D135E5-457A-4183-A722-09BD01DC1252}" type="slidenum">
               <a:rPr lang="es-ES" smtClean="0"/>
-              <a:t>9</a:t>
+              <a:t>10</a:t>
             </a:fld>
             <a:endParaRPr lang="es-ES" dirty="0"/>
           </a:p>
@@ -1472,7 +1980,7 @@
 </p:notes>
 </file>
 
-<file path=ppt/notesSlides/notesSlide8.xml><?xml version="1.0" encoding="utf-8"?>
+<file path=ppt/notesSlides/notesSlide9.xml><?xml version="1.0" encoding="utf-8"?>
 <p:notes xmlns:a="http://schemas.openxmlformats.org/drawingml/2006/main" xmlns:r="http://schemas.openxmlformats.org/officeDocument/2006/relationships" xmlns:p="http://schemas.openxmlformats.org/presentationml/2006/main">
   <p:cSld>
     <p:spTree>
@@ -1568,7 +2076,7 @@
           <a:p>
             <a:fld id="{05D135E5-457A-4183-A722-09BD01DC1252}" type="slidenum">
               <a:rPr lang="es-ES" smtClean="0"/>
-              <a:t>10</a:t>
+              <a:t>11</a:t>
             </a:fld>
             <a:endParaRPr lang="es-ES" dirty="0"/>
           </a:p>
@@ -1578,97 +2086,6 @@
     <p:extLst>
       <p:ext uri="{BB962C8B-B14F-4D97-AF65-F5344CB8AC3E}">
         <p14:creationId xmlns:p14="http://schemas.microsoft.com/office/powerpoint/2010/main" val="2030771114"/>
-      </p:ext>
-    </p:extLst>
-  </p:cSld>
-  <p:clrMapOvr>
-    <a:masterClrMapping/>
-  </p:clrMapOvr>
-</p:notes>
-</file>
-
-<file path=ppt/notesSlides/notesSlide9.xml><?xml version="1.0" encoding="utf-8"?>
-<p:notes xmlns:a="http://schemas.openxmlformats.org/drawingml/2006/main" xmlns:r="http://schemas.openxmlformats.org/officeDocument/2006/relationships" xmlns:p="http://schemas.openxmlformats.org/presentationml/2006/main">
-  <p:cSld>
-    <p:spTree>
-      <p:nvGrpSpPr>
-        <p:cNvPr id="1" name=""/>
-        <p:cNvGrpSpPr/>
-        <p:nvPr/>
-      </p:nvGrpSpPr>
-      <p:grpSpPr>
-        <a:xfrm>
-          <a:off x="0" y="0"/>
-          <a:ext cx="0" cy="0"/>
-          <a:chOff x="0" y="0"/>
-          <a:chExt cx="0" cy="0"/>
-        </a:xfrm>
-      </p:grpSpPr>
-      <p:sp>
-        <p:nvSpPr>
-          <p:cNvPr id="2" name="Marcador de imagen de diapositiva 1"/>
-          <p:cNvSpPr>
-            <a:spLocks noGrp="1" noRot="1" noChangeAspect="1"/>
-          </p:cNvSpPr>
-          <p:nvPr>
-            <p:ph type="sldImg"/>
-          </p:nvPr>
-        </p:nvSpPr>
-        <p:spPr/>
-        <p:txBody>
-          <a:bodyPr/>
-          <a:lstStyle/>
-          <a:p>
-            <a:endParaRPr lang="es-ES" dirty="0"/>
-          </a:p>
-        </p:txBody>
-      </p:sp>
-      <p:sp>
-        <p:nvSpPr>
-          <p:cNvPr id="3" name="Marcador de notas 2"/>
-          <p:cNvSpPr>
-            <a:spLocks noGrp="1"/>
-          </p:cNvSpPr>
-          <p:nvPr>
-            <p:ph type="body" idx="1"/>
-          </p:nvPr>
-        </p:nvSpPr>
-        <p:spPr/>
-        <p:txBody>
-          <a:bodyPr/>
-          <a:lstStyle/>
-          <a:p>
-            <a:endParaRPr lang="es-ES" dirty="0"/>
-          </a:p>
-        </p:txBody>
-      </p:sp>
-      <p:sp>
-        <p:nvSpPr>
-          <p:cNvPr id="4" name="Marcador de número de diapositiva 3"/>
-          <p:cNvSpPr>
-            <a:spLocks noGrp="1"/>
-          </p:cNvSpPr>
-          <p:nvPr>
-            <p:ph type="sldNum" sz="quarter" idx="10"/>
-          </p:nvPr>
-        </p:nvSpPr>
-        <p:spPr/>
-        <p:txBody>
-          <a:bodyPr/>
-          <a:lstStyle/>
-          <a:p>
-            <a:fld id="{05D135E5-457A-4183-A722-09BD01DC1252}" type="slidenum">
-              <a:rPr lang="es-ES" smtClean="0"/>
-              <a:t>11</a:t>
-            </a:fld>
-            <a:endParaRPr lang="es-ES" dirty="0"/>
-          </a:p>
-        </p:txBody>
-      </p:sp>
-    </p:spTree>
-    <p:extLst>
-      <p:ext uri="{BB962C8B-B14F-4D97-AF65-F5344CB8AC3E}">
-        <p14:creationId xmlns:p14="http://schemas.microsoft.com/office/powerpoint/2010/main" val="556698752"/>
       </p:ext>
     </p:extLst>
   </p:cSld>
@@ -3035,14 +3452,11 @@
           <a:lstStyle/>
           <a:p>
             <a:pPr algn="l"/>
-            <a:r>
-              <a:rPr lang="en-US" dirty="0">
-                <a:solidFill>
-                  <a:srgbClr val="FF0000"/>
-                </a:solidFill>
-              </a:rPr>
-              <a:t>Title - For example: Phishing detection using Phishing kits</a:t>
-            </a:r>
+            <a:endParaRPr lang="en-US" dirty="0">
+              <a:solidFill>
+                <a:srgbClr val="FF0000"/>
+              </a:solidFill>
+            </a:endParaRPr>
           </a:p>
         </p:txBody>
       </p:sp>
@@ -3105,8 +3519,8 @@
         </p:nvSpPr>
         <p:spPr>
           <a:xfrm>
-            <a:off x="5251466" y="3774503"/>
-            <a:ext cx="3492374" cy="564342"/>
+            <a:off x="5251466" y="3774502"/>
+            <a:ext cx="3492374" cy="1601061"/>
           </a:xfrm>
           <a:prstGeom prst="rect">
             <a:avLst/>
@@ -3265,7 +3679,7 @@
                   </a:schemeClr>
                 </a:solidFill>
               </a:rPr>
-              <a:t>by Student Name</a:t>
+              <a:t>Jaime Alvarado Fernández</a:t>
             </a:r>
           </a:p>
           <a:p>
@@ -3280,7 +3694,69 @@
                   </a:schemeClr>
                 </a:solidFill>
               </a:rPr>
-              <a:t>Presentation date</a:t>
+              <a:t>David Morán </a:t>
+            </a:r>
+            <a:r>
+              <a:rPr lang="en-GB" sz="1200" dirty="0" err="1">
+                <a:solidFill>
+                  <a:schemeClr val="bg1">
+                    <a:lumMod val="75000"/>
+                  </a:schemeClr>
+                </a:solidFill>
+              </a:rPr>
+              <a:t>Gorgojo</a:t>
+            </a:r>
+            <a:endParaRPr lang="en-GB" sz="1200" dirty="0">
+              <a:solidFill>
+                <a:schemeClr val="bg1">
+                  <a:lumMod val="75000"/>
+                </a:schemeClr>
+              </a:solidFill>
+            </a:endParaRPr>
+          </a:p>
+          <a:p>
+            <a:pPr marL="0" indent="0" algn="r">
+              <a:buNone/>
+            </a:pPr>
+            <a:r>
+              <a:rPr lang="en-GB" sz="1200" dirty="0">
+                <a:solidFill>
+                  <a:schemeClr val="bg1">
+                    <a:lumMod val="75000"/>
+                  </a:schemeClr>
+                </a:solidFill>
+              </a:rPr>
+              <a:t>Pablo Ruíz Morán</a:t>
+            </a:r>
+          </a:p>
+          <a:p>
+            <a:pPr marL="0" indent="0" algn="r">
+              <a:buNone/>
+            </a:pPr>
+            <a:r>
+              <a:rPr lang="en-GB" sz="1200" dirty="0">
+                <a:solidFill>
+                  <a:schemeClr val="bg1">
+                    <a:lumMod val="75000"/>
+                  </a:schemeClr>
+                </a:solidFill>
+              </a:rPr>
+              <a:t>Miguel Sánchez Rodríguez</a:t>
+            </a:r>
+          </a:p>
+          <a:p>
+            <a:pPr marL="0" indent="0" algn="r">
+              <a:buNone/>
+            </a:pPr>
+            <a:r>
+              <a:rPr lang="en-GB" sz="1200" dirty="0">
+                <a:solidFill>
+                  <a:schemeClr val="bg1">
+                    <a:lumMod val="75000"/>
+                  </a:schemeClr>
+                </a:solidFill>
+              </a:rPr>
+              <a:t>15/03/2026</a:t>
             </a:r>
           </a:p>
           <a:p>
@@ -3354,6 +3830,136 @@
         <p:cNvPr id="1" name="">
           <a:extLst>
             <a:ext uri="{FF2B5EF4-FFF2-40B4-BE49-F238E27FC236}">
+              <a16:creationId xmlns:a16="http://schemas.microsoft.com/office/drawing/2014/main" id="{F4CD17D0-6AE0-335D-DCCB-779C22440197}"/>
+            </a:ext>
+          </a:extLst>
+        </p:cNvPr>
+        <p:cNvGrpSpPr/>
+        <p:nvPr/>
+      </p:nvGrpSpPr>
+      <p:grpSpPr>
+        <a:xfrm>
+          <a:off x="0" y="0"/>
+          <a:ext cx="0" cy="0"/>
+          <a:chOff x="0" y="0"/>
+          <a:chExt cx="0" cy="0"/>
+        </a:xfrm>
+      </p:grpSpPr>
+      <p:sp>
+        <p:nvSpPr>
+          <p:cNvPr id="2" name="Title 1">
+            <a:extLst>
+              <a:ext uri="{FF2B5EF4-FFF2-40B4-BE49-F238E27FC236}">
+                <a16:creationId xmlns:a16="http://schemas.microsoft.com/office/drawing/2014/main" id="{ABE9FD54-E3E9-1AA0-9DD9-0517F99B7216}"/>
+              </a:ext>
+            </a:extLst>
+          </p:cNvPr>
+          <p:cNvSpPr>
+            <a:spLocks noGrp="1"/>
+          </p:cNvSpPr>
+          <p:nvPr>
+            <p:ph type="title"/>
+          </p:nvPr>
+        </p:nvSpPr>
+        <p:spPr>
+          <a:xfrm>
+            <a:off x="457200" y="274638"/>
+            <a:ext cx="7302500" cy="788278"/>
+          </a:xfrm>
+        </p:spPr>
+        <p:txBody>
+          <a:bodyPr>
+            <a:normAutofit/>
+          </a:bodyPr>
+          <a:lstStyle/>
+          <a:p>
+            <a:pPr algn="l"/>
+            <a:r>
+              <a:rPr lang="en-GB" sz="2800" dirty="0"/>
+              <a:t>3. Selected method 03: ZZZZ</a:t>
+            </a:r>
+          </a:p>
+        </p:txBody>
+      </p:sp>
+      <p:sp>
+        <p:nvSpPr>
+          <p:cNvPr id="30" name="Rectangle 7">
+            <a:extLst>
+              <a:ext uri="{FF2B5EF4-FFF2-40B4-BE49-F238E27FC236}">
+                <a16:creationId xmlns:a16="http://schemas.microsoft.com/office/drawing/2014/main" id="{36C84E96-7653-5D12-E6C6-A76E4A341C6C}"/>
+              </a:ext>
+            </a:extLst>
+          </p:cNvPr>
+          <p:cNvSpPr/>
+          <p:nvPr/>
+        </p:nvSpPr>
+        <p:spPr>
+          <a:xfrm>
+            <a:off x="80137" y="66509"/>
+            <a:ext cx="6565636" cy="303085"/>
+          </a:xfrm>
+          <a:prstGeom prst="rect">
+            <a:avLst/>
+          </a:prstGeom>
+          <a:noFill/>
+          <a:ln>
+            <a:noFill/>
+          </a:ln>
+          <a:extLst>
+            <a:ext uri="{909E8E84-426E-40DD-AFC4-6F175D3DCCD1}">
+              <a14:hiddenFill xmlns:a14="http://schemas.microsoft.com/office/drawing/2010/main">
+                <a:solidFill>
+                  <a:srgbClr val="FFFFFF"/>
+                </a:solidFill>
+              </a14:hiddenFill>
+            </a:ext>
+            <a:ext uri="{91240B29-F687-4F45-9708-019B960494DF}">
+              <a14:hiddenLine xmlns:a14="http://schemas.microsoft.com/office/drawing/2010/main" w="9525" cap="flat">
+                <a:solidFill>
+                  <a:srgbClr val="000000"/>
+                </a:solidFill>
+                <a:miter lim="800000"/>
+                <a:headEnd type="none" w="med" len="med"/>
+                <a:tailEnd type="none" w="med" len="med"/>
+              </a14:hiddenLine>
+            </a:ext>
+          </a:extLst>
+        </p:spPr>
+        <p:txBody>
+          <a:bodyPr lIns="0" tIns="0" rIns="0" bIns="0"/>
+          <a:lstStyle/>
+          <a:p>
+            <a:endParaRPr lang="en-US" sz="800" b="1" dirty="0">
+              <a:solidFill>
+                <a:srgbClr val="535353"/>
+              </a:solidFill>
+              <a:latin typeface="Geneva" charset="0"/>
+              <a:cs typeface="Geneva" charset="0"/>
+            </a:endParaRPr>
+          </a:p>
+        </p:txBody>
+      </p:sp>
+    </p:spTree>
+    <p:extLst>
+      <p:ext uri="{BB962C8B-B14F-4D97-AF65-F5344CB8AC3E}">
+        <p14:creationId xmlns:p14="http://schemas.microsoft.com/office/powerpoint/2010/main" val="2985104822"/>
+      </p:ext>
+    </p:extLst>
+  </p:cSld>
+  <p:clrMapOvr>
+    <a:masterClrMapping/>
+  </p:clrMapOvr>
+</p:sld>
+</file>
+
+<file path=ppt/slides/slide11.xml><?xml version="1.0" encoding="utf-8"?>
+<p:sld xmlns:a="http://schemas.openxmlformats.org/drawingml/2006/main" xmlns:r="http://schemas.openxmlformats.org/officeDocument/2006/relationships" xmlns:p="http://schemas.openxmlformats.org/presentationml/2006/main">
+  <p:cSld>
+    <p:spTree>
+      <p:nvGrpSpPr>
+        <p:cNvPr id="1" name="">
+          <a:extLst>
+            <a:ext uri="{FF2B5EF4-FFF2-40B4-BE49-F238E27FC236}">
               <a16:creationId xmlns:a16="http://schemas.microsoft.com/office/drawing/2014/main" id="{B47EF38C-1117-7442-9501-12F9402F6EE5}"/>
             </a:ext>
           </a:extLst>
@@ -3476,7 +4082,297 @@
 </p:sld>
 </file>
 
-<file path=ppt/slides/slide11.xml><?xml version="1.0" encoding="utf-8"?>
+<file path=ppt/slides/slide12.xml><?xml version="1.0" encoding="utf-8"?>
+<p:sld xmlns:a="http://schemas.openxmlformats.org/drawingml/2006/main" xmlns:r="http://schemas.openxmlformats.org/officeDocument/2006/relationships" xmlns:p="http://schemas.openxmlformats.org/presentationml/2006/main">
+  <p:cSld>
+    <p:spTree>
+      <p:nvGrpSpPr>
+        <p:cNvPr id="1" name="">
+          <a:extLst>
+            <a:ext uri="{FF2B5EF4-FFF2-40B4-BE49-F238E27FC236}">
+              <a16:creationId xmlns:a16="http://schemas.microsoft.com/office/drawing/2014/main" id="{C5558EEF-EC96-D69C-B8E5-BD64FE03A695}"/>
+            </a:ext>
+          </a:extLst>
+        </p:cNvPr>
+        <p:cNvGrpSpPr/>
+        <p:nvPr/>
+      </p:nvGrpSpPr>
+      <p:grpSpPr>
+        <a:xfrm>
+          <a:off x="0" y="0"/>
+          <a:ext cx="0" cy="0"/>
+          <a:chOff x="0" y="0"/>
+          <a:chExt cx="0" cy="0"/>
+        </a:xfrm>
+      </p:grpSpPr>
+      <p:sp>
+        <p:nvSpPr>
+          <p:cNvPr id="2" name="Title 1">
+            <a:extLst>
+              <a:ext uri="{FF2B5EF4-FFF2-40B4-BE49-F238E27FC236}">
+                <a16:creationId xmlns:a16="http://schemas.microsoft.com/office/drawing/2014/main" id="{2B9BDD58-B60F-FD54-CD00-99A6A5898414}"/>
+              </a:ext>
+            </a:extLst>
+          </p:cNvPr>
+          <p:cNvSpPr>
+            <a:spLocks noGrp="1"/>
+          </p:cNvSpPr>
+          <p:nvPr>
+            <p:ph type="title"/>
+          </p:nvPr>
+        </p:nvSpPr>
+        <p:spPr>
+          <a:xfrm>
+            <a:off x="457200" y="274638"/>
+            <a:ext cx="7302500" cy="788278"/>
+          </a:xfrm>
+        </p:spPr>
+        <p:txBody>
+          <a:bodyPr>
+            <a:normAutofit/>
+          </a:bodyPr>
+          <a:lstStyle/>
+          <a:p>
+            <a:pPr algn="l"/>
+            <a:r>
+              <a:rPr lang="en-GB" sz="2800" dirty="0"/>
+              <a:t>4. Datasets </a:t>
+            </a:r>
+          </a:p>
+        </p:txBody>
+      </p:sp>
+      <p:sp>
+        <p:nvSpPr>
+          <p:cNvPr id="30" name="Rectangle 7">
+            <a:extLst>
+              <a:ext uri="{FF2B5EF4-FFF2-40B4-BE49-F238E27FC236}">
+                <a16:creationId xmlns:a16="http://schemas.microsoft.com/office/drawing/2014/main" id="{52A72436-A003-CA2F-05BA-D66E839936B3}"/>
+              </a:ext>
+            </a:extLst>
+          </p:cNvPr>
+          <p:cNvSpPr/>
+          <p:nvPr/>
+        </p:nvSpPr>
+        <p:spPr>
+          <a:xfrm>
+            <a:off x="80137" y="66509"/>
+            <a:ext cx="6565636" cy="303085"/>
+          </a:xfrm>
+          <a:prstGeom prst="rect">
+            <a:avLst/>
+          </a:prstGeom>
+          <a:noFill/>
+          <a:ln>
+            <a:noFill/>
+          </a:ln>
+          <a:extLst>
+            <a:ext uri="{909E8E84-426E-40DD-AFC4-6F175D3DCCD1}">
+              <a14:hiddenFill xmlns:a14="http://schemas.microsoft.com/office/drawing/2010/main">
+                <a:solidFill>
+                  <a:srgbClr val="FFFFFF"/>
+                </a:solidFill>
+              </a14:hiddenFill>
+            </a:ext>
+            <a:ext uri="{91240B29-F687-4F45-9708-019B960494DF}">
+              <a14:hiddenLine xmlns:a14="http://schemas.microsoft.com/office/drawing/2010/main" w="9525" cap="flat">
+                <a:solidFill>
+                  <a:srgbClr val="000000"/>
+                </a:solidFill>
+                <a:miter lim="800000"/>
+                <a:headEnd type="none" w="med" len="med"/>
+                <a:tailEnd type="none" w="med" len="med"/>
+              </a14:hiddenLine>
+            </a:ext>
+          </a:extLst>
+        </p:spPr>
+        <p:txBody>
+          <a:bodyPr lIns="0" tIns="0" rIns="0" bIns="0"/>
+          <a:lstStyle/>
+          <a:p>
+            <a:endParaRPr lang="en-US" sz="800" b="1" dirty="0">
+              <a:solidFill>
+                <a:srgbClr val="535353"/>
+              </a:solidFill>
+              <a:latin typeface="Geneva" charset="0"/>
+              <a:cs typeface="Geneva" charset="0"/>
+            </a:endParaRPr>
+          </a:p>
+        </p:txBody>
+      </p:sp>
+      <p:pic>
+        <p:nvPicPr>
+          <p:cNvPr id="4" name="Imagen 3">
+            <a:extLst>
+              <a:ext uri="{FF2B5EF4-FFF2-40B4-BE49-F238E27FC236}">
+                <a16:creationId xmlns:a16="http://schemas.microsoft.com/office/drawing/2014/main" id="{B4E22E7E-51E3-8075-D64E-9C8AF62CADB4}"/>
+              </a:ext>
+            </a:extLst>
+          </p:cNvPr>
+          <p:cNvPicPr>
+            <a:picLocks noChangeAspect="1"/>
+          </p:cNvPicPr>
+          <p:nvPr/>
+        </p:nvPicPr>
+        <p:blipFill>
+          <a:blip r:embed="rId3"/>
+          <a:stretch>
+            <a:fillRect/>
+          </a:stretch>
+        </p:blipFill>
+        <p:spPr>
+          <a:xfrm>
+            <a:off x="274401" y="1908266"/>
+            <a:ext cx="8595198" cy="2738621"/>
+          </a:xfrm>
+          <a:prstGeom prst="rect">
+            <a:avLst/>
+          </a:prstGeom>
+        </p:spPr>
+      </p:pic>
+    </p:spTree>
+    <p:extLst>
+      <p:ext uri="{BB962C8B-B14F-4D97-AF65-F5344CB8AC3E}">
+        <p14:creationId xmlns:p14="http://schemas.microsoft.com/office/powerpoint/2010/main" val="3100511610"/>
+      </p:ext>
+    </p:extLst>
+  </p:cSld>
+  <p:clrMapOvr>
+    <a:masterClrMapping/>
+  </p:clrMapOvr>
+</p:sld>
+</file>
+
+<file path=ppt/slides/slide13.xml><?xml version="1.0" encoding="utf-8"?>
+<p:sld xmlns:a="http://schemas.openxmlformats.org/drawingml/2006/main" xmlns:r="http://schemas.openxmlformats.org/officeDocument/2006/relationships" xmlns:p="http://schemas.openxmlformats.org/presentationml/2006/main">
+  <p:cSld>
+    <p:spTree>
+      <p:nvGrpSpPr>
+        <p:cNvPr id="1" name="">
+          <a:extLst>
+            <a:ext uri="{FF2B5EF4-FFF2-40B4-BE49-F238E27FC236}">
+              <a16:creationId xmlns:a16="http://schemas.microsoft.com/office/drawing/2014/main" id="{9E86E997-3538-A49B-7E42-C15AFC38E4E5}"/>
+            </a:ext>
+          </a:extLst>
+        </p:cNvPr>
+        <p:cNvGrpSpPr/>
+        <p:nvPr/>
+      </p:nvGrpSpPr>
+      <p:grpSpPr>
+        <a:xfrm>
+          <a:off x="0" y="0"/>
+          <a:ext cx="0" cy="0"/>
+          <a:chOff x="0" y="0"/>
+          <a:chExt cx="0" cy="0"/>
+        </a:xfrm>
+      </p:grpSpPr>
+      <p:sp>
+        <p:nvSpPr>
+          <p:cNvPr id="2" name="Title 1">
+            <a:extLst>
+              <a:ext uri="{FF2B5EF4-FFF2-40B4-BE49-F238E27FC236}">
+                <a16:creationId xmlns:a16="http://schemas.microsoft.com/office/drawing/2014/main" id="{FCCC4654-C0D8-35E6-FFE3-2CA8A0583EB0}"/>
+              </a:ext>
+            </a:extLst>
+          </p:cNvPr>
+          <p:cNvSpPr>
+            <a:spLocks noGrp="1"/>
+          </p:cNvSpPr>
+          <p:nvPr>
+            <p:ph type="title"/>
+          </p:nvPr>
+        </p:nvSpPr>
+        <p:spPr>
+          <a:xfrm>
+            <a:off x="457200" y="274638"/>
+            <a:ext cx="7302500" cy="788278"/>
+          </a:xfrm>
+        </p:spPr>
+        <p:txBody>
+          <a:bodyPr>
+            <a:normAutofit/>
+          </a:bodyPr>
+          <a:lstStyle/>
+          <a:p>
+            <a:pPr algn="l"/>
+            <a:r>
+              <a:rPr lang="en-GB" sz="2800" dirty="0"/>
+              <a:t>5. Performance Metrics</a:t>
+            </a:r>
+          </a:p>
+        </p:txBody>
+      </p:sp>
+      <p:sp>
+        <p:nvSpPr>
+          <p:cNvPr id="30" name="Rectangle 7">
+            <a:extLst>
+              <a:ext uri="{FF2B5EF4-FFF2-40B4-BE49-F238E27FC236}">
+                <a16:creationId xmlns:a16="http://schemas.microsoft.com/office/drawing/2014/main" id="{0CE30BE0-5015-91ED-40F7-A8727B8688D9}"/>
+              </a:ext>
+            </a:extLst>
+          </p:cNvPr>
+          <p:cNvSpPr/>
+          <p:nvPr/>
+        </p:nvSpPr>
+        <p:spPr>
+          <a:xfrm>
+            <a:off x="80137" y="66509"/>
+            <a:ext cx="6565636" cy="303085"/>
+          </a:xfrm>
+          <a:prstGeom prst="rect">
+            <a:avLst/>
+          </a:prstGeom>
+          <a:noFill/>
+          <a:ln>
+            <a:noFill/>
+          </a:ln>
+          <a:extLst>
+            <a:ext uri="{909E8E84-426E-40DD-AFC4-6F175D3DCCD1}">
+              <a14:hiddenFill xmlns:a14="http://schemas.microsoft.com/office/drawing/2010/main">
+                <a:solidFill>
+                  <a:srgbClr val="FFFFFF"/>
+                </a:solidFill>
+              </a14:hiddenFill>
+            </a:ext>
+            <a:ext uri="{91240B29-F687-4F45-9708-019B960494DF}">
+              <a14:hiddenLine xmlns:a14="http://schemas.microsoft.com/office/drawing/2010/main" w="9525" cap="flat">
+                <a:solidFill>
+                  <a:srgbClr val="000000"/>
+                </a:solidFill>
+                <a:miter lim="800000"/>
+                <a:headEnd type="none" w="med" len="med"/>
+                <a:tailEnd type="none" w="med" len="med"/>
+              </a14:hiddenLine>
+            </a:ext>
+          </a:extLst>
+        </p:spPr>
+        <p:txBody>
+          <a:bodyPr lIns="0" tIns="0" rIns="0" bIns="0"/>
+          <a:lstStyle/>
+          <a:p>
+            <a:endParaRPr lang="en-US" sz="800" b="1" dirty="0">
+              <a:solidFill>
+                <a:srgbClr val="535353"/>
+              </a:solidFill>
+              <a:latin typeface="Geneva" charset="0"/>
+              <a:cs typeface="Geneva" charset="0"/>
+            </a:endParaRPr>
+          </a:p>
+        </p:txBody>
+      </p:sp>
+    </p:spTree>
+    <p:extLst>
+      <p:ext uri="{BB962C8B-B14F-4D97-AF65-F5344CB8AC3E}">
+        <p14:creationId xmlns:p14="http://schemas.microsoft.com/office/powerpoint/2010/main" val="2911866555"/>
+      </p:ext>
+    </p:extLst>
+  </p:cSld>
+  <p:clrMapOvr>
+    <a:masterClrMapping/>
+  </p:clrMapOvr>
+</p:sld>
+</file>
+
+<file path=ppt/slides/slide14.xml><?xml version="1.0" encoding="utf-8"?>
 <p:sld xmlns:a="http://schemas.openxmlformats.org/drawingml/2006/main" xmlns:r="http://schemas.openxmlformats.org/officeDocument/2006/relationships" xmlns:p="http://schemas.openxmlformats.org/presentationml/2006/main">
   <p:cSld>
     <p:spTree>
@@ -3551,14 +4447,14 @@
           </a:ln>
           <a:extLst>
             <a:ext uri="{909E8E84-426E-40dd-AFC4-6F175D3DCCD1}">
-              <a14:hiddenFill xmlns="" xmlns:a14="http://schemas.microsoft.com/office/drawing/2010/main">
+              <a14:hiddenFill xmlns:a14="http://schemas.microsoft.com/office/drawing/2010/main" xmlns="">
                 <a:solidFill>
                   <a:srgbClr val="FFFFFF"/>
                 </a:solidFill>
               </a14:hiddenFill>
             </a:ext>
             <a:ext uri="{91240B29-F687-4f45-9708-019B960494DF}">
-              <a14:hiddenLine xmlns="" xmlns:a14="http://schemas.microsoft.com/office/drawing/2010/main" w="9525">
+              <a14:hiddenLine xmlns:a14="http://schemas.microsoft.com/office/drawing/2010/main" xmlns="" w="9525">
                 <a:solidFill>
                   <a:srgbClr val="000000"/>
                 </a:solidFill>
@@ -3773,7 +4669,7 @@
 </p:sld>
 </file>
 
-<file path=ppt/slides/slide12.xml><?xml version="1.0" encoding="utf-8"?>
+<file path=ppt/slides/slide15.xml><?xml version="1.0" encoding="utf-8"?>
 <p:sld xmlns:a="http://schemas.openxmlformats.org/drawingml/2006/main" xmlns:r="http://schemas.openxmlformats.org/officeDocument/2006/relationships" xmlns:p="http://schemas.openxmlformats.org/presentationml/2006/main">
   <p:cSld>
     <p:spTree>
@@ -3941,7 +4837,7 @@
 </p:sld>
 </file>
 
-<file path=ppt/slides/slide13.xml><?xml version="1.0" encoding="utf-8"?>
+<file path=ppt/slides/slide16.xml><?xml version="1.0" encoding="utf-8"?>
 <p:sld xmlns:a="http://schemas.openxmlformats.org/drawingml/2006/main" xmlns:r="http://schemas.openxmlformats.org/officeDocument/2006/relationships" xmlns:p="http://schemas.openxmlformats.org/presentationml/2006/main">
   <p:cSld>
     <p:spTree>
@@ -3980,14 +4876,14 @@
           </a:ln>
           <a:extLst>
             <a:ext uri="{909E8E84-426E-40dd-AFC4-6F175D3DCCD1}">
-              <a14:hiddenFill xmlns:a14="http://schemas.microsoft.com/office/drawing/2010/main" xmlns="">
+              <a14:hiddenFill xmlns="" xmlns:a14="http://schemas.microsoft.com/office/drawing/2010/main">
                 <a:solidFill>
                   <a:srgbClr val="FFFFFF"/>
                 </a:solidFill>
               </a14:hiddenFill>
             </a:ext>
             <a:ext uri="{91240B29-F687-4f45-9708-019B960494DF}">
-              <a14:hiddenLine xmlns:a14="http://schemas.microsoft.com/office/drawing/2010/main" xmlns="" w="9525">
+              <a14:hiddenLine xmlns="" xmlns:a14="http://schemas.microsoft.com/office/drawing/2010/main" w="9525">
                 <a:solidFill>
                   <a:srgbClr val="000000"/>
                 </a:solidFill>
@@ -4442,14 +5338,14 @@
           </a:ln>
           <a:extLst>
             <a:ext uri="{909E8E84-426E-40dd-AFC4-6F175D3DCCD1}">
-              <a14:hiddenFill xmlns="" xmlns:a14="http://schemas.microsoft.com/office/drawing/2010/main">
+              <a14:hiddenFill xmlns:a14="http://schemas.microsoft.com/office/drawing/2010/main" xmlns="">
                 <a:solidFill>
                   <a:srgbClr val="FFFFFF"/>
                 </a:solidFill>
               </a14:hiddenFill>
             </a:ext>
             <a:ext uri="{91240B29-F687-4f45-9708-019B960494DF}">
-              <a14:hiddenLine xmlns="" xmlns:a14="http://schemas.microsoft.com/office/drawing/2010/main" w="9525">
+              <a14:hiddenLine xmlns:a14="http://schemas.microsoft.com/office/drawing/2010/main" xmlns="" w="9525">
                 <a:solidFill>
                   <a:srgbClr val="000000"/>
                 </a:solidFill>
@@ -4687,14 +5583,14 @@
           </a:ln>
           <a:extLst>
             <a:ext uri="{909E8E84-426E-40dd-AFC4-6F175D3DCCD1}">
-              <a14:hiddenFill xmlns="" xmlns:a14="http://schemas.microsoft.com/office/drawing/2010/main">
+              <a14:hiddenFill xmlns:a14="http://schemas.microsoft.com/office/drawing/2010/main" xmlns="">
                 <a:solidFill>
                   <a:srgbClr val="FFFFFF"/>
                 </a:solidFill>
               </a14:hiddenFill>
             </a:ext>
             <a:ext uri="{91240B29-F687-4f45-9708-019B960494DF}">
-              <a14:hiddenLine xmlns="" xmlns:a14="http://schemas.microsoft.com/office/drawing/2010/main" w="9525">
+              <a14:hiddenLine xmlns:a14="http://schemas.microsoft.com/office/drawing/2010/main" xmlns="" w="9525">
                 <a:solidFill>
                   <a:srgbClr val="000000"/>
                 </a:solidFill>
@@ -4947,14 +5843,14 @@
           </a:ln>
           <a:extLst>
             <a:ext uri="{909E8E84-426E-40dd-AFC4-6F175D3DCCD1}">
-              <a14:hiddenFill xmlns:a14="http://schemas.microsoft.com/office/drawing/2010/main" xmlns="">
+              <a14:hiddenFill xmlns="" xmlns:a14="http://schemas.microsoft.com/office/drawing/2010/main">
                 <a:solidFill>
                   <a:srgbClr val="FFFFFF"/>
                 </a:solidFill>
               </a14:hiddenFill>
             </a:ext>
             <a:ext uri="{91240B29-F687-4f45-9708-019B960494DF}">
-              <a14:hiddenLine xmlns:a14="http://schemas.microsoft.com/office/drawing/2010/main" xmlns="" w="9525">
+              <a14:hiddenLine xmlns="" xmlns:a14="http://schemas.microsoft.com/office/drawing/2010/main" w="9525">
                 <a:solidFill>
                   <a:srgbClr val="000000"/>
                 </a:solidFill>
@@ -5072,14 +5968,14 @@
             </a:ln>
             <a:extLst>
               <a:ext uri="{909E8E84-426E-40dd-AFC4-6F175D3DCCD1}">
-                <a14:hiddenFill xmlns:a14="http://schemas.microsoft.com/office/drawing/2010/main" xmlns="">
+                <a14:hiddenFill xmlns="" xmlns:a14="http://schemas.microsoft.com/office/drawing/2010/main">
                   <a:solidFill>
                     <a:srgbClr val="FFFFFF"/>
                   </a:solidFill>
                 </a14:hiddenFill>
               </a:ext>
               <a:ext uri="{91240B29-F687-4f45-9708-019B960494DF}">
-                <a14:hiddenLine xmlns:a14="http://schemas.microsoft.com/office/drawing/2010/main" xmlns="" w="9525">
+                <a14:hiddenLine xmlns="" xmlns:a14="http://schemas.microsoft.com/office/drawing/2010/main" w="9525">
                   <a:solidFill>
                     <a:srgbClr val="000000"/>
                   </a:solidFill>
@@ -5198,14 +6094,14 @@
             </a:ln>
             <a:extLst>
               <a:ext uri="{909E8E84-426E-40dd-AFC4-6F175D3DCCD1}">
-                <a14:hiddenFill xmlns:a14="http://schemas.microsoft.com/office/drawing/2010/main" xmlns="">
+                <a14:hiddenFill xmlns="" xmlns:a14="http://schemas.microsoft.com/office/drawing/2010/main">
                   <a:solidFill>
                     <a:srgbClr val="FFFFFF"/>
                   </a:solidFill>
                 </a14:hiddenFill>
               </a:ext>
               <a:ext uri="{91240B29-F687-4f45-9708-019B960494DF}">
-                <a14:hiddenLine xmlns:a14="http://schemas.microsoft.com/office/drawing/2010/main" xmlns="" w="9525">
+                <a14:hiddenLine xmlns="" xmlns:a14="http://schemas.microsoft.com/office/drawing/2010/main" w="9525">
                   <a:solidFill>
                     <a:srgbClr val="000000"/>
                   </a:solidFill>
@@ -5333,14 +6229,14 @@
             </a:ln>
             <a:extLst>
               <a:ext uri="{909E8E84-426E-40dd-AFC4-6F175D3DCCD1}">
-                <a14:hiddenFill xmlns:a14="http://schemas.microsoft.com/office/drawing/2010/main" xmlns="">
+                <a14:hiddenFill xmlns="" xmlns:a14="http://schemas.microsoft.com/office/drawing/2010/main">
                   <a:solidFill>
                     <a:srgbClr val="FFFFFF"/>
                   </a:solidFill>
                 </a14:hiddenFill>
               </a:ext>
               <a:ext uri="{91240B29-F687-4f45-9708-019B960494DF}">
-                <a14:hiddenLine xmlns:a14="http://schemas.microsoft.com/office/drawing/2010/main" xmlns="" w="9525">
+                <a14:hiddenLine xmlns="" xmlns:a14="http://schemas.microsoft.com/office/drawing/2010/main" w="9525">
                   <a:solidFill>
                     <a:srgbClr val="000000"/>
                   </a:solidFill>
@@ -5463,14 +6359,14 @@
             </a:ln>
             <a:extLst>
               <a:ext uri="{909E8E84-426E-40dd-AFC4-6F175D3DCCD1}">
-                <a14:hiddenFill xmlns:a14="http://schemas.microsoft.com/office/drawing/2010/main" xmlns="">
+                <a14:hiddenFill xmlns="" xmlns:a14="http://schemas.microsoft.com/office/drawing/2010/main">
                   <a:solidFill>
                     <a:srgbClr val="FFFFFF"/>
                   </a:solidFill>
                 </a14:hiddenFill>
               </a:ext>
               <a:ext uri="{91240B29-F687-4f45-9708-019B960494DF}">
-                <a14:hiddenLine xmlns:a14="http://schemas.microsoft.com/office/drawing/2010/main" xmlns="" w="9525">
+                <a14:hiddenLine xmlns="" xmlns:a14="http://schemas.microsoft.com/office/drawing/2010/main" w="9525">
                   <a:solidFill>
                     <a:srgbClr val="000000"/>
                   </a:solidFill>
@@ -5589,14 +6485,14 @@
             </a:ln>
             <a:extLst>
               <a:ext uri="{909E8E84-426E-40dd-AFC4-6F175D3DCCD1}">
-                <a14:hiddenFill xmlns:a14="http://schemas.microsoft.com/office/drawing/2010/main" xmlns="">
+                <a14:hiddenFill xmlns="" xmlns:a14="http://schemas.microsoft.com/office/drawing/2010/main">
                   <a:solidFill>
                     <a:srgbClr val="FFFFFF"/>
                   </a:solidFill>
                 </a14:hiddenFill>
               </a:ext>
               <a:ext uri="{91240B29-F687-4f45-9708-019B960494DF}">
-                <a14:hiddenLine xmlns:a14="http://schemas.microsoft.com/office/drawing/2010/main" xmlns="" w="9525">
+                <a14:hiddenLine xmlns="" xmlns:a14="http://schemas.microsoft.com/office/drawing/2010/main" w="9525">
                   <a:solidFill>
                     <a:srgbClr val="000000"/>
                   </a:solidFill>
@@ -6158,14 +7054,46 @@
         </p:spPr>
         <p:txBody>
           <a:bodyPr>
-            <a:normAutofit/>
+            <a:normAutofit fontScale="90000"/>
           </a:bodyPr>
           <a:lstStyle/>
           <a:p>
             <a:pPr algn="l"/>
             <a:r>
               <a:rPr lang="en-GB" sz="2800" dirty="0"/>
-              <a:t>2. Literature review</a:t>
+              <a:t>2. Literature review (Una </a:t>
+            </a:r>
+            <a:r>
+              <a:rPr lang="en-GB" sz="2800" dirty="0" err="1"/>
+              <a:t>vez</a:t>
+            </a:r>
+            <a:r>
+              <a:rPr lang="en-GB" sz="2800" dirty="0"/>
+              <a:t> </a:t>
+            </a:r>
+            <a:r>
+              <a:rPr lang="en-GB" sz="2800" dirty="0" err="1"/>
+              <a:t>añadidos</a:t>
+            </a:r>
+            <a:r>
+              <a:rPr lang="en-GB" sz="2800" dirty="0"/>
+              <a:t> </a:t>
+            </a:r>
+            <a:r>
+              <a:rPr lang="en-GB" sz="2800" dirty="0" err="1"/>
+              <a:t>todos</a:t>
+            </a:r>
+            <a:r>
+              <a:rPr lang="en-GB" sz="2800" dirty="0"/>
+              <a:t> lo </a:t>
+            </a:r>
+            <a:r>
+              <a:rPr lang="en-GB" sz="2800" dirty="0" err="1"/>
+              <a:t>ajustamos</a:t>
+            </a:r>
+            <a:r>
+              <a:rPr lang="en-GB" sz="2800" dirty="0"/>
+              <a:t>)</a:t>
             </a:r>
           </a:p>
         </p:txBody>
@@ -7787,6 +8715,266 @@
   <p:cSld>
     <p:spTree>
       <p:nvGrpSpPr>
+        <p:cNvPr id="1" name="">
+          <a:extLst>
+            <a:ext uri="{FF2B5EF4-FFF2-40B4-BE49-F238E27FC236}">
+              <a16:creationId xmlns:a16="http://schemas.microsoft.com/office/drawing/2014/main" id="{DFE16D71-5974-0503-CBCB-9203F0549B41}"/>
+            </a:ext>
+          </a:extLst>
+        </p:cNvPr>
+        <p:cNvGrpSpPr/>
+        <p:nvPr/>
+      </p:nvGrpSpPr>
+      <p:grpSpPr>
+        <a:xfrm>
+          <a:off x="0" y="0"/>
+          <a:ext cx="0" cy="0"/>
+          <a:chOff x="0" y="0"/>
+          <a:chExt cx="0" cy="0"/>
+        </a:xfrm>
+      </p:grpSpPr>
+      <p:sp>
+        <p:nvSpPr>
+          <p:cNvPr id="2" name="Title 1">
+            <a:extLst>
+              <a:ext uri="{FF2B5EF4-FFF2-40B4-BE49-F238E27FC236}">
+                <a16:creationId xmlns:a16="http://schemas.microsoft.com/office/drawing/2014/main" id="{971E8495-DCDD-44BF-A761-F1C09DFC7E67}"/>
+              </a:ext>
+            </a:extLst>
+          </p:cNvPr>
+          <p:cNvSpPr>
+            <a:spLocks noGrp="1"/>
+          </p:cNvSpPr>
+          <p:nvPr>
+            <p:ph type="title"/>
+          </p:nvPr>
+        </p:nvSpPr>
+        <p:spPr>
+          <a:xfrm>
+            <a:off x="457200" y="274638"/>
+            <a:ext cx="7302500" cy="788278"/>
+          </a:xfrm>
+        </p:spPr>
+        <p:txBody>
+          <a:bodyPr>
+            <a:normAutofit/>
+          </a:bodyPr>
+          <a:lstStyle/>
+          <a:p>
+            <a:pPr algn="l"/>
+            <a:r>
+              <a:rPr lang="en-GB" sz="2800" b="1" dirty="0"/>
+              <a:t>2. Literature review – Deep Learning (Pablo)</a:t>
+            </a:r>
+          </a:p>
+        </p:txBody>
+      </p:sp>
+      <p:sp>
+        <p:nvSpPr>
+          <p:cNvPr id="30" name="Rectangle 7">
+            <a:extLst>
+              <a:ext uri="{FF2B5EF4-FFF2-40B4-BE49-F238E27FC236}">
+                <a16:creationId xmlns:a16="http://schemas.microsoft.com/office/drawing/2014/main" id="{E2998411-BBE1-1077-A886-49B61CE6AF93}"/>
+              </a:ext>
+            </a:extLst>
+          </p:cNvPr>
+          <p:cNvSpPr/>
+          <p:nvPr/>
+        </p:nvSpPr>
+        <p:spPr>
+          <a:xfrm>
+            <a:off x="80137" y="66509"/>
+            <a:ext cx="6565636" cy="303085"/>
+          </a:xfrm>
+          <a:prstGeom prst="rect">
+            <a:avLst/>
+          </a:prstGeom>
+          <a:noFill/>
+          <a:ln>
+            <a:noFill/>
+          </a:ln>
+          <a:extLst>
+            <a:ext uri="{909E8E84-426E-40DD-AFC4-6F175D3DCCD1}">
+              <a14:hiddenFill xmlns:a14="http://schemas.microsoft.com/office/drawing/2010/main">
+                <a:solidFill>
+                  <a:srgbClr val="FFFFFF"/>
+                </a:solidFill>
+              </a14:hiddenFill>
+            </a:ext>
+            <a:ext uri="{91240B29-F687-4F45-9708-019B960494DF}">
+              <a14:hiddenLine xmlns:a14="http://schemas.microsoft.com/office/drawing/2010/main" w="9525" cap="flat">
+                <a:solidFill>
+                  <a:srgbClr val="000000"/>
+                </a:solidFill>
+                <a:miter lim="800000"/>
+                <a:headEnd type="none" w="med" len="med"/>
+                <a:tailEnd type="none" w="med" len="med"/>
+              </a14:hiddenLine>
+            </a:ext>
+          </a:extLst>
+        </p:spPr>
+        <p:txBody>
+          <a:bodyPr lIns="0" tIns="0" rIns="0" bIns="0"/>
+          <a:lstStyle/>
+          <a:p>
+            <a:endParaRPr lang="en-US" sz="800" b="1" dirty="0">
+              <a:solidFill>
+                <a:srgbClr val="535353"/>
+              </a:solidFill>
+              <a:latin typeface="Geneva" charset="0"/>
+              <a:cs typeface="Geneva" charset="0"/>
+            </a:endParaRPr>
+          </a:p>
+        </p:txBody>
+      </p:sp>
+      <p:sp>
+        <p:nvSpPr>
+          <p:cNvPr id="32" name="CuadroTexto 31">
+            <a:extLst>
+              <a:ext uri="{FF2B5EF4-FFF2-40B4-BE49-F238E27FC236}">
+                <a16:creationId xmlns:a16="http://schemas.microsoft.com/office/drawing/2014/main" id="{F2551BD6-4841-68EE-055C-26F68C85CC3F}"/>
+              </a:ext>
+            </a:extLst>
+          </p:cNvPr>
+          <p:cNvSpPr txBox="1"/>
+          <p:nvPr/>
+        </p:nvSpPr>
+        <p:spPr>
+          <a:xfrm>
+            <a:off x="423164" y="1271045"/>
+            <a:ext cx="8414226" cy="415498"/>
+          </a:xfrm>
+          <a:prstGeom prst="rect">
+            <a:avLst/>
+          </a:prstGeom>
+          <a:noFill/>
+        </p:spPr>
+        <p:txBody>
+          <a:bodyPr wrap="none" rtlCol="0">
+            <a:spAutoFit/>
+          </a:bodyPr>
+          <a:lstStyle/>
+          <a:p>
+            <a:r>
+              <a:rPr lang="es-ES" sz="2000" b="1" dirty="0"/>
+              <a:t>Main method categories: </a:t>
+            </a:r>
+            <a:r>
+              <a:rPr lang="es-ES" sz="2100" b="1" dirty="0">
+                <a:solidFill>
+                  <a:schemeClr val="accent3">
+                    <a:lumMod val="75000"/>
+                  </a:schemeClr>
+                </a:solidFill>
+              </a:rPr>
+              <a:t>Segmentation</a:t>
+            </a:r>
+            <a:r>
+              <a:rPr lang="es-ES" sz="2000" dirty="0"/>
+              <a:t>,</a:t>
+            </a:r>
+            <a:r>
+              <a:rPr lang="es-ES" sz="2000" dirty="0">
+                <a:solidFill>
+                  <a:schemeClr val="tx2">
+                    <a:lumMod val="60000"/>
+                    <a:lumOff val="40000"/>
+                  </a:schemeClr>
+                </a:solidFill>
+              </a:rPr>
+              <a:t> </a:t>
+            </a:r>
+            <a:r>
+              <a:rPr lang="es-ES" sz="2100" b="1" dirty="0">
+                <a:solidFill>
+                  <a:schemeClr val="tx2">
+                    <a:lumMod val="60000"/>
+                    <a:lumOff val="40000"/>
+                  </a:schemeClr>
+                </a:solidFill>
+              </a:rPr>
+              <a:t>Detection</a:t>
+            </a:r>
+            <a:r>
+              <a:rPr lang="es-ES" sz="2000" b="1" dirty="0">
+                <a:solidFill>
+                  <a:schemeClr val="tx2">
+                    <a:lumMod val="60000"/>
+                    <a:lumOff val="40000"/>
+                  </a:schemeClr>
+                </a:solidFill>
+              </a:rPr>
+              <a:t> </a:t>
+            </a:r>
+            <a:r>
+              <a:rPr lang="es-ES" sz="2000" b="1" dirty="0"/>
+              <a:t>and</a:t>
+            </a:r>
+            <a:r>
+              <a:rPr lang="es-ES" sz="2000" dirty="0"/>
+              <a:t> </a:t>
+            </a:r>
+            <a:r>
+              <a:rPr lang="es-ES" sz="2100" b="1" dirty="0">
+                <a:solidFill>
+                  <a:schemeClr val="accent1">
+                    <a:lumMod val="75000"/>
+                  </a:schemeClr>
+                </a:solidFill>
+              </a:rPr>
+              <a:t>Anomaly Detection</a:t>
+            </a:r>
+            <a:endParaRPr lang="es-ES" sz="2100" b="1" dirty="0"/>
+          </a:p>
+        </p:txBody>
+      </p:sp>
+      <p:pic>
+        <p:nvPicPr>
+          <p:cNvPr id="36" name="Imagen 35">
+            <a:extLst>
+              <a:ext uri="{FF2B5EF4-FFF2-40B4-BE49-F238E27FC236}">
+                <a16:creationId xmlns:a16="http://schemas.microsoft.com/office/drawing/2014/main" id="{2AFB3648-5E3E-D6B1-A84A-32FA8CFFEB37}"/>
+              </a:ext>
+            </a:extLst>
+          </p:cNvPr>
+          <p:cNvPicPr>
+            <a:picLocks noChangeAspect="1"/>
+          </p:cNvPicPr>
+          <p:nvPr/>
+        </p:nvPicPr>
+        <p:blipFill>
+          <a:blip r:embed="rId3"/>
+          <a:srcRect/>
+          <a:stretch/>
+        </p:blipFill>
+        <p:spPr>
+          <a:xfrm>
+            <a:off x="331227" y="2552032"/>
+            <a:ext cx="8497957" cy="2542123"/>
+          </a:xfrm>
+          <a:prstGeom prst="rect">
+            <a:avLst/>
+          </a:prstGeom>
+        </p:spPr>
+      </p:pic>
+    </p:spTree>
+    <p:extLst>
+      <p:ext uri="{BB962C8B-B14F-4D97-AF65-F5344CB8AC3E}">
+        <p14:creationId xmlns:p14="http://schemas.microsoft.com/office/powerpoint/2010/main" val="3733304673"/>
+      </p:ext>
+    </p:extLst>
+  </p:cSld>
+  <p:clrMapOvr>
+    <a:masterClrMapping/>
+  </p:clrMapOvr>
+</p:sld>
+</file>
+
+<file path=ppt/slides/slide8.xml><?xml version="1.0" encoding="utf-8"?>
+<p:sld xmlns:a="http://schemas.openxmlformats.org/drawingml/2006/main" xmlns:r="http://schemas.openxmlformats.org/officeDocument/2006/relationships" xmlns:p="http://schemas.openxmlformats.org/presentationml/2006/main">
+  <p:cSld>
+    <p:spTree>
+      <p:nvGrpSpPr>
         <p:cNvPr id="1" name=""/>
         <p:cNvGrpSpPr/>
         <p:nvPr/>
@@ -7894,7 +9082,7 @@
 </p:sld>
 </file>
 
-<file path=ppt/slides/slide8.xml><?xml version="1.0" encoding="utf-8"?>
+<file path=ppt/slides/slide9.xml><?xml version="1.0" encoding="utf-8"?>
 <p:sld xmlns:a="http://schemas.openxmlformats.org/drawingml/2006/main" xmlns:r="http://schemas.openxmlformats.org/officeDocument/2006/relationships" xmlns:p="http://schemas.openxmlformats.org/presentationml/2006/main">
   <p:cSld>
     <p:spTree>
@@ -7948,7 +9136,7 @@
             <a:pPr algn="l"/>
             <a:r>
               <a:rPr lang="en-GB" sz="2800" dirty="0"/>
-              <a:t>3. Selected method 02: YYYY</a:t>
+              <a:t>3. Selected method (Deep 02): Grounded-SAM</a:t>
             </a:r>
           </a:p>
         </p:txBody>
@@ -8011,94 +9199,54 @@
           </a:p>
         </p:txBody>
       </p:sp>
-    </p:spTree>
-    <p:extLst>
-      <p:ext uri="{BB962C8B-B14F-4D97-AF65-F5344CB8AC3E}">
-        <p14:creationId xmlns:p14="http://schemas.microsoft.com/office/powerpoint/2010/main" val="3050205436"/>
-      </p:ext>
-    </p:extLst>
-  </p:cSld>
-  <p:clrMapOvr>
-    <a:masterClrMapping/>
-  </p:clrMapOvr>
-</p:sld>
-</file>
-
-<file path=ppt/slides/slide9.xml><?xml version="1.0" encoding="utf-8"?>
-<p:sld xmlns:a="http://schemas.openxmlformats.org/drawingml/2006/main" xmlns:r="http://schemas.openxmlformats.org/officeDocument/2006/relationships" xmlns:p="http://schemas.openxmlformats.org/presentationml/2006/main">
-  <p:cSld>
-    <p:spTree>
-      <p:nvGrpSpPr>
-        <p:cNvPr id="1" name="">
-          <a:extLst>
-            <a:ext uri="{FF2B5EF4-FFF2-40B4-BE49-F238E27FC236}">
-              <a16:creationId xmlns:a16="http://schemas.microsoft.com/office/drawing/2014/main" id="{F4CD17D0-6AE0-335D-DCCB-779C22440197}"/>
-            </a:ext>
-          </a:extLst>
-        </p:cNvPr>
-        <p:cNvGrpSpPr/>
-        <p:nvPr/>
-      </p:nvGrpSpPr>
-      <p:grpSpPr>
-        <a:xfrm>
-          <a:off x="0" y="0"/>
-          <a:ext cx="0" cy="0"/>
-          <a:chOff x="0" y="0"/>
-          <a:chExt cx="0" cy="0"/>
-        </a:xfrm>
-      </p:grpSpPr>
+      <p:pic>
+        <p:nvPicPr>
+          <p:cNvPr id="7" name="Imagen 6">
+            <a:extLst>
+              <a:ext uri="{FF2B5EF4-FFF2-40B4-BE49-F238E27FC236}">
+                <a16:creationId xmlns:a16="http://schemas.microsoft.com/office/drawing/2014/main" id="{5DA4DB5B-7178-9422-2D2D-DE06F57C981C}"/>
+              </a:ext>
+            </a:extLst>
+          </p:cNvPr>
+          <p:cNvPicPr>
+            <a:picLocks noChangeAspect="1"/>
+          </p:cNvPicPr>
+          <p:nvPr/>
+        </p:nvPicPr>
+        <p:blipFill>
+          <a:blip r:embed="rId3"/>
+          <a:stretch>
+            <a:fillRect/>
+          </a:stretch>
+        </p:blipFill>
+        <p:spPr>
+          <a:xfrm>
+            <a:off x="3713018" y="2134759"/>
+            <a:ext cx="4965700" cy="4393185"/>
+          </a:xfrm>
+          <a:prstGeom prst="rect">
+            <a:avLst/>
+          </a:prstGeom>
+        </p:spPr>
+      </p:pic>
       <p:sp>
         <p:nvSpPr>
-          <p:cNvPr id="2" name="Title 1">
+          <p:cNvPr id="3" name="Rectangle 9">
             <a:extLst>
               <a:ext uri="{FF2B5EF4-FFF2-40B4-BE49-F238E27FC236}">
-                <a16:creationId xmlns:a16="http://schemas.microsoft.com/office/drawing/2014/main" id="{ABE9FD54-E3E9-1AA0-9DD9-0517F99B7216}"/>
+                <a16:creationId xmlns:a16="http://schemas.microsoft.com/office/drawing/2014/main" id="{9432D02F-CFEC-0CCD-2E78-CC886AAA6DD2}"/>
               </a:ext>
             </a:extLst>
           </p:cNvPr>
           <p:cNvSpPr>
-            <a:spLocks noGrp="1"/>
+            <a:spLocks noChangeArrowheads="1"/>
           </p:cNvSpPr>
-          <p:nvPr>
-            <p:ph type="title"/>
-          </p:nvPr>
-        </p:nvSpPr>
-        <p:spPr>
-          <a:xfrm>
-            <a:off x="457200" y="274638"/>
-            <a:ext cx="7302500" cy="788278"/>
-          </a:xfrm>
-        </p:spPr>
-        <p:txBody>
-          <a:bodyPr>
-            <a:normAutofit/>
-          </a:bodyPr>
-          <a:lstStyle/>
-          <a:p>
-            <a:pPr algn="l"/>
-            <a:r>
-              <a:rPr lang="en-GB" sz="2800" dirty="0"/>
-              <a:t>3. Selected method 03: ZZZZ</a:t>
-            </a:r>
-          </a:p>
-        </p:txBody>
-      </p:sp>
-      <p:sp>
-        <p:nvSpPr>
-          <p:cNvPr id="30" name="Rectangle 7">
-            <a:extLst>
-              <a:ext uri="{FF2B5EF4-FFF2-40B4-BE49-F238E27FC236}">
-                <a16:creationId xmlns:a16="http://schemas.microsoft.com/office/drawing/2014/main" id="{36C84E96-7653-5D12-E6C6-A76E4A341C6C}"/>
-              </a:ext>
-            </a:extLst>
-          </p:cNvPr>
-          <p:cNvSpPr/>
           <p:nvPr/>
         </p:nvSpPr>
-        <p:spPr>
+        <p:spPr bwMode="auto">
           <a:xfrm>
-            <a:off x="80137" y="66509"/>
-            <a:ext cx="6565636" cy="303085"/>
+            <a:off x="910871" y="1501092"/>
+            <a:ext cx="5734902" cy="1631216"/>
           </a:xfrm>
           <a:prstGeom prst="rect">
             <a:avLst/>
@@ -8107,36 +9255,369 @@
           <a:ln>
             <a:noFill/>
           </a:ln>
+          <a:effectLst/>
           <a:extLst>
             <a:ext uri="{909E8E84-426E-40DD-AFC4-6F175D3DCCD1}">
               <a14:hiddenFill xmlns:a14="http://schemas.microsoft.com/office/drawing/2010/main">
                 <a:solidFill>
-                  <a:srgbClr val="FFFFFF"/>
+                  <a:schemeClr val="accent1"/>
                 </a:solidFill>
               </a14:hiddenFill>
             </a:ext>
             <a:ext uri="{91240B29-F687-4F45-9708-019B960494DF}">
-              <a14:hiddenLine xmlns:a14="http://schemas.microsoft.com/office/drawing/2010/main" w="9525" cap="flat">
-                <a:solidFill>
-                  <a:srgbClr val="000000"/>
+              <a14:hiddenLine xmlns:a14="http://schemas.microsoft.com/office/drawing/2010/main" w="9525">
+                <a:solidFill>
+                  <a:schemeClr val="tx1"/>
                 </a:solidFill>
                 <a:miter lim="800000"/>
-                <a:headEnd type="none" w="med" len="med"/>
-                <a:tailEnd type="none" w="med" len="med"/>
+                <a:headEnd/>
+                <a:tailEnd/>
               </a14:hiddenLine>
+            </a:ext>
+            <a:ext uri="{AF507438-7753-43E0-B8FC-AC1667EBCBE1}">
+              <a14:hiddenEffects xmlns:a14="http://schemas.microsoft.com/office/drawing/2010/main">
+                <a:effectLst>
+                  <a:outerShdw dist="35921" dir="2700000" algn="ctr" rotWithShape="0">
+                    <a:schemeClr val="bg2"/>
+                  </a:outerShdw>
+                </a:effectLst>
+              </a14:hiddenEffects>
             </a:ext>
           </a:extLst>
         </p:spPr>
         <p:txBody>
-          <a:bodyPr lIns="0" tIns="0" rIns="0" bIns="0"/>
+          <a:bodyPr vert="horz" wrap="square" lIns="91440" tIns="45720" rIns="91440" bIns="45720" numCol="1" anchor="ctr" anchorCtr="0" compatLnSpc="1">
+            <a:prstTxWarp prst="textNoShape">
+              <a:avLst/>
+            </a:prstTxWarp>
+            <a:spAutoFit/>
+          </a:bodyPr>
           <a:lstStyle/>
           <a:p>
-            <a:endParaRPr lang="en-US" sz="800" b="1" dirty="0">
+            <a:pPr lvl="0" defTabSz="914400" eaLnBrk="0" fontAlgn="base" hangingPunct="0">
+              <a:spcBef>
+                <a:spcPct val="0"/>
+              </a:spcBef>
+              <a:spcAft>
+                <a:spcPct val="0"/>
+              </a:spcAft>
+              <a:buFontTx/>
+              <a:buChar char="•"/>
+            </a:pPr>
+            <a:r>
+              <a:rPr kumimoji="0" lang="es-ES" altLang="es-ES" sz="2000" b="0" i="0" u="none" strike="noStrike" cap="none" normalizeH="0" baseline="0" dirty="0">
+                <a:ln>
+                  <a:noFill/>
+                </a:ln>
+                <a:solidFill>
+                  <a:schemeClr val="tx1"/>
+                </a:solidFill>
+                <a:effectLst/>
+                <a:latin typeface="Arial" panose="020B0604020202020204" pitchFamily="34" charset="0"/>
+              </a:rPr>
+              <a:t> </a:t>
+            </a:r>
+            <a:r>
+              <a:rPr lang="es-ES" dirty="0"/>
+              <a:t>🔗</a:t>
+            </a:r>
+            <a:r>
+              <a:rPr lang="es-ES" altLang="es-ES" sz="2000" dirty="0" err="1">
+                <a:latin typeface="Arial" panose="020B0604020202020204" pitchFamily="34" charset="0"/>
+              </a:rPr>
+              <a:t>Detection</a:t>
+            </a:r>
+            <a:r>
+              <a:rPr lang="es-ES" altLang="es-ES" sz="2000" dirty="0">
+                <a:latin typeface="Arial" panose="020B0604020202020204" pitchFamily="34" charset="0"/>
+              </a:rPr>
+              <a:t> + </a:t>
+            </a:r>
+            <a:r>
+              <a:rPr lang="es-ES" altLang="es-ES" sz="2000" dirty="0" err="1">
+                <a:latin typeface="Arial" panose="020B0604020202020204" pitchFamily="34" charset="0"/>
+              </a:rPr>
+              <a:t>segmentation</a:t>
+            </a:r>
+            <a:r>
+              <a:rPr lang="es-ES" altLang="es-ES" sz="2000" dirty="0">
+                <a:latin typeface="Arial" panose="020B0604020202020204" pitchFamily="34" charset="0"/>
+              </a:rPr>
+              <a:t> pipeline (2-stage)</a:t>
+            </a:r>
+            <a:endParaRPr kumimoji="0" lang="es-ES" altLang="es-ES" sz="2000" b="0" i="0" u="none" strike="noStrike" cap="none" normalizeH="0" baseline="0" dirty="0">
+              <a:ln>
+                <a:noFill/>
+              </a:ln>
               <a:solidFill>
-                <a:srgbClr val="535353"/>
+                <a:schemeClr val="tx1"/>
               </a:solidFill>
-              <a:latin typeface="Geneva" charset="0"/>
-              <a:cs typeface="Geneva" charset="0"/>
+              <a:effectLst/>
+              <a:latin typeface="Arial" panose="020B0604020202020204" pitchFamily="34" charset="0"/>
+            </a:endParaRPr>
+          </a:p>
+          <a:p>
+            <a:pPr lvl="0" defTabSz="914400" eaLnBrk="0" fontAlgn="base" hangingPunct="0">
+              <a:spcBef>
+                <a:spcPct val="0"/>
+              </a:spcBef>
+              <a:spcAft>
+                <a:spcPct val="0"/>
+              </a:spcAft>
+              <a:buFontTx/>
+              <a:buChar char="•"/>
+            </a:pPr>
+            <a:r>
+              <a:rPr kumimoji="0" lang="es-ES" altLang="es-ES" sz="2000" b="0" i="0" u="none" strike="noStrike" cap="none" normalizeH="0" baseline="0" dirty="0">
+                <a:ln>
+                  <a:noFill/>
+                </a:ln>
+                <a:solidFill>
+                  <a:schemeClr val="tx1"/>
+                </a:solidFill>
+                <a:effectLst/>
+                <a:latin typeface="Arial" panose="020B0604020202020204" pitchFamily="34" charset="0"/>
+              </a:rPr>
+              <a:t> </a:t>
+            </a:r>
+            <a:r>
+              <a:rPr lang="es-ES" dirty="0"/>
+              <a:t>📝</a:t>
+            </a:r>
+            <a:r>
+              <a:rPr kumimoji="0" lang="es-ES" altLang="es-ES" sz="2000" b="0" i="0" u="none" strike="noStrike" cap="none" normalizeH="0" baseline="0" dirty="0">
+                <a:ln>
+                  <a:noFill/>
+                </a:ln>
+                <a:solidFill>
+                  <a:schemeClr val="tx1"/>
+                </a:solidFill>
+                <a:effectLst/>
+                <a:latin typeface="Arial" panose="020B0604020202020204" pitchFamily="34" charset="0"/>
+              </a:rPr>
+              <a:t>Open-</a:t>
+            </a:r>
+            <a:r>
+              <a:rPr kumimoji="0" lang="es-ES" altLang="es-ES" sz="2000" b="0" i="0" u="none" strike="noStrike" cap="none" normalizeH="0" baseline="0" dirty="0" err="1">
+                <a:ln>
+                  <a:noFill/>
+                </a:ln>
+                <a:solidFill>
+                  <a:schemeClr val="tx1"/>
+                </a:solidFill>
+                <a:effectLst/>
+                <a:latin typeface="Arial" panose="020B0604020202020204" pitchFamily="34" charset="0"/>
+              </a:rPr>
+              <a:t>vocabulary</a:t>
+            </a:r>
+            <a:endParaRPr lang="es-ES" altLang="es-ES" sz="2000" dirty="0">
+              <a:latin typeface="Arial" panose="020B0604020202020204" pitchFamily="34" charset="0"/>
+            </a:endParaRPr>
+          </a:p>
+          <a:p>
+            <a:pPr lvl="0" defTabSz="914400" eaLnBrk="0" fontAlgn="base" hangingPunct="0">
+              <a:spcBef>
+                <a:spcPct val="0"/>
+              </a:spcBef>
+              <a:spcAft>
+                <a:spcPct val="0"/>
+              </a:spcAft>
+              <a:buFontTx/>
+              <a:buChar char="•"/>
+            </a:pPr>
+            <a:r>
+              <a:rPr kumimoji="0" lang="es-ES" altLang="es-ES" sz="2000" b="0" i="0" u="none" strike="noStrike" cap="none" normalizeH="0" baseline="0" dirty="0">
+                <a:ln>
+                  <a:noFill/>
+                </a:ln>
+                <a:solidFill>
+                  <a:schemeClr val="tx1"/>
+                </a:solidFill>
+                <a:effectLst/>
+                <a:latin typeface="Arial" panose="020B0604020202020204" pitchFamily="34" charset="0"/>
+              </a:rPr>
+              <a:t> </a:t>
+            </a:r>
+            <a:r>
+              <a:rPr lang="es-ES" dirty="0"/>
+              <a:t>📦</a:t>
+            </a:r>
+            <a:r>
+              <a:rPr kumimoji="0" lang="es-ES" altLang="es-ES" sz="2000" b="0" i="0" u="none" strike="noStrike" cap="none" normalizeH="0" baseline="0" dirty="0" err="1">
+                <a:ln>
+                  <a:noFill/>
+                </a:ln>
+                <a:solidFill>
+                  <a:schemeClr val="tx1"/>
+                </a:solidFill>
+                <a:effectLst/>
+                <a:latin typeface="Arial" panose="020B0604020202020204" pitchFamily="34" charset="0"/>
+              </a:rPr>
+              <a:t>Object</a:t>
+            </a:r>
+            <a:r>
+              <a:rPr kumimoji="0" lang="es-ES" altLang="es-ES" sz="2000" b="0" i="0" u="none" strike="noStrike" cap="none" normalizeH="0" baseline="0" dirty="0">
+                <a:ln>
+                  <a:noFill/>
+                </a:ln>
+                <a:solidFill>
+                  <a:schemeClr val="tx1"/>
+                </a:solidFill>
+                <a:effectLst/>
+                <a:latin typeface="Arial" panose="020B0604020202020204" pitchFamily="34" charset="0"/>
+              </a:rPr>
+              <a:t> </a:t>
+            </a:r>
+            <a:r>
+              <a:rPr kumimoji="0" lang="es-ES" altLang="es-ES" sz="2000" b="0" i="0" u="none" strike="noStrike" cap="none" normalizeH="0" baseline="0" dirty="0" err="1">
+                <a:ln>
+                  <a:noFill/>
+                </a:ln>
+                <a:solidFill>
+                  <a:schemeClr val="tx1"/>
+                </a:solidFill>
+                <a:effectLst/>
+                <a:latin typeface="Arial" panose="020B0604020202020204" pitchFamily="34" charset="0"/>
+              </a:rPr>
+              <a:t>detection</a:t>
+            </a:r>
+            <a:endParaRPr kumimoji="0" lang="es-ES" altLang="es-ES" sz="2000" b="0" i="0" u="none" strike="noStrike" cap="none" normalizeH="0" baseline="0" dirty="0">
+              <a:ln>
+                <a:noFill/>
+              </a:ln>
+              <a:solidFill>
+                <a:schemeClr val="tx1"/>
+              </a:solidFill>
+              <a:effectLst/>
+              <a:latin typeface="Arial" panose="020B0604020202020204" pitchFamily="34" charset="0"/>
+            </a:endParaRPr>
+          </a:p>
+          <a:p>
+            <a:pPr lvl="0" defTabSz="914400" eaLnBrk="0" fontAlgn="base" hangingPunct="0">
+              <a:spcBef>
+                <a:spcPct val="0"/>
+              </a:spcBef>
+              <a:spcAft>
+                <a:spcPct val="0"/>
+              </a:spcAft>
+              <a:buFontTx/>
+              <a:buChar char="•"/>
+            </a:pPr>
+            <a:r>
+              <a:rPr kumimoji="0" lang="es-ES" altLang="es-ES" sz="2000" b="0" i="0" u="none" strike="noStrike" cap="none" normalizeH="0" baseline="0" dirty="0">
+                <a:ln>
+                  <a:noFill/>
+                </a:ln>
+                <a:solidFill>
+                  <a:schemeClr val="tx1"/>
+                </a:solidFill>
+                <a:effectLst/>
+                <a:latin typeface="Arial" panose="020B0604020202020204" pitchFamily="34" charset="0"/>
+              </a:rPr>
+              <a:t> </a:t>
+            </a:r>
+            <a:r>
+              <a:rPr lang="es-ES" dirty="0"/>
+              <a:t>🎯</a:t>
+            </a:r>
+            <a:r>
+              <a:rPr kumimoji="0" lang="es-ES" altLang="es-ES" sz="2000" b="0" i="0" u="none" strike="noStrike" cap="none" normalizeH="0" baseline="0" dirty="0">
+                <a:ln>
+                  <a:noFill/>
+                </a:ln>
+                <a:solidFill>
+                  <a:schemeClr val="tx1"/>
+                </a:solidFill>
+                <a:effectLst/>
+                <a:latin typeface="Arial" panose="020B0604020202020204" pitchFamily="34" charset="0"/>
+              </a:rPr>
+              <a:t>Precise </a:t>
+            </a:r>
+            <a:r>
+              <a:rPr kumimoji="0" lang="es-ES" altLang="es-ES" sz="2000" b="0" i="0" u="none" strike="noStrike" cap="none" normalizeH="0" baseline="0" dirty="0" err="1">
+                <a:ln>
+                  <a:noFill/>
+                </a:ln>
+                <a:solidFill>
+                  <a:schemeClr val="tx1"/>
+                </a:solidFill>
+                <a:effectLst/>
+                <a:latin typeface="Arial" panose="020B0604020202020204" pitchFamily="34" charset="0"/>
+              </a:rPr>
+              <a:t>segmentation</a:t>
+            </a:r>
+            <a:r>
+              <a:rPr kumimoji="0" lang="es-ES" altLang="es-ES" sz="2000" b="0" i="0" u="none" strike="noStrike" cap="none" normalizeH="0" baseline="0" dirty="0">
+                <a:ln>
+                  <a:noFill/>
+                </a:ln>
+                <a:solidFill>
+                  <a:schemeClr val="tx1"/>
+                </a:solidFill>
+                <a:effectLst/>
+                <a:latin typeface="Arial" panose="020B0604020202020204" pitchFamily="34" charset="0"/>
+              </a:rPr>
+              <a:t> </a:t>
+            </a:r>
+            <a:r>
+              <a:rPr kumimoji="0" lang="es-ES" altLang="es-ES" sz="2000" b="0" i="0" u="none" strike="noStrike" cap="none" normalizeH="0" baseline="0" dirty="0" err="1">
+                <a:ln>
+                  <a:noFill/>
+                </a:ln>
+                <a:solidFill>
+                  <a:schemeClr val="tx1"/>
+                </a:solidFill>
+                <a:effectLst/>
+                <a:latin typeface="Arial" panose="020B0604020202020204" pitchFamily="34" charset="0"/>
+              </a:rPr>
+              <a:t>masks</a:t>
+            </a:r>
+            <a:endParaRPr lang="es-ES" altLang="es-ES" sz="2000" dirty="0">
+              <a:latin typeface="Arial" panose="020B0604020202020204" pitchFamily="34" charset="0"/>
+            </a:endParaRPr>
+          </a:p>
+          <a:p>
+            <a:pPr lvl="0" defTabSz="914400" eaLnBrk="0" fontAlgn="base" hangingPunct="0">
+              <a:spcBef>
+                <a:spcPct val="0"/>
+              </a:spcBef>
+              <a:spcAft>
+                <a:spcPct val="0"/>
+              </a:spcAft>
+              <a:buFontTx/>
+              <a:buChar char="•"/>
+            </a:pPr>
+            <a:r>
+              <a:rPr lang="es-ES" altLang="es-ES" sz="2000" dirty="0">
+                <a:latin typeface="Arial" panose="020B0604020202020204" pitchFamily="34" charset="0"/>
+              </a:rPr>
+              <a:t> </a:t>
+            </a:r>
+            <a:r>
+              <a:rPr lang="es-ES" dirty="0"/>
+              <a:t>🚫</a:t>
+            </a:r>
+            <a:r>
+              <a:rPr lang="es-ES" altLang="es-ES" sz="2000" dirty="0">
+                <a:latin typeface="Arial" panose="020B0604020202020204" pitchFamily="34" charset="0"/>
+              </a:rPr>
+              <a:t>Zero-</a:t>
+            </a:r>
+            <a:r>
+              <a:rPr lang="es-ES" altLang="es-ES" sz="2000" dirty="0" err="1">
+                <a:latin typeface="Arial" panose="020B0604020202020204" pitchFamily="34" charset="0"/>
+              </a:rPr>
+              <a:t>shot</a:t>
+            </a:r>
+            <a:endParaRPr kumimoji="0" lang="es-ES" altLang="es-ES" sz="2000" b="0" i="0" u="none" strike="noStrike" cap="none" normalizeH="0" baseline="0" dirty="0">
+              <a:ln>
+                <a:noFill/>
+              </a:ln>
+              <a:solidFill>
+                <a:schemeClr val="tx1"/>
+              </a:solidFill>
+              <a:effectLst/>
+              <a:latin typeface="Arial" panose="020B0604020202020204" pitchFamily="34" charset="0"/>
             </a:endParaRPr>
           </a:p>
         </p:txBody>
@@ -8144,7 +9625,7 @@
     </p:spTree>
     <p:extLst>
       <p:ext uri="{BB962C8B-B14F-4D97-AF65-F5344CB8AC3E}">
-        <p14:creationId xmlns:p14="http://schemas.microsoft.com/office/powerpoint/2010/main" val="2985104822"/>
+        <p14:creationId xmlns:p14="http://schemas.microsoft.com/office/powerpoint/2010/main" val="3050205436"/>
       </p:ext>
     </p:extLst>
   </p:cSld>

--- a/docs/GIDIA_VA_Course_Project_Presentations.pptx
+++ b/docs/GIDIA_VA_Course_Project_Presentations.pptx
@@ -4229,6 +4229,294 @@
           </a:prstGeom>
         </p:spPr>
       </p:pic>
+      <p:pic>
+        <p:nvPicPr>
+          <p:cNvPr id="5" name="Imagen 4">
+            <a:extLst>
+              <a:ext uri="{FF2B5EF4-FFF2-40B4-BE49-F238E27FC236}">
+                <a16:creationId xmlns:a16="http://schemas.microsoft.com/office/drawing/2014/main" id="{A260E61C-CF0C-CBB4-6FFE-05A177CE5043}"/>
+              </a:ext>
+            </a:extLst>
+          </p:cNvPr>
+          <p:cNvPicPr>
+            <a:picLocks noChangeAspect="1"/>
+          </p:cNvPicPr>
+          <p:nvPr/>
+        </p:nvPicPr>
+        <p:blipFill>
+          <a:blip r:embed="rId4">
+            <a:alphaModFix amt="25000"/>
+          </a:blip>
+          <a:stretch>
+            <a:fillRect/>
+          </a:stretch>
+        </p:blipFill>
+        <p:spPr>
+          <a:xfrm>
+            <a:off x="1830070" y="2214693"/>
+            <a:ext cx="5144218" cy="2682303"/>
+          </a:xfrm>
+          <a:prstGeom prst="rect">
+            <a:avLst/>
+          </a:prstGeom>
+        </p:spPr>
+      </p:pic>
+      <p:pic>
+        <p:nvPicPr>
+          <p:cNvPr id="7" name="Imagen 6">
+            <a:extLst>
+              <a:ext uri="{FF2B5EF4-FFF2-40B4-BE49-F238E27FC236}">
+                <a16:creationId xmlns:a16="http://schemas.microsoft.com/office/drawing/2014/main" id="{0FAAF5DB-34BF-083D-22DF-62A069380D99}"/>
+              </a:ext>
+            </a:extLst>
+          </p:cNvPr>
+          <p:cNvPicPr>
+            <a:picLocks noChangeAspect="1"/>
+          </p:cNvPicPr>
+          <p:nvPr/>
+        </p:nvPicPr>
+        <p:blipFill>
+          <a:blip r:embed="rId5">
+            <a:alphaModFix amt="25000"/>
+          </a:blip>
+          <a:stretch>
+            <a:fillRect/>
+          </a:stretch>
+        </p:blipFill>
+        <p:spPr>
+          <a:xfrm>
+            <a:off x="2211552" y="-1273662"/>
+            <a:ext cx="3505689" cy="3496163"/>
+          </a:xfrm>
+          <a:prstGeom prst="rect">
+            <a:avLst/>
+          </a:prstGeom>
+        </p:spPr>
+      </p:pic>
+      <p:pic>
+        <p:nvPicPr>
+          <p:cNvPr id="9" name="Imagen 8">
+            <a:extLst>
+              <a:ext uri="{FF2B5EF4-FFF2-40B4-BE49-F238E27FC236}">
+                <a16:creationId xmlns:a16="http://schemas.microsoft.com/office/drawing/2014/main" id="{855580D9-C421-EBC4-5246-EC8668D68033}"/>
+              </a:ext>
+            </a:extLst>
+          </p:cNvPr>
+          <p:cNvPicPr>
+            <a:picLocks noChangeAspect="1"/>
+          </p:cNvPicPr>
+          <p:nvPr/>
+        </p:nvPicPr>
+        <p:blipFill>
+          <a:blip r:embed="rId6">
+            <a:alphaModFix amt="25000"/>
+          </a:blip>
+          <a:stretch>
+            <a:fillRect/>
+          </a:stretch>
+        </p:blipFill>
+        <p:spPr>
+          <a:xfrm>
+            <a:off x="6974288" y="2214693"/>
+            <a:ext cx="2256189" cy="2682303"/>
+          </a:xfrm>
+          <a:prstGeom prst="rect">
+            <a:avLst/>
+          </a:prstGeom>
+        </p:spPr>
+      </p:pic>
+      <p:pic>
+        <p:nvPicPr>
+          <p:cNvPr id="11" name="Imagen 10">
+            <a:extLst>
+              <a:ext uri="{FF2B5EF4-FFF2-40B4-BE49-F238E27FC236}">
+                <a16:creationId xmlns:a16="http://schemas.microsoft.com/office/drawing/2014/main" id="{82486E68-9CF4-504D-368A-620B23577FCE}"/>
+              </a:ext>
+            </a:extLst>
+          </p:cNvPr>
+          <p:cNvPicPr>
+            <a:picLocks noChangeAspect="1"/>
+          </p:cNvPicPr>
+          <p:nvPr/>
+        </p:nvPicPr>
+        <p:blipFill>
+          <a:blip r:embed="rId7">
+            <a:alphaModFix amt="25000"/>
+          </a:blip>
+          <a:stretch>
+            <a:fillRect/>
+          </a:stretch>
+        </p:blipFill>
+        <p:spPr>
+          <a:xfrm>
+            <a:off x="41840" y="2209932"/>
+            <a:ext cx="1811024" cy="2687065"/>
+          </a:xfrm>
+          <a:prstGeom prst="rect">
+            <a:avLst/>
+          </a:prstGeom>
+        </p:spPr>
+      </p:pic>
+      <p:pic>
+        <p:nvPicPr>
+          <p:cNvPr id="13" name="Imagen 12">
+            <a:extLst>
+              <a:ext uri="{FF2B5EF4-FFF2-40B4-BE49-F238E27FC236}">
+                <a16:creationId xmlns:a16="http://schemas.microsoft.com/office/drawing/2014/main" id="{2D638B83-C0BC-277A-2A30-FC389C17D3B2}"/>
+              </a:ext>
+            </a:extLst>
+          </p:cNvPr>
+          <p:cNvPicPr>
+            <a:picLocks noChangeAspect="1"/>
+          </p:cNvPicPr>
+          <p:nvPr/>
+        </p:nvPicPr>
+        <p:blipFill>
+          <a:blip r:embed="rId8">
+            <a:alphaModFix amt="25000"/>
+          </a:blip>
+          <a:stretch>
+            <a:fillRect/>
+          </a:stretch>
+        </p:blipFill>
+        <p:spPr>
+          <a:xfrm>
+            <a:off x="2481544" y="4896997"/>
+            <a:ext cx="4677428" cy="3524742"/>
+          </a:xfrm>
+          <a:prstGeom prst="rect">
+            <a:avLst/>
+          </a:prstGeom>
+        </p:spPr>
+      </p:pic>
+      <p:pic>
+        <p:nvPicPr>
+          <p:cNvPr id="15" name="Imagen 14">
+            <a:extLst>
+              <a:ext uri="{FF2B5EF4-FFF2-40B4-BE49-F238E27FC236}">
+                <a16:creationId xmlns:a16="http://schemas.microsoft.com/office/drawing/2014/main" id="{3C26A960-DB73-47B8-43F0-D6BBE57C2BE7}"/>
+              </a:ext>
+            </a:extLst>
+          </p:cNvPr>
+          <p:cNvPicPr>
+            <a:picLocks noChangeAspect="1"/>
+          </p:cNvPicPr>
+          <p:nvPr/>
+        </p:nvPicPr>
+        <p:blipFill>
+          <a:blip r:embed="rId9">
+            <a:alphaModFix amt="25000"/>
+          </a:blip>
+          <a:stretch>
+            <a:fillRect/>
+          </a:stretch>
+        </p:blipFill>
+        <p:spPr>
+          <a:xfrm>
+            <a:off x="5717241" y="-1254609"/>
+            <a:ext cx="4505954" cy="3464541"/>
+          </a:xfrm>
+          <a:prstGeom prst="rect">
+            <a:avLst/>
+          </a:prstGeom>
+        </p:spPr>
+      </p:pic>
+      <p:pic>
+        <p:nvPicPr>
+          <p:cNvPr id="17" name="Imagen 16">
+            <a:extLst>
+              <a:ext uri="{FF2B5EF4-FFF2-40B4-BE49-F238E27FC236}">
+                <a16:creationId xmlns:a16="http://schemas.microsoft.com/office/drawing/2014/main" id="{19B3B48B-9993-B496-C19C-444175ABBD00}"/>
+              </a:ext>
+            </a:extLst>
+          </p:cNvPr>
+          <p:cNvPicPr>
+            <a:picLocks noChangeAspect="1"/>
+          </p:cNvPicPr>
+          <p:nvPr/>
+        </p:nvPicPr>
+        <p:blipFill>
+          <a:blip r:embed="rId10">
+            <a:alphaModFix amt="25000"/>
+          </a:blip>
+          <a:stretch>
+            <a:fillRect/>
+          </a:stretch>
+        </p:blipFill>
+        <p:spPr>
+          <a:xfrm>
+            <a:off x="-55714" y="-1283188"/>
+            <a:ext cx="2267266" cy="3505689"/>
+          </a:xfrm>
+          <a:prstGeom prst="rect">
+            <a:avLst/>
+          </a:prstGeom>
+        </p:spPr>
+      </p:pic>
+      <p:pic>
+        <p:nvPicPr>
+          <p:cNvPr id="19" name="Imagen 18">
+            <a:extLst>
+              <a:ext uri="{FF2B5EF4-FFF2-40B4-BE49-F238E27FC236}">
+                <a16:creationId xmlns:a16="http://schemas.microsoft.com/office/drawing/2014/main" id="{30A69AC1-C53D-33B4-105A-AD149AD6C994}"/>
+              </a:ext>
+            </a:extLst>
+          </p:cNvPr>
+          <p:cNvPicPr>
+            <a:picLocks noChangeAspect="1"/>
+          </p:cNvPicPr>
+          <p:nvPr/>
+        </p:nvPicPr>
+        <p:blipFill>
+          <a:blip r:embed="rId11">
+            <a:alphaModFix amt="25000"/>
+          </a:blip>
+          <a:stretch>
+            <a:fillRect/>
+          </a:stretch>
+        </p:blipFill>
+        <p:spPr>
+          <a:xfrm>
+            <a:off x="1270" y="4896997"/>
+            <a:ext cx="2481545" cy="2586646"/>
+          </a:xfrm>
+          <a:prstGeom prst="rect">
+            <a:avLst/>
+          </a:prstGeom>
+        </p:spPr>
+      </p:pic>
+      <p:pic>
+        <p:nvPicPr>
+          <p:cNvPr id="21" name="Imagen 20">
+            <a:extLst>
+              <a:ext uri="{FF2B5EF4-FFF2-40B4-BE49-F238E27FC236}">
+                <a16:creationId xmlns:a16="http://schemas.microsoft.com/office/drawing/2014/main" id="{FA96640A-2C49-3A0D-2C3B-3C04FF71F173}"/>
+              </a:ext>
+            </a:extLst>
+          </p:cNvPr>
+          <p:cNvPicPr>
+            <a:picLocks noChangeAspect="1"/>
+          </p:cNvPicPr>
+          <p:nvPr/>
+        </p:nvPicPr>
+        <p:blipFill>
+          <a:blip r:embed="rId12">
+            <a:alphaModFix amt="25000"/>
+          </a:blip>
+          <a:stretch>
+            <a:fillRect/>
+          </a:stretch>
+        </p:blipFill>
+        <p:spPr>
+          <a:xfrm>
+            <a:off x="7155717" y="4896997"/>
+            <a:ext cx="3067478" cy="2267266"/>
+          </a:xfrm>
+          <a:prstGeom prst="rect">
+            <a:avLst/>
+          </a:prstGeom>
+        </p:spPr>
+      </p:pic>
     </p:spTree>
     <p:extLst>
       <p:ext uri="{BB962C8B-B14F-4D97-AF65-F5344CB8AC3E}">
@@ -4359,6 +4647,680 @@
           </a:p>
         </p:txBody>
       </p:sp>
+      <p:sp>
+        <p:nvSpPr>
+          <p:cNvPr id="3" name="Content Placeholder 2">
+            <a:extLst>
+              <a:ext uri="{FF2B5EF4-FFF2-40B4-BE49-F238E27FC236}">
+                <a16:creationId xmlns:a16="http://schemas.microsoft.com/office/drawing/2014/main" id="{1AB30589-8C05-AEC0-1C75-C4A06851FC0A}"/>
+              </a:ext>
+            </a:extLst>
+          </p:cNvPr>
+          <p:cNvSpPr txBox="1">
+            <a:spLocks/>
+          </p:cNvSpPr>
+          <p:nvPr/>
+        </p:nvSpPr>
+        <p:spPr>
+          <a:xfrm>
+            <a:off x="486698" y="1416337"/>
+            <a:ext cx="3920249" cy="2012664"/>
+          </a:xfrm>
+          <a:prstGeom prst="rect">
+            <a:avLst/>
+          </a:prstGeom>
+        </p:spPr>
+        <p:txBody>
+          <a:bodyPr vert="horz" lIns="91440" tIns="45720" rIns="91440" bIns="45720" rtlCol="0">
+            <a:noAutofit/>
+          </a:bodyPr>
+          <a:lstStyle>
+            <a:defPPr>
+              <a:defRPr lang="en-US"/>
+            </a:defPPr>
+            <a:lvl1pPr marL="0" algn="l" defTabSz="457200" rtl="0" eaLnBrk="1" latinLnBrk="0" hangingPunct="1">
+              <a:defRPr sz="1800" kern="1200">
+                <a:solidFill>
+                  <a:schemeClr val="tx1"/>
+                </a:solidFill>
+                <a:latin typeface="+mn-lt"/>
+                <a:ea typeface="+mn-ea"/>
+                <a:cs typeface="+mn-cs"/>
+              </a:defRPr>
+            </a:lvl1pPr>
+            <a:lvl2pPr marL="457200" algn="l" defTabSz="457200" rtl="0" eaLnBrk="1" latinLnBrk="0" hangingPunct="1">
+              <a:defRPr sz="1800" kern="1200">
+                <a:solidFill>
+                  <a:schemeClr val="tx1"/>
+                </a:solidFill>
+                <a:latin typeface="+mn-lt"/>
+                <a:ea typeface="+mn-ea"/>
+                <a:cs typeface="+mn-cs"/>
+              </a:defRPr>
+            </a:lvl2pPr>
+            <a:lvl3pPr marL="914400" algn="l" defTabSz="457200" rtl="0" eaLnBrk="1" latinLnBrk="0" hangingPunct="1">
+              <a:defRPr sz="1800" kern="1200">
+                <a:solidFill>
+                  <a:schemeClr val="tx1"/>
+                </a:solidFill>
+                <a:latin typeface="+mn-lt"/>
+                <a:ea typeface="+mn-ea"/>
+                <a:cs typeface="+mn-cs"/>
+              </a:defRPr>
+            </a:lvl3pPr>
+            <a:lvl4pPr marL="1371600" algn="l" defTabSz="457200" rtl="0" eaLnBrk="1" latinLnBrk="0" hangingPunct="1">
+              <a:defRPr sz="1800" kern="1200">
+                <a:solidFill>
+                  <a:schemeClr val="tx1"/>
+                </a:solidFill>
+                <a:latin typeface="+mn-lt"/>
+                <a:ea typeface="+mn-ea"/>
+                <a:cs typeface="+mn-cs"/>
+              </a:defRPr>
+            </a:lvl4pPr>
+            <a:lvl5pPr marL="1828800" algn="l" defTabSz="457200" rtl="0" eaLnBrk="1" latinLnBrk="0" hangingPunct="1">
+              <a:defRPr sz="1800" kern="1200">
+                <a:solidFill>
+                  <a:schemeClr val="tx1"/>
+                </a:solidFill>
+                <a:latin typeface="+mn-lt"/>
+                <a:ea typeface="+mn-ea"/>
+                <a:cs typeface="+mn-cs"/>
+              </a:defRPr>
+            </a:lvl5pPr>
+            <a:lvl6pPr marL="2286000" algn="l" defTabSz="457200" rtl="0" eaLnBrk="1" latinLnBrk="0" hangingPunct="1">
+              <a:defRPr sz="1800" kern="1200">
+                <a:solidFill>
+                  <a:schemeClr val="tx1"/>
+                </a:solidFill>
+                <a:latin typeface="+mn-lt"/>
+                <a:ea typeface="+mn-ea"/>
+                <a:cs typeface="+mn-cs"/>
+              </a:defRPr>
+            </a:lvl6pPr>
+            <a:lvl7pPr marL="2743200" algn="l" defTabSz="457200" rtl="0" eaLnBrk="1" latinLnBrk="0" hangingPunct="1">
+              <a:defRPr sz="1800" kern="1200">
+                <a:solidFill>
+                  <a:schemeClr val="tx1"/>
+                </a:solidFill>
+                <a:latin typeface="+mn-lt"/>
+                <a:ea typeface="+mn-ea"/>
+                <a:cs typeface="+mn-cs"/>
+              </a:defRPr>
+            </a:lvl7pPr>
+            <a:lvl8pPr marL="3200400" algn="l" defTabSz="457200" rtl="0" eaLnBrk="1" latinLnBrk="0" hangingPunct="1">
+              <a:defRPr sz="1800" kern="1200">
+                <a:solidFill>
+                  <a:schemeClr val="tx1"/>
+                </a:solidFill>
+                <a:latin typeface="+mn-lt"/>
+                <a:ea typeface="+mn-ea"/>
+                <a:cs typeface="+mn-cs"/>
+              </a:defRPr>
+            </a:lvl8pPr>
+            <a:lvl9pPr marL="3657600" algn="l" defTabSz="457200" rtl="0" eaLnBrk="1" latinLnBrk="0" hangingPunct="1">
+              <a:defRPr sz="1800" kern="1200">
+                <a:solidFill>
+                  <a:schemeClr val="tx1"/>
+                </a:solidFill>
+                <a:latin typeface="+mn-lt"/>
+                <a:ea typeface="+mn-ea"/>
+                <a:cs typeface="+mn-cs"/>
+              </a:defRPr>
+            </a:lvl9pPr>
+          </a:lstStyle>
+          <a:p>
+            <a:pPr>
+              <a:buNone/>
+            </a:pPr>
+            <a:r>
+              <a:rPr lang="es-ES" sz="2000" dirty="0"/>
+              <a:t>🔹 </a:t>
+            </a:r>
+            <a:r>
+              <a:rPr lang="es-ES" sz="2000" b="1" dirty="0" err="1"/>
+              <a:t>Detection</a:t>
+            </a:r>
+            <a:r>
+              <a:rPr lang="es-ES" sz="2000" b="1" dirty="0"/>
+              <a:t> &amp; </a:t>
+            </a:r>
+            <a:r>
+              <a:rPr lang="es-ES" sz="2000" b="1" dirty="0" err="1"/>
+              <a:t>Segmentation</a:t>
+            </a:r>
+            <a:br>
+              <a:rPr lang="es-ES" sz="2000" dirty="0"/>
+            </a:br>
+            <a:r>
+              <a:rPr lang="es-ES" sz="2000" dirty="0"/>
+              <a:t>- </a:t>
+            </a:r>
+            <a:r>
+              <a:rPr lang="es-ES" dirty="0"/>
+              <a:t>📦</a:t>
+            </a:r>
+            <a:r>
+              <a:rPr lang="es-ES" sz="2000" dirty="0"/>
+              <a:t> </a:t>
+            </a:r>
+            <a:r>
+              <a:rPr lang="es-ES" sz="2000" dirty="0" err="1"/>
+              <a:t>Precision</a:t>
+            </a:r>
+            <a:r>
+              <a:rPr lang="es-ES" sz="2000" dirty="0"/>
+              <a:t> / </a:t>
+            </a:r>
+            <a:r>
+              <a:rPr lang="es-ES" sz="2000" dirty="0" err="1"/>
+              <a:t>Recall</a:t>
+            </a:r>
+            <a:r>
+              <a:rPr lang="es-ES" sz="2000" dirty="0"/>
+              <a:t> / F1-Score</a:t>
+            </a:r>
+          </a:p>
+          <a:p>
+            <a:r>
+              <a:rPr lang="es-ES" sz="2000" dirty="0"/>
+              <a:t>- </a:t>
+            </a:r>
+            <a:r>
+              <a:rPr lang="es-ES" dirty="0"/>
+              <a:t>🎯</a:t>
+            </a:r>
+            <a:r>
+              <a:rPr lang="es-ES" sz="2000" dirty="0"/>
+              <a:t> </a:t>
+            </a:r>
+            <a:r>
+              <a:rPr lang="es-ES" sz="2000" dirty="0" err="1"/>
+              <a:t>IoU</a:t>
+            </a:r>
+            <a:r>
+              <a:rPr lang="es-ES" sz="2000" dirty="0"/>
+              <a:t> (</a:t>
+            </a:r>
+            <a:r>
+              <a:rPr lang="es-ES" sz="2000" dirty="0" err="1"/>
+              <a:t>overlap</a:t>
+            </a:r>
+            <a:r>
+              <a:rPr lang="es-ES" sz="2000" dirty="0"/>
+              <a:t> </a:t>
+            </a:r>
+            <a:r>
+              <a:rPr lang="es-ES" sz="2000" dirty="0" err="1"/>
+              <a:t>quality</a:t>
+            </a:r>
+            <a:r>
+              <a:rPr lang="es-ES" sz="2000" dirty="0"/>
+              <a:t>)</a:t>
+            </a:r>
+          </a:p>
+          <a:p>
+            <a:r>
+              <a:rPr lang="es-ES" sz="2000" dirty="0"/>
+              <a:t>- </a:t>
+            </a:r>
+            <a:r>
+              <a:rPr lang="es-ES" dirty="0"/>
+              <a:t>📊</a:t>
+            </a:r>
+            <a:r>
+              <a:rPr lang="es-ES" sz="2000" dirty="0"/>
+              <a:t> AP / </a:t>
+            </a:r>
+            <a:r>
+              <a:rPr lang="es-ES" sz="2000" dirty="0" err="1"/>
+              <a:t>mAP</a:t>
+            </a:r>
+            <a:r>
+              <a:rPr lang="es-ES" sz="2000" dirty="0"/>
+              <a:t> (</a:t>
+            </a:r>
+            <a:r>
+              <a:rPr lang="es-ES" sz="2000" dirty="0" err="1"/>
+              <a:t>overall</a:t>
+            </a:r>
+            <a:r>
+              <a:rPr lang="es-ES" sz="2000" dirty="0"/>
+              <a:t> </a:t>
+            </a:r>
+            <a:r>
+              <a:rPr lang="es-ES" sz="2000" dirty="0" err="1"/>
+              <a:t>detection</a:t>
+            </a:r>
+            <a:r>
+              <a:rPr lang="es-ES" sz="2000" dirty="0"/>
+              <a:t> performance)</a:t>
+            </a:r>
+          </a:p>
+          <a:p>
+            <a:pPr>
+              <a:buNone/>
+            </a:pPr>
+            <a:endParaRPr lang="es-ES" sz="1600" noProof="0" dirty="0">
+              <a:latin typeface="Trebuchet MS" panose="020B0603020202020204" pitchFamily="34" charset="0"/>
+            </a:endParaRPr>
+          </a:p>
+          <a:p>
+            <a:pPr algn="just"/>
+            <a:endParaRPr lang="es-ES" sz="1600" noProof="0" dirty="0">
+              <a:latin typeface="Trebuchet MS" panose="020B0603020202020204" pitchFamily="34" charset="0"/>
+            </a:endParaRPr>
+          </a:p>
+          <a:p>
+            <a:pPr marL="285750" indent="-285750" algn="just">
+              <a:buFont typeface="Arial" panose="020B0604020202020204" pitchFamily="34" charset="0"/>
+              <a:buChar char="•"/>
+            </a:pPr>
+            <a:endParaRPr lang="es-ES" sz="900" noProof="0" dirty="0">
+              <a:latin typeface="Trebuchet MS" panose="020B0603020202020204" pitchFamily="34" charset="0"/>
+            </a:endParaRPr>
+          </a:p>
+        </p:txBody>
+      </p:sp>
+      <p:sp>
+        <p:nvSpPr>
+          <p:cNvPr id="4" name="Content Placeholder 2">
+            <a:extLst>
+              <a:ext uri="{FF2B5EF4-FFF2-40B4-BE49-F238E27FC236}">
+                <a16:creationId xmlns:a16="http://schemas.microsoft.com/office/drawing/2014/main" id="{8D2CADF1-86A6-9CD6-A003-031D19C36CA4}"/>
+              </a:ext>
+            </a:extLst>
+          </p:cNvPr>
+          <p:cNvSpPr txBox="1">
+            <a:spLocks/>
+          </p:cNvSpPr>
+          <p:nvPr/>
+        </p:nvSpPr>
+        <p:spPr>
+          <a:xfrm>
+            <a:off x="4497001" y="2835841"/>
+            <a:ext cx="3920249" cy="1639178"/>
+          </a:xfrm>
+          <a:prstGeom prst="rect">
+            <a:avLst/>
+          </a:prstGeom>
+        </p:spPr>
+        <p:txBody>
+          <a:bodyPr vert="horz" lIns="91440" tIns="45720" rIns="91440" bIns="45720" rtlCol="0">
+            <a:noAutofit/>
+          </a:bodyPr>
+          <a:lstStyle>
+            <a:defPPr>
+              <a:defRPr lang="en-US"/>
+            </a:defPPr>
+            <a:lvl1pPr marL="0" algn="l" defTabSz="457200" rtl="0" eaLnBrk="1" latinLnBrk="0" hangingPunct="1">
+              <a:defRPr sz="1800" kern="1200">
+                <a:solidFill>
+                  <a:schemeClr val="tx1"/>
+                </a:solidFill>
+                <a:latin typeface="+mn-lt"/>
+                <a:ea typeface="+mn-ea"/>
+                <a:cs typeface="+mn-cs"/>
+              </a:defRPr>
+            </a:lvl1pPr>
+            <a:lvl2pPr marL="457200" algn="l" defTabSz="457200" rtl="0" eaLnBrk="1" latinLnBrk="0" hangingPunct="1">
+              <a:defRPr sz="1800" kern="1200">
+                <a:solidFill>
+                  <a:schemeClr val="tx1"/>
+                </a:solidFill>
+                <a:latin typeface="+mn-lt"/>
+                <a:ea typeface="+mn-ea"/>
+                <a:cs typeface="+mn-cs"/>
+              </a:defRPr>
+            </a:lvl2pPr>
+            <a:lvl3pPr marL="914400" algn="l" defTabSz="457200" rtl="0" eaLnBrk="1" latinLnBrk="0" hangingPunct="1">
+              <a:defRPr sz="1800" kern="1200">
+                <a:solidFill>
+                  <a:schemeClr val="tx1"/>
+                </a:solidFill>
+                <a:latin typeface="+mn-lt"/>
+                <a:ea typeface="+mn-ea"/>
+                <a:cs typeface="+mn-cs"/>
+              </a:defRPr>
+            </a:lvl3pPr>
+            <a:lvl4pPr marL="1371600" algn="l" defTabSz="457200" rtl="0" eaLnBrk="1" latinLnBrk="0" hangingPunct="1">
+              <a:defRPr sz="1800" kern="1200">
+                <a:solidFill>
+                  <a:schemeClr val="tx1"/>
+                </a:solidFill>
+                <a:latin typeface="+mn-lt"/>
+                <a:ea typeface="+mn-ea"/>
+                <a:cs typeface="+mn-cs"/>
+              </a:defRPr>
+            </a:lvl4pPr>
+            <a:lvl5pPr marL="1828800" algn="l" defTabSz="457200" rtl="0" eaLnBrk="1" latinLnBrk="0" hangingPunct="1">
+              <a:defRPr sz="1800" kern="1200">
+                <a:solidFill>
+                  <a:schemeClr val="tx1"/>
+                </a:solidFill>
+                <a:latin typeface="+mn-lt"/>
+                <a:ea typeface="+mn-ea"/>
+                <a:cs typeface="+mn-cs"/>
+              </a:defRPr>
+            </a:lvl5pPr>
+            <a:lvl6pPr marL="2286000" algn="l" defTabSz="457200" rtl="0" eaLnBrk="1" latinLnBrk="0" hangingPunct="1">
+              <a:defRPr sz="1800" kern="1200">
+                <a:solidFill>
+                  <a:schemeClr val="tx1"/>
+                </a:solidFill>
+                <a:latin typeface="+mn-lt"/>
+                <a:ea typeface="+mn-ea"/>
+                <a:cs typeface="+mn-cs"/>
+              </a:defRPr>
+            </a:lvl6pPr>
+            <a:lvl7pPr marL="2743200" algn="l" defTabSz="457200" rtl="0" eaLnBrk="1" latinLnBrk="0" hangingPunct="1">
+              <a:defRPr sz="1800" kern="1200">
+                <a:solidFill>
+                  <a:schemeClr val="tx1"/>
+                </a:solidFill>
+                <a:latin typeface="+mn-lt"/>
+                <a:ea typeface="+mn-ea"/>
+                <a:cs typeface="+mn-cs"/>
+              </a:defRPr>
+            </a:lvl7pPr>
+            <a:lvl8pPr marL="3200400" algn="l" defTabSz="457200" rtl="0" eaLnBrk="1" latinLnBrk="0" hangingPunct="1">
+              <a:defRPr sz="1800" kern="1200">
+                <a:solidFill>
+                  <a:schemeClr val="tx1"/>
+                </a:solidFill>
+                <a:latin typeface="+mn-lt"/>
+                <a:ea typeface="+mn-ea"/>
+                <a:cs typeface="+mn-cs"/>
+              </a:defRPr>
+            </a:lvl8pPr>
+            <a:lvl9pPr marL="3657600" algn="l" defTabSz="457200" rtl="0" eaLnBrk="1" latinLnBrk="0" hangingPunct="1">
+              <a:defRPr sz="1800" kern="1200">
+                <a:solidFill>
+                  <a:schemeClr val="tx1"/>
+                </a:solidFill>
+                <a:latin typeface="+mn-lt"/>
+                <a:ea typeface="+mn-ea"/>
+                <a:cs typeface="+mn-cs"/>
+              </a:defRPr>
+            </a:lvl9pPr>
+          </a:lstStyle>
+          <a:p>
+            <a:pPr>
+              <a:buNone/>
+            </a:pPr>
+            <a:r>
+              <a:rPr lang="es-ES" sz="2000" dirty="0"/>
+              <a:t>🔹 </a:t>
+            </a:r>
+            <a:r>
+              <a:rPr lang="es-ES" sz="2000" b="1" dirty="0"/>
+              <a:t>Edge </a:t>
+            </a:r>
+            <a:r>
+              <a:rPr lang="es-ES" sz="2000" b="1" dirty="0" err="1"/>
+              <a:t>Detection</a:t>
+            </a:r>
+            <a:br>
+              <a:rPr lang="es-ES" sz="2000" dirty="0"/>
+            </a:br>
+            <a:r>
+              <a:rPr lang="es-ES" sz="2000" dirty="0"/>
+              <a:t>- </a:t>
+            </a:r>
+            <a:r>
+              <a:rPr lang="es-ES" dirty="0"/>
+              <a:t>📈</a:t>
+            </a:r>
+            <a:r>
+              <a:rPr lang="es-ES" sz="2000" dirty="0"/>
+              <a:t> </a:t>
+            </a:r>
+            <a:r>
+              <a:rPr lang="es-ES" sz="2000" dirty="0" err="1"/>
+              <a:t>Precison-Recall</a:t>
+            </a:r>
+            <a:r>
+              <a:rPr lang="es-ES" sz="2000" dirty="0"/>
+              <a:t> Curve</a:t>
+            </a:r>
+          </a:p>
+          <a:p>
+            <a:pPr>
+              <a:buNone/>
+            </a:pPr>
+            <a:r>
+              <a:rPr lang="es-ES" sz="2000" noProof="0" dirty="0">
+                <a:latin typeface="Trebuchet MS" panose="020B0603020202020204" pitchFamily="34" charset="0"/>
+              </a:rPr>
+              <a:t>- </a:t>
+            </a:r>
+            <a:r>
+              <a:rPr lang="es-ES" dirty="0"/>
+              <a:t>📏</a:t>
+            </a:r>
+            <a:r>
+              <a:rPr lang="es-ES" sz="2000" dirty="0"/>
+              <a:t> </a:t>
+            </a:r>
+            <a:r>
+              <a:rPr lang="es-ES" sz="2000" noProof="0" dirty="0">
+                <a:latin typeface="Trebuchet MS" panose="020B0603020202020204" pitchFamily="34" charset="0"/>
+              </a:rPr>
+              <a:t>FOM (Edge </a:t>
+            </a:r>
+            <a:r>
+              <a:rPr lang="es-ES" sz="2000" noProof="0" dirty="0" err="1">
+                <a:latin typeface="Trebuchet MS" panose="020B0603020202020204" pitchFamily="34" charset="0"/>
+              </a:rPr>
+              <a:t>accuracy</a:t>
+            </a:r>
+            <a:r>
+              <a:rPr lang="es-ES" sz="2000" noProof="0" dirty="0">
+                <a:latin typeface="Trebuchet MS" panose="020B0603020202020204" pitchFamily="34" charset="0"/>
+              </a:rPr>
+              <a:t>)</a:t>
+            </a:r>
+            <a:endParaRPr lang="es-ES" sz="1600" noProof="0" dirty="0">
+              <a:latin typeface="Trebuchet MS" panose="020B0603020202020204" pitchFamily="34" charset="0"/>
+            </a:endParaRPr>
+          </a:p>
+          <a:p>
+            <a:pPr marL="285750" indent="-285750" algn="just">
+              <a:buFont typeface="Arial" panose="020B0604020202020204" pitchFamily="34" charset="0"/>
+              <a:buChar char="•"/>
+            </a:pPr>
+            <a:endParaRPr lang="es-ES" sz="900" noProof="0" dirty="0">
+              <a:latin typeface="Trebuchet MS" panose="020B0603020202020204" pitchFamily="34" charset="0"/>
+            </a:endParaRPr>
+          </a:p>
+        </p:txBody>
+      </p:sp>
+      <p:sp>
+        <p:nvSpPr>
+          <p:cNvPr id="5" name="Content Placeholder 2">
+            <a:extLst>
+              <a:ext uri="{FF2B5EF4-FFF2-40B4-BE49-F238E27FC236}">
+                <a16:creationId xmlns:a16="http://schemas.microsoft.com/office/drawing/2014/main" id="{18B06AEC-8D2C-DD00-AF90-35FAD079210B}"/>
+              </a:ext>
+            </a:extLst>
+          </p:cNvPr>
+          <p:cNvSpPr txBox="1">
+            <a:spLocks/>
+          </p:cNvSpPr>
+          <p:nvPr/>
+        </p:nvSpPr>
+        <p:spPr>
+          <a:xfrm>
+            <a:off x="457200" y="3802485"/>
+            <a:ext cx="3920249" cy="1639178"/>
+          </a:xfrm>
+          <a:prstGeom prst="rect">
+            <a:avLst/>
+          </a:prstGeom>
+        </p:spPr>
+        <p:txBody>
+          <a:bodyPr vert="horz" lIns="91440" tIns="45720" rIns="91440" bIns="45720" rtlCol="0">
+            <a:noAutofit/>
+          </a:bodyPr>
+          <a:lstStyle>
+            <a:defPPr>
+              <a:defRPr lang="en-US"/>
+            </a:defPPr>
+            <a:lvl1pPr marL="0" algn="l" defTabSz="457200" rtl="0" eaLnBrk="1" latinLnBrk="0" hangingPunct="1">
+              <a:defRPr sz="1800" kern="1200">
+                <a:solidFill>
+                  <a:schemeClr val="tx1"/>
+                </a:solidFill>
+                <a:latin typeface="+mn-lt"/>
+                <a:ea typeface="+mn-ea"/>
+                <a:cs typeface="+mn-cs"/>
+              </a:defRPr>
+            </a:lvl1pPr>
+            <a:lvl2pPr marL="457200" algn="l" defTabSz="457200" rtl="0" eaLnBrk="1" latinLnBrk="0" hangingPunct="1">
+              <a:defRPr sz="1800" kern="1200">
+                <a:solidFill>
+                  <a:schemeClr val="tx1"/>
+                </a:solidFill>
+                <a:latin typeface="+mn-lt"/>
+                <a:ea typeface="+mn-ea"/>
+                <a:cs typeface="+mn-cs"/>
+              </a:defRPr>
+            </a:lvl2pPr>
+            <a:lvl3pPr marL="914400" algn="l" defTabSz="457200" rtl="0" eaLnBrk="1" latinLnBrk="0" hangingPunct="1">
+              <a:defRPr sz="1800" kern="1200">
+                <a:solidFill>
+                  <a:schemeClr val="tx1"/>
+                </a:solidFill>
+                <a:latin typeface="+mn-lt"/>
+                <a:ea typeface="+mn-ea"/>
+                <a:cs typeface="+mn-cs"/>
+              </a:defRPr>
+            </a:lvl3pPr>
+            <a:lvl4pPr marL="1371600" algn="l" defTabSz="457200" rtl="0" eaLnBrk="1" latinLnBrk="0" hangingPunct="1">
+              <a:defRPr sz="1800" kern="1200">
+                <a:solidFill>
+                  <a:schemeClr val="tx1"/>
+                </a:solidFill>
+                <a:latin typeface="+mn-lt"/>
+                <a:ea typeface="+mn-ea"/>
+                <a:cs typeface="+mn-cs"/>
+              </a:defRPr>
+            </a:lvl4pPr>
+            <a:lvl5pPr marL="1828800" algn="l" defTabSz="457200" rtl="0" eaLnBrk="1" latinLnBrk="0" hangingPunct="1">
+              <a:defRPr sz="1800" kern="1200">
+                <a:solidFill>
+                  <a:schemeClr val="tx1"/>
+                </a:solidFill>
+                <a:latin typeface="+mn-lt"/>
+                <a:ea typeface="+mn-ea"/>
+                <a:cs typeface="+mn-cs"/>
+              </a:defRPr>
+            </a:lvl5pPr>
+            <a:lvl6pPr marL="2286000" algn="l" defTabSz="457200" rtl="0" eaLnBrk="1" latinLnBrk="0" hangingPunct="1">
+              <a:defRPr sz="1800" kern="1200">
+                <a:solidFill>
+                  <a:schemeClr val="tx1"/>
+                </a:solidFill>
+                <a:latin typeface="+mn-lt"/>
+                <a:ea typeface="+mn-ea"/>
+                <a:cs typeface="+mn-cs"/>
+              </a:defRPr>
+            </a:lvl6pPr>
+            <a:lvl7pPr marL="2743200" algn="l" defTabSz="457200" rtl="0" eaLnBrk="1" latinLnBrk="0" hangingPunct="1">
+              <a:defRPr sz="1800" kern="1200">
+                <a:solidFill>
+                  <a:schemeClr val="tx1"/>
+                </a:solidFill>
+                <a:latin typeface="+mn-lt"/>
+                <a:ea typeface="+mn-ea"/>
+                <a:cs typeface="+mn-cs"/>
+              </a:defRPr>
+            </a:lvl7pPr>
+            <a:lvl8pPr marL="3200400" algn="l" defTabSz="457200" rtl="0" eaLnBrk="1" latinLnBrk="0" hangingPunct="1">
+              <a:defRPr sz="1800" kern="1200">
+                <a:solidFill>
+                  <a:schemeClr val="tx1"/>
+                </a:solidFill>
+                <a:latin typeface="+mn-lt"/>
+                <a:ea typeface="+mn-ea"/>
+                <a:cs typeface="+mn-cs"/>
+              </a:defRPr>
+            </a:lvl8pPr>
+            <a:lvl9pPr marL="3657600" algn="l" defTabSz="457200" rtl="0" eaLnBrk="1" latinLnBrk="0" hangingPunct="1">
+              <a:defRPr sz="1800" kern="1200">
+                <a:solidFill>
+                  <a:schemeClr val="tx1"/>
+                </a:solidFill>
+                <a:latin typeface="+mn-lt"/>
+                <a:ea typeface="+mn-ea"/>
+                <a:cs typeface="+mn-cs"/>
+              </a:defRPr>
+            </a:lvl9pPr>
+          </a:lstStyle>
+          <a:p>
+            <a:pPr>
+              <a:buNone/>
+            </a:pPr>
+            <a:r>
+              <a:rPr lang="es-ES" sz="2000" dirty="0"/>
+              <a:t>🔹 </a:t>
+            </a:r>
+            <a:r>
+              <a:rPr lang="es-ES" sz="2000" b="1" dirty="0" err="1"/>
+              <a:t>Measurement</a:t>
+            </a:r>
+            <a:br>
+              <a:rPr lang="es-ES" sz="2000" dirty="0"/>
+            </a:br>
+            <a:r>
+              <a:rPr lang="es-ES" sz="2000" dirty="0"/>
+              <a:t>- </a:t>
+            </a:r>
+            <a:r>
+              <a:rPr lang="es-ES" dirty="0"/>
+              <a:t>📉</a:t>
+            </a:r>
+            <a:r>
+              <a:rPr lang="es-ES" sz="2000" dirty="0"/>
+              <a:t> RMSE / MAE</a:t>
+            </a:r>
+          </a:p>
+          <a:p>
+            <a:pPr>
+              <a:buNone/>
+            </a:pPr>
+            <a:r>
+              <a:rPr lang="es-ES" sz="2000" dirty="0"/>
+              <a:t>- </a:t>
+            </a:r>
+            <a:r>
+              <a:rPr lang="es-ES" dirty="0"/>
+              <a:t>📏</a:t>
+            </a:r>
+            <a:r>
+              <a:rPr lang="es-ES" sz="2000" dirty="0"/>
+              <a:t> </a:t>
+            </a:r>
+            <a:r>
+              <a:rPr lang="es-ES" sz="2000" dirty="0" err="1"/>
+              <a:t>Distance</a:t>
+            </a:r>
+            <a:r>
+              <a:rPr lang="es-ES" sz="2000" dirty="0"/>
+              <a:t> Error</a:t>
+            </a:r>
+          </a:p>
+          <a:p>
+            <a:pPr marL="285750" indent="-285750" algn="just">
+              <a:buFont typeface="Arial" panose="020B0604020202020204" pitchFamily="34" charset="0"/>
+              <a:buChar char="•"/>
+            </a:pPr>
+            <a:endParaRPr lang="es-ES" sz="900" noProof="0" dirty="0">
+              <a:latin typeface="Trebuchet MS" panose="020B0603020202020204" pitchFamily="34" charset="0"/>
+            </a:endParaRPr>
+          </a:p>
+        </p:txBody>
+      </p:sp>
     </p:spTree>
     <p:extLst>
       <p:ext uri="{BB962C8B-B14F-4D97-AF65-F5344CB8AC3E}">
@@ -4447,14 +5409,14 @@
           </a:ln>
           <a:extLst>
             <a:ext uri="{909E8E84-426E-40dd-AFC4-6F175D3DCCD1}">
-              <a14:hiddenFill xmlns:a14="http://schemas.microsoft.com/office/drawing/2010/main" xmlns="">
+              <a14:hiddenFill xmlns="" xmlns:a14="http://schemas.microsoft.com/office/drawing/2010/main">
                 <a:solidFill>
                   <a:srgbClr val="FFFFFF"/>
                 </a:solidFill>
               </a14:hiddenFill>
             </a:ext>
             <a:ext uri="{91240B29-F687-4f45-9708-019B960494DF}">
-              <a14:hiddenLine xmlns:a14="http://schemas.microsoft.com/office/drawing/2010/main" xmlns="" w="9525">
+              <a14:hiddenLine xmlns="" xmlns:a14="http://schemas.microsoft.com/office/drawing/2010/main" w="9525">
                 <a:solidFill>
                   <a:srgbClr val="000000"/>
                 </a:solidFill>
@@ -4876,14 +5838,14 @@
           </a:ln>
           <a:extLst>
             <a:ext uri="{909E8E84-426E-40dd-AFC4-6F175D3DCCD1}">
-              <a14:hiddenFill xmlns="" xmlns:a14="http://schemas.microsoft.com/office/drawing/2010/main">
+              <a14:hiddenFill xmlns:a14="http://schemas.microsoft.com/office/drawing/2010/main" xmlns="">
                 <a:solidFill>
                   <a:srgbClr val="FFFFFF"/>
                 </a:solidFill>
               </a14:hiddenFill>
             </a:ext>
             <a:ext uri="{91240B29-F687-4f45-9708-019B960494DF}">
-              <a14:hiddenLine xmlns="" xmlns:a14="http://schemas.microsoft.com/office/drawing/2010/main" w="9525">
+              <a14:hiddenLine xmlns:a14="http://schemas.microsoft.com/office/drawing/2010/main" xmlns="" w="9525">
                 <a:solidFill>
                   <a:srgbClr val="000000"/>
                 </a:solidFill>
@@ -5338,14 +6300,14 @@
           </a:ln>
           <a:extLst>
             <a:ext uri="{909E8E84-426E-40dd-AFC4-6F175D3DCCD1}">
-              <a14:hiddenFill xmlns:a14="http://schemas.microsoft.com/office/drawing/2010/main" xmlns="">
+              <a14:hiddenFill xmlns="" xmlns:a14="http://schemas.microsoft.com/office/drawing/2010/main">
                 <a:solidFill>
                   <a:srgbClr val="FFFFFF"/>
                 </a:solidFill>
               </a14:hiddenFill>
             </a:ext>
             <a:ext uri="{91240B29-F687-4f45-9708-019B960494DF}">
-              <a14:hiddenLine xmlns:a14="http://schemas.microsoft.com/office/drawing/2010/main" xmlns="" w="9525">
+              <a14:hiddenLine xmlns="" xmlns:a14="http://schemas.microsoft.com/office/drawing/2010/main" w="9525">
                 <a:solidFill>
                   <a:srgbClr val="000000"/>
                 </a:solidFill>
@@ -5583,14 +6545,14 @@
           </a:ln>
           <a:extLst>
             <a:ext uri="{909E8E84-426E-40dd-AFC4-6F175D3DCCD1}">
-              <a14:hiddenFill xmlns:a14="http://schemas.microsoft.com/office/drawing/2010/main" xmlns="">
+              <a14:hiddenFill xmlns="" xmlns:a14="http://schemas.microsoft.com/office/drawing/2010/main">
                 <a:solidFill>
                   <a:srgbClr val="FFFFFF"/>
                 </a:solidFill>
               </a14:hiddenFill>
             </a:ext>
             <a:ext uri="{91240B29-F687-4f45-9708-019B960494DF}">
-              <a14:hiddenLine xmlns:a14="http://schemas.microsoft.com/office/drawing/2010/main" xmlns="" w="9525">
+              <a14:hiddenLine xmlns="" xmlns:a14="http://schemas.microsoft.com/office/drawing/2010/main" w="9525">
                 <a:solidFill>
                   <a:srgbClr val="000000"/>
                 </a:solidFill>
@@ -5843,14 +6805,14 @@
           </a:ln>
           <a:extLst>
             <a:ext uri="{909E8E84-426E-40dd-AFC4-6F175D3DCCD1}">
-              <a14:hiddenFill xmlns="" xmlns:a14="http://schemas.microsoft.com/office/drawing/2010/main">
+              <a14:hiddenFill xmlns:a14="http://schemas.microsoft.com/office/drawing/2010/main" xmlns="">
                 <a:solidFill>
                   <a:srgbClr val="FFFFFF"/>
                 </a:solidFill>
               </a14:hiddenFill>
             </a:ext>
             <a:ext uri="{91240B29-F687-4f45-9708-019B960494DF}">
-              <a14:hiddenLine xmlns="" xmlns:a14="http://schemas.microsoft.com/office/drawing/2010/main" w="9525">
+              <a14:hiddenLine xmlns:a14="http://schemas.microsoft.com/office/drawing/2010/main" xmlns="" w="9525">
                 <a:solidFill>
                   <a:srgbClr val="000000"/>
                 </a:solidFill>
@@ -5968,14 +6930,14 @@
             </a:ln>
             <a:extLst>
               <a:ext uri="{909E8E84-426E-40dd-AFC4-6F175D3DCCD1}">
-                <a14:hiddenFill xmlns="" xmlns:a14="http://schemas.microsoft.com/office/drawing/2010/main">
+                <a14:hiddenFill xmlns:a14="http://schemas.microsoft.com/office/drawing/2010/main" xmlns="">
                   <a:solidFill>
                     <a:srgbClr val="FFFFFF"/>
                   </a:solidFill>
                 </a14:hiddenFill>
               </a:ext>
               <a:ext uri="{91240B29-F687-4f45-9708-019B960494DF}">
-                <a14:hiddenLine xmlns="" xmlns:a14="http://schemas.microsoft.com/office/drawing/2010/main" w="9525">
+                <a14:hiddenLine xmlns:a14="http://schemas.microsoft.com/office/drawing/2010/main" xmlns="" w="9525">
                   <a:solidFill>
                     <a:srgbClr val="000000"/>
                   </a:solidFill>
@@ -6094,14 +7056,14 @@
             </a:ln>
             <a:extLst>
               <a:ext uri="{909E8E84-426E-40dd-AFC4-6F175D3DCCD1}">
-                <a14:hiddenFill xmlns="" xmlns:a14="http://schemas.microsoft.com/office/drawing/2010/main">
+                <a14:hiddenFill xmlns:a14="http://schemas.microsoft.com/office/drawing/2010/main" xmlns="">
                   <a:solidFill>
                     <a:srgbClr val="FFFFFF"/>
                   </a:solidFill>
                 </a14:hiddenFill>
               </a:ext>
               <a:ext uri="{91240B29-F687-4f45-9708-019B960494DF}">
-                <a14:hiddenLine xmlns="" xmlns:a14="http://schemas.microsoft.com/office/drawing/2010/main" w="9525">
+                <a14:hiddenLine xmlns:a14="http://schemas.microsoft.com/office/drawing/2010/main" xmlns="" w="9525">
                   <a:solidFill>
                     <a:srgbClr val="000000"/>
                   </a:solidFill>
@@ -6229,14 +7191,14 @@
             </a:ln>
             <a:extLst>
               <a:ext uri="{909E8E84-426E-40dd-AFC4-6F175D3DCCD1}">
-                <a14:hiddenFill xmlns="" xmlns:a14="http://schemas.microsoft.com/office/drawing/2010/main">
+                <a14:hiddenFill xmlns:a14="http://schemas.microsoft.com/office/drawing/2010/main" xmlns="">
                   <a:solidFill>
                     <a:srgbClr val="FFFFFF"/>
                   </a:solidFill>
                 </a14:hiddenFill>
               </a:ext>
               <a:ext uri="{91240B29-F687-4f45-9708-019B960494DF}">
-                <a14:hiddenLine xmlns="" xmlns:a14="http://schemas.microsoft.com/office/drawing/2010/main" w="9525">
+                <a14:hiddenLine xmlns:a14="http://schemas.microsoft.com/office/drawing/2010/main" xmlns="" w="9525">
                   <a:solidFill>
                     <a:srgbClr val="000000"/>
                   </a:solidFill>
@@ -6359,14 +7321,14 @@
             </a:ln>
             <a:extLst>
               <a:ext uri="{909E8E84-426E-40dd-AFC4-6F175D3DCCD1}">
-                <a14:hiddenFill xmlns="" xmlns:a14="http://schemas.microsoft.com/office/drawing/2010/main">
+                <a14:hiddenFill xmlns:a14="http://schemas.microsoft.com/office/drawing/2010/main" xmlns="">
                   <a:solidFill>
                     <a:srgbClr val="FFFFFF"/>
                   </a:solidFill>
                 </a14:hiddenFill>
               </a:ext>
               <a:ext uri="{91240B29-F687-4f45-9708-019B960494DF}">
-                <a14:hiddenLine xmlns="" xmlns:a14="http://schemas.microsoft.com/office/drawing/2010/main" w="9525">
+                <a14:hiddenLine xmlns:a14="http://schemas.microsoft.com/office/drawing/2010/main" xmlns="" w="9525">
                   <a:solidFill>
                     <a:srgbClr val="000000"/>
                   </a:solidFill>
@@ -6485,14 +7447,14 @@
             </a:ln>
             <a:extLst>
               <a:ext uri="{909E8E84-426E-40dd-AFC4-6F175D3DCCD1}">
-                <a14:hiddenFill xmlns="" xmlns:a14="http://schemas.microsoft.com/office/drawing/2010/main">
+                <a14:hiddenFill xmlns:a14="http://schemas.microsoft.com/office/drawing/2010/main" xmlns="">
                   <a:solidFill>
                     <a:srgbClr val="FFFFFF"/>
                   </a:solidFill>
                 </a14:hiddenFill>
               </a:ext>
               <a:ext uri="{91240B29-F687-4f45-9708-019B960494DF}">
-                <a14:hiddenLine xmlns="" xmlns:a14="http://schemas.microsoft.com/office/drawing/2010/main" w="9525">
+                <a14:hiddenLine xmlns:a14="http://schemas.microsoft.com/office/drawing/2010/main" xmlns="" w="9525">
                   <a:solidFill>
                     <a:srgbClr val="000000"/>
                   </a:solidFill>

--- a/docs/GIDIA_VA_Course_Project_Presentations.pptx
+++ b/docs/GIDIA_VA_Course_Project_Presentations.pptx
@@ -5,10 +5,10 @@
     <p:sldMasterId id="2147483648" r:id="rId1"/>
   </p:sldMasterIdLst>
   <p:notesMasterIdLst>
-    <p:notesMasterId r:id="rId18"/>
+    <p:notesMasterId r:id="rId20"/>
   </p:notesMasterIdLst>
   <p:handoutMasterIdLst>
-    <p:handoutMasterId r:id="rId19"/>
+    <p:handoutMasterId r:id="rId21"/>
   </p:handoutMasterIdLst>
   <p:sldIdLst>
     <p:sldId id="257" r:id="rId2"/>
@@ -26,7 +26,9 @@
     <p:sldId id="416" r:id="rId14"/>
     <p:sldId id="383" r:id="rId15"/>
     <p:sldId id="404" r:id="rId16"/>
-    <p:sldId id="287" r:id="rId17"/>
+    <p:sldId id="417" r:id="rId17"/>
+    <p:sldId id="419" r:id="rId18"/>
+    <p:sldId id="287" r:id="rId19"/>
   </p:sldIdLst>
   <p:sldSz cx="9144000" cy="6858000" type="screen4x3"/>
   <p:notesSz cx="6858000" cy="9144000"/>
@@ -235,7 +237,7 @@
           <a:p>
             <a:fld id="{655DD89B-4A46-4028-8866-1E86EFBC0DEE}" type="datetimeFigureOut">
               <a:rPr lang="es-ES" smtClean="0"/>
-              <a:t>04/04/2026</a:t>
+              <a:t>06/04/2026</a:t>
             </a:fld>
             <a:endParaRPr lang="es-ES"/>
           </a:p>
@@ -400,7 +402,7 @@
           <a:p>
             <a:fld id="{C19EA62F-3719-438F-A310-6434B1FA2AEA}" type="datetimeFigureOut">
               <a:rPr lang="es-ES" smtClean="0"/>
-              <a:t>04/04/2026</a:t>
+              <a:t>06/04/2026</a:t>
             </a:fld>
             <a:endParaRPr lang="es-ES"/>
           </a:p>
@@ -1165,6 +1167,236 @@
     <p:extLst>
       <p:ext uri="{BB962C8B-B14F-4D97-AF65-F5344CB8AC3E}">
         <p14:creationId xmlns:p14="http://schemas.microsoft.com/office/powerpoint/2010/main" val="665325235"/>
+      </p:ext>
+    </p:extLst>
+  </p:cSld>
+  <p:clrMapOvr>
+    <a:masterClrMapping/>
+  </p:clrMapOvr>
+</p:notes>
+</file>
+
+<file path=ppt/notesSlides/notesSlide14.xml><?xml version="1.0" encoding="utf-8"?>
+<p:notes xmlns:a="http://schemas.openxmlformats.org/drawingml/2006/main" xmlns:r="http://schemas.openxmlformats.org/officeDocument/2006/relationships" xmlns:p="http://schemas.openxmlformats.org/presentationml/2006/main">
+  <p:cSld>
+    <p:spTree>
+      <p:nvGrpSpPr>
+        <p:cNvPr id="1" name="">
+          <a:extLst>
+            <a:ext uri="{FF2B5EF4-FFF2-40B4-BE49-F238E27FC236}">
+              <a16:creationId xmlns:a16="http://schemas.microsoft.com/office/drawing/2014/main" id="{51E0D285-10E2-9119-E602-49B3A21DB304}"/>
+            </a:ext>
+          </a:extLst>
+        </p:cNvPr>
+        <p:cNvGrpSpPr/>
+        <p:nvPr/>
+      </p:nvGrpSpPr>
+      <p:grpSpPr>
+        <a:xfrm>
+          <a:off x="0" y="0"/>
+          <a:ext cx="0" cy="0"/>
+          <a:chOff x="0" y="0"/>
+          <a:chExt cx="0" cy="0"/>
+        </a:xfrm>
+      </p:grpSpPr>
+      <p:sp>
+        <p:nvSpPr>
+          <p:cNvPr id="2" name="Marcador de imagen de diapositiva 1">
+            <a:extLst>
+              <a:ext uri="{FF2B5EF4-FFF2-40B4-BE49-F238E27FC236}">
+                <a16:creationId xmlns:a16="http://schemas.microsoft.com/office/drawing/2014/main" id="{61DC83E1-DBB7-D310-57FC-69C9B3DFE68D}"/>
+              </a:ext>
+            </a:extLst>
+          </p:cNvPr>
+          <p:cNvSpPr>
+            <a:spLocks noGrp="1" noRot="1" noChangeAspect="1"/>
+          </p:cNvSpPr>
+          <p:nvPr>
+            <p:ph type="sldImg"/>
+          </p:nvPr>
+        </p:nvSpPr>
+        <p:spPr/>
+        <p:txBody>
+          <a:bodyPr/>
+          <a:lstStyle/>
+          <a:p>
+            <a:endParaRPr lang="es-ES" dirty="0"/>
+          </a:p>
+        </p:txBody>
+      </p:sp>
+      <p:sp>
+        <p:nvSpPr>
+          <p:cNvPr id="3" name="Marcador de notas 2">
+            <a:extLst>
+              <a:ext uri="{FF2B5EF4-FFF2-40B4-BE49-F238E27FC236}">
+                <a16:creationId xmlns:a16="http://schemas.microsoft.com/office/drawing/2014/main" id="{BDA9754C-6E69-7AF6-F056-E7B1ACAE682F}"/>
+              </a:ext>
+            </a:extLst>
+          </p:cNvPr>
+          <p:cNvSpPr>
+            <a:spLocks noGrp="1"/>
+          </p:cNvSpPr>
+          <p:nvPr>
+            <p:ph type="body" idx="1"/>
+          </p:nvPr>
+        </p:nvSpPr>
+        <p:spPr/>
+        <p:txBody>
+          <a:bodyPr/>
+          <a:lstStyle/>
+          <a:p>
+            <a:endParaRPr lang="es-ES" dirty="0"/>
+          </a:p>
+        </p:txBody>
+      </p:sp>
+      <p:sp>
+        <p:nvSpPr>
+          <p:cNvPr id="4" name="Marcador de número de diapositiva 3">
+            <a:extLst>
+              <a:ext uri="{FF2B5EF4-FFF2-40B4-BE49-F238E27FC236}">
+                <a16:creationId xmlns:a16="http://schemas.microsoft.com/office/drawing/2014/main" id="{8EC3B433-C701-2D43-B964-72586B3E8135}"/>
+              </a:ext>
+            </a:extLst>
+          </p:cNvPr>
+          <p:cNvSpPr>
+            <a:spLocks noGrp="1"/>
+          </p:cNvSpPr>
+          <p:nvPr>
+            <p:ph type="sldNum" sz="quarter" idx="10"/>
+          </p:nvPr>
+        </p:nvSpPr>
+        <p:spPr/>
+        <p:txBody>
+          <a:bodyPr/>
+          <a:lstStyle/>
+          <a:p>
+            <a:fld id="{05D135E5-457A-4183-A722-09BD01DC1252}" type="slidenum">
+              <a:rPr lang="es-ES" smtClean="0"/>
+              <a:t>16</a:t>
+            </a:fld>
+            <a:endParaRPr lang="es-ES" dirty="0"/>
+          </a:p>
+        </p:txBody>
+      </p:sp>
+    </p:spTree>
+    <p:extLst>
+      <p:ext uri="{BB962C8B-B14F-4D97-AF65-F5344CB8AC3E}">
+        <p14:creationId xmlns:p14="http://schemas.microsoft.com/office/powerpoint/2010/main" val="1140312576"/>
+      </p:ext>
+    </p:extLst>
+  </p:cSld>
+  <p:clrMapOvr>
+    <a:masterClrMapping/>
+  </p:clrMapOvr>
+</p:notes>
+</file>
+
+<file path=ppt/notesSlides/notesSlide15.xml><?xml version="1.0" encoding="utf-8"?>
+<p:notes xmlns:a="http://schemas.openxmlformats.org/drawingml/2006/main" xmlns:r="http://schemas.openxmlformats.org/officeDocument/2006/relationships" xmlns:p="http://schemas.openxmlformats.org/presentationml/2006/main">
+  <p:cSld>
+    <p:spTree>
+      <p:nvGrpSpPr>
+        <p:cNvPr id="1" name="">
+          <a:extLst>
+            <a:ext uri="{FF2B5EF4-FFF2-40B4-BE49-F238E27FC236}">
+              <a16:creationId xmlns:a16="http://schemas.microsoft.com/office/drawing/2014/main" id="{B6C6F89F-82DF-7B87-14A5-74E9461CE4C9}"/>
+            </a:ext>
+          </a:extLst>
+        </p:cNvPr>
+        <p:cNvGrpSpPr/>
+        <p:nvPr/>
+      </p:nvGrpSpPr>
+      <p:grpSpPr>
+        <a:xfrm>
+          <a:off x="0" y="0"/>
+          <a:ext cx="0" cy="0"/>
+          <a:chOff x="0" y="0"/>
+          <a:chExt cx="0" cy="0"/>
+        </a:xfrm>
+      </p:grpSpPr>
+      <p:sp>
+        <p:nvSpPr>
+          <p:cNvPr id="2" name="Marcador de imagen de diapositiva 1">
+            <a:extLst>
+              <a:ext uri="{FF2B5EF4-FFF2-40B4-BE49-F238E27FC236}">
+                <a16:creationId xmlns:a16="http://schemas.microsoft.com/office/drawing/2014/main" id="{79ECC67E-3429-8BF3-1853-63448974E11A}"/>
+              </a:ext>
+            </a:extLst>
+          </p:cNvPr>
+          <p:cNvSpPr>
+            <a:spLocks noGrp="1" noRot="1" noChangeAspect="1"/>
+          </p:cNvSpPr>
+          <p:nvPr>
+            <p:ph type="sldImg"/>
+          </p:nvPr>
+        </p:nvSpPr>
+        <p:spPr/>
+        <p:txBody>
+          <a:bodyPr/>
+          <a:lstStyle/>
+          <a:p>
+            <a:endParaRPr lang="es-ES" dirty="0"/>
+          </a:p>
+        </p:txBody>
+      </p:sp>
+      <p:sp>
+        <p:nvSpPr>
+          <p:cNvPr id="3" name="Marcador de notas 2">
+            <a:extLst>
+              <a:ext uri="{FF2B5EF4-FFF2-40B4-BE49-F238E27FC236}">
+                <a16:creationId xmlns:a16="http://schemas.microsoft.com/office/drawing/2014/main" id="{6DDB763E-8A4A-AC8E-7230-20A762155219}"/>
+              </a:ext>
+            </a:extLst>
+          </p:cNvPr>
+          <p:cNvSpPr>
+            <a:spLocks noGrp="1"/>
+          </p:cNvSpPr>
+          <p:nvPr>
+            <p:ph type="body" idx="1"/>
+          </p:nvPr>
+        </p:nvSpPr>
+        <p:spPr/>
+        <p:txBody>
+          <a:bodyPr/>
+          <a:lstStyle/>
+          <a:p>
+            <a:endParaRPr lang="es-ES" dirty="0"/>
+          </a:p>
+        </p:txBody>
+      </p:sp>
+      <p:sp>
+        <p:nvSpPr>
+          <p:cNvPr id="4" name="Marcador de número de diapositiva 3">
+            <a:extLst>
+              <a:ext uri="{FF2B5EF4-FFF2-40B4-BE49-F238E27FC236}">
+                <a16:creationId xmlns:a16="http://schemas.microsoft.com/office/drawing/2014/main" id="{2448D358-73A8-C199-664A-B3BA6F742EFB}"/>
+              </a:ext>
+            </a:extLst>
+          </p:cNvPr>
+          <p:cNvSpPr>
+            <a:spLocks noGrp="1"/>
+          </p:cNvSpPr>
+          <p:nvPr>
+            <p:ph type="sldNum" sz="quarter" idx="10"/>
+          </p:nvPr>
+        </p:nvSpPr>
+        <p:spPr/>
+        <p:txBody>
+          <a:bodyPr/>
+          <a:lstStyle/>
+          <a:p>
+            <a:fld id="{05D135E5-457A-4183-A722-09BD01DC1252}" type="slidenum">
+              <a:rPr lang="es-ES" smtClean="0"/>
+              <a:t>17</a:t>
+            </a:fld>
+            <a:endParaRPr lang="es-ES" dirty="0"/>
+          </a:p>
+        </p:txBody>
+      </p:sp>
+    </p:spTree>
+    <p:extLst>
+      <p:ext uri="{BB962C8B-B14F-4D97-AF65-F5344CB8AC3E}">
+        <p14:creationId xmlns:p14="http://schemas.microsoft.com/office/powerpoint/2010/main" val="2791876583"/>
       </p:ext>
     </p:extLst>
   </p:cSld>
@@ -3452,11 +3684,15 @@
           <a:lstStyle/>
           <a:p>
             <a:pPr algn="l"/>
-            <a:endParaRPr lang="en-US" dirty="0">
-              <a:solidFill>
-                <a:srgbClr val="FF0000"/>
-              </a:solidFill>
-            </a:endParaRPr>
+            <a:r>
+              <a:rPr lang="en-US" dirty="0">
+                <a:solidFill>
+                  <a:srgbClr val="FF0000"/>
+                </a:solidFill>
+                <a:latin typeface="Trebuchet MS" panose="020B0603020202020204" pitchFamily="34" charset="0"/>
+              </a:rPr>
+              <a:t>Detection, Segmentation and Calibration of Rubber Strips</a:t>
+            </a:r>
           </a:p>
         </p:txBody>
       </p:sp>
@@ -3876,7 +4112,11 @@
             <a:pPr algn="l"/>
             <a:r>
               <a:rPr lang="en-GB" sz="2800" dirty="0"/>
-              <a:t>3. Selected method 03: ZZZZ</a:t>
+              <a:t>3. </a:t>
+            </a:r>
+            <a:r>
+              <a:rPr lang="en-GB" sz="2800" b="1" dirty="0"/>
+              <a:t>Selected method 03: ZZZZ</a:t>
             </a:r>
           </a:p>
         </p:txBody>
@@ -4006,7 +4246,11 @@
             <a:pPr algn="l"/>
             <a:r>
               <a:rPr lang="en-GB" sz="2800" dirty="0"/>
-              <a:t>3. Selected method 04: WWWW</a:t>
+              <a:t>3. </a:t>
+            </a:r>
+            <a:r>
+              <a:rPr lang="en-GB" sz="2800" b="1" dirty="0"/>
+              <a:t>Selected method 04: WWWW</a:t>
             </a:r>
           </a:p>
         </p:txBody>
@@ -4136,7 +4380,15 @@
             <a:pPr algn="l"/>
             <a:r>
               <a:rPr lang="en-GB" sz="2800" dirty="0"/>
-              <a:t>4. Datasets </a:t>
+              <a:t>4. </a:t>
+            </a:r>
+            <a:r>
+              <a:rPr lang="en-GB" sz="2800" b="1" dirty="0"/>
+              <a:t>Datasets</a:t>
+            </a:r>
+            <a:r>
+              <a:rPr lang="en-GB" sz="2800" dirty="0"/>
+              <a:t> </a:t>
             </a:r>
           </a:p>
         </p:txBody>
@@ -4423,38 +4675,6 @@
       </p:pic>
       <p:pic>
         <p:nvPicPr>
-          <p:cNvPr id="17" name="Imagen 16">
-            <a:extLst>
-              <a:ext uri="{FF2B5EF4-FFF2-40B4-BE49-F238E27FC236}">
-                <a16:creationId xmlns:a16="http://schemas.microsoft.com/office/drawing/2014/main" id="{19B3B48B-9993-B496-C19C-444175ABBD00}"/>
-              </a:ext>
-            </a:extLst>
-          </p:cNvPr>
-          <p:cNvPicPr>
-            <a:picLocks noChangeAspect="1"/>
-          </p:cNvPicPr>
-          <p:nvPr/>
-        </p:nvPicPr>
-        <p:blipFill>
-          <a:blip r:embed="rId10">
-            <a:alphaModFix amt="25000"/>
-          </a:blip>
-          <a:stretch>
-            <a:fillRect/>
-          </a:stretch>
-        </p:blipFill>
-        <p:spPr>
-          <a:xfrm>
-            <a:off x="-55714" y="-1283188"/>
-            <a:ext cx="2267266" cy="3505689"/>
-          </a:xfrm>
-          <a:prstGeom prst="rect">
-            <a:avLst/>
-          </a:prstGeom>
-        </p:spPr>
-      </p:pic>
-      <p:pic>
-        <p:nvPicPr>
           <p:cNvPr id="19" name="Imagen 18">
             <a:extLst>
               <a:ext uri="{FF2B5EF4-FFF2-40B4-BE49-F238E27FC236}">
@@ -4468,7 +4688,7 @@
           <p:nvPr/>
         </p:nvPicPr>
         <p:blipFill>
-          <a:blip r:embed="rId11">
+          <a:blip r:embed="rId10">
             <a:alphaModFix amt="25000"/>
           </a:blip>
           <a:stretch>
@@ -4500,7 +4720,7 @@
           <p:nvPr/>
         </p:nvPicPr>
         <p:blipFill>
-          <a:blip r:embed="rId12">
+          <a:blip r:embed="rId11">
             <a:alphaModFix amt="25000"/>
           </a:blip>
           <a:stretch>
@@ -4511,6 +4731,38 @@
           <a:xfrm>
             <a:off x="7155717" y="4896997"/>
             <a:ext cx="3067478" cy="2267266"/>
+          </a:xfrm>
+          <a:prstGeom prst="rect">
+            <a:avLst/>
+          </a:prstGeom>
+        </p:spPr>
+      </p:pic>
+      <p:pic>
+        <p:nvPicPr>
+          <p:cNvPr id="3" name="Imagen 2">
+            <a:extLst>
+              <a:ext uri="{FF2B5EF4-FFF2-40B4-BE49-F238E27FC236}">
+                <a16:creationId xmlns:a16="http://schemas.microsoft.com/office/drawing/2014/main" id="{8DF1DD48-EBCE-957F-3213-3D7391EB2EDB}"/>
+              </a:ext>
+            </a:extLst>
+          </p:cNvPr>
+          <p:cNvPicPr>
+            <a:picLocks noChangeAspect="1"/>
+          </p:cNvPicPr>
+          <p:nvPr/>
+        </p:nvPicPr>
+        <p:blipFill>
+          <a:blip r:embed="rId12">
+            <a:alphaModFix amt="25000"/>
+          </a:blip>
+          <a:stretch>
+            <a:fillRect/>
+          </a:stretch>
+        </p:blipFill>
+        <p:spPr>
+          <a:xfrm>
+            <a:off x="-55714" y="-1283188"/>
+            <a:ext cx="2267266" cy="3505689"/>
           </a:xfrm>
           <a:prstGeom prst="rect">
             <a:avLst/>
@@ -4584,7 +4836,11 @@
             <a:pPr algn="l"/>
             <a:r>
               <a:rPr lang="en-GB" sz="2800" dirty="0"/>
-              <a:t>5. Performance Metrics</a:t>
+              <a:t>5. </a:t>
+            </a:r>
+            <a:r>
+              <a:rPr lang="en-GB" sz="2800" b="1" dirty="0"/>
+              <a:t>Performance Metrics</a:t>
             </a:r>
           </a:p>
         </p:txBody>
@@ -4663,7 +4919,7 @@
         </p:nvSpPr>
         <p:spPr>
           <a:xfrm>
-            <a:off x="486698" y="1416337"/>
+            <a:off x="880351" y="1416336"/>
             <a:ext cx="3920249" cy="2012664"/>
           </a:xfrm>
           <a:prstGeom prst="rect">
@@ -4938,7 +5194,7 @@
         </p:nvSpPr>
         <p:spPr>
           <a:xfrm>
-            <a:off x="4497001" y="2835841"/>
+            <a:off x="4907554" y="3089221"/>
             <a:ext cx="3920249" cy="1639178"/>
           </a:xfrm>
           <a:prstGeom prst="rect">
@@ -5151,7 +5407,7 @@
         </p:nvSpPr>
         <p:spPr>
           <a:xfrm>
-            <a:off x="457200" y="3802485"/>
+            <a:off x="880351" y="3908810"/>
             <a:ext cx="3920249" cy="1639178"/>
           </a:xfrm>
           <a:prstGeom prst="rect">
@@ -5321,6 +5577,174 @@
           </a:p>
         </p:txBody>
       </p:sp>
+      <p:sp>
+        <p:nvSpPr>
+          <p:cNvPr id="6" name="Rectángulo 5">
+            <a:extLst>
+              <a:ext uri="{FF2B5EF4-FFF2-40B4-BE49-F238E27FC236}">
+                <a16:creationId xmlns:a16="http://schemas.microsoft.com/office/drawing/2014/main" id="{C5BA3EA6-4AA0-9D59-FDEB-23377676DED4}"/>
+              </a:ext>
+            </a:extLst>
+          </p:cNvPr>
+          <p:cNvSpPr/>
+          <p:nvPr/>
+        </p:nvSpPr>
+        <p:spPr>
+          <a:xfrm>
+            <a:off x="865660" y="1416336"/>
+            <a:ext cx="3706340" cy="1672885"/>
+          </a:xfrm>
+          <a:prstGeom prst="rect">
+            <a:avLst/>
+          </a:prstGeom>
+          <a:noFill/>
+          <a:ln w="76200" cap="flat" cmpd="sng" algn="ctr">
+            <a:solidFill>
+              <a:srgbClr val="00B050"/>
+            </a:solidFill>
+            <a:prstDash val="solid"/>
+            <a:round/>
+            <a:headEnd type="none" w="med" len="med"/>
+            <a:tailEnd type="none" w="med" len="med"/>
+          </a:ln>
+        </p:spPr>
+        <p:style>
+          <a:lnRef idx="0">
+            <a:scrgbClr r="0" g="0" b="0"/>
+          </a:lnRef>
+          <a:fillRef idx="0">
+            <a:scrgbClr r="0" g="0" b="0"/>
+          </a:fillRef>
+          <a:effectRef idx="0">
+            <a:scrgbClr r="0" g="0" b="0"/>
+          </a:effectRef>
+          <a:fontRef idx="minor">
+            <a:schemeClr val="accent1"/>
+          </a:fontRef>
+        </p:style>
+        <p:txBody>
+          <a:bodyPr rtlCol="0" anchor="ctr"/>
+          <a:lstStyle/>
+          <a:p>
+            <a:pPr algn="ctr"/>
+            <a:endParaRPr lang="en-US">
+              <a:latin typeface="Trebuchet MS" panose="020B0603020202020204" pitchFamily="34" charset="0"/>
+            </a:endParaRPr>
+          </a:p>
+        </p:txBody>
+      </p:sp>
+      <p:sp>
+        <p:nvSpPr>
+          <p:cNvPr id="7" name="Rectángulo 6">
+            <a:extLst>
+              <a:ext uri="{FF2B5EF4-FFF2-40B4-BE49-F238E27FC236}">
+                <a16:creationId xmlns:a16="http://schemas.microsoft.com/office/drawing/2014/main" id="{632995D7-536F-7479-E593-9419C9A958C9}"/>
+              </a:ext>
+            </a:extLst>
+          </p:cNvPr>
+          <p:cNvSpPr/>
+          <p:nvPr/>
+        </p:nvSpPr>
+        <p:spPr>
+          <a:xfrm>
+            <a:off x="4792603" y="2949190"/>
+            <a:ext cx="3471046" cy="1410159"/>
+          </a:xfrm>
+          <a:prstGeom prst="rect">
+            <a:avLst/>
+          </a:prstGeom>
+          <a:noFill/>
+          <a:ln w="76200" cap="flat" cmpd="sng" algn="ctr">
+            <a:solidFill>
+              <a:schemeClr val="accent6"/>
+            </a:solidFill>
+            <a:prstDash val="solid"/>
+            <a:round/>
+            <a:headEnd type="none" w="med" len="med"/>
+            <a:tailEnd type="none" w="med" len="med"/>
+          </a:ln>
+        </p:spPr>
+        <p:style>
+          <a:lnRef idx="0">
+            <a:scrgbClr r="0" g="0" b="0"/>
+          </a:lnRef>
+          <a:fillRef idx="0">
+            <a:scrgbClr r="0" g="0" b="0"/>
+          </a:fillRef>
+          <a:effectRef idx="0">
+            <a:scrgbClr r="0" g="0" b="0"/>
+          </a:effectRef>
+          <a:fontRef idx="minor">
+            <a:schemeClr val="accent1"/>
+          </a:fontRef>
+        </p:style>
+        <p:txBody>
+          <a:bodyPr rtlCol="0" anchor="ctr"/>
+          <a:lstStyle/>
+          <a:p>
+            <a:pPr algn="ctr"/>
+            <a:endParaRPr lang="en-US">
+              <a:latin typeface="Trebuchet MS" panose="020B0603020202020204" pitchFamily="34" charset="0"/>
+            </a:endParaRPr>
+          </a:p>
+        </p:txBody>
+      </p:sp>
+      <p:sp>
+        <p:nvSpPr>
+          <p:cNvPr id="8" name="Rectángulo 7">
+            <a:extLst>
+              <a:ext uri="{FF2B5EF4-FFF2-40B4-BE49-F238E27FC236}">
+                <a16:creationId xmlns:a16="http://schemas.microsoft.com/office/drawing/2014/main" id="{58584F29-59F0-2BC5-6F6A-FCB8016A0416}"/>
+              </a:ext>
+            </a:extLst>
+          </p:cNvPr>
+          <p:cNvSpPr/>
+          <p:nvPr/>
+        </p:nvSpPr>
+        <p:spPr>
+          <a:xfrm>
+            <a:off x="880351" y="3891956"/>
+            <a:ext cx="3706340" cy="1307365"/>
+          </a:xfrm>
+          <a:prstGeom prst="rect">
+            <a:avLst/>
+          </a:prstGeom>
+          <a:noFill/>
+          <a:ln w="76200" cap="flat" cmpd="sng" algn="ctr">
+            <a:solidFill>
+              <a:srgbClr val="FF0000"/>
+            </a:solidFill>
+            <a:prstDash val="solid"/>
+            <a:round/>
+            <a:headEnd type="none" w="med" len="med"/>
+            <a:tailEnd type="none" w="med" len="med"/>
+          </a:ln>
+        </p:spPr>
+        <p:style>
+          <a:lnRef idx="0">
+            <a:scrgbClr r="0" g="0" b="0"/>
+          </a:lnRef>
+          <a:fillRef idx="0">
+            <a:scrgbClr r="0" g="0" b="0"/>
+          </a:fillRef>
+          <a:effectRef idx="0">
+            <a:scrgbClr r="0" g="0" b="0"/>
+          </a:effectRef>
+          <a:fontRef idx="minor">
+            <a:schemeClr val="accent1"/>
+          </a:fontRef>
+        </p:style>
+        <p:txBody>
+          <a:bodyPr rtlCol="0" anchor="ctr"/>
+          <a:lstStyle/>
+          <a:p>
+            <a:pPr algn="ctr"/>
+            <a:endParaRPr lang="en-US">
+              <a:latin typeface="Trebuchet MS" panose="020B0603020202020204" pitchFamily="34" charset="0"/>
+            </a:endParaRPr>
+          </a:p>
+        </p:txBody>
+      </p:sp>
     </p:spTree>
     <p:extLst>
       <p:ext uri="{BB962C8B-B14F-4D97-AF65-F5344CB8AC3E}">
@@ -5331,6 +5755,176 @@
   <p:clrMapOvr>
     <a:masterClrMapping/>
   </p:clrMapOvr>
+  <p:timing>
+    <p:tnLst>
+      <p:par>
+        <p:cTn id="1" dur="indefinite" restart="never" nodeType="tmRoot">
+          <p:childTnLst>
+            <p:seq concurrent="1" nextAc="seek">
+              <p:cTn id="2" dur="indefinite" nodeType="mainSeq">
+                <p:childTnLst>
+                  <p:par>
+                    <p:cTn id="3" fill="hold">
+                      <p:stCondLst>
+                        <p:cond delay="indefinite"/>
+                      </p:stCondLst>
+                      <p:childTnLst>
+                        <p:par>
+                          <p:cTn id="4" fill="hold">
+                            <p:stCondLst>
+                              <p:cond delay="0"/>
+                            </p:stCondLst>
+                            <p:childTnLst>
+                              <p:par>
+                                <p:cTn id="5" presetID="1" presetClass="entr" presetSubtype="0" fill="hold" grpId="0" nodeType="clickEffect">
+                                  <p:stCondLst>
+                                    <p:cond delay="0"/>
+                                  </p:stCondLst>
+                                  <p:childTnLst>
+                                    <p:set>
+                                      <p:cBhvr>
+                                        <p:cTn id="6" dur="1" fill="hold">
+                                          <p:stCondLst>
+                                            <p:cond delay="0"/>
+                                          </p:stCondLst>
+                                        </p:cTn>
+                                        <p:tgtEl>
+                                          <p:spTgt spid="6"/>
+                                        </p:tgtEl>
+                                        <p:attrNameLst>
+                                          <p:attrName>style.visibility</p:attrName>
+                                        </p:attrNameLst>
+                                      </p:cBhvr>
+                                      <p:to>
+                                        <p:strVal val="visible"/>
+                                      </p:to>
+                                    </p:set>
+                                  </p:childTnLst>
+                                </p:cTn>
+                              </p:par>
+                            </p:childTnLst>
+                          </p:cTn>
+                        </p:par>
+                      </p:childTnLst>
+                    </p:cTn>
+                  </p:par>
+                  <p:par>
+                    <p:cTn id="7" fill="hold">
+                      <p:stCondLst>
+                        <p:cond delay="indefinite"/>
+                      </p:stCondLst>
+                      <p:childTnLst>
+                        <p:par>
+                          <p:cTn id="8" fill="hold">
+                            <p:stCondLst>
+                              <p:cond delay="0"/>
+                            </p:stCondLst>
+                            <p:childTnLst>
+                              <p:par>
+                                <p:cTn id="9" presetID="1" presetClass="entr" presetSubtype="0" fill="hold" grpId="0" nodeType="clickEffect">
+                                  <p:stCondLst>
+                                    <p:cond delay="0"/>
+                                  </p:stCondLst>
+                                  <p:childTnLst>
+                                    <p:set>
+                                      <p:cBhvr>
+                                        <p:cTn id="10" dur="1" fill="hold">
+                                          <p:stCondLst>
+                                            <p:cond delay="0"/>
+                                          </p:stCondLst>
+                                        </p:cTn>
+                                        <p:tgtEl>
+                                          <p:spTgt spid="7"/>
+                                        </p:tgtEl>
+                                        <p:attrNameLst>
+                                          <p:attrName>style.visibility</p:attrName>
+                                        </p:attrNameLst>
+                                      </p:cBhvr>
+                                      <p:to>
+                                        <p:strVal val="visible"/>
+                                      </p:to>
+                                    </p:set>
+                                  </p:childTnLst>
+                                </p:cTn>
+                              </p:par>
+                            </p:childTnLst>
+                          </p:cTn>
+                        </p:par>
+                      </p:childTnLst>
+                    </p:cTn>
+                  </p:par>
+                  <p:par>
+                    <p:cTn id="11" fill="hold">
+                      <p:stCondLst>
+                        <p:cond delay="indefinite"/>
+                      </p:stCondLst>
+                      <p:childTnLst>
+                        <p:par>
+                          <p:cTn id="12" fill="hold">
+                            <p:stCondLst>
+                              <p:cond delay="0"/>
+                            </p:stCondLst>
+                            <p:childTnLst>
+                              <p:par>
+                                <p:cTn id="13" presetID="1" presetClass="entr" presetSubtype="0" fill="hold" grpId="0" nodeType="clickEffect">
+                                  <p:stCondLst>
+                                    <p:cond delay="0"/>
+                                  </p:stCondLst>
+                                  <p:childTnLst>
+                                    <p:set>
+                                      <p:cBhvr>
+                                        <p:cTn id="14" dur="1" fill="hold">
+                                          <p:stCondLst>
+                                            <p:cond delay="0"/>
+                                          </p:stCondLst>
+                                        </p:cTn>
+                                        <p:tgtEl>
+                                          <p:spTgt spid="8"/>
+                                        </p:tgtEl>
+                                        <p:attrNameLst>
+                                          <p:attrName>style.visibility</p:attrName>
+                                        </p:attrNameLst>
+                                      </p:cBhvr>
+                                      <p:to>
+                                        <p:strVal val="visible"/>
+                                      </p:to>
+                                    </p:set>
+                                  </p:childTnLst>
+                                </p:cTn>
+                              </p:par>
+                            </p:childTnLst>
+                          </p:cTn>
+                        </p:par>
+                      </p:childTnLst>
+                    </p:cTn>
+                  </p:par>
+                </p:childTnLst>
+              </p:cTn>
+              <p:prevCondLst>
+                <p:cond evt="onPrev" delay="0">
+                  <p:tgtEl>
+                    <p:sldTgt/>
+                  </p:tgtEl>
+                </p:cond>
+              </p:prevCondLst>
+              <p:nextCondLst>
+                <p:cond evt="onNext" delay="0">
+                  <p:tgtEl>
+                    <p:sldTgt/>
+                  </p:tgtEl>
+                </p:cond>
+              </p:nextCondLst>
+            </p:seq>
+          </p:childTnLst>
+        </p:cTn>
+      </p:par>
+    </p:tnLst>
+    <p:bldLst>
+      <p:bldP spid="6" grpId="0" animBg="1"/>
+      <p:bldP spid="7" grpId="0" animBg="1"/>
+      <p:bldP spid="8" grpId="0" animBg="1"/>
+    </p:bldLst>
+  </p:timing>
 </p:sld>
 </file>
 
@@ -5373,10 +5967,14 @@
           </a:bodyPr>
           <a:lstStyle/>
           <a:p>
-            <a:pPr algn="l"/>
+            <a:pPr algn="just"/>
             <a:r>
               <a:rPr lang="en-GB" sz="2800" dirty="0"/>
-              <a:t>7. Conclusions</a:t>
+              <a:t>6. </a:t>
+            </a:r>
+            <a:r>
+              <a:rPr lang="en-GB" sz="2800" b="1" dirty="0"/>
+              <a:t>Conclusions</a:t>
             </a:r>
           </a:p>
         </p:txBody>
@@ -5409,14 +6007,14 @@
           </a:ln>
           <a:extLst>
             <a:ext uri="{909E8E84-426E-40dd-AFC4-6F175D3DCCD1}">
-              <a14:hiddenFill xmlns="" xmlns:a14="http://schemas.microsoft.com/office/drawing/2010/main">
+              <a14:hiddenFill xmlns:a14="http://schemas.microsoft.com/office/drawing/2010/main" xmlns="">
                 <a:solidFill>
                   <a:srgbClr val="FFFFFF"/>
                 </a:solidFill>
               </a14:hiddenFill>
             </a:ext>
             <a:ext uri="{91240B29-F687-4f45-9708-019B960494DF}">
-              <a14:hiddenLine xmlns="" xmlns:a14="http://schemas.microsoft.com/office/drawing/2010/main" w="9525">
+              <a14:hiddenLine xmlns:a14="http://schemas.microsoft.com/office/drawing/2010/main" xmlns="" w="9525">
                 <a:solidFill>
                   <a:srgbClr val="000000"/>
                 </a:solidFill>
@@ -5671,9 +6269,16 @@
           <a:lstStyle/>
           <a:p>
             <a:pPr algn="l"/>
-            <a:r>
+            <a:br>
               <a:rPr lang="en-GB" sz="2800" dirty="0"/>
-              <a:t>8. References</a:t>
+            </a:br>
+            <a:r>
+              <a:rPr lang="en-GB" sz="2800" dirty="0"/>
+              <a:t>7. </a:t>
+            </a:r>
+            <a:r>
+              <a:rPr lang="en-GB" sz="2800" b="1" dirty="0"/>
+              <a:t>References</a:t>
             </a:r>
           </a:p>
         </p:txBody>
@@ -5731,22 +6336,33 @@
               <a:buNone/>
             </a:pPr>
             <a:r>
-              <a:rPr lang="en-AU" sz="1200" b="0" dirty="0"/>
-              <a:t>(</a:t>
-            </a:r>
-            <a:r>
-              <a:rPr lang="en-AU" sz="1600" dirty="0"/>
-              <a:t>Every paper cited in the previous slides needs to be referenced properly here)</a:t>
-            </a:r>
-            <a:endParaRPr lang="en-AU" sz="1200" dirty="0"/>
+              <a:rPr lang="en-AU" sz="1200" dirty="0"/>
+              <a:t>[1] </a:t>
+            </a:r>
+            <a:r>
+              <a:rPr lang="en-AU" sz="1200" dirty="0" err="1"/>
+              <a:t>Jocher</a:t>
+            </a:r>
+            <a:r>
+              <a:rPr lang="en-AU" sz="1200" dirty="0"/>
+              <a:t>, G.; Chaurasia, A.; Qiu, J. </a:t>
+            </a:r>
+            <a:r>
+              <a:rPr lang="en-AU" sz="1200" dirty="0" err="1"/>
+              <a:t>Ultralytics</a:t>
+            </a:r>
+            <a:r>
+              <a:rPr lang="en-AU" sz="1200" dirty="0"/>
+              <a:t> YOLOv8. 2023. Available online: https://github.com/ultralytics/ultralytics</a:t>
+            </a:r>
           </a:p>
           <a:p>
             <a:pPr marL="0" indent="0">
               <a:buNone/>
             </a:pPr>
             <a:r>
-              <a:rPr lang="en-AU" sz="1200" b="0" dirty="0"/>
-              <a:t>[1] Wang, K.; Belongie, S. Word spotting in the wild. In Proceedings of the 11th European Conference on Computer Vision (ECCV 2010), Heraklion, Greece, 5–11 September 2010; pp. 591–604.</a:t>
+              <a:rPr lang="en-AU" sz="1200" dirty="0"/>
+              <a:t>[2] Liao, Z. et al. RT-DETRv4: Painlessly furthering real-time object detection with vision foundation models. 2025.</a:t>
             </a:r>
           </a:p>
           <a:p>
@@ -5754,8 +6370,8 @@
               <a:buNone/>
             </a:pPr>
             <a:r>
-              <a:rPr lang="en-AU" sz="1200" b="0" dirty="0"/>
-              <a:t>[2] Karatzas, D.; Shafait, F.; Uchida, S.; Iwamura, M.; I Bigorda, L.G.; Mestre, S.R.; Mas, J.; Mota, D.F.; Almazan, J.A.; De Las Heras, L.P. ICDAR 2013 robust reading competition. In Proceedings of the 2013 12th International Conference on Document Analysis and Recognition, Washington, DC, USA, 25–28 August 2013; pp. 1484–1493.</a:t>
+              <a:rPr lang="en-AU" sz="1200" dirty="0"/>
+              <a:t>[3] Ren, T.; Liu, S.; Zeng, A.; Lin, J.; Li, K.; Cao, H.; Chen, J.; Huang, X.; Chen, Y.; Yan, F.; et al. Grounded SAM: Assembling open-world models for diverse visual tasks. 2024.</a:t>
             </a:r>
           </a:p>
           <a:p>
@@ -5763,8 +6379,8 @@
               <a:buNone/>
             </a:pPr>
             <a:r>
-              <a:rPr lang="en-AU" sz="1200" b="0" dirty="0"/>
-              <a:t>[3] Karatzas, D.; Gomez-Bigorda, L.; Nicolaou, A.; Ghosh, S.; Bagdanov, A.; Iwamura, M.; Matas, J.; Neumann, L.; Chandrasekhar, V.R.; Lu, S.; et al. ICDAR 2015 competition on robust reading. In Proceedings of the 2015 13th International Conference on Document Analysis and Recognition (ICDAR), Tunis, Tunisia, 23–26 August 2015; pp. 1156–1160.</a:t>
+              <a:rPr lang="en-AU" sz="1200" dirty="0"/>
+              <a:t>[4] Kirillov, A.; Mintun, E.; Ravi, N.; Mao, H.; Rolland, C.; Gustafson, L.; Xiao, T.; Whitehead, S.; Berg, A.C.; Lo, W.-Y.; et al. Segment Anything. 2023.</a:t>
             </a:r>
           </a:p>
           <a:p>
@@ -5772,16 +6388,100 @@
               <a:buNone/>
             </a:pPr>
             <a:r>
-              <a:rPr lang="en-AU" sz="1200" b="0" dirty="0"/>
-              <a:t>[4] Mishra, A.; </a:t>
-            </a:r>
-            <a:r>
-              <a:rPr lang="en-AU" sz="1200" b="0" dirty="0" err="1"/>
-              <a:t>Alahari</a:t>
-            </a:r>
-            <a:r>
-              <a:rPr lang="en-AU" sz="1200" b="0" dirty="0"/>
-              <a:t>, K.; Jawahar, C. Scene text recognition using higher order language priors. In Proceedings of the BMVC-British Machine Vision Conference 2012, Surrey, UK, 3–7 September 2012.</a:t>
+              <a:rPr lang="en-AU" sz="1200" dirty="0"/>
+              <a:t>[5] Damm, S.; </a:t>
+            </a:r>
+            <a:r>
+              <a:rPr lang="en-AU" sz="1200" dirty="0" err="1"/>
+              <a:t>Laszkiewicz</a:t>
+            </a:r>
+            <a:r>
+              <a:rPr lang="en-AU" sz="1200" dirty="0"/>
+              <a:t>, M.; Lederer, J.; Fischer, A. Anomaly DINO: Boosting patch-based few-shot anomaly detection with DINOv2. 2024.</a:t>
+            </a:r>
+          </a:p>
+          <a:p>
+            <a:pPr marL="0" indent="0">
+              <a:buNone/>
+            </a:pPr>
+            <a:r>
+              <a:rPr lang="en-AU" sz="1200" dirty="0"/>
+              <a:t>[6] Kienzle, D.; </a:t>
+            </a:r>
+            <a:r>
+              <a:rPr lang="en-AU" sz="1200" dirty="0" err="1"/>
+              <a:t>Kantarelis</a:t>
+            </a:r>
+            <a:r>
+              <a:rPr lang="en-AU" sz="1200" dirty="0"/>
+              <a:t>, K.; Barthel, K. </a:t>
+            </a:r>
+            <a:r>
+              <a:rPr lang="en-AU" sz="1200" dirty="0" err="1"/>
+              <a:t>Segformer</a:t>
+            </a:r>
+            <a:r>
+              <a:rPr lang="en-AU" sz="1200" dirty="0"/>
+              <a:t>++: Efficient token-merging strategies for high-resolution semantic segmentation. 2024.</a:t>
+            </a:r>
+          </a:p>
+          <a:p>
+            <a:pPr marL="0" indent="0">
+              <a:buNone/>
+            </a:pPr>
+            <a:r>
+              <a:rPr lang="en-AU" sz="1200" dirty="0"/>
+              <a:t>[7] </a:t>
+            </a:r>
+            <a:r>
+              <a:rPr lang="en-AU" sz="1200" dirty="0" err="1"/>
+              <a:t>Cavagnero</a:t>
+            </a:r>
+            <a:r>
+              <a:rPr lang="en-AU" sz="1200" dirty="0"/>
+              <a:t>, N.; Rosi, G.; </a:t>
+            </a:r>
+            <a:r>
+              <a:rPr lang="en-AU" sz="1200" dirty="0" err="1"/>
+              <a:t>Averta</a:t>
+            </a:r>
+            <a:r>
+              <a:rPr lang="en-AU" sz="1200" dirty="0"/>
+              <a:t>, G.; Lamberti, F.; Tommasi, T. PEM: Prototype-based efficient </a:t>
+            </a:r>
+            <a:r>
+              <a:rPr lang="en-AU" sz="1200" dirty="0" err="1"/>
+              <a:t>MaskFormer</a:t>
+            </a:r>
+            <a:r>
+              <a:rPr lang="en-AU" sz="1200" dirty="0"/>
+              <a:t> for image segmentation. 2024.</a:t>
+            </a:r>
+          </a:p>
+          <a:p>
+            <a:pPr marL="0" indent="0">
+              <a:buNone/>
+            </a:pPr>
+            <a:r>
+              <a:rPr lang="en-AU" sz="1200" dirty="0"/>
+              <a:t>[8] Hou, X.; Ma, M.; Fan, B.; Luo, P.; Wan, Y. Relation-DETR: Exploring explicit position relation prior for object detection. 2024.</a:t>
+            </a:r>
+          </a:p>
+          <a:p>
+            <a:pPr marL="0" indent="0">
+              <a:buNone/>
+            </a:pPr>
+            <a:r>
+              <a:rPr lang="en-AU" sz="1200" dirty="0"/>
+              <a:t>[9] Heidari, M. et al. A study on the performance of U-Net modifications in retroperitoneal </a:t>
+            </a:r>
+            <a:r>
+              <a:rPr lang="en-AU" sz="1200" dirty="0" err="1"/>
+              <a:t>tumor</a:t>
+            </a:r>
+            <a:r>
+              <a:rPr lang="en-AU" sz="1200" dirty="0"/>
+              <a:t> segmentation. 2025.</a:t>
             </a:r>
           </a:p>
         </p:txBody>
@@ -5800,6 +6500,455 @@
 </file>
 
 <file path=ppt/slides/slide16.xml><?xml version="1.0" encoding="utf-8"?>
+<p:sld xmlns:a="http://schemas.openxmlformats.org/drawingml/2006/main" xmlns:r="http://schemas.openxmlformats.org/officeDocument/2006/relationships" xmlns:p="http://schemas.openxmlformats.org/presentationml/2006/main">
+  <p:cSld>
+    <p:spTree>
+      <p:nvGrpSpPr>
+        <p:cNvPr id="1" name="">
+          <a:extLst>
+            <a:ext uri="{FF2B5EF4-FFF2-40B4-BE49-F238E27FC236}">
+              <a16:creationId xmlns:a16="http://schemas.microsoft.com/office/drawing/2014/main" id="{3132305C-936E-E4C6-006A-352A25FBA9FF}"/>
+            </a:ext>
+          </a:extLst>
+        </p:cNvPr>
+        <p:cNvGrpSpPr/>
+        <p:nvPr/>
+      </p:nvGrpSpPr>
+      <p:grpSpPr>
+        <a:xfrm>
+          <a:off x="0" y="0"/>
+          <a:ext cx="0" cy="0"/>
+          <a:chOff x="0" y="0"/>
+          <a:chExt cx="0" cy="0"/>
+        </a:xfrm>
+      </p:grpSpPr>
+      <p:sp>
+        <p:nvSpPr>
+          <p:cNvPr id="2" name="Title 1">
+            <a:extLst>
+              <a:ext uri="{FF2B5EF4-FFF2-40B4-BE49-F238E27FC236}">
+                <a16:creationId xmlns:a16="http://schemas.microsoft.com/office/drawing/2014/main" id="{442B9437-46B9-465C-57A9-651DC005DD33}"/>
+              </a:ext>
+            </a:extLst>
+          </p:cNvPr>
+          <p:cNvSpPr>
+            <a:spLocks noGrp="1"/>
+          </p:cNvSpPr>
+          <p:nvPr>
+            <p:ph type="title"/>
+          </p:nvPr>
+        </p:nvSpPr>
+        <p:spPr>
+          <a:xfrm>
+            <a:off x="457200" y="274638"/>
+            <a:ext cx="7302500" cy="1143000"/>
+          </a:xfrm>
+        </p:spPr>
+        <p:txBody>
+          <a:bodyPr>
+            <a:normAutofit/>
+          </a:bodyPr>
+          <a:lstStyle/>
+          <a:p>
+            <a:pPr algn="l"/>
+            <a:br>
+              <a:rPr lang="en-GB" sz="2800" dirty="0"/>
+            </a:br>
+            <a:r>
+              <a:rPr lang="en-GB" sz="2800" dirty="0"/>
+              <a:t>7. </a:t>
+            </a:r>
+            <a:r>
+              <a:rPr lang="en-GB" sz="2800" b="1" dirty="0"/>
+              <a:t>References</a:t>
+            </a:r>
+          </a:p>
+        </p:txBody>
+      </p:sp>
+      <p:sp>
+        <p:nvSpPr>
+          <p:cNvPr id="4" name="CuadroTexto 16">
+            <a:extLst>
+              <a:ext uri="{FF2B5EF4-FFF2-40B4-BE49-F238E27FC236}">
+                <a16:creationId xmlns:a16="http://schemas.microsoft.com/office/drawing/2014/main" id="{EE7C02DD-2117-6C1F-43CB-14B908E8234E}"/>
+              </a:ext>
+            </a:extLst>
+          </p:cNvPr>
+          <p:cNvSpPr txBox="1"/>
+          <p:nvPr/>
+        </p:nvSpPr>
+        <p:spPr>
+          <a:xfrm>
+            <a:off x="841838" y="1510859"/>
+            <a:ext cx="7981420" cy="4383504"/>
+          </a:xfrm>
+          <a:prstGeom prst="rect">
+            <a:avLst/>
+          </a:prstGeom>
+          <a:noFill/>
+          <a:ln>
+            <a:noFill/>
+          </a:ln>
+        </p:spPr>
+        <p:txBody>
+          <a:bodyPr lIns="38100" tIns="38100" rIns="38100" bIns="38100"/>
+          <a:lstStyle>
+            <a:defPPr>
+              <a:defRPr lang="en-US"/>
+            </a:defPPr>
+            <a:lvl1pPr marL="285750" indent="-285750">
+              <a:spcBef>
+                <a:spcPts val="600"/>
+              </a:spcBef>
+              <a:spcAft>
+                <a:spcPts val="600"/>
+              </a:spcAft>
+              <a:buFont typeface="Arial" panose="020B0604020202020204" pitchFamily="34" charset="0"/>
+              <a:buChar char="•"/>
+              <a:defRPr b="1">
+                <a:solidFill>
+                  <a:srgbClr val="002060"/>
+                </a:solidFill>
+                <a:latin typeface="Trebuchet MS" panose="020B0603020202020204" pitchFamily="34" charset="0"/>
+              </a:defRPr>
+            </a:lvl1pPr>
+          </a:lstStyle>
+          <a:p>
+            <a:pPr marL="0" indent="0">
+              <a:buNone/>
+            </a:pPr>
+            <a:r>
+              <a:rPr lang="en-AU" sz="1200" dirty="0"/>
+              <a:t>[10] Cheng, T.; Song, L.; Ge, Y.; Liu, W.; Wang, X.; Shan, Y. YOLO-World: Real-time open-vocabulary object detection. In Proceedings of CVPR 2024; pp. 16901–16911.</a:t>
+            </a:r>
+          </a:p>
+          <a:p>
+            <a:pPr marL="0" indent="0">
+              <a:buNone/>
+            </a:pPr>
+            <a:r>
+              <a:rPr lang="en-AU" sz="1200" dirty="0"/>
+              <a:t>[11] Wyatt, J.; Leach, A.; </a:t>
+            </a:r>
+            <a:r>
+              <a:rPr lang="en-AU" sz="1200" dirty="0" err="1"/>
+              <a:t>Schmon</a:t>
+            </a:r>
+            <a:r>
+              <a:rPr lang="en-AU" sz="1200" dirty="0"/>
+              <a:t>, S.M.; Willcocks, C.G. </a:t>
+            </a:r>
+            <a:r>
+              <a:rPr lang="en-AU" sz="1200" dirty="0" err="1"/>
+              <a:t>AnoDDPM</a:t>
+            </a:r>
+            <a:r>
+              <a:rPr lang="en-AU" sz="1200" dirty="0"/>
+              <a:t>: Anomaly detection with denoising diffusion probabilistic models. In Proceedings of CVPR Workshops 2022; pp. 650–656.</a:t>
+            </a:r>
+          </a:p>
+          <a:p>
+            <a:pPr marL="0" indent="0">
+              <a:buNone/>
+            </a:pPr>
+            <a:r>
+              <a:rPr lang="en-AU" sz="1200" dirty="0"/>
+              <a:t>[12] Ren, T. et al. Grounding DINO 1.5: Advance the edge of open-set object detection. 2024.</a:t>
+            </a:r>
+          </a:p>
+          <a:p>
+            <a:pPr marL="0" indent="0">
+              <a:buNone/>
+            </a:pPr>
+            <a:r>
+              <a:rPr lang="en-AU" sz="1200" dirty="0"/>
+              <a:t>[13] Ravi, N.; </a:t>
+            </a:r>
+            <a:r>
+              <a:rPr lang="en-AU" sz="1200" dirty="0" err="1"/>
+              <a:t>Gabeur</a:t>
+            </a:r>
+            <a:r>
+              <a:rPr lang="en-AU" sz="1200" dirty="0"/>
+              <a:t>, V.; Hu, Y.-T.; Hu, R.; </a:t>
+            </a:r>
+            <a:r>
+              <a:rPr lang="en-AU" sz="1200" dirty="0" err="1"/>
+              <a:t>Ryali</a:t>
+            </a:r>
+            <a:r>
+              <a:rPr lang="en-AU" sz="1200" dirty="0"/>
+              <a:t>, C.; Ma, T.; Khedr, H.; Rädle, R.; Rolland, C.; Gustafson, L.; et al. SAM 2: Segment anything in images and videos. </a:t>
+            </a:r>
+            <a:r>
+              <a:rPr lang="en-AU" sz="1200" dirty="0" err="1"/>
+              <a:t>arXiv</a:t>
+            </a:r>
+            <a:r>
+              <a:rPr lang="en-AU" sz="1200" dirty="0"/>
+              <a:t> preprint, 2024.</a:t>
+            </a:r>
+          </a:p>
+          <a:p>
+            <a:pPr marL="0" indent="0">
+              <a:buNone/>
+            </a:pPr>
+            <a:r>
+              <a:rPr lang="en-AU" sz="1200" dirty="0"/>
+              <a:t>[14] Xiong, Y.; Varadarajan, B.; Wu, L.; Xiang, X.; Xiao, F.; Zhu, C.; Dai, X.; Wang, D.; Sun, F.; </a:t>
+            </a:r>
+            <a:r>
+              <a:rPr lang="en-AU" sz="1200" dirty="0" err="1"/>
+              <a:t>Iandola</a:t>
+            </a:r>
+            <a:r>
+              <a:rPr lang="en-AU" sz="1200" dirty="0"/>
+              <a:t>, F.; et al. </a:t>
+            </a:r>
+            <a:r>
+              <a:rPr lang="en-AU" sz="1200" dirty="0" err="1"/>
+              <a:t>EfficientSAM</a:t>
+            </a:r>
+            <a:r>
+              <a:rPr lang="en-AU" sz="1200" dirty="0"/>
+              <a:t>: Leveraged masked image pretraining for efficient segment anything. 2023.</a:t>
+            </a:r>
+          </a:p>
+          <a:p>
+            <a:pPr marL="0" indent="0">
+              <a:buNone/>
+            </a:pPr>
+            <a:r>
+              <a:rPr lang="en-AU" sz="1200" dirty="0"/>
+              <a:t>[15] Wang, C.-Y.; Yeh, I.-H.; Liao, H.-Y.M. YOLOv9: Learning what you want to learn using programmable gradient information. 2024.</a:t>
+            </a:r>
+          </a:p>
+          <a:p>
+            <a:pPr marL="0" indent="0">
+              <a:buNone/>
+            </a:pPr>
+            <a:r>
+              <a:rPr lang="en-AU" sz="1200" dirty="0"/>
+              <a:t>[16] Shi, R.; Li, Z.; Wu, Z.; Zhang, W.; Xu, Y.; Luo, G.; Ma, P.; Zhang, Z. An industrial carbon block instance segmentation algorithm based on improved YOLOv8. Scientific Reports, 2025.</a:t>
+            </a:r>
+          </a:p>
+          <a:p>
+            <a:pPr marL="0" indent="0">
+              <a:buNone/>
+            </a:pPr>
+            <a:r>
+              <a:rPr lang="en-AU" sz="1200" dirty="0"/>
+              <a:t>[17] Jiang, J.; He, Z.; Wan, A.; AL-</a:t>
+            </a:r>
+            <a:r>
+              <a:rPr lang="en-AU" sz="1200" dirty="0" err="1"/>
+              <a:t>Bukhaiti</a:t>
+            </a:r>
+            <a:r>
+              <a:rPr lang="en-AU" sz="1200" dirty="0"/>
+              <a:t>, K.; Wang, K.; Zhu, P.; Cheng, X. Zero-shot industrial anomaly detection via CLIP-DINOv2 multimodal fusion. Electronics, 2025.</a:t>
+            </a:r>
+          </a:p>
+          <a:p>
+            <a:pPr marL="0" indent="0">
+              <a:buNone/>
+            </a:pPr>
+            <a:r>
+              <a:rPr lang="en-AU" sz="1200" dirty="0"/>
+              <a:t>[18] Xiong, X.; Wu, Z.; Tan, S.; Li, W.; Tang, F.; Chen, Y.; Li, S.; Ma, J.; Li, G. SAM2-UNet: Segment anything 2 as a strong encoder. 2026.</a:t>
+            </a:r>
+          </a:p>
+        </p:txBody>
+      </p:sp>
+    </p:spTree>
+    <p:extLst>
+      <p:ext uri="{BB962C8B-B14F-4D97-AF65-F5344CB8AC3E}">
+        <p14:creationId xmlns:p14="http://schemas.microsoft.com/office/powerpoint/2010/main" val="1473679579"/>
+      </p:ext>
+    </p:extLst>
+  </p:cSld>
+  <p:clrMapOvr>
+    <a:masterClrMapping/>
+  </p:clrMapOvr>
+</p:sld>
+</file>
+
+<file path=ppt/slides/slide17.xml><?xml version="1.0" encoding="utf-8"?>
+<p:sld xmlns:a="http://schemas.openxmlformats.org/drawingml/2006/main" xmlns:r="http://schemas.openxmlformats.org/officeDocument/2006/relationships" xmlns:p="http://schemas.openxmlformats.org/presentationml/2006/main">
+  <p:cSld>
+    <p:spTree>
+      <p:nvGrpSpPr>
+        <p:cNvPr id="1" name="">
+          <a:extLst>
+            <a:ext uri="{FF2B5EF4-FFF2-40B4-BE49-F238E27FC236}">
+              <a16:creationId xmlns:a16="http://schemas.microsoft.com/office/drawing/2014/main" id="{11426998-D806-ADE6-ECD8-9D9A77D9CD62}"/>
+            </a:ext>
+          </a:extLst>
+        </p:cNvPr>
+        <p:cNvGrpSpPr/>
+        <p:nvPr/>
+      </p:nvGrpSpPr>
+      <p:grpSpPr>
+        <a:xfrm>
+          <a:off x="0" y="0"/>
+          <a:ext cx="0" cy="0"/>
+          <a:chOff x="0" y="0"/>
+          <a:chExt cx="0" cy="0"/>
+        </a:xfrm>
+      </p:grpSpPr>
+      <p:sp>
+        <p:nvSpPr>
+          <p:cNvPr id="2" name="Title 1">
+            <a:extLst>
+              <a:ext uri="{FF2B5EF4-FFF2-40B4-BE49-F238E27FC236}">
+                <a16:creationId xmlns:a16="http://schemas.microsoft.com/office/drawing/2014/main" id="{A0EE5B20-BC59-7A28-0485-A407D1CBB909}"/>
+              </a:ext>
+            </a:extLst>
+          </p:cNvPr>
+          <p:cNvSpPr>
+            <a:spLocks noGrp="1"/>
+          </p:cNvSpPr>
+          <p:nvPr>
+            <p:ph type="title"/>
+          </p:nvPr>
+        </p:nvSpPr>
+        <p:spPr>
+          <a:xfrm>
+            <a:off x="457200" y="274638"/>
+            <a:ext cx="7302500" cy="1143000"/>
+          </a:xfrm>
+        </p:spPr>
+        <p:txBody>
+          <a:bodyPr>
+            <a:normAutofit/>
+          </a:bodyPr>
+          <a:lstStyle/>
+          <a:p>
+            <a:pPr algn="l"/>
+            <a:br>
+              <a:rPr lang="en-GB" sz="2800" dirty="0"/>
+            </a:br>
+            <a:r>
+              <a:rPr lang="en-GB" sz="2800" dirty="0"/>
+              <a:t>7. </a:t>
+            </a:r>
+            <a:r>
+              <a:rPr lang="en-GB" sz="2800" b="1" dirty="0"/>
+              <a:t>References</a:t>
+            </a:r>
+          </a:p>
+        </p:txBody>
+      </p:sp>
+      <p:sp>
+        <p:nvSpPr>
+          <p:cNvPr id="4" name="CuadroTexto 16">
+            <a:extLst>
+              <a:ext uri="{FF2B5EF4-FFF2-40B4-BE49-F238E27FC236}">
+                <a16:creationId xmlns:a16="http://schemas.microsoft.com/office/drawing/2014/main" id="{1488EC34-EB99-4A8A-242D-64E9877187FC}"/>
+              </a:ext>
+            </a:extLst>
+          </p:cNvPr>
+          <p:cNvSpPr txBox="1"/>
+          <p:nvPr/>
+        </p:nvSpPr>
+        <p:spPr>
+          <a:xfrm>
+            <a:off x="841838" y="1510859"/>
+            <a:ext cx="7981420" cy="4383504"/>
+          </a:xfrm>
+          <a:prstGeom prst="rect">
+            <a:avLst/>
+          </a:prstGeom>
+          <a:noFill/>
+          <a:ln>
+            <a:noFill/>
+          </a:ln>
+        </p:spPr>
+        <p:txBody>
+          <a:bodyPr lIns="38100" tIns="38100" rIns="38100" bIns="38100"/>
+          <a:lstStyle>
+            <a:defPPr>
+              <a:defRPr lang="en-US"/>
+            </a:defPPr>
+            <a:lvl1pPr marL="285750" indent="-285750">
+              <a:spcBef>
+                <a:spcPts val="600"/>
+              </a:spcBef>
+              <a:spcAft>
+                <a:spcPts val="600"/>
+              </a:spcAft>
+              <a:buFont typeface="Arial" panose="020B0604020202020204" pitchFamily="34" charset="0"/>
+              <a:buChar char="•"/>
+              <a:defRPr b="1">
+                <a:solidFill>
+                  <a:srgbClr val="002060"/>
+                </a:solidFill>
+                <a:latin typeface="Trebuchet MS" panose="020B0603020202020204" pitchFamily="34" charset="0"/>
+              </a:defRPr>
+            </a:lvl1pPr>
+          </a:lstStyle>
+          <a:p>
+            <a:pPr marL="0" indent="0">
+              <a:buNone/>
+            </a:pPr>
+            <a:r>
+              <a:rPr lang="en-AU" sz="1200" dirty="0"/>
+              <a:t>[19] Shi, C.; Wang, K.; Zhang, G.; Li, Z.; Zhu, C. Semi-supervised semantic segmentation for industrial surface defects. Scientific Reports, 2024.</a:t>
+            </a:r>
+            <a:br>
+              <a:rPr lang="en-AU" sz="1200" dirty="0"/>
+            </a:br>
+            <a:br>
+              <a:rPr lang="en-AU" sz="1200" dirty="0"/>
+            </a:br>
+            <a:r>
+              <a:rPr lang="en-AU" sz="1200" dirty="0"/>
+              <a:t>[20] Liao, K.; Nie, L.; Huang, S.; Lin, C.; Zhang, J.; Zhao, Y.; </a:t>
+            </a:r>
+            <a:r>
+              <a:rPr lang="en-AU" sz="1200" dirty="0" err="1"/>
+              <a:t>Gabbouj</a:t>
+            </a:r>
+            <a:r>
+              <a:rPr lang="en-AU" sz="1200" dirty="0"/>
+              <a:t>, M.; Tao, D. Deep learning for camera calibration and beyond: A survey. 2025.</a:t>
+            </a:r>
+            <a:br>
+              <a:rPr lang="en-AU" sz="1200" dirty="0"/>
+            </a:br>
+            <a:br>
+              <a:rPr lang="en-AU" sz="1200" dirty="0"/>
+            </a:br>
+            <a:r>
+              <a:rPr lang="en-AU" sz="1200" dirty="0"/>
+              <a:t>[21] Heckler-Kram, L.; Neudeck, J.-H.; Scheler, U.; König, R.; Steger, C. The </a:t>
+            </a:r>
+            <a:r>
+              <a:rPr lang="en-AU" sz="1200" dirty="0" err="1"/>
+              <a:t>MVTec</a:t>
+            </a:r>
+            <a:r>
+              <a:rPr lang="en-AU" sz="1200" dirty="0"/>
+              <a:t> AD 2 dataset: Advanced scenarios for anomaly detection . 2025.</a:t>
+            </a:r>
+            <a:endParaRPr lang="en-AU" sz="1200" b="0" dirty="0"/>
+          </a:p>
+        </p:txBody>
+      </p:sp>
+    </p:spTree>
+    <p:extLst>
+      <p:ext uri="{BB962C8B-B14F-4D97-AF65-F5344CB8AC3E}">
+        <p14:creationId xmlns:p14="http://schemas.microsoft.com/office/powerpoint/2010/main" val="916036587"/>
+      </p:ext>
+    </p:extLst>
+  </p:cSld>
+  <p:clrMapOvr>
+    <a:masterClrMapping/>
+  </p:clrMapOvr>
+</p:sld>
+</file>
+
+<file path=ppt/slides/slide18.xml><?xml version="1.0" encoding="utf-8"?>
 <p:sld xmlns:a="http://schemas.openxmlformats.org/drawingml/2006/main" xmlns:r="http://schemas.openxmlformats.org/officeDocument/2006/relationships" xmlns:p="http://schemas.openxmlformats.org/presentationml/2006/main">
   <p:cSld>
     <p:spTree>
@@ -5838,14 +6987,14 @@
           </a:ln>
           <a:extLst>
             <a:ext uri="{909E8E84-426E-40dd-AFC4-6F175D3DCCD1}">
-              <a14:hiddenFill xmlns:a14="http://schemas.microsoft.com/office/drawing/2010/main" xmlns="">
+              <a14:hiddenFill xmlns="" xmlns:a14="http://schemas.microsoft.com/office/drawing/2010/main">
                 <a:solidFill>
                   <a:srgbClr val="FFFFFF"/>
                 </a:solidFill>
               </a14:hiddenFill>
             </a:ext>
             <a:ext uri="{91240B29-F687-4f45-9708-019B960494DF}">
-              <a14:hiddenLine xmlns:a14="http://schemas.microsoft.com/office/drawing/2010/main" xmlns="" w="9525">
+              <a14:hiddenLine xmlns="" xmlns:a14="http://schemas.microsoft.com/office/drawing/2010/main" w="9525">
                 <a:solidFill>
                   <a:srgbClr val="000000"/>
                 </a:solidFill>
@@ -5978,7 +7127,7 @@
           <a:p>
             <a:pPr algn="l"/>
             <a:r>
-              <a:rPr lang="en-US" dirty="0"/>
+              <a:rPr lang="en-US" b="1" dirty="0"/>
               <a:t>Contents</a:t>
             </a:r>
           </a:p>
@@ -6205,19 +7354,6 @@
             <a:r>
               <a:rPr lang="en-AU" sz="2000" dirty="0"/>
               <a:t>Performance metrics</a:t>
-            </a:r>
-          </a:p>
-          <a:p>
-            <a:pPr marL="457200" indent="-457200">
-              <a:lnSpc>
-                <a:spcPct val="130000"/>
-              </a:lnSpc>
-              <a:buFont typeface="+mj-lt"/>
-              <a:buAutoNum type="arabicPeriod"/>
-            </a:pPr>
-            <a:r>
-              <a:rPr lang="en-AU" sz="2000" dirty="0"/>
-              <a:t>Results and discussion</a:t>
             </a:r>
           </a:p>
           <a:p>
@@ -6300,14 +7436,14 @@
           </a:ln>
           <a:extLst>
             <a:ext uri="{909E8E84-426E-40dd-AFC4-6F175D3DCCD1}">
-              <a14:hiddenFill xmlns="" xmlns:a14="http://schemas.microsoft.com/office/drawing/2010/main">
+              <a14:hiddenFill xmlns:a14="http://schemas.microsoft.com/office/drawing/2010/main" xmlns="">
                 <a:solidFill>
                   <a:srgbClr val="FFFFFF"/>
                 </a:solidFill>
               </a14:hiddenFill>
             </a:ext>
             <a:ext uri="{91240B29-F687-4f45-9708-019B960494DF}">
-              <a14:hiddenLine xmlns="" xmlns:a14="http://schemas.microsoft.com/office/drawing/2010/main" w="9525">
+              <a14:hiddenLine xmlns:a14="http://schemas.microsoft.com/office/drawing/2010/main" xmlns="" w="9525">
                 <a:solidFill>
                   <a:srgbClr val="000000"/>
                 </a:solidFill>
@@ -6335,7 +7471,7 @@
                 <a:latin typeface="Trebuchet MS" panose="020B0603020202020204" pitchFamily="34" charset="0"/>
                 <a:sym typeface="Tahoma Bold" charset="0"/>
               </a:rPr>
-              <a:t>For example: What is phishing?</a:t>
+              <a:t>What is the problem?</a:t>
             </a:r>
             <a:endParaRPr lang="en-US" sz="2000" b="1" dirty="0">
               <a:solidFill>
@@ -6376,7 +7512,11 @@
             </a:r>
             <a:r>
               <a:rPr lang="en-GB" sz="2800" dirty="0"/>
-              <a:t>. Introduction</a:t>
+              <a:t>. </a:t>
+            </a:r>
+            <a:r>
+              <a:rPr lang="en-GB" sz="2800" b="1" dirty="0"/>
+              <a:t>Introduction</a:t>
             </a:r>
           </a:p>
         </p:txBody>
@@ -6504,14 +7644,59 @@
             </a:lvl9pPr>
           </a:lstStyle>
           <a:p>
-            <a:pPr algn="just"/>
-            <a:r>
-              <a:rPr lang="en-US" sz="1600" dirty="0">
+            <a:pPr marL="285750" indent="-285750" algn="just">
+              <a:buFont typeface="Arial" panose="020B0604020202020204" pitchFamily="34" charset="0"/>
+              <a:buChar char="•"/>
+            </a:pPr>
+            <a:r>
+              <a:rPr lang="en-US" b="1" dirty="0">
                 <a:latin typeface="Trebuchet MS" panose="020B0603020202020204" pitchFamily="34" charset="0"/>
               </a:rPr>
-              <a:t>Definition.</a:t>
-            </a:r>
-            <a:endParaRPr lang="en-GB" sz="900" dirty="0">
+              <a:t>Detection</a:t>
+            </a:r>
+            <a:r>
+              <a:rPr lang="en-US" dirty="0">
+                <a:latin typeface="Trebuchet MS" panose="020B0603020202020204" pitchFamily="34" charset="0"/>
+              </a:rPr>
+              <a:t>, </a:t>
+            </a:r>
+            <a:r>
+              <a:rPr lang="en-US" b="1" dirty="0">
+                <a:latin typeface="Trebuchet MS" panose="020B0603020202020204" pitchFamily="34" charset="0"/>
+              </a:rPr>
+              <a:t>segmentation</a:t>
+            </a:r>
+            <a:r>
+              <a:rPr lang="en-US" dirty="0">
+                <a:latin typeface="Trebuchet MS" panose="020B0603020202020204" pitchFamily="34" charset="0"/>
+              </a:rPr>
+              <a:t> and </a:t>
+            </a:r>
+            <a:r>
+              <a:rPr lang="en-US" b="1" dirty="0">
+                <a:latin typeface="Trebuchet MS" panose="020B0603020202020204" pitchFamily="34" charset="0"/>
+              </a:rPr>
+              <a:t>distance estimation </a:t>
+            </a:r>
+            <a:r>
+              <a:rPr lang="en-US" dirty="0">
+                <a:latin typeface="Trebuchet MS" panose="020B0603020202020204" pitchFamily="34" charset="0"/>
+              </a:rPr>
+              <a:t>of rubber strips from </a:t>
+            </a:r>
+            <a:r>
+              <a:rPr lang="en-US" i="1" dirty="0">
+                <a:solidFill>
+                  <a:srgbClr val="FF0000"/>
+                </a:solidFill>
+                <a:latin typeface="Trebuchet MS" panose="020B0603020202020204" pitchFamily="34" charset="0"/>
+              </a:rPr>
+              <a:t>smartphone images</a:t>
+            </a:r>
+            <a:endParaRPr lang="en-GB" sz="1000" i="1" dirty="0">
+              <a:solidFill>
+                <a:srgbClr val="FF0000"/>
+              </a:solidFill>
               <a:latin typeface="Trebuchet MS" panose="020B0603020202020204" pitchFamily="34" charset="0"/>
             </a:endParaRPr>
           </a:p>
@@ -6545,14 +7730,14 @@
           </a:ln>
           <a:extLst>
             <a:ext uri="{909E8E84-426E-40dd-AFC4-6F175D3DCCD1}">
-              <a14:hiddenFill xmlns="" xmlns:a14="http://schemas.microsoft.com/office/drawing/2010/main">
+              <a14:hiddenFill xmlns:a14="http://schemas.microsoft.com/office/drawing/2010/main" xmlns="">
                 <a:solidFill>
                   <a:srgbClr val="FFFFFF"/>
                 </a:solidFill>
               </a14:hiddenFill>
             </a:ext>
             <a:ext uri="{91240B29-F687-4f45-9708-019B960494DF}">
-              <a14:hiddenLine xmlns="" xmlns:a14="http://schemas.microsoft.com/office/drawing/2010/main" w="9525">
+              <a14:hiddenLine xmlns:a14="http://schemas.microsoft.com/office/drawing/2010/main" xmlns="" w="9525">
                 <a:solidFill>
                   <a:srgbClr val="000000"/>
                 </a:solidFill>
@@ -6580,7 +7765,7 @@
                 <a:latin typeface="Trebuchet MS" panose="020B0603020202020204" pitchFamily="34" charset="0"/>
                 <a:sym typeface="Tahoma Bold" charset="0"/>
               </a:rPr>
-              <a:t>Why is important to detect phishing?</a:t>
+              <a:t>What is it challenging?</a:t>
             </a:r>
             <a:endParaRPr lang="en-US" sz="2000" b="1" dirty="0">
               <a:solidFill>
@@ -6609,7 +7794,7 @@
         <p:spPr>
           <a:xfrm>
             <a:off x="1434904" y="3324224"/>
-            <a:ext cx="6913398" cy="2752726"/>
+            <a:ext cx="6913398" cy="1247776"/>
           </a:xfrm>
           <a:prstGeom prst="rect">
             <a:avLst/>
@@ -6715,6 +7900,87 @@
             </a:lvl9pPr>
           </a:lstStyle>
           <a:p>
+            <a:pPr marL="285750" indent="-285750" algn="just">
+              <a:spcBef>
+                <a:spcPts val="600"/>
+              </a:spcBef>
+              <a:spcAft>
+                <a:spcPts val="600"/>
+              </a:spcAft>
+              <a:buFont typeface="Arial" panose="020B0604020202020204" pitchFamily="34" charset="0"/>
+              <a:buChar char="•"/>
+            </a:pPr>
+            <a:r>
+              <a:rPr lang="es-ES" dirty="0"/>
+              <a:t>📸 </a:t>
+            </a:r>
+            <a:r>
+              <a:rPr lang="en-US" dirty="0">
+                <a:latin typeface="Trebuchet MS" panose="020B0603020202020204" pitchFamily="34" charset="0"/>
+              </a:rPr>
+              <a:t>Real-world smartphone images</a:t>
+            </a:r>
+          </a:p>
+          <a:p>
+            <a:pPr marL="285750" indent="-285750" algn="just">
+              <a:spcBef>
+                <a:spcPts val="600"/>
+              </a:spcBef>
+              <a:spcAft>
+                <a:spcPts val="600"/>
+              </a:spcAft>
+              <a:buFont typeface="Arial" panose="020B0604020202020204" pitchFamily="34" charset="0"/>
+              <a:buChar char="•"/>
+            </a:pPr>
+            <a:r>
+              <a:rPr lang="es-ES" dirty="0"/>
+              <a:t>📐 </a:t>
+            </a:r>
+            <a:r>
+              <a:rPr lang="en-US" dirty="0">
+                <a:latin typeface="Trebuchet MS" panose="020B0603020202020204" pitchFamily="34" charset="0"/>
+              </a:rPr>
+              <a:t>Precise distance estimation</a:t>
+            </a:r>
+          </a:p>
+          <a:p>
+            <a:pPr marL="285750" indent="-285750" algn="just">
+              <a:spcBef>
+                <a:spcPts val="600"/>
+              </a:spcBef>
+              <a:spcAft>
+                <a:spcPts val="600"/>
+              </a:spcAft>
+              <a:buFont typeface="Arial" panose="020B0604020202020204" pitchFamily="34" charset="0"/>
+              <a:buChar char="•"/>
+            </a:pPr>
+            <a:r>
+              <a:rPr lang="es-ES" dirty="0"/>
+              <a:t>⚠️ </a:t>
+            </a:r>
+            <a:r>
+              <a:rPr lang="en-US" dirty="0">
+                <a:latin typeface="Trebuchet MS" panose="020B0603020202020204" pitchFamily="34" charset="0"/>
+              </a:rPr>
+              <a:t>Perspective, noise, variability</a:t>
+            </a:r>
+          </a:p>
+          <a:p>
+            <a:pPr marL="285750" indent="-285750" algn="just">
+              <a:spcBef>
+                <a:spcPts val="600"/>
+              </a:spcBef>
+              <a:spcAft>
+                <a:spcPts val="600"/>
+              </a:spcAft>
+              <a:buFont typeface="Arial" panose="020B0604020202020204" pitchFamily="34" charset="0"/>
+              <a:buChar char="•"/>
+            </a:pPr>
+            <a:endParaRPr lang="en-US" sz="1600" dirty="0">
+              <a:latin typeface="Trebuchet MS" panose="020B0603020202020204" pitchFamily="34" charset="0"/>
+            </a:endParaRPr>
+          </a:p>
+          <a:p>
             <a:pPr algn="just">
               <a:spcBef>
                 <a:spcPts val="600"/>
@@ -6723,12 +7989,61 @@
                 <a:spcPts val="600"/>
               </a:spcAft>
             </a:pPr>
-            <a:r>
-              <a:rPr lang="en-US" sz="1600" dirty="0">
-                <a:latin typeface="Trebuchet MS" panose="020B0603020202020204" pitchFamily="34" charset="0"/>
+            <a:endParaRPr lang="en-US" sz="1600" dirty="0">
+              <a:latin typeface="Trebuchet MS" panose="020B0603020202020204" pitchFamily="34" charset="0"/>
+            </a:endParaRPr>
+          </a:p>
+          <a:p>
+            <a:pPr algn="just"/>
+            <a:r>
+              <a:rPr lang="es-ES" altLang="es-ES" sz="2400" dirty="0">
+                <a:latin typeface="Times New Roman" panose="02020603050405020304" pitchFamily="18" charset="0"/>
+                <a:cs typeface="Times New Roman" panose="02020603050405020304" pitchFamily="18" charset="0"/>
               </a:rPr>
-              <a:t>Explanation</a:t>
-            </a:r>
+              <a:t>🤖 </a:t>
+            </a:r>
+            <a:r>
+              <a:rPr lang="es-ES" altLang="es-ES" sz="2400" b="1" dirty="0" err="1">
+                <a:solidFill>
+                  <a:srgbClr val="FF0000"/>
+                </a:solidFill>
+                <a:latin typeface="Times New Roman" panose="02020603050405020304" pitchFamily="18" charset="0"/>
+                <a:cs typeface="Times New Roman" panose="02020603050405020304" pitchFamily="18" charset="0"/>
+              </a:rPr>
+              <a:t>Solution</a:t>
+            </a:r>
+            <a:r>
+              <a:rPr lang="es-ES" altLang="es-ES" sz="2400" b="1" dirty="0">
+                <a:latin typeface="Times New Roman" panose="02020603050405020304" pitchFamily="18" charset="0"/>
+                <a:cs typeface="Times New Roman" panose="02020603050405020304" pitchFamily="18" charset="0"/>
+              </a:rPr>
+              <a:t>: </a:t>
+            </a:r>
+            <a:r>
+              <a:rPr lang="es-ES" altLang="es-ES" sz="2400" b="1" i="1" dirty="0" err="1">
+                <a:latin typeface="Times New Roman" panose="02020603050405020304" pitchFamily="18" charset="0"/>
+                <a:cs typeface="Times New Roman" panose="02020603050405020304" pitchFamily="18" charset="0"/>
+              </a:rPr>
+              <a:t>Classical</a:t>
+            </a:r>
+            <a:r>
+              <a:rPr lang="es-ES" altLang="es-ES" sz="2400" b="1" i="1" dirty="0">
+                <a:latin typeface="Times New Roman" panose="02020603050405020304" pitchFamily="18" charset="0"/>
+                <a:cs typeface="Times New Roman" panose="02020603050405020304" pitchFamily="18" charset="0"/>
+              </a:rPr>
+              <a:t> vs Deep </a:t>
+            </a:r>
+            <a:r>
+              <a:rPr lang="es-ES" altLang="es-ES" sz="2400" b="1" i="1" dirty="0" err="1">
+                <a:latin typeface="Times New Roman" panose="02020603050405020304" pitchFamily="18" charset="0"/>
+                <a:cs typeface="Times New Roman" panose="02020603050405020304" pitchFamily="18" charset="0"/>
+              </a:rPr>
+              <a:t>Learning</a:t>
+            </a:r>
+            <a:endParaRPr lang="es-ES" altLang="es-ES" sz="2400" i="1" dirty="0">
+              <a:latin typeface="Times New Roman" panose="02020603050405020304" pitchFamily="18" charset="0"/>
+              <a:cs typeface="Times New Roman" panose="02020603050405020304" pitchFamily="18" charset="0"/>
+            </a:endParaRPr>
           </a:p>
           <a:p>
             <a:pPr algn="just"/>
@@ -6747,6 +8062,36 @@
           </a:p>
         </p:txBody>
       </p:sp>
+      <p:pic>
+        <p:nvPicPr>
+          <p:cNvPr id="5" name="Imagen 4">
+            <a:extLst>
+              <a:ext uri="{FF2B5EF4-FFF2-40B4-BE49-F238E27FC236}">
+                <a16:creationId xmlns:a16="http://schemas.microsoft.com/office/drawing/2014/main" id="{B5F4D240-A666-B060-7926-33ACC95C3897}"/>
+              </a:ext>
+            </a:extLst>
+          </p:cNvPr>
+          <p:cNvPicPr>
+            <a:picLocks noChangeAspect="1"/>
+          </p:cNvPicPr>
+          <p:nvPr/>
+        </p:nvPicPr>
+        <p:blipFill>
+          <a:blip r:embed="rId3"/>
+          <a:stretch>
+            <a:fillRect/>
+          </a:stretch>
+        </p:blipFill>
+        <p:spPr>
+          <a:xfrm>
+            <a:off x="6666613" y="2752769"/>
+            <a:ext cx="1804031" cy="1814323"/>
+          </a:xfrm>
+          <a:prstGeom prst="rect">
+            <a:avLst/>
+          </a:prstGeom>
+        </p:spPr>
+      </p:pic>
     </p:spTree>
     <p:extLst>
       <p:ext uri="{BB962C8B-B14F-4D97-AF65-F5344CB8AC3E}">
@@ -6793,8 +8138,8 @@
         </p:nvSpPr>
         <p:spPr bwMode="auto">
           <a:xfrm>
-            <a:off x="855315" y="1570137"/>
-            <a:ext cx="1984728" cy="419100"/>
+            <a:off x="855314" y="1360587"/>
+            <a:ext cx="2686713" cy="419100"/>
           </a:xfrm>
           <a:prstGeom prst="rect">
             <a:avLst/>
@@ -6805,14 +8150,14 @@
           </a:ln>
           <a:extLst>
             <a:ext uri="{909E8E84-426E-40dd-AFC4-6F175D3DCCD1}">
-              <a14:hiddenFill xmlns:a14="http://schemas.microsoft.com/office/drawing/2010/main" xmlns="">
+              <a14:hiddenFill xmlns="" xmlns:a14="http://schemas.microsoft.com/office/drawing/2010/main">
                 <a:solidFill>
                   <a:srgbClr val="FFFFFF"/>
                 </a:solidFill>
               </a14:hiddenFill>
             </a:ext>
             <a:ext uri="{91240B29-F687-4f45-9708-019B960494DF}">
-              <a14:hiddenLine xmlns:a14="http://schemas.microsoft.com/office/drawing/2010/main" xmlns="" w="9525">
+              <a14:hiddenLine xmlns="" xmlns:a14="http://schemas.microsoft.com/office/drawing/2010/main" w="9525">
                 <a:solidFill>
                   <a:srgbClr val="000000"/>
                 </a:solidFill>
@@ -6840,7 +8185,7 @@
                 <a:latin typeface="Trebuchet MS" panose="020B0603020202020204" pitchFamily="34" charset="0"/>
                 <a:sym typeface="Tahoma Bold" charset="0"/>
               </a:rPr>
-              <a:t>Attack vectors</a:t>
+              <a:t>Main approaches</a:t>
             </a:r>
             <a:endParaRPr lang="en-US" sz="2000" b="1" dirty="0">
               <a:solidFill>
@@ -6852,748 +8197,6 @@
           </a:p>
         </p:txBody>
       </p:sp>
-      <p:grpSp>
-        <p:nvGrpSpPr>
-          <p:cNvPr id="29" name="Grupo 28">
-            <a:extLst>
-              <a:ext uri="{FF2B5EF4-FFF2-40B4-BE49-F238E27FC236}">
-                <a16:creationId xmlns:a16="http://schemas.microsoft.com/office/drawing/2014/main" id="{B662F074-C17E-42BD-B66E-E66ED34B91F6}"/>
-              </a:ext>
-            </a:extLst>
-          </p:cNvPr>
-          <p:cNvGrpSpPr/>
-          <p:nvPr/>
-        </p:nvGrpSpPr>
-        <p:grpSpPr>
-          <a:xfrm>
-            <a:off x="1010944" y="2119401"/>
-            <a:ext cx="792340" cy="1317554"/>
-            <a:chOff x="1451965" y="3000248"/>
-            <a:chExt cx="792340" cy="1317554"/>
-          </a:xfrm>
-        </p:grpSpPr>
-        <p:pic>
-          <p:nvPicPr>
-            <p:cNvPr id="3" name="Imagen 2">
-              <a:extLst>
-                <a:ext uri="{FF2B5EF4-FFF2-40B4-BE49-F238E27FC236}">
-                  <a16:creationId xmlns:a16="http://schemas.microsoft.com/office/drawing/2014/main" id="{B5C72196-3EC9-45F4-9E0C-8C040064C1B3}"/>
-                </a:ext>
-              </a:extLst>
-            </p:cNvPr>
-            <p:cNvPicPr>
-              <a:picLocks noChangeAspect="1"/>
-            </p:cNvPicPr>
-            <p:nvPr/>
-          </p:nvPicPr>
-          <p:blipFill>
-            <a:blip r:embed="rId3"/>
-            <a:stretch>
-              <a:fillRect/>
-            </a:stretch>
-          </p:blipFill>
-          <p:spPr>
-            <a:xfrm>
-              <a:off x="1451965" y="3536624"/>
-              <a:ext cx="781178" cy="781178"/>
-            </a:xfrm>
-            <a:prstGeom prst="rect">
-              <a:avLst/>
-            </a:prstGeom>
-          </p:spPr>
-        </p:pic>
-        <p:sp>
-          <p:nvSpPr>
-            <p:cNvPr id="11" name="Rectangle 29">
-              <a:extLst>
-                <a:ext uri="{FF2B5EF4-FFF2-40B4-BE49-F238E27FC236}">
-                  <a16:creationId xmlns:a16="http://schemas.microsoft.com/office/drawing/2014/main" id="{957F48E7-11E5-4FA5-8281-C00641C48211}"/>
-                </a:ext>
-              </a:extLst>
-            </p:cNvPr>
-            <p:cNvSpPr>
-              <a:spLocks/>
-            </p:cNvSpPr>
-            <p:nvPr/>
-          </p:nvSpPr>
-          <p:spPr bwMode="auto">
-            <a:xfrm>
-              <a:off x="1507352" y="3000248"/>
-              <a:ext cx="736953" cy="419100"/>
-            </a:xfrm>
-            <a:prstGeom prst="rect">
-              <a:avLst/>
-            </a:prstGeom>
-            <a:noFill/>
-            <a:ln>
-              <a:noFill/>
-            </a:ln>
-            <a:extLst>
-              <a:ext uri="{909E8E84-426E-40dd-AFC4-6F175D3DCCD1}">
-                <a14:hiddenFill xmlns:a14="http://schemas.microsoft.com/office/drawing/2010/main" xmlns="">
-                  <a:solidFill>
-                    <a:srgbClr val="FFFFFF"/>
-                  </a:solidFill>
-                </a14:hiddenFill>
-              </a:ext>
-              <a:ext uri="{91240B29-F687-4f45-9708-019B960494DF}">
-                <a14:hiddenLine xmlns:a14="http://schemas.microsoft.com/office/drawing/2010/main" xmlns="" w="9525">
-                  <a:solidFill>
-                    <a:srgbClr val="000000"/>
-                  </a:solidFill>
-                  <a:miter lim="800000"/>
-                  <a:headEnd/>
-                  <a:tailEnd/>
-                </a14:hiddenLine>
-              </a:ext>
-            </a:extLst>
-          </p:spPr>
-          <p:txBody>
-            <a:bodyPr lIns="38100" tIns="38100" rIns="38100" bIns="38100"/>
-            <a:lstStyle/>
-            <a:p>
-              <a:pPr>
-                <a:spcBef>
-                  <a:spcPts val="425"/>
-                </a:spcBef>
-              </a:pPr>
-              <a:r>
-                <a:rPr lang="en-US" b="1" dirty="0">
-                  <a:solidFill>
-                    <a:srgbClr val="FFC000"/>
-                  </a:solidFill>
-                  <a:latin typeface="Trebuchet MS" panose="020B0603020202020204" pitchFamily="34" charset="0"/>
-                  <a:sym typeface="Tahoma Bold" charset="0"/>
-                </a:rPr>
-                <a:t>Email</a:t>
-              </a:r>
-              <a:endParaRPr lang="en-US" b="1" dirty="0">
-                <a:solidFill>
-                  <a:srgbClr val="FFC000"/>
-                </a:solidFill>
-                <a:latin typeface="Trebuchet MS" panose="020B0603020202020204" pitchFamily="34" charset="0"/>
-                <a:sym typeface="Tahoma" charset="0"/>
-              </a:endParaRPr>
-            </a:p>
-          </p:txBody>
-        </p:sp>
-      </p:grpSp>
-      <p:grpSp>
-        <p:nvGrpSpPr>
-          <p:cNvPr id="31" name="Grupo 30">
-            <a:extLst>
-              <a:ext uri="{FF2B5EF4-FFF2-40B4-BE49-F238E27FC236}">
-                <a16:creationId xmlns:a16="http://schemas.microsoft.com/office/drawing/2014/main" id="{6C11CE61-3C5C-47BC-86FE-F2EF421C490F}"/>
-              </a:ext>
-            </a:extLst>
-          </p:cNvPr>
-          <p:cNvGrpSpPr/>
-          <p:nvPr/>
-        </p:nvGrpSpPr>
-        <p:grpSpPr>
-          <a:xfrm>
-            <a:off x="4171890" y="2061244"/>
-            <a:ext cx="1297781" cy="1452437"/>
-            <a:chOff x="3882237" y="2865365"/>
-            <a:chExt cx="1297781" cy="1452437"/>
-          </a:xfrm>
-        </p:grpSpPr>
-        <p:pic>
-          <p:nvPicPr>
-            <p:cNvPr id="5" name="Imagen 4">
-              <a:extLst>
-                <a:ext uri="{FF2B5EF4-FFF2-40B4-BE49-F238E27FC236}">
-                  <a16:creationId xmlns:a16="http://schemas.microsoft.com/office/drawing/2014/main" id="{6B760B2A-E784-4F31-BE7D-898CF673D6C9}"/>
-                </a:ext>
-              </a:extLst>
-            </p:cNvPr>
-            <p:cNvPicPr>
-              <a:picLocks noChangeAspect="1"/>
-            </p:cNvPicPr>
-            <p:nvPr/>
-          </p:nvPicPr>
-          <p:blipFill>
-            <a:blip r:embed="rId4"/>
-            <a:stretch>
-              <a:fillRect/>
-            </a:stretch>
-          </p:blipFill>
-          <p:spPr>
-            <a:xfrm>
-              <a:off x="4235728" y="3622782"/>
-              <a:ext cx="695020" cy="695020"/>
-            </a:xfrm>
-            <a:prstGeom prst="rect">
-              <a:avLst/>
-            </a:prstGeom>
-          </p:spPr>
-        </p:pic>
-        <p:sp>
-          <p:nvSpPr>
-            <p:cNvPr id="15" name="Rectangle 29">
-              <a:extLst>
-                <a:ext uri="{FF2B5EF4-FFF2-40B4-BE49-F238E27FC236}">
-                  <a16:creationId xmlns:a16="http://schemas.microsoft.com/office/drawing/2014/main" id="{DF643521-0CF7-4826-AA80-39DA39D11DDB}"/>
-                </a:ext>
-              </a:extLst>
-            </p:cNvPr>
-            <p:cNvSpPr>
-              <a:spLocks/>
-            </p:cNvSpPr>
-            <p:nvPr/>
-          </p:nvSpPr>
-          <p:spPr bwMode="auto">
-            <a:xfrm>
-              <a:off x="3882237" y="2865365"/>
-              <a:ext cx="1297781" cy="725306"/>
-            </a:xfrm>
-            <a:prstGeom prst="rect">
-              <a:avLst/>
-            </a:prstGeom>
-            <a:noFill/>
-            <a:ln>
-              <a:noFill/>
-            </a:ln>
-            <a:extLst>
-              <a:ext uri="{909E8E84-426E-40dd-AFC4-6F175D3DCCD1}">
-                <a14:hiddenFill xmlns:a14="http://schemas.microsoft.com/office/drawing/2010/main" xmlns="">
-                  <a:solidFill>
-                    <a:srgbClr val="FFFFFF"/>
-                  </a:solidFill>
-                </a14:hiddenFill>
-              </a:ext>
-              <a:ext uri="{91240B29-F687-4f45-9708-019B960494DF}">
-                <a14:hiddenLine xmlns:a14="http://schemas.microsoft.com/office/drawing/2010/main" xmlns="" w="9525">
-                  <a:solidFill>
-                    <a:srgbClr val="000000"/>
-                  </a:solidFill>
-                  <a:miter lim="800000"/>
-                  <a:headEnd/>
-                  <a:tailEnd/>
-                </a14:hiddenLine>
-              </a:ext>
-            </a:extLst>
-          </p:spPr>
-          <p:txBody>
-            <a:bodyPr lIns="38100" tIns="38100" rIns="38100" bIns="38100"/>
-            <a:lstStyle/>
-            <a:p>
-              <a:pPr algn="ctr"/>
-              <a:r>
-                <a:rPr lang="en-US" b="1" dirty="0">
-                  <a:solidFill>
-                    <a:srgbClr val="7030A0"/>
-                  </a:solidFill>
-                  <a:latin typeface="Trebuchet MS" panose="020B0603020202020204" pitchFamily="34" charset="0"/>
-                  <a:sym typeface="Tahoma Bold" charset="0"/>
-                </a:rPr>
-                <a:t>Instant</a:t>
-              </a:r>
-            </a:p>
-            <a:p>
-              <a:pPr algn="ctr"/>
-              <a:r>
-                <a:rPr lang="en-US" b="1" dirty="0">
-                  <a:solidFill>
-                    <a:srgbClr val="7030A0"/>
-                  </a:solidFill>
-                  <a:latin typeface="Trebuchet MS" panose="020B0603020202020204" pitchFamily="34" charset="0"/>
-                  <a:sym typeface="Tahoma Bold" charset="0"/>
-                </a:rPr>
-                <a:t>messaging</a:t>
-              </a:r>
-              <a:endParaRPr lang="en-US" b="1" dirty="0">
-                <a:solidFill>
-                  <a:srgbClr val="7030A0"/>
-                </a:solidFill>
-                <a:latin typeface="Trebuchet MS" panose="020B0603020202020204" pitchFamily="34" charset="0"/>
-                <a:sym typeface="Tahoma" charset="0"/>
-              </a:endParaRPr>
-            </a:p>
-          </p:txBody>
-        </p:sp>
-      </p:grpSp>
-      <p:grpSp>
-        <p:nvGrpSpPr>
-          <p:cNvPr id="64" name="Grupo 63">
-            <a:extLst>
-              <a:ext uri="{FF2B5EF4-FFF2-40B4-BE49-F238E27FC236}">
-                <a16:creationId xmlns:a16="http://schemas.microsoft.com/office/drawing/2014/main" id="{6BC3B53F-C5A1-4032-B6B5-C473B96A9621}"/>
-              </a:ext>
-            </a:extLst>
-          </p:cNvPr>
-          <p:cNvGrpSpPr/>
-          <p:nvPr/>
-        </p:nvGrpSpPr>
-        <p:grpSpPr>
-          <a:xfrm>
-            <a:off x="5867039" y="2239205"/>
-            <a:ext cx="946006" cy="1274476"/>
-            <a:chOff x="5525108" y="3028823"/>
-            <a:chExt cx="946006" cy="1274476"/>
-          </a:xfrm>
-        </p:grpSpPr>
-        <p:pic>
-          <p:nvPicPr>
-            <p:cNvPr id="12" name="Imagen 11">
-              <a:extLst>
-                <a:ext uri="{FF2B5EF4-FFF2-40B4-BE49-F238E27FC236}">
-                  <a16:creationId xmlns:a16="http://schemas.microsoft.com/office/drawing/2014/main" id="{CE408DA7-3E69-4DDD-B1FD-F4B793DF9F02}"/>
-                </a:ext>
-              </a:extLst>
-            </p:cNvPr>
-            <p:cNvPicPr>
-              <a:picLocks noChangeAspect="1"/>
-            </p:cNvPicPr>
-            <p:nvPr/>
-          </p:nvPicPr>
-          <p:blipFill>
-            <a:blip r:embed="rId5"/>
-            <a:stretch>
-              <a:fillRect/>
-            </a:stretch>
-          </p:blipFill>
-          <p:spPr>
-            <a:xfrm>
-              <a:off x="5629329" y="3608278"/>
-              <a:ext cx="695021" cy="695021"/>
-            </a:xfrm>
-            <a:prstGeom prst="rect">
-              <a:avLst/>
-            </a:prstGeom>
-          </p:spPr>
-        </p:pic>
-        <p:sp>
-          <p:nvSpPr>
-            <p:cNvPr id="19" name="Rectangle 29">
-              <a:extLst>
-                <a:ext uri="{FF2B5EF4-FFF2-40B4-BE49-F238E27FC236}">
-                  <a16:creationId xmlns:a16="http://schemas.microsoft.com/office/drawing/2014/main" id="{C9B50A1F-2F1E-4602-9716-8AD87BD376FF}"/>
-                </a:ext>
-              </a:extLst>
-            </p:cNvPr>
-            <p:cNvSpPr>
-              <a:spLocks/>
-            </p:cNvSpPr>
-            <p:nvPr/>
-          </p:nvSpPr>
-          <p:spPr bwMode="auto">
-            <a:xfrm>
-              <a:off x="5525108" y="3028823"/>
-              <a:ext cx="946006" cy="419100"/>
-            </a:xfrm>
-            <a:prstGeom prst="rect">
-              <a:avLst/>
-            </a:prstGeom>
-            <a:noFill/>
-            <a:ln>
-              <a:noFill/>
-            </a:ln>
-            <a:extLst>
-              <a:ext uri="{909E8E84-426E-40dd-AFC4-6F175D3DCCD1}">
-                <a14:hiddenFill xmlns:a14="http://schemas.microsoft.com/office/drawing/2010/main" xmlns="">
-                  <a:solidFill>
-                    <a:srgbClr val="FFFFFF"/>
-                  </a:solidFill>
-                </a14:hiddenFill>
-              </a:ext>
-              <a:ext uri="{91240B29-F687-4f45-9708-019B960494DF}">
-                <a14:hiddenLine xmlns:a14="http://schemas.microsoft.com/office/drawing/2010/main" xmlns="" w="9525">
-                  <a:solidFill>
-                    <a:srgbClr val="000000"/>
-                  </a:solidFill>
-                  <a:miter lim="800000"/>
-                  <a:headEnd/>
-                  <a:tailEnd/>
-                </a14:hiddenLine>
-              </a:ext>
-            </a:extLst>
-          </p:spPr>
-          <p:txBody>
-            <a:bodyPr lIns="38100" tIns="38100" rIns="38100" bIns="38100"/>
-            <a:lstStyle/>
-            <a:p>
-              <a:pPr>
-                <a:spcBef>
-                  <a:spcPts val="425"/>
-                </a:spcBef>
-              </a:pPr>
-              <a:r>
-                <a:rPr lang="en-US" b="1" dirty="0">
-                  <a:solidFill>
-                    <a:schemeClr val="bg1">
-                      <a:lumMod val="50000"/>
-                    </a:schemeClr>
-                  </a:solidFill>
-                  <a:latin typeface="Trebuchet MS" panose="020B0603020202020204" pitchFamily="34" charset="0"/>
-                  <a:sym typeface="Tahoma Bold" charset="0"/>
-                </a:rPr>
-                <a:t>Vishing</a:t>
-              </a:r>
-              <a:endParaRPr lang="en-US" b="1" dirty="0">
-                <a:solidFill>
-                  <a:schemeClr val="bg1">
-                    <a:lumMod val="50000"/>
-                  </a:schemeClr>
-                </a:solidFill>
-                <a:latin typeface="Trebuchet MS" panose="020B0603020202020204" pitchFamily="34" charset="0"/>
-                <a:sym typeface="Tahoma" charset="0"/>
-              </a:endParaRPr>
-            </a:p>
-          </p:txBody>
-        </p:sp>
-      </p:grpSp>
-      <p:grpSp>
-        <p:nvGrpSpPr>
-          <p:cNvPr id="65" name="Grupo 64">
-            <a:extLst>
-              <a:ext uri="{FF2B5EF4-FFF2-40B4-BE49-F238E27FC236}">
-                <a16:creationId xmlns:a16="http://schemas.microsoft.com/office/drawing/2014/main" id="{94733B88-1BB5-47AD-B78E-B823C943364D}"/>
-              </a:ext>
-            </a:extLst>
-          </p:cNvPr>
-          <p:cNvGrpSpPr/>
-          <p:nvPr/>
-        </p:nvGrpSpPr>
-        <p:grpSpPr>
-          <a:xfrm>
-            <a:off x="7392122" y="2277433"/>
-            <a:ext cx="736953" cy="1236248"/>
-            <a:chOff x="7001963" y="3038475"/>
-            <a:chExt cx="736953" cy="1236248"/>
-          </a:xfrm>
-        </p:grpSpPr>
-        <p:pic>
-          <p:nvPicPr>
-            <p:cNvPr id="17" name="Imagen 16">
-              <a:extLst>
-                <a:ext uri="{FF2B5EF4-FFF2-40B4-BE49-F238E27FC236}">
-                  <a16:creationId xmlns:a16="http://schemas.microsoft.com/office/drawing/2014/main" id="{B8B7AD61-E156-4C46-9050-C5EE6A5CE871}"/>
-                </a:ext>
-              </a:extLst>
-            </p:cNvPr>
-            <p:cNvPicPr>
-              <a:picLocks noChangeAspect="1"/>
-            </p:cNvPicPr>
-            <p:nvPr/>
-          </p:nvPicPr>
-          <p:blipFill>
-            <a:blip r:embed="rId6"/>
-            <a:stretch>
-              <a:fillRect/>
-            </a:stretch>
-          </p:blipFill>
-          <p:spPr>
-            <a:xfrm>
-              <a:off x="7022930" y="3579703"/>
-              <a:ext cx="695020" cy="695020"/>
-            </a:xfrm>
-            <a:prstGeom prst="rect">
-              <a:avLst/>
-            </a:prstGeom>
-          </p:spPr>
-        </p:pic>
-        <p:sp>
-          <p:nvSpPr>
-            <p:cNvPr id="22" name="Rectangle 29">
-              <a:extLst>
-                <a:ext uri="{FF2B5EF4-FFF2-40B4-BE49-F238E27FC236}">
-                  <a16:creationId xmlns:a16="http://schemas.microsoft.com/office/drawing/2014/main" id="{3E99EBD0-9176-4EC7-B559-5B06AD4FC2DF}"/>
-                </a:ext>
-              </a:extLst>
-            </p:cNvPr>
-            <p:cNvSpPr>
-              <a:spLocks/>
-            </p:cNvSpPr>
-            <p:nvPr/>
-          </p:nvSpPr>
-          <p:spPr bwMode="auto">
-            <a:xfrm>
-              <a:off x="7001963" y="3038475"/>
-              <a:ext cx="736953" cy="419100"/>
-            </a:xfrm>
-            <a:prstGeom prst="rect">
-              <a:avLst/>
-            </a:prstGeom>
-            <a:noFill/>
-            <a:ln>
-              <a:noFill/>
-            </a:ln>
-            <a:extLst>
-              <a:ext uri="{909E8E84-426E-40dd-AFC4-6F175D3DCCD1}">
-                <a14:hiddenFill xmlns:a14="http://schemas.microsoft.com/office/drawing/2010/main" xmlns="">
-                  <a:solidFill>
-                    <a:srgbClr val="FFFFFF"/>
-                  </a:solidFill>
-                </a14:hiddenFill>
-              </a:ext>
-              <a:ext uri="{91240B29-F687-4f45-9708-019B960494DF}">
-                <a14:hiddenLine xmlns:a14="http://schemas.microsoft.com/office/drawing/2010/main" xmlns="" w="9525">
-                  <a:solidFill>
-                    <a:srgbClr val="000000"/>
-                  </a:solidFill>
-                  <a:miter lim="800000"/>
-                  <a:headEnd/>
-                  <a:tailEnd/>
-                </a14:hiddenLine>
-              </a:ext>
-            </a:extLst>
-          </p:spPr>
-          <p:txBody>
-            <a:bodyPr lIns="38100" tIns="38100" rIns="38100" bIns="38100"/>
-            <a:lstStyle/>
-            <a:p>
-              <a:pPr>
-                <a:spcBef>
-                  <a:spcPts val="425"/>
-                </a:spcBef>
-              </a:pPr>
-              <a:r>
-                <a:rPr lang="en-US" b="1" dirty="0">
-                  <a:solidFill>
-                    <a:srgbClr val="0070C0"/>
-                  </a:solidFill>
-                  <a:latin typeface="Trebuchet MS" panose="020B0603020202020204" pitchFamily="34" charset="0"/>
-                  <a:sym typeface="Tahoma Bold" charset="0"/>
-                </a:rPr>
-                <a:t>Wi-Fi</a:t>
-              </a:r>
-              <a:endParaRPr lang="en-US" b="1" dirty="0">
-                <a:solidFill>
-                  <a:srgbClr val="0070C0"/>
-                </a:solidFill>
-                <a:latin typeface="Trebuchet MS" panose="020B0603020202020204" pitchFamily="34" charset="0"/>
-                <a:sym typeface="Tahoma" charset="0"/>
-              </a:endParaRPr>
-            </a:p>
-          </p:txBody>
-        </p:sp>
-      </p:grpSp>
-      <p:grpSp>
-        <p:nvGrpSpPr>
-          <p:cNvPr id="30" name="Grupo 29">
-            <a:extLst>
-              <a:ext uri="{FF2B5EF4-FFF2-40B4-BE49-F238E27FC236}">
-                <a16:creationId xmlns:a16="http://schemas.microsoft.com/office/drawing/2014/main" id="{22B1D300-FF36-4D1F-91D3-DA872E9E889E}"/>
-              </a:ext>
-            </a:extLst>
-          </p:cNvPr>
-          <p:cNvGrpSpPr/>
-          <p:nvPr/>
-        </p:nvGrpSpPr>
-        <p:grpSpPr>
-          <a:xfrm>
-            <a:off x="2635649" y="2123041"/>
-            <a:ext cx="1078924" cy="1317554"/>
-            <a:chOff x="2630768" y="3000248"/>
-            <a:chExt cx="1078924" cy="1317554"/>
-          </a:xfrm>
-        </p:grpSpPr>
-        <p:pic>
-          <p:nvPicPr>
-            <p:cNvPr id="20" name="Imagen 19">
-              <a:extLst>
-                <a:ext uri="{FF2B5EF4-FFF2-40B4-BE49-F238E27FC236}">
-                  <a16:creationId xmlns:a16="http://schemas.microsoft.com/office/drawing/2014/main" id="{3D7BEBA0-4048-4C14-8411-005573BC1AC9}"/>
-                </a:ext>
-              </a:extLst>
-            </p:cNvPr>
-            <p:cNvPicPr>
-              <a:picLocks noChangeAspect="1"/>
-            </p:cNvPicPr>
-            <p:nvPr/>
-          </p:nvPicPr>
-          <p:blipFill>
-            <a:blip r:embed="rId7"/>
-            <a:stretch>
-              <a:fillRect/>
-            </a:stretch>
-          </p:blipFill>
-          <p:spPr>
-            <a:xfrm>
-              <a:off x="2755969" y="3536624"/>
-              <a:ext cx="781178" cy="781178"/>
-            </a:xfrm>
-            <a:prstGeom prst="rect">
-              <a:avLst/>
-            </a:prstGeom>
-          </p:spPr>
-        </p:pic>
-        <p:sp>
-          <p:nvSpPr>
-            <p:cNvPr id="25" name="Rectangle 29">
-              <a:extLst>
-                <a:ext uri="{FF2B5EF4-FFF2-40B4-BE49-F238E27FC236}">
-                  <a16:creationId xmlns:a16="http://schemas.microsoft.com/office/drawing/2014/main" id="{9683CA6B-FF53-40C3-AA8E-5EBC2BEF484F}"/>
-                </a:ext>
-              </a:extLst>
-            </p:cNvPr>
-            <p:cNvSpPr>
-              <a:spLocks/>
-            </p:cNvSpPr>
-            <p:nvPr/>
-          </p:nvSpPr>
-          <p:spPr bwMode="auto">
-            <a:xfrm>
-              <a:off x="2630768" y="3000248"/>
-              <a:ext cx="1078924" cy="419100"/>
-            </a:xfrm>
-            <a:prstGeom prst="rect">
-              <a:avLst/>
-            </a:prstGeom>
-            <a:noFill/>
-            <a:ln>
-              <a:noFill/>
-            </a:ln>
-            <a:extLst>
-              <a:ext uri="{909E8E84-426E-40dd-AFC4-6F175D3DCCD1}">
-                <a14:hiddenFill xmlns:a14="http://schemas.microsoft.com/office/drawing/2010/main" xmlns="">
-                  <a:solidFill>
-                    <a:srgbClr val="FFFFFF"/>
-                  </a:solidFill>
-                </a14:hiddenFill>
-              </a:ext>
-              <a:ext uri="{91240B29-F687-4f45-9708-019B960494DF}">
-                <a14:hiddenLine xmlns:a14="http://schemas.microsoft.com/office/drawing/2010/main" xmlns="" w="9525">
-                  <a:solidFill>
-                    <a:srgbClr val="000000"/>
-                  </a:solidFill>
-                  <a:miter lim="800000"/>
-                  <a:headEnd/>
-                  <a:tailEnd/>
-                </a14:hiddenLine>
-              </a:ext>
-            </a:extLst>
-          </p:spPr>
-          <p:txBody>
-            <a:bodyPr lIns="38100" tIns="38100" rIns="38100" bIns="38100"/>
-            <a:lstStyle/>
-            <a:p>
-              <a:pPr>
-                <a:spcBef>
-                  <a:spcPts val="425"/>
-                </a:spcBef>
-              </a:pPr>
-              <a:r>
-                <a:rPr lang="en-US" b="1" dirty="0">
-                  <a:solidFill>
-                    <a:srgbClr val="00B050"/>
-                  </a:solidFill>
-                  <a:latin typeface="Trebuchet MS" panose="020B0603020202020204" pitchFamily="34" charset="0"/>
-                  <a:sym typeface="Tahoma Bold" charset="0"/>
-                </a:rPr>
-                <a:t>Smishing</a:t>
-              </a:r>
-              <a:endParaRPr lang="en-US" b="1" dirty="0">
-                <a:solidFill>
-                  <a:srgbClr val="00B050"/>
-                </a:solidFill>
-                <a:latin typeface="Trebuchet MS" panose="020B0603020202020204" pitchFamily="34" charset="0"/>
-                <a:sym typeface="Tahoma" charset="0"/>
-              </a:endParaRPr>
-            </a:p>
-          </p:txBody>
-        </p:sp>
-      </p:grpSp>
-      <p:pic>
-        <p:nvPicPr>
-          <p:cNvPr id="26" name="Imagen 25">
-            <a:extLst>
-              <a:ext uri="{FF2B5EF4-FFF2-40B4-BE49-F238E27FC236}">
-                <a16:creationId xmlns:a16="http://schemas.microsoft.com/office/drawing/2014/main" id="{4A994537-493A-44A7-BD7A-B8125071B74A}"/>
-              </a:ext>
-            </a:extLst>
-          </p:cNvPr>
-          <p:cNvPicPr>
-            <a:picLocks noChangeAspect="1"/>
-          </p:cNvPicPr>
-          <p:nvPr/>
-        </p:nvPicPr>
-        <p:blipFill>
-          <a:blip r:embed="rId8"/>
-          <a:stretch>
-            <a:fillRect/>
-          </a:stretch>
-        </p:blipFill>
-        <p:spPr>
-          <a:xfrm>
-            <a:off x="887269" y="3832159"/>
-            <a:ext cx="1920820" cy="1298718"/>
-          </a:xfrm>
-          <a:prstGeom prst="rect">
-            <a:avLst/>
-          </a:prstGeom>
-          <a:ln w="19050">
-            <a:solidFill>
-              <a:schemeClr val="tx1"/>
-            </a:solidFill>
-          </a:ln>
-        </p:spPr>
-      </p:pic>
-      <p:pic>
-        <p:nvPicPr>
-          <p:cNvPr id="28" name="Imagen 27">
-            <a:extLst>
-              <a:ext uri="{FF2B5EF4-FFF2-40B4-BE49-F238E27FC236}">
-                <a16:creationId xmlns:a16="http://schemas.microsoft.com/office/drawing/2014/main" id="{B9778695-37B1-45C4-83ED-5CA3B793B83B}"/>
-              </a:ext>
-            </a:extLst>
-          </p:cNvPr>
-          <p:cNvPicPr>
-            <a:picLocks noChangeAspect="1"/>
-          </p:cNvPicPr>
-          <p:nvPr/>
-        </p:nvPicPr>
-        <p:blipFill>
-          <a:blip r:embed="rId9"/>
-          <a:stretch>
-            <a:fillRect/>
-          </a:stretch>
-        </p:blipFill>
-        <p:spPr>
-          <a:xfrm>
-            <a:off x="3391127" y="3832159"/>
-            <a:ext cx="1724780" cy="1298718"/>
-          </a:xfrm>
-          <a:prstGeom prst="rect">
-            <a:avLst/>
-          </a:prstGeom>
-        </p:spPr>
-      </p:pic>
-      <p:pic>
-        <p:nvPicPr>
-          <p:cNvPr id="67" name="Imagen 66">
-            <a:extLst>
-              <a:ext uri="{FF2B5EF4-FFF2-40B4-BE49-F238E27FC236}">
-                <a16:creationId xmlns:a16="http://schemas.microsoft.com/office/drawing/2014/main" id="{E4B95E15-3418-49DD-91A9-F5D2D2F08637}"/>
-              </a:ext>
-            </a:extLst>
-          </p:cNvPr>
-          <p:cNvPicPr>
-            <a:picLocks noChangeAspect="1"/>
-          </p:cNvPicPr>
-          <p:nvPr/>
-        </p:nvPicPr>
-        <p:blipFill rotWithShape="1">
-          <a:blip r:embed="rId10"/>
-          <a:srcRect r="18272"/>
-          <a:stretch/>
-        </p:blipFill>
-        <p:spPr>
-          <a:xfrm>
-            <a:off x="5971260" y="3832159"/>
-            <a:ext cx="1896239" cy="1298718"/>
-          </a:xfrm>
-          <a:prstGeom prst="rect">
-            <a:avLst/>
-          </a:prstGeom>
-          <a:ln w="19050">
-            <a:solidFill>
-              <a:schemeClr val="tx1"/>
-            </a:solidFill>
-          </a:ln>
-        </p:spPr>
-      </p:pic>
       <p:sp>
         <p:nvSpPr>
           <p:cNvPr id="24" name="Title 1">
@@ -7640,13 +8243,308 @@
           <a:p>
             <a:pPr algn="l"/>
             <a:r>
-              <a:rPr lang="is-IS" sz="2800"/>
+              <a:rPr lang="is-IS" sz="2800" dirty="0"/>
               <a:t>1</a:t>
             </a:r>
             <a:r>
               <a:rPr lang="en-GB" sz="2800" dirty="0"/>
-              <a:t>. Introduction</a:t>
-            </a:r>
+              <a:t>. </a:t>
+            </a:r>
+            <a:r>
+              <a:rPr lang="en-GB" sz="2800" b="1" dirty="0"/>
+              <a:t>Introduction:</a:t>
+            </a:r>
+            <a:r>
+              <a:rPr lang="en-GB" sz="2800" dirty="0"/>
+              <a:t> </a:t>
+            </a:r>
+            <a:r>
+              <a:rPr lang="en-GB" sz="2800" b="1" i="1" dirty="0"/>
+              <a:t>State of the art</a:t>
+            </a:r>
+          </a:p>
+        </p:txBody>
+      </p:sp>
+      <p:pic>
+        <p:nvPicPr>
+          <p:cNvPr id="14" name="Imagen 13">
+            <a:extLst>
+              <a:ext uri="{FF2B5EF4-FFF2-40B4-BE49-F238E27FC236}">
+                <a16:creationId xmlns:a16="http://schemas.microsoft.com/office/drawing/2014/main" id="{B583089D-923E-3164-3740-208DFD3D093A}"/>
+              </a:ext>
+            </a:extLst>
+          </p:cNvPr>
+          <p:cNvPicPr>
+            <a:picLocks noChangeAspect="1"/>
+          </p:cNvPicPr>
+          <p:nvPr/>
+        </p:nvPicPr>
+        <p:blipFill>
+          <a:blip r:embed="rId3"/>
+          <a:srcRect t="12789" b="12342"/>
+          <a:stretch>
+            <a:fillRect/>
+          </a:stretch>
+        </p:blipFill>
+        <p:spPr>
+          <a:xfrm>
+            <a:off x="2785730" y="3154290"/>
+            <a:ext cx="6358270" cy="3173562"/>
+          </a:xfrm>
+          <a:prstGeom prst="rect">
+            <a:avLst/>
+          </a:prstGeom>
+        </p:spPr>
+      </p:pic>
+      <p:sp>
+        <p:nvSpPr>
+          <p:cNvPr id="2" name="Content Placeholder 2">
+            <a:extLst>
+              <a:ext uri="{FF2B5EF4-FFF2-40B4-BE49-F238E27FC236}">
+                <a16:creationId xmlns:a16="http://schemas.microsoft.com/office/drawing/2014/main" id="{36EFA760-A147-EC20-DAA4-501D805D6A9C}"/>
+              </a:ext>
+            </a:extLst>
+          </p:cNvPr>
+          <p:cNvSpPr txBox="1">
+            <a:spLocks/>
+          </p:cNvSpPr>
+          <p:nvPr/>
+        </p:nvSpPr>
+        <p:spPr>
+          <a:xfrm>
+            <a:off x="846302" y="1892212"/>
+            <a:ext cx="6913398" cy="2736334"/>
+          </a:xfrm>
+          <a:prstGeom prst="rect">
+            <a:avLst/>
+          </a:prstGeom>
+        </p:spPr>
+        <p:txBody>
+          <a:bodyPr vert="horz" lIns="91440" tIns="45720" rIns="91440" bIns="45720" rtlCol="0">
+            <a:noAutofit/>
+          </a:bodyPr>
+          <a:lstStyle>
+            <a:defPPr>
+              <a:defRPr lang="en-US"/>
+            </a:defPPr>
+            <a:lvl1pPr marL="0" algn="l" defTabSz="457200" rtl="0" eaLnBrk="1" latinLnBrk="0" hangingPunct="1">
+              <a:defRPr sz="1800" kern="1200">
+                <a:solidFill>
+                  <a:schemeClr val="tx1"/>
+                </a:solidFill>
+                <a:latin typeface="+mn-lt"/>
+                <a:ea typeface="+mn-ea"/>
+                <a:cs typeface="+mn-cs"/>
+              </a:defRPr>
+            </a:lvl1pPr>
+            <a:lvl2pPr marL="457200" algn="l" defTabSz="457200" rtl="0" eaLnBrk="1" latinLnBrk="0" hangingPunct="1">
+              <a:defRPr sz="1800" kern="1200">
+                <a:solidFill>
+                  <a:schemeClr val="tx1"/>
+                </a:solidFill>
+                <a:latin typeface="+mn-lt"/>
+                <a:ea typeface="+mn-ea"/>
+                <a:cs typeface="+mn-cs"/>
+              </a:defRPr>
+            </a:lvl2pPr>
+            <a:lvl3pPr marL="914400" algn="l" defTabSz="457200" rtl="0" eaLnBrk="1" latinLnBrk="0" hangingPunct="1">
+              <a:defRPr sz="1800" kern="1200">
+                <a:solidFill>
+                  <a:schemeClr val="tx1"/>
+                </a:solidFill>
+                <a:latin typeface="+mn-lt"/>
+                <a:ea typeface="+mn-ea"/>
+                <a:cs typeface="+mn-cs"/>
+              </a:defRPr>
+            </a:lvl3pPr>
+            <a:lvl4pPr marL="1371600" algn="l" defTabSz="457200" rtl="0" eaLnBrk="1" latinLnBrk="0" hangingPunct="1">
+              <a:defRPr sz="1800" kern="1200">
+                <a:solidFill>
+                  <a:schemeClr val="tx1"/>
+                </a:solidFill>
+                <a:latin typeface="+mn-lt"/>
+                <a:ea typeface="+mn-ea"/>
+                <a:cs typeface="+mn-cs"/>
+              </a:defRPr>
+            </a:lvl4pPr>
+            <a:lvl5pPr marL="1828800" algn="l" defTabSz="457200" rtl="0" eaLnBrk="1" latinLnBrk="0" hangingPunct="1">
+              <a:defRPr sz="1800" kern="1200">
+                <a:solidFill>
+                  <a:schemeClr val="tx1"/>
+                </a:solidFill>
+                <a:latin typeface="+mn-lt"/>
+                <a:ea typeface="+mn-ea"/>
+                <a:cs typeface="+mn-cs"/>
+              </a:defRPr>
+            </a:lvl5pPr>
+            <a:lvl6pPr marL="2286000" algn="l" defTabSz="457200" rtl="0" eaLnBrk="1" latinLnBrk="0" hangingPunct="1">
+              <a:defRPr sz="1800" kern="1200">
+                <a:solidFill>
+                  <a:schemeClr val="tx1"/>
+                </a:solidFill>
+                <a:latin typeface="+mn-lt"/>
+                <a:ea typeface="+mn-ea"/>
+                <a:cs typeface="+mn-cs"/>
+              </a:defRPr>
+            </a:lvl6pPr>
+            <a:lvl7pPr marL="2743200" algn="l" defTabSz="457200" rtl="0" eaLnBrk="1" latinLnBrk="0" hangingPunct="1">
+              <a:defRPr sz="1800" kern="1200">
+                <a:solidFill>
+                  <a:schemeClr val="tx1"/>
+                </a:solidFill>
+                <a:latin typeface="+mn-lt"/>
+                <a:ea typeface="+mn-ea"/>
+                <a:cs typeface="+mn-cs"/>
+              </a:defRPr>
+            </a:lvl7pPr>
+            <a:lvl8pPr marL="3200400" algn="l" defTabSz="457200" rtl="0" eaLnBrk="1" latinLnBrk="0" hangingPunct="1">
+              <a:defRPr sz="1800" kern="1200">
+                <a:solidFill>
+                  <a:schemeClr val="tx1"/>
+                </a:solidFill>
+                <a:latin typeface="+mn-lt"/>
+                <a:ea typeface="+mn-ea"/>
+                <a:cs typeface="+mn-cs"/>
+              </a:defRPr>
+            </a:lvl8pPr>
+            <a:lvl9pPr marL="3657600" algn="l" defTabSz="457200" rtl="0" eaLnBrk="1" latinLnBrk="0" hangingPunct="1">
+              <a:defRPr sz="1800" kern="1200">
+                <a:solidFill>
+                  <a:schemeClr val="tx1"/>
+                </a:solidFill>
+                <a:latin typeface="+mn-lt"/>
+                <a:ea typeface="+mn-ea"/>
+                <a:cs typeface="+mn-cs"/>
+              </a:defRPr>
+            </a:lvl9pPr>
+          </a:lstStyle>
+          <a:p>
+            <a:pPr algn="just">
+              <a:spcBef>
+                <a:spcPts val="600"/>
+              </a:spcBef>
+              <a:spcAft>
+                <a:spcPts val="600"/>
+              </a:spcAft>
+            </a:pPr>
+            <a:r>
+              <a:rPr lang="en-US" dirty="0"/>
+              <a:t>🟢 </a:t>
+            </a:r>
+            <a:r>
+              <a:rPr lang="en-US" b="1" i="1" dirty="0">
+                <a:latin typeface="Trebuchet MS" panose="020B0603020202020204" pitchFamily="34" charset="0"/>
+              </a:rPr>
+              <a:t>Segmentation</a:t>
+            </a:r>
+            <a:endParaRPr lang="en-US" dirty="0"/>
+          </a:p>
+          <a:p>
+            <a:pPr algn="just">
+              <a:spcBef>
+                <a:spcPts val="600"/>
+              </a:spcBef>
+              <a:spcAft>
+                <a:spcPts val="600"/>
+              </a:spcAft>
+            </a:pPr>
+            <a:r>
+              <a:rPr lang="en-US" dirty="0"/>
+              <a:t>🔵 </a:t>
+            </a:r>
+            <a:r>
+              <a:rPr lang="en-US" b="1" i="1" dirty="0">
+                <a:latin typeface="Trebuchet MS" panose="020B0603020202020204" pitchFamily="34" charset="0"/>
+              </a:rPr>
+              <a:t>Detection</a:t>
+            </a:r>
+            <a:endParaRPr lang="en-US" dirty="0"/>
+          </a:p>
+          <a:p>
+            <a:pPr algn="just">
+              <a:spcBef>
+                <a:spcPts val="600"/>
+              </a:spcBef>
+              <a:spcAft>
+                <a:spcPts val="600"/>
+              </a:spcAft>
+            </a:pPr>
+            <a:r>
+              <a:rPr lang="en-US" dirty="0"/>
+              <a:t>🔴 </a:t>
+            </a:r>
+            <a:r>
+              <a:rPr lang="en-US" b="1" i="1" dirty="0">
+                <a:latin typeface="Trebuchet MS" panose="020B0603020202020204" pitchFamily="34" charset="0"/>
+              </a:rPr>
+              <a:t>Anomaly</a:t>
+            </a:r>
+            <a:r>
+              <a:rPr lang="en-US" dirty="0"/>
+              <a:t> </a:t>
+            </a:r>
+            <a:r>
+              <a:rPr lang="en-US" b="1" i="1" dirty="0">
+                <a:latin typeface="Trebuchet MS" panose="020B0603020202020204" pitchFamily="34" charset="0"/>
+              </a:rPr>
+              <a:t>Detection</a:t>
+            </a:r>
+            <a:r>
+              <a:rPr lang="en-US" dirty="0"/>
+              <a:t>  </a:t>
+            </a:r>
+          </a:p>
+          <a:p>
+            <a:pPr algn="just">
+              <a:spcBef>
+                <a:spcPts val="600"/>
+              </a:spcBef>
+              <a:spcAft>
+                <a:spcPts val="600"/>
+              </a:spcAft>
+            </a:pPr>
+            <a:r>
+              <a:rPr lang="en-US" dirty="0"/>
+              <a:t>🟠 </a:t>
+            </a:r>
+            <a:r>
+              <a:rPr lang="en-US" b="1" i="1" dirty="0">
+                <a:latin typeface="Trebuchet MS" panose="020B0603020202020204" pitchFamily="34" charset="0"/>
+              </a:rPr>
+              <a:t>Calibration</a:t>
+            </a:r>
+            <a:endParaRPr lang="en-US" sz="1600" b="1" i="1" dirty="0">
+              <a:latin typeface="Trebuchet MS" panose="020B0603020202020204" pitchFamily="34" charset="0"/>
+            </a:endParaRPr>
+          </a:p>
+          <a:p>
+            <a:pPr algn="just">
+              <a:spcBef>
+                <a:spcPts val="600"/>
+              </a:spcBef>
+              <a:spcAft>
+                <a:spcPts val="600"/>
+              </a:spcAft>
+            </a:pPr>
+            <a:endParaRPr lang="es-ES" altLang="es-ES" sz="2400" i="1" dirty="0">
+              <a:latin typeface="Times New Roman" panose="02020603050405020304" pitchFamily="18" charset="0"/>
+              <a:cs typeface="Times New Roman" panose="02020603050405020304" pitchFamily="18" charset="0"/>
+            </a:endParaRPr>
+          </a:p>
+          <a:p>
+            <a:pPr algn="just"/>
+            <a:endParaRPr lang="en-US" sz="1600" dirty="0">
+              <a:latin typeface="Trebuchet MS" panose="020B0603020202020204" pitchFamily="34" charset="0"/>
+            </a:endParaRPr>
+          </a:p>
+          <a:p>
+            <a:pPr marL="285750" indent="-285750" algn="just">
+              <a:buFont typeface="Arial" panose="020B0604020202020204" pitchFamily="34" charset="0"/>
+              <a:buChar char="•"/>
+            </a:pPr>
+            <a:endParaRPr lang="en-GB" sz="900" dirty="0">
+              <a:latin typeface="Trebuchet MS" panose="020B0603020202020204" pitchFamily="34" charset="0"/>
+            </a:endParaRPr>
           </a:p>
         </p:txBody>
       </p:sp>
@@ -7660,324 +8558,6 @@
   <p:clrMapOvr>
     <a:masterClrMapping/>
   </p:clrMapOvr>
-  <p:timing>
-    <p:tnLst>
-      <p:par>
-        <p:cTn id="1" dur="indefinite" restart="never" nodeType="tmRoot">
-          <p:childTnLst>
-            <p:seq concurrent="1" nextAc="seek">
-              <p:cTn id="2" dur="indefinite" nodeType="mainSeq">
-                <p:childTnLst>
-                  <p:par>
-                    <p:cTn id="3" fill="hold">
-                      <p:stCondLst>
-                        <p:cond delay="indefinite"/>
-                      </p:stCondLst>
-                      <p:childTnLst>
-                        <p:par>
-                          <p:cTn id="4" fill="hold">
-                            <p:stCondLst>
-                              <p:cond delay="0"/>
-                            </p:stCondLst>
-                            <p:childTnLst>
-                              <p:par>
-                                <p:cTn id="5" presetID="1" presetClass="entr" presetSubtype="0" fill="hold" nodeType="clickEffect">
-                                  <p:stCondLst>
-                                    <p:cond delay="0"/>
-                                  </p:stCondLst>
-                                  <p:childTnLst>
-                                    <p:set>
-                                      <p:cBhvr>
-                                        <p:cTn id="6" dur="1" fill="hold">
-                                          <p:stCondLst>
-                                            <p:cond delay="0"/>
-                                          </p:stCondLst>
-                                        </p:cTn>
-                                        <p:tgtEl>
-                                          <p:spTgt spid="29"/>
-                                        </p:tgtEl>
-                                        <p:attrNameLst>
-                                          <p:attrName>style.visibility</p:attrName>
-                                        </p:attrNameLst>
-                                      </p:cBhvr>
-                                      <p:to>
-                                        <p:strVal val="visible"/>
-                                      </p:to>
-                                    </p:set>
-                                  </p:childTnLst>
-                                </p:cTn>
-                              </p:par>
-                              <p:par>
-                                <p:cTn id="7" presetID="1" presetClass="entr" presetSubtype="0" fill="hold" nodeType="withEffect">
-                                  <p:stCondLst>
-                                    <p:cond delay="0"/>
-                                  </p:stCondLst>
-                                  <p:childTnLst>
-                                    <p:set>
-                                      <p:cBhvr>
-                                        <p:cTn id="8" dur="1" fill="hold">
-                                          <p:stCondLst>
-                                            <p:cond delay="0"/>
-                                          </p:stCondLst>
-                                        </p:cTn>
-                                        <p:tgtEl>
-                                          <p:spTgt spid="26"/>
-                                        </p:tgtEl>
-                                        <p:attrNameLst>
-                                          <p:attrName>style.visibility</p:attrName>
-                                        </p:attrNameLst>
-                                      </p:cBhvr>
-                                      <p:to>
-                                        <p:strVal val="visible"/>
-                                      </p:to>
-                                    </p:set>
-                                  </p:childTnLst>
-                                </p:cTn>
-                              </p:par>
-                            </p:childTnLst>
-                          </p:cTn>
-                        </p:par>
-                      </p:childTnLst>
-                    </p:cTn>
-                  </p:par>
-                  <p:par>
-                    <p:cTn id="9" fill="hold">
-                      <p:stCondLst>
-                        <p:cond delay="indefinite"/>
-                      </p:stCondLst>
-                      <p:childTnLst>
-                        <p:par>
-                          <p:cTn id="10" fill="hold">
-                            <p:stCondLst>
-                              <p:cond delay="0"/>
-                            </p:stCondLst>
-                            <p:childTnLst>
-                              <p:par>
-                                <p:cTn id="11" presetID="1" presetClass="entr" presetSubtype="0" fill="hold" nodeType="clickEffect">
-                                  <p:stCondLst>
-                                    <p:cond delay="0"/>
-                                  </p:stCondLst>
-                                  <p:childTnLst>
-                                    <p:set>
-                                      <p:cBhvr>
-                                        <p:cTn id="12" dur="1" fill="hold">
-                                          <p:stCondLst>
-                                            <p:cond delay="0"/>
-                                          </p:stCondLst>
-                                        </p:cTn>
-                                        <p:tgtEl>
-                                          <p:spTgt spid="30"/>
-                                        </p:tgtEl>
-                                        <p:attrNameLst>
-                                          <p:attrName>style.visibility</p:attrName>
-                                        </p:attrNameLst>
-                                      </p:cBhvr>
-                                      <p:to>
-                                        <p:strVal val="visible"/>
-                                      </p:to>
-                                    </p:set>
-                                  </p:childTnLst>
-                                </p:cTn>
-                              </p:par>
-                              <p:par>
-                                <p:cTn id="13" presetID="1" presetClass="entr" presetSubtype="0" fill="hold" nodeType="withEffect">
-                                  <p:stCondLst>
-                                    <p:cond delay="0"/>
-                                  </p:stCondLst>
-                                  <p:childTnLst>
-                                    <p:set>
-                                      <p:cBhvr>
-                                        <p:cTn id="14" dur="1" fill="hold">
-                                          <p:stCondLst>
-                                            <p:cond delay="0"/>
-                                          </p:stCondLst>
-                                        </p:cTn>
-                                        <p:tgtEl>
-                                          <p:spTgt spid="31"/>
-                                        </p:tgtEl>
-                                        <p:attrNameLst>
-                                          <p:attrName>style.visibility</p:attrName>
-                                        </p:attrNameLst>
-                                      </p:cBhvr>
-                                      <p:to>
-                                        <p:strVal val="visible"/>
-                                      </p:to>
-                                    </p:set>
-                                  </p:childTnLst>
-                                </p:cTn>
-                              </p:par>
-                              <p:par>
-                                <p:cTn id="15" presetID="1" presetClass="entr" presetSubtype="0" fill="hold" nodeType="withEffect">
-                                  <p:stCondLst>
-                                    <p:cond delay="0"/>
-                                  </p:stCondLst>
-                                  <p:childTnLst>
-                                    <p:set>
-                                      <p:cBhvr>
-                                        <p:cTn id="16" dur="1" fill="hold">
-                                          <p:stCondLst>
-                                            <p:cond delay="0"/>
-                                          </p:stCondLst>
-                                        </p:cTn>
-                                        <p:tgtEl>
-                                          <p:spTgt spid="28"/>
-                                        </p:tgtEl>
-                                        <p:attrNameLst>
-                                          <p:attrName>style.visibility</p:attrName>
-                                        </p:attrNameLst>
-                                      </p:cBhvr>
-                                      <p:to>
-                                        <p:strVal val="visible"/>
-                                      </p:to>
-                                    </p:set>
-                                  </p:childTnLst>
-                                </p:cTn>
-                              </p:par>
-                            </p:childTnLst>
-                          </p:cTn>
-                        </p:par>
-                      </p:childTnLst>
-                    </p:cTn>
-                  </p:par>
-                  <p:par>
-                    <p:cTn id="17" fill="hold">
-                      <p:stCondLst>
-                        <p:cond delay="indefinite"/>
-                      </p:stCondLst>
-                      <p:childTnLst>
-                        <p:par>
-                          <p:cTn id="18" fill="hold">
-                            <p:stCondLst>
-                              <p:cond delay="0"/>
-                            </p:stCondLst>
-                            <p:childTnLst>
-                              <p:par>
-                                <p:cTn id="19" presetID="1" presetClass="entr" presetSubtype="0" fill="hold" nodeType="clickEffect">
-                                  <p:stCondLst>
-                                    <p:cond delay="0"/>
-                                  </p:stCondLst>
-                                  <p:childTnLst>
-                                    <p:set>
-                                      <p:cBhvr>
-                                        <p:cTn id="20" dur="1" fill="hold">
-                                          <p:stCondLst>
-                                            <p:cond delay="0"/>
-                                          </p:stCondLst>
-                                        </p:cTn>
-                                        <p:tgtEl>
-                                          <p:spTgt spid="64"/>
-                                        </p:tgtEl>
-                                        <p:attrNameLst>
-                                          <p:attrName>style.visibility</p:attrName>
-                                        </p:attrNameLst>
-                                      </p:cBhvr>
-                                      <p:to>
-                                        <p:strVal val="visible"/>
-                                      </p:to>
-                                    </p:set>
-                                  </p:childTnLst>
-                                </p:cTn>
-                              </p:par>
-                            </p:childTnLst>
-                          </p:cTn>
-                        </p:par>
-                      </p:childTnLst>
-                    </p:cTn>
-                  </p:par>
-                  <p:par>
-                    <p:cTn id="21" fill="hold">
-                      <p:stCondLst>
-                        <p:cond delay="indefinite"/>
-                      </p:stCondLst>
-                      <p:childTnLst>
-                        <p:par>
-                          <p:cTn id="22" fill="hold">
-                            <p:stCondLst>
-                              <p:cond delay="0"/>
-                            </p:stCondLst>
-                            <p:childTnLst>
-                              <p:par>
-                                <p:cTn id="23" presetID="1" presetClass="entr" presetSubtype="0" fill="hold" nodeType="clickEffect">
-                                  <p:stCondLst>
-                                    <p:cond delay="0"/>
-                                  </p:stCondLst>
-                                  <p:childTnLst>
-                                    <p:set>
-                                      <p:cBhvr>
-                                        <p:cTn id="24" dur="1" fill="hold">
-                                          <p:stCondLst>
-                                            <p:cond delay="0"/>
-                                          </p:stCondLst>
-                                        </p:cTn>
-                                        <p:tgtEl>
-                                          <p:spTgt spid="65"/>
-                                        </p:tgtEl>
-                                        <p:attrNameLst>
-                                          <p:attrName>style.visibility</p:attrName>
-                                        </p:attrNameLst>
-                                      </p:cBhvr>
-                                      <p:to>
-                                        <p:strVal val="visible"/>
-                                      </p:to>
-                                    </p:set>
-                                  </p:childTnLst>
-                                </p:cTn>
-                              </p:par>
-                              <p:par>
-                                <p:cTn id="25" presetID="1" presetClass="entr" presetSubtype="0" fill="hold" nodeType="withEffect">
-                                  <p:stCondLst>
-                                    <p:cond delay="0"/>
-                                  </p:stCondLst>
-                                  <p:childTnLst>
-                                    <p:set>
-                                      <p:cBhvr>
-                                        <p:cTn id="26" dur="1" fill="hold">
-                                          <p:stCondLst>
-                                            <p:cond delay="0"/>
-                                          </p:stCondLst>
-                                        </p:cTn>
-                                        <p:tgtEl>
-                                          <p:spTgt spid="67"/>
-                                        </p:tgtEl>
-                                        <p:attrNameLst>
-                                          <p:attrName>style.visibility</p:attrName>
-                                        </p:attrNameLst>
-                                      </p:cBhvr>
-                                      <p:to>
-                                        <p:strVal val="visible"/>
-                                      </p:to>
-                                    </p:set>
-                                  </p:childTnLst>
-                                </p:cTn>
-                              </p:par>
-                            </p:childTnLst>
-                          </p:cTn>
-                        </p:par>
-                      </p:childTnLst>
-                    </p:cTn>
-                  </p:par>
-                </p:childTnLst>
-              </p:cTn>
-              <p:prevCondLst>
-                <p:cond evt="onPrev" delay="0">
-                  <p:tgtEl>
-                    <p:sldTgt/>
-                  </p:tgtEl>
-                </p:cond>
-              </p:prevCondLst>
-              <p:nextCondLst>
-                <p:cond evt="onNext" delay="0">
-                  <p:tgtEl>
-                    <p:sldTgt/>
-                  </p:tgtEl>
-                </p:cond>
-              </p:nextCondLst>
-            </p:seq>
-          </p:childTnLst>
-        </p:cTn>
-      </p:par>
-    </p:tnLst>
-  </p:timing>
 </p:sld>
 </file>
 
@@ -8023,38 +8603,42 @@
             <a:pPr algn="l"/>
             <a:r>
               <a:rPr lang="en-GB" sz="2800" dirty="0"/>
-              <a:t>2. Literature review (Una </a:t>
-            </a:r>
-            <a:r>
-              <a:rPr lang="en-GB" sz="2800" dirty="0" err="1"/>
+              <a:t>2</a:t>
+            </a:r>
+            <a:r>
+              <a:rPr lang="en-GB" sz="2800" b="1" dirty="0"/>
+              <a:t>. Literature review (Una </a:t>
+            </a:r>
+            <a:r>
+              <a:rPr lang="en-GB" sz="2800" b="1" dirty="0" err="1"/>
               <a:t>vez</a:t>
             </a:r>
             <a:r>
-              <a:rPr lang="en-GB" sz="2800" dirty="0"/>
+              <a:rPr lang="en-GB" sz="2800" b="1" dirty="0"/>
               <a:t> </a:t>
             </a:r>
             <a:r>
-              <a:rPr lang="en-GB" sz="2800" dirty="0" err="1"/>
+              <a:rPr lang="en-GB" sz="2800" b="1" dirty="0" err="1"/>
               <a:t>añadidos</a:t>
             </a:r>
             <a:r>
-              <a:rPr lang="en-GB" sz="2800" dirty="0"/>
+              <a:rPr lang="en-GB" sz="2800" b="1" dirty="0"/>
               <a:t> </a:t>
             </a:r>
             <a:r>
-              <a:rPr lang="en-GB" sz="2800" dirty="0" err="1"/>
+              <a:rPr lang="en-GB" sz="2800" b="1" dirty="0" err="1"/>
               <a:t>todos</a:t>
             </a:r>
             <a:r>
-              <a:rPr lang="en-GB" sz="2800" dirty="0"/>
+              <a:rPr lang="en-GB" sz="2800" b="1" dirty="0"/>
               <a:t> lo </a:t>
             </a:r>
             <a:r>
-              <a:rPr lang="en-GB" sz="2800" dirty="0" err="1"/>
+              <a:rPr lang="en-GB" sz="2800" b="1" dirty="0" err="1"/>
               <a:t>ajustamos</a:t>
             </a:r>
             <a:r>
-              <a:rPr lang="en-GB" sz="2800" dirty="0"/>
+              <a:rPr lang="en-GB" sz="2800" b="1" dirty="0"/>
               <a:t>)</a:t>
             </a:r>
           </a:p>
@@ -9543,7 +10127,7 @@
         <p:spPr>
           <a:xfrm>
             <a:off x="423164" y="1271045"/>
-            <a:ext cx="8414226" cy="415498"/>
+            <a:ext cx="8172430" cy="369332"/>
           </a:xfrm>
           <a:prstGeom prst="rect">
             <a:avLst/>
@@ -9557,75 +10141,78 @@
           <a:lstStyle/>
           <a:p>
             <a:r>
-              <a:rPr lang="es-ES" sz="2000" b="1" dirty="0"/>
+              <a:rPr lang="es-ES" b="1" dirty="0">
+                <a:latin typeface="Trebuchet MS" panose="020B0603020202020204" pitchFamily="34" charset="0"/>
+              </a:rPr>
               <a:t>Main method categories: </a:t>
             </a:r>
             <a:r>
-              <a:rPr lang="es-ES" sz="2100" b="1" dirty="0">
+              <a:rPr lang="es-ES" b="1" dirty="0">
                 <a:solidFill>
                   <a:schemeClr val="accent3">
                     <a:lumMod val="75000"/>
                   </a:schemeClr>
                 </a:solidFill>
+                <a:latin typeface="Trebuchet MS" panose="020B0603020202020204" pitchFamily="34" charset="0"/>
               </a:rPr>
               <a:t>Segmentation</a:t>
             </a:r>
             <a:r>
-              <a:rPr lang="es-ES" sz="2000" dirty="0"/>
+              <a:rPr lang="es-ES" dirty="0">
+                <a:latin typeface="Trebuchet MS" panose="020B0603020202020204" pitchFamily="34" charset="0"/>
+              </a:rPr>
               <a:t>,</a:t>
             </a:r>
             <a:r>
-              <a:rPr lang="es-ES" sz="2000" dirty="0">
+              <a:rPr lang="es-ES" dirty="0">
                 <a:solidFill>
                   <a:schemeClr val="tx2">
                     <a:lumMod val="60000"/>
                     <a:lumOff val="40000"/>
                   </a:schemeClr>
                 </a:solidFill>
+                <a:latin typeface="Trebuchet MS" panose="020B0603020202020204" pitchFamily="34" charset="0"/>
               </a:rPr>
               <a:t> </a:t>
             </a:r>
             <a:r>
-              <a:rPr lang="es-ES" sz="2100" b="1" dirty="0">
+              <a:rPr lang="es-ES" b="1" dirty="0">
                 <a:solidFill>
                   <a:schemeClr val="tx2">
                     <a:lumMod val="60000"/>
                     <a:lumOff val="40000"/>
                   </a:schemeClr>
                 </a:solidFill>
+                <a:latin typeface="Trebuchet MS" panose="020B0603020202020204" pitchFamily="34" charset="0"/>
               </a:rPr>
-              <a:t>Detection</a:t>
-            </a:r>
-            <a:r>
-              <a:rPr lang="es-ES" sz="2000" b="1" dirty="0">
-                <a:solidFill>
-                  <a:schemeClr val="tx2">
-                    <a:lumMod val="60000"/>
-                    <a:lumOff val="40000"/>
-                  </a:schemeClr>
-                </a:solidFill>
+              <a:t>Detection </a:t>
+            </a:r>
+            <a:r>
+              <a:rPr lang="es-ES" b="1" dirty="0">
+                <a:latin typeface="Trebuchet MS" panose="020B0603020202020204" pitchFamily="34" charset="0"/>
+              </a:rPr>
+              <a:t>and</a:t>
+            </a:r>
+            <a:r>
+              <a:rPr lang="es-ES" dirty="0">
+                <a:latin typeface="Trebuchet MS" panose="020B0603020202020204" pitchFamily="34" charset="0"/>
               </a:rPr>
               <a:t> </a:t>
             </a:r>
             <a:r>
-              <a:rPr lang="es-ES" sz="2000" b="1" dirty="0"/>
-              <a:t>and</a:t>
-            </a:r>
-            <a:r>
-              <a:rPr lang="es-ES" sz="2000" dirty="0"/>
-              <a:t> </a:t>
-            </a:r>
-            <a:r>
-              <a:rPr lang="es-ES" sz="2100" b="1" dirty="0">
+              <a:rPr lang="es-ES" b="1" dirty="0">
                 <a:solidFill>
                   <a:schemeClr val="accent1">
                     <a:lumMod val="75000"/>
                   </a:schemeClr>
                 </a:solidFill>
+                <a:latin typeface="Trebuchet MS" panose="020B0603020202020204" pitchFamily="34" charset="0"/>
               </a:rPr>
               <a:t>Anomaly Detection</a:t>
             </a:r>
-            <a:endParaRPr lang="es-ES" sz="2100" b="1" dirty="0"/>
+            <a:endParaRPr lang="es-ES" b="1" dirty="0">
+              <a:latin typeface="Trebuchet MS" panose="020B0603020202020204" pitchFamily="34" charset="0"/>
+            </a:endParaRPr>
           </a:p>
         </p:txBody>
       </p:sp>
@@ -9645,14 +10232,15 @@
         </p:nvPicPr>
         <p:blipFill>
           <a:blip r:embed="rId3"/>
+          <a:srcRect b="16984"/>
           <a:stretch>
             <a:fillRect/>
           </a:stretch>
         </p:blipFill>
         <p:spPr>
           <a:xfrm>
-            <a:off x="331227" y="1964367"/>
-            <a:ext cx="8497957" cy="3717454"/>
+            <a:off x="260400" y="2066474"/>
+            <a:ext cx="8497957" cy="3086098"/>
           </a:xfrm>
           <a:prstGeom prst="rect">
             <a:avLst/>
@@ -9804,7 +10392,7 @@
         <p:spPr>
           <a:xfrm>
             <a:off x="423164" y="1271045"/>
-            <a:ext cx="8414226" cy="415498"/>
+            <a:ext cx="8172430" cy="369332"/>
           </a:xfrm>
           <a:prstGeom prst="rect">
             <a:avLst/>
@@ -9818,84 +10406,87 @@
           <a:lstStyle/>
           <a:p>
             <a:r>
-              <a:rPr lang="es-ES" sz="2000" b="1" dirty="0"/>
+              <a:rPr lang="es-ES" b="1" dirty="0">
+                <a:latin typeface="Trebuchet MS" panose="020B0603020202020204" pitchFamily="34" charset="0"/>
+              </a:rPr>
               <a:t>Main method categories: </a:t>
             </a:r>
             <a:r>
-              <a:rPr lang="es-ES" sz="2100" b="1" dirty="0">
+              <a:rPr lang="es-ES" b="1" dirty="0">
                 <a:solidFill>
                   <a:schemeClr val="accent3">
                     <a:lumMod val="75000"/>
                   </a:schemeClr>
                 </a:solidFill>
+                <a:latin typeface="Trebuchet MS" panose="020B0603020202020204" pitchFamily="34" charset="0"/>
               </a:rPr>
               <a:t>Segmentation</a:t>
             </a:r>
             <a:r>
-              <a:rPr lang="es-ES" sz="2000" dirty="0"/>
+              <a:rPr lang="es-ES" dirty="0">
+                <a:latin typeface="Trebuchet MS" panose="020B0603020202020204" pitchFamily="34" charset="0"/>
+              </a:rPr>
               <a:t>,</a:t>
             </a:r>
             <a:r>
-              <a:rPr lang="es-ES" sz="2000" dirty="0">
+              <a:rPr lang="es-ES" dirty="0">
                 <a:solidFill>
                   <a:schemeClr val="tx2">
                     <a:lumMod val="60000"/>
                     <a:lumOff val="40000"/>
                   </a:schemeClr>
                 </a:solidFill>
+                <a:latin typeface="Trebuchet MS" panose="020B0603020202020204" pitchFamily="34" charset="0"/>
               </a:rPr>
               <a:t> </a:t>
             </a:r>
             <a:r>
-              <a:rPr lang="es-ES" sz="2100" b="1" dirty="0">
+              <a:rPr lang="es-ES" b="1" dirty="0">
                 <a:solidFill>
                   <a:schemeClr val="tx2">
                     <a:lumMod val="60000"/>
                     <a:lumOff val="40000"/>
                   </a:schemeClr>
                 </a:solidFill>
+                <a:latin typeface="Trebuchet MS" panose="020B0603020202020204" pitchFamily="34" charset="0"/>
               </a:rPr>
-              <a:t>Detection</a:t>
-            </a:r>
-            <a:r>
-              <a:rPr lang="es-ES" sz="2000" b="1" dirty="0">
-                <a:solidFill>
-                  <a:schemeClr val="tx2">
-                    <a:lumMod val="60000"/>
-                    <a:lumOff val="40000"/>
-                  </a:schemeClr>
-                </a:solidFill>
+              <a:t>Detection </a:t>
+            </a:r>
+            <a:r>
+              <a:rPr lang="es-ES" b="1" dirty="0">
+                <a:latin typeface="Trebuchet MS" panose="020B0603020202020204" pitchFamily="34" charset="0"/>
+              </a:rPr>
+              <a:t>and</a:t>
+            </a:r>
+            <a:r>
+              <a:rPr lang="es-ES" dirty="0">
+                <a:latin typeface="Trebuchet MS" panose="020B0603020202020204" pitchFamily="34" charset="0"/>
               </a:rPr>
               <a:t> </a:t>
             </a:r>
             <a:r>
-              <a:rPr lang="es-ES" sz="2000" b="1" dirty="0"/>
-              <a:t>and</a:t>
-            </a:r>
-            <a:r>
-              <a:rPr lang="es-ES" sz="2000" dirty="0"/>
-              <a:t> </a:t>
-            </a:r>
-            <a:r>
-              <a:rPr lang="es-ES" sz="2100" b="1" dirty="0">
+              <a:rPr lang="es-ES" b="1" dirty="0">
                 <a:solidFill>
                   <a:schemeClr val="accent1">
                     <a:lumMod val="75000"/>
                   </a:schemeClr>
                 </a:solidFill>
+                <a:latin typeface="Trebuchet MS" panose="020B0603020202020204" pitchFamily="34" charset="0"/>
               </a:rPr>
               <a:t>Anomaly Detection</a:t>
             </a:r>
-            <a:endParaRPr lang="es-ES" sz="2100" b="1" dirty="0"/>
+            <a:endParaRPr lang="es-ES" b="1" dirty="0">
+              <a:latin typeface="Trebuchet MS" panose="020B0603020202020204" pitchFamily="34" charset="0"/>
+            </a:endParaRPr>
           </a:p>
         </p:txBody>
       </p:sp>
       <p:pic>
         <p:nvPicPr>
-          <p:cNvPr id="36" name="Imagen 35">
+          <p:cNvPr id="4" name="Imagen 3">
             <a:extLst>
               <a:ext uri="{FF2B5EF4-FFF2-40B4-BE49-F238E27FC236}">
-                <a16:creationId xmlns:a16="http://schemas.microsoft.com/office/drawing/2014/main" id="{2AFB3648-5E3E-D6B1-A84A-32FA8CFFEB37}"/>
+                <a16:creationId xmlns:a16="http://schemas.microsoft.com/office/drawing/2014/main" id="{B5CB8C1D-6036-4D0A-EAE0-E0042920700E}"/>
               </a:ext>
             </a:extLst>
           </p:cNvPr>
@@ -9906,13 +10497,14 @@
         </p:nvPicPr>
         <p:blipFill>
           <a:blip r:embed="rId3"/>
-          <a:srcRect/>
-          <a:stretch/>
+          <a:stretch>
+            <a:fillRect/>
+          </a:stretch>
         </p:blipFill>
         <p:spPr>
           <a:xfrm>
-            <a:off x="331227" y="2552032"/>
-            <a:ext cx="8497957" cy="2542123"/>
+            <a:off x="323872" y="1964367"/>
+            <a:ext cx="8496255" cy="3314785"/>
           </a:xfrm>
           <a:prstGeom prst="rect">
             <a:avLst/>
@@ -9974,7 +10566,11 @@
             <a:pPr algn="l"/>
             <a:r>
               <a:rPr lang="en-GB" sz="2800" dirty="0"/>
-              <a:t>3. Selected method 01: XXXX</a:t>
+              <a:t>3. </a:t>
+            </a:r>
+            <a:r>
+              <a:rPr lang="en-GB" sz="2800" b="1" dirty="0"/>
+              <a:t>Selected method 01: XXXX</a:t>
             </a:r>
           </a:p>
         </p:txBody>
@@ -10098,7 +10694,11 @@
             <a:pPr algn="l"/>
             <a:r>
               <a:rPr lang="en-GB" sz="2800" dirty="0"/>
-              <a:t>3. Selected method (Deep 02): Grounded-SAM</a:t>
+              <a:t>3. </a:t>
+            </a:r>
+            <a:r>
+              <a:rPr lang="en-GB" sz="2800" b="1" dirty="0"/>
+              <a:t>Selected method (Deep 02): Grounded-SAM</a:t>
             </a:r>
           </a:p>
         </p:txBody>
@@ -10284,30 +10884,30 @@
               <a:t>🔗</a:t>
             </a:r>
             <a:r>
-              <a:rPr lang="es-ES" altLang="es-ES" sz="2000" dirty="0" err="1">
-                <a:latin typeface="Arial" panose="020B0604020202020204" pitchFamily="34" charset="0"/>
+              <a:rPr lang="es-ES" altLang="es-ES" dirty="0" err="1">
+                <a:latin typeface="Trebuchet MS" panose="020B0603020202020204" pitchFamily="34" charset="0"/>
               </a:rPr>
               <a:t>Detection</a:t>
             </a:r>
             <a:r>
-              <a:rPr lang="es-ES" altLang="es-ES" sz="2000" dirty="0">
-                <a:latin typeface="Arial" panose="020B0604020202020204" pitchFamily="34" charset="0"/>
+              <a:rPr lang="es-ES" altLang="es-ES" dirty="0">
+                <a:latin typeface="Trebuchet MS" panose="020B0603020202020204" pitchFamily="34" charset="0"/>
               </a:rPr>
               <a:t> + </a:t>
             </a:r>
             <a:r>
-              <a:rPr lang="es-ES" altLang="es-ES" sz="2000" dirty="0" err="1">
-                <a:latin typeface="Arial" panose="020B0604020202020204" pitchFamily="34" charset="0"/>
+              <a:rPr lang="es-ES" altLang="es-ES" dirty="0" err="1">
+                <a:latin typeface="Trebuchet MS" panose="020B0603020202020204" pitchFamily="34" charset="0"/>
               </a:rPr>
               <a:t>segmentation</a:t>
             </a:r>
             <a:r>
-              <a:rPr lang="es-ES" altLang="es-ES" sz="2000" dirty="0">
-                <a:latin typeface="Arial" panose="020B0604020202020204" pitchFamily="34" charset="0"/>
+              <a:rPr lang="es-ES" altLang="es-ES" dirty="0">
+                <a:latin typeface="Trebuchet MS" panose="020B0603020202020204" pitchFamily="34" charset="0"/>
               </a:rPr>
               <a:t> pipeline (2-stage)</a:t>
             </a:r>
-            <a:endParaRPr kumimoji="0" lang="es-ES" altLang="es-ES" sz="2000" b="0" i="0" u="none" strike="noStrike" cap="none" normalizeH="0" baseline="0" dirty="0">
+            <a:endParaRPr kumimoji="0" lang="es-ES" altLang="es-ES" b="0" i="0" u="none" strike="noStrike" cap="none" normalizeH="0" baseline="0" dirty="0">
               <a:ln>
                 <a:noFill/>
               </a:ln>
@@ -10315,7 +10915,7 @@
                 <a:schemeClr val="tx1"/>
               </a:solidFill>
               <a:effectLst/>
-              <a:latin typeface="Arial" panose="020B0604020202020204" pitchFamily="34" charset="0"/>
+              <a:latin typeface="Trebuchet MS" panose="020B0603020202020204" pitchFamily="34" charset="0"/>
             </a:endParaRPr>
           </a:p>
           <a:p>
@@ -10347,7 +10947,7 @@
               <a:t>📝</a:t>
             </a:r>
             <a:r>
-              <a:rPr kumimoji="0" lang="es-ES" altLang="es-ES" sz="2000" b="0" i="0" u="none" strike="noStrike" cap="none" normalizeH="0" baseline="0" dirty="0">
+              <a:rPr kumimoji="0" lang="es-ES" altLang="es-ES" b="0" i="0" u="none" strike="noStrike" cap="none" normalizeH="0" baseline="0" dirty="0">
                 <a:ln>
                   <a:noFill/>
                 </a:ln>
@@ -10355,12 +10955,12 @@
                   <a:schemeClr val="tx1"/>
                 </a:solidFill>
                 <a:effectLst/>
-                <a:latin typeface="Arial" panose="020B0604020202020204" pitchFamily="34" charset="0"/>
+                <a:latin typeface="Trebuchet MS" panose="020B0603020202020204" pitchFamily="34" charset="0"/>
               </a:rPr>
               <a:t>Open-</a:t>
             </a:r>
             <a:r>
-              <a:rPr kumimoji="0" lang="es-ES" altLang="es-ES" sz="2000" b="0" i="0" u="none" strike="noStrike" cap="none" normalizeH="0" baseline="0" dirty="0" err="1">
+              <a:rPr kumimoji="0" lang="es-ES" altLang="es-ES" b="0" i="0" u="none" strike="noStrike" cap="none" normalizeH="0" baseline="0" dirty="0" err="1">
                 <a:ln>
                   <a:noFill/>
                 </a:ln>
@@ -10368,12 +10968,12 @@
                   <a:schemeClr val="tx1"/>
                 </a:solidFill>
                 <a:effectLst/>
-                <a:latin typeface="Arial" panose="020B0604020202020204" pitchFamily="34" charset="0"/>
+                <a:latin typeface="Trebuchet MS" panose="020B0603020202020204" pitchFamily="34" charset="0"/>
               </a:rPr>
               <a:t>vocabulary</a:t>
             </a:r>
-            <a:endParaRPr lang="es-ES" altLang="es-ES" sz="2000" dirty="0">
-              <a:latin typeface="Arial" panose="020B0604020202020204" pitchFamily="34" charset="0"/>
+            <a:endParaRPr lang="es-ES" altLang="es-ES" dirty="0">
+              <a:latin typeface="Trebuchet MS" panose="020B0603020202020204" pitchFamily="34" charset="0"/>
             </a:endParaRPr>
           </a:p>
           <a:p>
@@ -10405,7 +11005,7 @@
               <a:t>📦</a:t>
             </a:r>
             <a:r>
-              <a:rPr kumimoji="0" lang="es-ES" altLang="es-ES" sz="2000" b="0" i="0" u="none" strike="noStrike" cap="none" normalizeH="0" baseline="0" dirty="0" err="1">
+              <a:rPr kumimoji="0" lang="es-ES" altLang="es-ES" b="0" i="0" u="none" strike="noStrike" cap="none" normalizeH="0" baseline="0" dirty="0" err="1">
                 <a:ln>
                   <a:noFill/>
                 </a:ln>
@@ -10413,12 +11013,12 @@
                   <a:schemeClr val="tx1"/>
                 </a:solidFill>
                 <a:effectLst/>
-                <a:latin typeface="Arial" panose="020B0604020202020204" pitchFamily="34" charset="0"/>
+                <a:latin typeface="Trebuchet MS" panose="020B0603020202020204" pitchFamily="34" charset="0"/>
               </a:rPr>
               <a:t>Object</a:t>
             </a:r>
             <a:r>
-              <a:rPr kumimoji="0" lang="es-ES" altLang="es-ES" sz="2000" b="0" i="0" u="none" strike="noStrike" cap="none" normalizeH="0" baseline="0" dirty="0">
+              <a:rPr kumimoji="0" lang="es-ES" altLang="es-ES" b="0" i="0" u="none" strike="noStrike" cap="none" normalizeH="0" baseline="0" dirty="0">
                 <a:ln>
                   <a:noFill/>
                 </a:ln>
@@ -10426,12 +11026,12 @@
                   <a:schemeClr val="tx1"/>
                 </a:solidFill>
                 <a:effectLst/>
-                <a:latin typeface="Arial" panose="020B0604020202020204" pitchFamily="34" charset="0"/>
+                <a:latin typeface="Trebuchet MS" panose="020B0603020202020204" pitchFamily="34" charset="0"/>
               </a:rPr>
               <a:t> </a:t>
             </a:r>
             <a:r>
-              <a:rPr kumimoji="0" lang="es-ES" altLang="es-ES" sz="2000" b="0" i="0" u="none" strike="noStrike" cap="none" normalizeH="0" baseline="0" dirty="0" err="1">
+              <a:rPr kumimoji="0" lang="es-ES" altLang="es-ES" b="0" i="0" u="none" strike="noStrike" cap="none" normalizeH="0" baseline="0" dirty="0" err="1">
                 <a:ln>
                   <a:noFill/>
                 </a:ln>
@@ -10439,11 +11039,11 @@
                   <a:schemeClr val="tx1"/>
                 </a:solidFill>
                 <a:effectLst/>
-                <a:latin typeface="Arial" panose="020B0604020202020204" pitchFamily="34" charset="0"/>
+                <a:latin typeface="Trebuchet MS" panose="020B0603020202020204" pitchFamily="34" charset="0"/>
               </a:rPr>
               <a:t>detection</a:t>
             </a:r>
-            <a:endParaRPr kumimoji="0" lang="es-ES" altLang="es-ES" sz="2000" b="0" i="0" u="none" strike="noStrike" cap="none" normalizeH="0" baseline="0" dirty="0">
+            <a:endParaRPr kumimoji="0" lang="es-ES" altLang="es-ES" b="0" i="0" u="none" strike="noStrike" cap="none" normalizeH="0" baseline="0" dirty="0">
               <a:ln>
                 <a:noFill/>
               </a:ln>
@@ -10451,7 +11051,7 @@
                 <a:schemeClr val="tx1"/>
               </a:solidFill>
               <a:effectLst/>
-              <a:latin typeface="Arial" panose="020B0604020202020204" pitchFamily="34" charset="0"/>
+              <a:latin typeface="Trebuchet MS" panose="020B0603020202020204" pitchFamily="34" charset="0"/>
             </a:endParaRPr>
           </a:p>
           <a:p>
@@ -10483,7 +11083,7 @@
               <a:t>🎯</a:t>
             </a:r>
             <a:r>
-              <a:rPr kumimoji="0" lang="es-ES" altLang="es-ES" sz="2000" b="0" i="0" u="none" strike="noStrike" cap="none" normalizeH="0" baseline="0" dirty="0">
+              <a:rPr kumimoji="0" lang="es-ES" altLang="es-ES" b="0" i="0" u="none" strike="noStrike" cap="none" normalizeH="0" baseline="0" dirty="0">
                 <a:ln>
                   <a:noFill/>
                 </a:ln>
@@ -10491,12 +11091,12 @@
                   <a:schemeClr val="tx1"/>
                 </a:solidFill>
                 <a:effectLst/>
-                <a:latin typeface="Arial" panose="020B0604020202020204" pitchFamily="34" charset="0"/>
+                <a:latin typeface="Trebuchet MS" panose="020B0603020202020204" pitchFamily="34" charset="0"/>
               </a:rPr>
               <a:t>Precise </a:t>
             </a:r>
             <a:r>
-              <a:rPr kumimoji="0" lang="es-ES" altLang="es-ES" sz="2000" b="0" i="0" u="none" strike="noStrike" cap="none" normalizeH="0" baseline="0" dirty="0" err="1">
+              <a:rPr kumimoji="0" lang="es-ES" altLang="es-ES" b="0" i="0" u="none" strike="noStrike" cap="none" normalizeH="0" baseline="0" dirty="0" err="1">
                 <a:ln>
                   <a:noFill/>
                 </a:ln>
@@ -10504,12 +11104,12 @@
                   <a:schemeClr val="tx1"/>
                 </a:solidFill>
                 <a:effectLst/>
-                <a:latin typeface="Arial" panose="020B0604020202020204" pitchFamily="34" charset="0"/>
+                <a:latin typeface="Trebuchet MS" panose="020B0603020202020204" pitchFamily="34" charset="0"/>
               </a:rPr>
               <a:t>segmentation</a:t>
             </a:r>
             <a:r>
-              <a:rPr kumimoji="0" lang="es-ES" altLang="es-ES" sz="2000" b="0" i="0" u="none" strike="noStrike" cap="none" normalizeH="0" baseline="0" dirty="0">
+              <a:rPr kumimoji="0" lang="es-ES" altLang="es-ES" b="0" i="0" u="none" strike="noStrike" cap="none" normalizeH="0" baseline="0" dirty="0">
                 <a:ln>
                   <a:noFill/>
                 </a:ln>
@@ -10517,12 +11117,12 @@
                   <a:schemeClr val="tx1"/>
                 </a:solidFill>
                 <a:effectLst/>
-                <a:latin typeface="Arial" panose="020B0604020202020204" pitchFamily="34" charset="0"/>
+                <a:latin typeface="Trebuchet MS" panose="020B0603020202020204" pitchFamily="34" charset="0"/>
               </a:rPr>
               <a:t> </a:t>
             </a:r>
             <a:r>
-              <a:rPr kumimoji="0" lang="es-ES" altLang="es-ES" sz="2000" b="0" i="0" u="none" strike="noStrike" cap="none" normalizeH="0" baseline="0" dirty="0" err="1">
+              <a:rPr kumimoji="0" lang="es-ES" altLang="es-ES" b="0" i="0" u="none" strike="noStrike" cap="none" normalizeH="0" baseline="0" dirty="0" err="1">
                 <a:ln>
                   <a:noFill/>
                 </a:ln>
@@ -10530,12 +11130,12 @@
                   <a:schemeClr val="tx1"/>
                 </a:solidFill>
                 <a:effectLst/>
-                <a:latin typeface="Arial" panose="020B0604020202020204" pitchFamily="34" charset="0"/>
+                <a:latin typeface="Trebuchet MS" panose="020B0603020202020204" pitchFamily="34" charset="0"/>
               </a:rPr>
               <a:t>masks</a:t>
             </a:r>
-            <a:endParaRPr lang="es-ES" altLang="es-ES" sz="2000" dirty="0">
-              <a:latin typeface="Arial" panose="020B0604020202020204" pitchFamily="34" charset="0"/>
+            <a:endParaRPr lang="es-ES" altLang="es-ES" dirty="0">
+              <a:latin typeface="Trebuchet MS" panose="020B0603020202020204" pitchFamily="34" charset="0"/>
             </a:endParaRPr>
           </a:p>
           <a:p>
@@ -10560,14 +11160,14 @@
               <a:t>🚫</a:t>
             </a:r>
             <a:r>
-              <a:rPr lang="es-ES" altLang="es-ES" sz="2000" dirty="0">
-                <a:latin typeface="Arial" panose="020B0604020202020204" pitchFamily="34" charset="0"/>
+              <a:rPr lang="es-ES" altLang="es-ES" dirty="0">
+                <a:latin typeface="Trebuchet MS" panose="020B0603020202020204" pitchFamily="34" charset="0"/>
               </a:rPr>
               <a:t>Zero-</a:t>
             </a:r>
             <a:r>
-              <a:rPr lang="es-ES" altLang="es-ES" sz="2000" dirty="0" err="1">
-                <a:latin typeface="Arial" panose="020B0604020202020204" pitchFamily="34" charset="0"/>
+              <a:rPr lang="es-ES" altLang="es-ES" dirty="0" err="1">
+                <a:latin typeface="Trebuchet MS" panose="020B0603020202020204" pitchFamily="34" charset="0"/>
               </a:rPr>
               <a:t>shot</a:t>
             </a:r>
@@ -10579,7 +11179,7 @@
                 <a:schemeClr val="tx1"/>
               </a:solidFill>
               <a:effectLst/>
-              <a:latin typeface="Arial" panose="020B0604020202020204" pitchFamily="34" charset="0"/>
+              <a:latin typeface="Trebuchet MS" panose="020B0603020202020204" pitchFamily="34" charset="0"/>
             </a:endParaRPr>
           </a:p>
         </p:txBody>

--- a/docs/GIDIA_VA_Course_Project_Presentations.pptx
+++ b/docs/GIDIA_VA_Course_Project_Presentations.pptx
@@ -25,10 +25,10 @@
     <p:sldId id="415" r:id="rId13"/>
     <p:sldId id="416" r:id="rId14"/>
     <p:sldId id="383" r:id="rId15"/>
-    <p:sldId id="404" r:id="rId16"/>
-    <p:sldId id="417" r:id="rId17"/>
-    <p:sldId id="419" r:id="rId18"/>
-    <p:sldId id="287" r:id="rId19"/>
+    <p:sldId id="287" r:id="rId16"/>
+    <p:sldId id="404" r:id="rId17"/>
+    <p:sldId id="417" r:id="rId18"/>
+    <p:sldId id="419" r:id="rId19"/>
   </p:sldIdLst>
   <p:sldSz cx="9144000" cy="6858000" type="screen4x3"/>
   <p:notesSz cx="6858000" cy="9144000"/>
@@ -237,7 +237,7 @@
           <a:p>
             <a:fld id="{655DD89B-4A46-4028-8866-1E86EFBC0DEE}" type="datetimeFigureOut">
               <a:rPr lang="es-ES" smtClean="0"/>
-              <a:t>06/04/2026</a:t>
+              <a:t>07/04/2026</a:t>
             </a:fld>
             <a:endParaRPr lang="es-ES"/>
           </a:p>
@@ -402,7 +402,7 @@
           <a:p>
             <a:fld id="{C19EA62F-3719-438F-A310-6434B1FA2AEA}" type="datetimeFigureOut">
               <a:rPr lang="es-ES" smtClean="0"/>
-              <a:t>06/04/2026</a:t>
+              <a:t>07/04/2026</a:t>
             </a:fld>
             <a:endParaRPr lang="es-ES"/>
           </a:p>
@@ -1157,7 +1157,7 @@
           <a:p>
             <a:fld id="{05D135E5-457A-4183-A722-09BD01DC1252}" type="slidenum">
               <a:rPr lang="es-ES" smtClean="0"/>
-              <a:t>15</a:t>
+              <a:t>16</a:t>
             </a:fld>
             <a:endParaRPr lang="es-ES" dirty="0"/>
           </a:p>
@@ -1272,7 +1272,7 @@
           <a:p>
             <a:fld id="{05D135E5-457A-4183-A722-09BD01DC1252}" type="slidenum">
               <a:rPr lang="es-ES" smtClean="0"/>
-              <a:t>16</a:t>
+              <a:t>17</a:t>
             </a:fld>
             <a:endParaRPr lang="es-ES" dirty="0"/>
           </a:p>
@@ -1387,7 +1387,7 @@
           <a:p>
             <a:fld id="{05D135E5-457A-4183-A722-09BD01DC1252}" type="slidenum">
               <a:rPr lang="es-ES" smtClean="0"/>
-              <a:t>17</a:t>
+              <a:t>18</a:t>
             </a:fld>
             <a:endParaRPr lang="es-ES" dirty="0"/>
           </a:p>
@@ -5050,11 +5050,41 @@
             </a:br>
             <a:r>
               <a:rPr lang="es-ES" sz="2000" dirty="0"/>
-              <a:t>- </a:t>
-            </a:r>
-            <a:r>
-              <a:rPr lang="es-ES" dirty="0"/>
-              <a:t>📦</a:t>
+              <a:t>-  </a:t>
+            </a:r>
+            <a:r>
+              <a:rPr lang="es-ES" sz="2000" dirty="0" err="1"/>
+              <a:t>Precision</a:t>
+            </a:r>
+            <a:r>
+              <a:rPr lang="es-ES" sz="2000" dirty="0"/>
+              <a:t> / </a:t>
+            </a:r>
+            <a:r>
+              <a:rPr lang="es-ES" sz="2000" dirty="0" err="1"/>
+              <a:t>Recall</a:t>
+            </a:r>
+            <a:r>
+              <a:rPr lang="es-ES" sz="2000" dirty="0"/>
+              <a:t> / F1-Score</a:t>
+            </a:r>
+          </a:p>
+          <a:p>
+            <a:r>
+              <a:rPr lang="es-ES" sz="2000" dirty="0"/>
+              <a:t>-  </a:t>
+            </a:r>
+            <a:r>
+              <a:rPr lang="es-ES" sz="2000" dirty="0" err="1"/>
+              <a:t>IoU</a:t>
+            </a:r>
+            <a:r>
+              <a:rPr lang="es-ES" sz="2000" dirty="0"/>
+              <a:t> (</a:t>
+            </a:r>
+            <a:r>
+              <a:rPr lang="es-ES" sz="2000" dirty="0" err="1"/>
+              <a:t>overlap</a:t>
             </a:r>
             <a:r>
               <a:rPr lang="es-ES" sz="2000" dirty="0"/>
@@ -5062,52 +5092,6 @@
             </a:r>
             <a:r>
               <a:rPr lang="es-ES" sz="2000" dirty="0" err="1"/>
-              <a:t>Precision</a:t>
-            </a:r>
-            <a:r>
-              <a:rPr lang="es-ES" sz="2000" dirty="0"/>
-              <a:t> / </a:t>
-            </a:r>
-            <a:r>
-              <a:rPr lang="es-ES" sz="2000" dirty="0" err="1"/>
-              <a:t>Recall</a:t>
-            </a:r>
-            <a:r>
-              <a:rPr lang="es-ES" sz="2000" dirty="0"/>
-              <a:t> / F1-Score</a:t>
-            </a:r>
-          </a:p>
-          <a:p>
-            <a:r>
-              <a:rPr lang="es-ES" sz="2000" dirty="0"/>
-              <a:t>- </a:t>
-            </a:r>
-            <a:r>
-              <a:rPr lang="es-ES" dirty="0"/>
-              <a:t>🎯</a:t>
-            </a:r>
-            <a:r>
-              <a:rPr lang="es-ES" sz="2000" dirty="0"/>
-              <a:t> </a:t>
-            </a:r>
-            <a:r>
-              <a:rPr lang="es-ES" sz="2000" dirty="0" err="1"/>
-              <a:t>IoU</a:t>
-            </a:r>
-            <a:r>
-              <a:rPr lang="es-ES" sz="2000" dirty="0"/>
-              <a:t> (</a:t>
-            </a:r>
-            <a:r>
-              <a:rPr lang="es-ES" sz="2000" dirty="0" err="1"/>
-              <a:t>overlap</a:t>
-            </a:r>
-            <a:r>
-              <a:rPr lang="es-ES" sz="2000" dirty="0"/>
-              <a:t> </a:t>
-            </a:r>
-            <a:r>
-              <a:rPr lang="es-ES" sz="2000" dirty="0" err="1"/>
               <a:t>quality</a:t>
             </a:r>
             <a:r>
@@ -5118,15 +5102,7 @@
           <a:p>
             <a:r>
               <a:rPr lang="es-ES" sz="2000" dirty="0"/>
-              <a:t>- </a:t>
-            </a:r>
-            <a:r>
-              <a:rPr lang="es-ES" dirty="0"/>
-              <a:t>📊</a:t>
-            </a:r>
-            <a:r>
-              <a:rPr lang="es-ES" sz="2000" dirty="0"/>
-              <a:t> AP / </a:t>
+              <a:t>-  AP / </a:t>
             </a:r>
             <a:r>
               <a:rPr lang="es-ES" sz="2000" dirty="0" err="1"/>
@@ -5321,15 +5297,7 @@
             </a:br>
             <a:r>
               <a:rPr lang="es-ES" sz="2000" dirty="0"/>
-              <a:t>- </a:t>
-            </a:r>
-            <a:r>
-              <a:rPr lang="es-ES" dirty="0"/>
-              <a:t>📈</a:t>
-            </a:r>
-            <a:r>
-              <a:rPr lang="es-ES" sz="2000" dirty="0"/>
-              <a:t> </a:t>
+              <a:t>-  </a:t>
             </a:r>
             <a:r>
               <a:rPr lang="es-ES" sz="2000" dirty="0" err="1"/>
@@ -5349,10 +5317,6 @@
                 <a:latin typeface="Trebuchet MS" panose="020B0603020202020204" pitchFamily="34" charset="0"/>
               </a:rPr>
               <a:t>- </a:t>
-            </a:r>
-            <a:r>
-              <a:rPr lang="es-ES" dirty="0"/>
-              <a:t>📏</a:t>
             </a:r>
             <a:r>
               <a:rPr lang="es-ES" sz="2000" dirty="0"/>
@@ -5530,15 +5494,7 @@
             </a:br>
             <a:r>
               <a:rPr lang="es-ES" sz="2000" dirty="0"/>
-              <a:t>- </a:t>
-            </a:r>
-            <a:r>
-              <a:rPr lang="es-ES" dirty="0"/>
-              <a:t>📉</a:t>
-            </a:r>
-            <a:r>
-              <a:rPr lang="es-ES" sz="2000" dirty="0"/>
-              <a:t> RMSE / MAE</a:t>
+              <a:t>-  RMSE / MAE</a:t>
             </a:r>
           </a:p>
           <a:p>
@@ -5547,15 +5503,7 @@
             </a:pPr>
             <a:r>
               <a:rPr lang="es-ES" sz="2000" dirty="0"/>
-              <a:t>- </a:t>
-            </a:r>
-            <a:r>
-              <a:rPr lang="es-ES" dirty="0"/>
-              <a:t>📏</a:t>
-            </a:r>
-            <a:r>
-              <a:rPr lang="es-ES" sz="2000" dirty="0"/>
-              <a:t> </a:t>
+              <a:t>-  </a:t>
             </a:r>
             <a:r>
               <a:rPr lang="es-ES" sz="2000" dirty="0" err="1"/>
@@ -5981,22 +5929,22 @@
       </p:sp>
       <p:sp>
         <p:nvSpPr>
-          <p:cNvPr id="7" name="Rectangle 29">
+          <p:cNvPr id="3" name="Rectangle 1">
             <a:extLst>
               <a:ext uri="{FF2B5EF4-FFF2-40B4-BE49-F238E27FC236}">
-                <a16:creationId xmlns:a16="http://schemas.microsoft.com/office/drawing/2014/main" id="{658CF425-7A7B-42AD-9FB2-F09E7D0442A3}"/>
+                <a16:creationId xmlns:a16="http://schemas.microsoft.com/office/drawing/2014/main" id="{4FE16A73-F2E1-CC62-FF07-708C25A462A2}"/>
               </a:ext>
             </a:extLst>
           </p:cNvPr>
           <p:cNvSpPr>
-            <a:spLocks/>
+            <a:spLocks noChangeArrowheads="1"/>
           </p:cNvSpPr>
           <p:nvPr/>
         </p:nvSpPr>
         <p:spPr bwMode="auto">
           <a:xfrm>
-            <a:off x="920750" y="1547444"/>
-            <a:ext cx="7302500" cy="4253281"/>
+            <a:off x="457200" y="1438779"/>
+            <a:ext cx="8702062" cy="646331"/>
           </a:xfrm>
           <a:prstGeom prst="rect">
             <a:avLst/>
@@ -6005,214 +5953,2123 @@
           <a:ln>
             <a:noFill/>
           </a:ln>
+          <a:effectLst/>
           <a:extLst>
-            <a:ext uri="{909E8E84-426E-40dd-AFC4-6F175D3DCCD1}">
-              <a14:hiddenFill xmlns:a14="http://schemas.microsoft.com/office/drawing/2010/main" xmlns="">
-                <a:solidFill>
-                  <a:srgbClr val="FFFFFF"/>
+            <a:ext uri="{909E8E84-426E-40DD-AFC4-6F175D3DCCD1}">
+              <a14:hiddenFill xmlns:a14="http://schemas.microsoft.com/office/drawing/2010/main">
+                <a:solidFill>
+                  <a:schemeClr val="accent1"/>
                 </a:solidFill>
               </a14:hiddenFill>
             </a:ext>
-            <a:ext uri="{91240B29-F687-4f45-9708-019B960494DF}">
-              <a14:hiddenLine xmlns:a14="http://schemas.microsoft.com/office/drawing/2010/main" xmlns="" w="9525">
-                <a:solidFill>
-                  <a:srgbClr val="000000"/>
+            <a:ext uri="{91240B29-F687-4F45-9708-019B960494DF}">
+              <a14:hiddenLine xmlns:a14="http://schemas.microsoft.com/office/drawing/2010/main" w="9525">
+                <a:solidFill>
+                  <a:schemeClr val="tx1"/>
                 </a:solidFill>
                 <a:miter lim="800000"/>
                 <a:headEnd/>
                 <a:tailEnd/>
               </a14:hiddenLine>
             </a:ext>
+            <a:ext uri="{AF507438-7753-43E0-B8FC-AC1667EBCBE1}">
+              <a14:hiddenEffects xmlns:a14="http://schemas.microsoft.com/office/drawing/2010/main">
+                <a:effectLst>
+                  <a:outerShdw dist="35921" dir="2700000" algn="ctr" rotWithShape="0">
+                    <a:schemeClr val="bg2"/>
+                  </a:outerShdw>
+                </a:effectLst>
+              </a14:hiddenEffects>
+            </a:ext>
           </a:extLst>
         </p:spPr>
         <p:txBody>
-          <a:bodyPr lIns="38100" tIns="38100" rIns="38100" bIns="38100"/>
+          <a:bodyPr vert="horz" wrap="none" lIns="91440" tIns="45720" rIns="91440" bIns="45720" numCol="1" anchor="ctr" anchorCtr="0" compatLnSpc="1">
+            <a:prstTxWarp prst="textNoShape">
+              <a:avLst/>
+            </a:prstTxWarp>
+            <a:spAutoFit/>
+          </a:bodyPr>
           <a:lstStyle/>
           <a:p>
-            <a:pPr marL="285750" indent="-285750">
+            <a:pPr marL="285750" marR="0" lvl="0" indent="-285750" algn="l" defTabSz="914400" rtl="0" eaLnBrk="0" fontAlgn="base" latinLnBrk="0" hangingPunct="0">
+              <a:lnSpc>
+                <a:spcPct val="100000"/>
+              </a:lnSpc>
               <a:spcBef>
-                <a:spcPts val="600"/>
+                <a:spcPct val="0"/>
               </a:spcBef>
               <a:spcAft>
-                <a:spcPts val="600"/>
+                <a:spcPct val="0"/>
               </a:spcAft>
+              <a:buClrTx/>
+              <a:buSzTx/>
               <a:buFont typeface="Arial" panose="020B0604020202020204" pitchFamily="34" charset="0"/>
               <a:buChar char="•"/>
+              <a:tabLst/>
             </a:pPr>
             <a:r>
-              <a:rPr lang="en-US" dirty="0">
-                <a:solidFill>
-                  <a:srgbClr val="002060"/>
-                </a:solidFill>
-                <a:latin typeface="+mj-lt"/>
-                <a:sym typeface="Tahoma" charset="0"/>
-              </a:rPr>
-              <a:t>The best method is … because…</a:t>
-            </a:r>
-          </a:p>
-          <a:p>
-            <a:pPr marL="285750" indent="-285750">
+              <a:rPr kumimoji="0" lang="es-ES" altLang="es-ES" sz="1800" b="0" i="0" u="none" strike="noStrike" cap="none" normalizeH="0" baseline="0" dirty="0">
+                <a:ln>
+                  <a:noFill/>
+                </a:ln>
+                <a:solidFill>
+                  <a:schemeClr val="tx1"/>
+                </a:solidFill>
+                <a:effectLst/>
+                <a:latin typeface="Arial" panose="020B0604020202020204" pitchFamily="34" charset="0"/>
+              </a:rPr>
+              <a:t>Deep </a:t>
+            </a:r>
+            <a:r>
+              <a:rPr kumimoji="0" lang="es-ES" altLang="es-ES" sz="1800" b="0" i="0" u="none" strike="noStrike" cap="none" normalizeH="0" baseline="0" dirty="0" err="1">
+                <a:ln>
+                  <a:noFill/>
+                </a:ln>
+                <a:solidFill>
+                  <a:schemeClr val="tx1"/>
+                </a:solidFill>
+                <a:effectLst/>
+                <a:latin typeface="Arial" panose="020B0604020202020204" pitchFamily="34" charset="0"/>
+              </a:rPr>
+              <a:t>learning</a:t>
+            </a:r>
+            <a:r>
+              <a:rPr kumimoji="0" lang="es-ES" altLang="es-ES" sz="1800" b="0" i="0" u="none" strike="noStrike" cap="none" normalizeH="0" baseline="0" dirty="0">
+                <a:ln>
+                  <a:noFill/>
+                </a:ln>
+                <a:solidFill>
+                  <a:schemeClr val="tx1"/>
+                </a:solidFill>
+                <a:effectLst/>
+                <a:latin typeface="Arial" panose="020B0604020202020204" pitchFamily="34" charset="0"/>
+              </a:rPr>
+              <a:t> </a:t>
+            </a:r>
+            <a:r>
+              <a:rPr kumimoji="0" lang="es-ES" altLang="es-ES" sz="1800" b="0" i="0" u="none" strike="noStrike" cap="none" normalizeH="0" baseline="0" dirty="0" err="1">
+                <a:ln>
+                  <a:noFill/>
+                </a:ln>
+                <a:solidFill>
+                  <a:schemeClr val="tx1"/>
+                </a:solidFill>
+                <a:effectLst/>
+                <a:latin typeface="Arial" panose="020B0604020202020204" pitchFamily="34" charset="0"/>
+              </a:rPr>
+              <a:t>highest</a:t>
+            </a:r>
+            <a:r>
+              <a:rPr kumimoji="0" lang="es-ES" altLang="es-ES" sz="1800" b="0" i="0" u="none" strike="noStrike" cap="none" normalizeH="0" baseline="0" dirty="0">
+                <a:ln>
+                  <a:noFill/>
+                </a:ln>
+                <a:solidFill>
+                  <a:schemeClr val="tx1"/>
+                </a:solidFill>
+                <a:effectLst/>
+                <a:latin typeface="Arial" panose="020B0604020202020204" pitchFamily="34" charset="0"/>
+              </a:rPr>
+              <a:t> </a:t>
+            </a:r>
+            <a:r>
+              <a:rPr kumimoji="0" lang="es-ES" altLang="es-ES" sz="1800" b="0" i="0" u="none" strike="noStrike" cap="none" normalizeH="0" baseline="0" dirty="0" err="1">
+                <a:ln>
+                  <a:noFill/>
+                </a:ln>
+                <a:solidFill>
+                  <a:schemeClr val="tx1"/>
+                </a:solidFill>
+                <a:effectLst/>
+                <a:latin typeface="Arial" panose="020B0604020202020204" pitchFamily="34" charset="0"/>
+              </a:rPr>
+              <a:t>accuracy</a:t>
+            </a:r>
+            <a:r>
+              <a:rPr kumimoji="0" lang="es-ES" altLang="es-ES" sz="1800" b="0" i="0" u="none" strike="noStrike" cap="none" normalizeH="0" baseline="0" dirty="0">
+                <a:ln>
+                  <a:noFill/>
+                </a:ln>
+                <a:solidFill>
+                  <a:schemeClr val="tx1"/>
+                </a:solidFill>
+                <a:effectLst/>
+                <a:latin typeface="Arial" panose="020B0604020202020204" pitchFamily="34" charset="0"/>
+              </a:rPr>
+              <a:t>, </a:t>
+            </a:r>
+            <a:r>
+              <a:rPr kumimoji="0" lang="es-ES" altLang="es-ES" sz="1800" b="0" i="0" u="none" strike="noStrike" cap="none" normalizeH="0" baseline="0" dirty="0" err="1">
+                <a:ln>
+                  <a:noFill/>
+                </a:ln>
+                <a:solidFill>
+                  <a:schemeClr val="tx1"/>
+                </a:solidFill>
+                <a:effectLst/>
+                <a:latin typeface="Arial" panose="020B0604020202020204" pitchFamily="34" charset="0"/>
+              </a:rPr>
+              <a:t>but</a:t>
+            </a:r>
+            <a:r>
+              <a:rPr kumimoji="0" lang="es-ES" altLang="es-ES" sz="1800" b="0" i="0" u="none" strike="noStrike" cap="none" normalizeH="0" baseline="0" dirty="0">
+                <a:ln>
+                  <a:noFill/>
+                </a:ln>
+                <a:solidFill>
+                  <a:schemeClr val="tx1"/>
+                </a:solidFill>
+                <a:effectLst/>
+                <a:latin typeface="Arial" panose="020B0604020202020204" pitchFamily="34" charset="0"/>
+              </a:rPr>
+              <a:t> </a:t>
+            </a:r>
+            <a:r>
+              <a:rPr kumimoji="0" lang="es-ES" altLang="es-ES" sz="1800" b="0" i="0" u="none" strike="noStrike" cap="none" normalizeH="0" baseline="0" dirty="0" err="1">
+                <a:ln>
+                  <a:noFill/>
+                </a:ln>
+                <a:solidFill>
+                  <a:schemeClr val="tx1"/>
+                </a:solidFill>
+                <a:effectLst/>
+                <a:latin typeface="Arial" panose="020B0604020202020204" pitchFamily="34" charset="0"/>
+              </a:rPr>
+              <a:t>requires</a:t>
+            </a:r>
+            <a:r>
+              <a:rPr kumimoji="0" lang="es-ES" altLang="es-ES" sz="1800" b="0" i="0" u="none" strike="noStrike" cap="none" normalizeH="0" baseline="0" dirty="0">
+                <a:ln>
+                  <a:noFill/>
+                </a:ln>
+                <a:solidFill>
+                  <a:schemeClr val="tx1"/>
+                </a:solidFill>
+                <a:effectLst/>
+                <a:latin typeface="Arial" panose="020B0604020202020204" pitchFamily="34" charset="0"/>
+              </a:rPr>
+              <a:t> data + GPU.</a:t>
+            </a:r>
+          </a:p>
+          <a:p>
+            <a:pPr marL="285750" marR="0" lvl="0" indent="-285750" algn="l" defTabSz="914400" rtl="0" eaLnBrk="0" fontAlgn="base" latinLnBrk="0" hangingPunct="0">
+              <a:lnSpc>
+                <a:spcPct val="100000"/>
+              </a:lnSpc>
               <a:spcBef>
-                <a:spcPts val="600"/>
+                <a:spcPct val="0"/>
               </a:spcBef>
               <a:spcAft>
-                <a:spcPts val="600"/>
+                <a:spcPct val="0"/>
               </a:spcAft>
+              <a:buClrTx/>
+              <a:buSzTx/>
               <a:buFont typeface="Arial" panose="020B0604020202020204" pitchFamily="34" charset="0"/>
               <a:buChar char="•"/>
+              <a:tabLst/>
             </a:pPr>
             <a:r>
-              <a:rPr lang="en-US" dirty="0">
-                <a:solidFill>
-                  <a:srgbClr val="002060"/>
-                </a:solidFill>
-                <a:latin typeface="+mj-lt"/>
-                <a:sym typeface="Tahoma" charset="0"/>
-              </a:rPr>
-              <a:t>The main drawback is…</a:t>
-            </a:r>
-          </a:p>
-          <a:p>
-            <a:pPr marL="285750" indent="-285750">
+              <a:rPr lang="es-ES" altLang="es-ES" dirty="0" err="1">
+                <a:latin typeface="Arial" panose="020B0604020202020204" pitchFamily="34" charset="0"/>
+              </a:rPr>
+              <a:t>Classical</a:t>
+            </a:r>
+            <a:r>
+              <a:rPr lang="es-ES" altLang="es-ES" dirty="0">
+                <a:latin typeface="Arial" panose="020B0604020202020204" pitchFamily="34" charset="0"/>
+              </a:rPr>
+              <a:t> </a:t>
+            </a:r>
+            <a:r>
+              <a:rPr lang="es-ES" altLang="es-ES" dirty="0" err="1">
+                <a:latin typeface="Arial" panose="020B0604020202020204" pitchFamily="34" charset="0"/>
+              </a:rPr>
+              <a:t>methods</a:t>
+            </a:r>
+            <a:r>
+              <a:rPr lang="es-ES" altLang="es-ES" dirty="0">
+                <a:latin typeface="Arial" panose="020B0604020202020204" pitchFamily="34" charset="0"/>
+              </a:rPr>
+              <a:t> </a:t>
+            </a:r>
+            <a:r>
+              <a:rPr lang="es-ES" altLang="es-ES" dirty="0" err="1">
+                <a:latin typeface="Arial" panose="020B0604020202020204" pitchFamily="34" charset="0"/>
+              </a:rPr>
+              <a:t>efficient</a:t>
+            </a:r>
+            <a:r>
+              <a:rPr lang="es-ES" altLang="es-ES" dirty="0">
+                <a:latin typeface="Arial" panose="020B0604020202020204" pitchFamily="34" charset="0"/>
+              </a:rPr>
+              <a:t> and no data </a:t>
+            </a:r>
+            <a:r>
+              <a:rPr lang="es-ES" altLang="es-ES" dirty="0" err="1">
+                <a:latin typeface="Arial" panose="020B0604020202020204" pitchFamily="34" charset="0"/>
+              </a:rPr>
+              <a:t>needde</a:t>
+            </a:r>
+            <a:r>
+              <a:rPr lang="es-ES" altLang="es-ES" dirty="0">
+                <a:latin typeface="Arial" panose="020B0604020202020204" pitchFamily="34" charset="0"/>
+              </a:rPr>
+              <a:t>, </a:t>
+            </a:r>
+            <a:r>
+              <a:rPr lang="es-ES" altLang="es-ES" dirty="0" err="1">
+                <a:latin typeface="Arial" panose="020B0604020202020204" pitchFamily="34" charset="0"/>
+              </a:rPr>
+              <a:t>but</a:t>
+            </a:r>
+            <a:r>
+              <a:rPr lang="es-ES" altLang="es-ES" dirty="0">
+                <a:latin typeface="Arial" panose="020B0604020202020204" pitchFamily="34" charset="0"/>
+              </a:rPr>
+              <a:t> les </a:t>
+            </a:r>
+            <a:r>
+              <a:rPr lang="es-ES" altLang="es-ES" dirty="0" err="1">
+                <a:latin typeface="Arial" panose="020B0604020202020204" pitchFamily="34" charset="0"/>
+              </a:rPr>
+              <a:t>robust</a:t>
+            </a:r>
+            <a:r>
+              <a:rPr lang="es-ES" altLang="es-ES" dirty="0">
+                <a:latin typeface="Arial" panose="020B0604020202020204" pitchFamily="34" charset="0"/>
+              </a:rPr>
+              <a:t> </a:t>
+            </a:r>
+            <a:r>
+              <a:rPr lang="es-ES" altLang="es-ES" dirty="0" err="1">
+                <a:latin typeface="Arial" panose="020B0604020202020204" pitchFamily="34" charset="0"/>
+              </a:rPr>
+              <a:t>to</a:t>
+            </a:r>
+            <a:r>
+              <a:rPr lang="es-ES" altLang="es-ES" dirty="0">
+                <a:latin typeface="Arial" panose="020B0604020202020204" pitchFamily="34" charset="0"/>
+              </a:rPr>
+              <a:t> real </a:t>
+            </a:r>
+            <a:r>
+              <a:rPr lang="es-ES" altLang="es-ES" dirty="0" err="1">
+                <a:latin typeface="Arial" panose="020B0604020202020204" pitchFamily="34" charset="0"/>
+              </a:rPr>
+              <a:t>conditions</a:t>
+            </a:r>
+            <a:r>
+              <a:rPr lang="es-ES" altLang="es-ES" dirty="0">
+                <a:latin typeface="Arial" panose="020B0604020202020204" pitchFamily="34" charset="0"/>
+              </a:rPr>
+              <a:t>.</a:t>
+            </a:r>
+            <a:endParaRPr kumimoji="0" lang="es-ES" altLang="es-ES" sz="1800" b="0" i="0" u="none" strike="noStrike" cap="none" normalizeH="0" baseline="0" dirty="0">
+              <a:ln>
+                <a:noFill/>
+              </a:ln>
+              <a:solidFill>
+                <a:schemeClr val="tx1"/>
+              </a:solidFill>
+              <a:effectLst/>
+              <a:latin typeface="Arial" panose="020B0604020202020204" pitchFamily="34" charset="0"/>
+            </a:endParaRPr>
+          </a:p>
+        </p:txBody>
+      </p:sp>
+      <p:sp>
+        <p:nvSpPr>
+          <p:cNvPr id="6" name="Rectangle 4">
+            <a:extLst>
+              <a:ext uri="{FF2B5EF4-FFF2-40B4-BE49-F238E27FC236}">
+                <a16:creationId xmlns:a16="http://schemas.microsoft.com/office/drawing/2014/main" id="{44E711C2-834B-AC16-A55F-133C1422CB5C}"/>
+              </a:ext>
+            </a:extLst>
+          </p:cNvPr>
+          <p:cNvSpPr>
+            <a:spLocks noChangeArrowheads="1"/>
+          </p:cNvSpPr>
+          <p:nvPr/>
+        </p:nvSpPr>
+        <p:spPr bwMode="auto">
+          <a:xfrm>
+            <a:off x="0" y="0"/>
+            <a:ext cx="9144000" cy="0"/>
+          </a:xfrm>
+          <a:prstGeom prst="rect">
+            <a:avLst/>
+          </a:prstGeom>
+          <a:noFill/>
+          <a:ln>
+            <a:noFill/>
+          </a:ln>
+          <a:effectLst/>
+          <a:extLst>
+            <a:ext uri="{909E8E84-426E-40DD-AFC4-6F175D3DCCD1}">
+              <a14:hiddenFill xmlns:a14="http://schemas.microsoft.com/office/drawing/2010/main">
+                <a:solidFill>
+                  <a:schemeClr val="accent1"/>
+                </a:solidFill>
+              </a14:hiddenFill>
+            </a:ext>
+            <a:ext uri="{91240B29-F687-4F45-9708-019B960494DF}">
+              <a14:hiddenLine xmlns:a14="http://schemas.microsoft.com/office/drawing/2010/main" w="9525">
+                <a:solidFill>
+                  <a:schemeClr val="tx1"/>
+                </a:solidFill>
+                <a:miter lim="800000"/>
+                <a:headEnd/>
+                <a:tailEnd/>
+              </a14:hiddenLine>
+            </a:ext>
+            <a:ext uri="{AF507438-7753-43E0-B8FC-AC1667EBCBE1}">
+              <a14:hiddenEffects xmlns:a14="http://schemas.microsoft.com/office/drawing/2010/main">
+                <a:effectLst>
+                  <a:outerShdw dist="35921" dir="2700000" algn="ctr" rotWithShape="0">
+                    <a:schemeClr val="bg2"/>
+                  </a:outerShdw>
+                </a:effectLst>
+              </a14:hiddenEffects>
+            </a:ext>
+          </a:extLst>
+        </p:spPr>
+        <p:txBody>
+          <a:bodyPr vert="horz" wrap="none" lIns="91440" tIns="45720" rIns="91440" bIns="45720" numCol="1" anchor="ctr" anchorCtr="0" compatLnSpc="1">
+            <a:prstTxWarp prst="textNoShape">
+              <a:avLst/>
+            </a:prstTxWarp>
+            <a:spAutoFit/>
+          </a:bodyPr>
+          <a:lstStyle/>
+          <a:p>
+            <a:pPr marL="0" marR="0" lvl="0" indent="0" algn="l" defTabSz="914400" rtl="0" eaLnBrk="0" fontAlgn="base" latinLnBrk="0" hangingPunct="0">
+              <a:lnSpc>
+                <a:spcPct val="100000"/>
+              </a:lnSpc>
               <a:spcBef>
-                <a:spcPts val="600"/>
+                <a:spcPct val="0"/>
               </a:spcBef>
               <a:spcAft>
-                <a:spcPts val="600"/>
+                <a:spcPct val="0"/>
               </a:spcAft>
-              <a:buFont typeface="Arial" panose="020B0604020202020204" pitchFamily="34" charset="0"/>
+              <a:buClrTx/>
+              <a:buSzTx/>
+              <a:buFontTx/>
               <a:buChar char="•"/>
+              <a:tabLst/>
             </a:pPr>
             <a:r>
-              <a:rPr lang="en-US" dirty="0">
-                <a:solidFill>
-                  <a:srgbClr val="002060"/>
-                </a:solidFill>
-                <a:latin typeface="+mj-lt"/>
-                <a:sym typeface="Tahoma" charset="0"/>
-              </a:rPr>
-              <a:t>The performance decreases when..</a:t>
-            </a:r>
-          </a:p>
-          <a:p>
-            <a:pPr marL="285750" indent="-285750">
+              <a:rPr kumimoji="0" lang="es-ES" altLang="es-ES" sz="1800" b="1" i="0" u="none" strike="noStrike" cap="none" normalizeH="0" baseline="0" dirty="0" err="1">
+                <a:ln>
+                  <a:noFill/>
+                </a:ln>
+                <a:solidFill>
+                  <a:schemeClr val="tx1"/>
+                </a:solidFill>
+                <a:effectLst/>
+                <a:latin typeface="Arial" panose="020B0604020202020204" pitchFamily="34" charset="0"/>
+              </a:rPr>
+              <a:t>Grounded</a:t>
+            </a:r>
+            <a:r>
+              <a:rPr kumimoji="0" lang="es-ES" altLang="es-ES" sz="1800" b="1" i="0" u="none" strike="noStrike" cap="none" normalizeH="0" baseline="0" dirty="0">
+                <a:ln>
+                  <a:noFill/>
+                </a:ln>
+                <a:solidFill>
+                  <a:schemeClr val="tx1"/>
+                </a:solidFill>
+                <a:effectLst/>
+                <a:latin typeface="Arial" panose="020B0604020202020204" pitchFamily="34" charset="0"/>
+              </a:rPr>
+              <a:t>-SAM</a:t>
+            </a:r>
+            <a:r>
+              <a:rPr kumimoji="0" lang="es-ES" altLang="es-ES" sz="1800" b="0" i="0" u="none" strike="noStrike" cap="none" normalizeH="0" baseline="0" dirty="0">
+                <a:ln>
+                  <a:noFill/>
+                </a:ln>
+                <a:solidFill>
+                  <a:schemeClr val="tx1"/>
+                </a:solidFill>
+                <a:effectLst/>
+                <a:latin typeface="Arial" panose="020B0604020202020204" pitchFamily="34" charset="0"/>
+              </a:rPr>
+              <a:t> </a:t>
+            </a:r>
+            <a:r>
+              <a:rPr kumimoji="0" lang="es-ES" altLang="es-ES" sz="1800" b="0" i="0" u="none" strike="noStrike" cap="none" normalizeH="0" baseline="0" dirty="0" err="1">
+                <a:ln>
+                  <a:noFill/>
+                </a:ln>
+                <a:solidFill>
+                  <a:schemeClr val="tx1"/>
+                </a:solidFill>
+                <a:effectLst/>
+                <a:latin typeface="Arial" panose="020B0604020202020204" pitchFamily="34" charset="0"/>
+              </a:rPr>
+              <a:t>is</a:t>
+            </a:r>
+            <a:r>
+              <a:rPr kumimoji="0" lang="es-ES" altLang="es-ES" sz="1800" b="0" i="0" u="none" strike="noStrike" cap="none" normalizeH="0" baseline="0" dirty="0">
+                <a:ln>
+                  <a:noFill/>
+                </a:ln>
+                <a:solidFill>
+                  <a:schemeClr val="tx1"/>
+                </a:solidFill>
+                <a:effectLst/>
+                <a:latin typeface="Arial" panose="020B0604020202020204" pitchFamily="34" charset="0"/>
+              </a:rPr>
+              <a:t> </a:t>
+            </a:r>
+            <a:r>
+              <a:rPr kumimoji="0" lang="es-ES" altLang="es-ES" sz="1800" b="0" i="0" u="none" strike="noStrike" cap="none" normalizeH="0" baseline="0" dirty="0" err="1">
+                <a:ln>
+                  <a:noFill/>
+                </a:ln>
+                <a:solidFill>
+                  <a:schemeClr val="tx1"/>
+                </a:solidFill>
+                <a:effectLst/>
+                <a:latin typeface="Arial" panose="020B0604020202020204" pitchFamily="34" charset="0"/>
+              </a:rPr>
+              <a:t>the</a:t>
+            </a:r>
+            <a:r>
+              <a:rPr kumimoji="0" lang="es-ES" altLang="es-ES" sz="1800" b="0" i="0" u="none" strike="noStrike" cap="none" normalizeH="0" baseline="0" dirty="0">
+                <a:ln>
+                  <a:noFill/>
+                </a:ln>
+                <a:solidFill>
+                  <a:schemeClr val="tx1"/>
+                </a:solidFill>
+                <a:effectLst/>
+                <a:latin typeface="Arial" panose="020B0604020202020204" pitchFamily="34" charset="0"/>
+              </a:rPr>
+              <a:t> </a:t>
+            </a:r>
+            <a:r>
+              <a:rPr kumimoji="0" lang="es-ES" altLang="es-ES" sz="1800" b="0" i="0" u="none" strike="noStrike" cap="none" normalizeH="0" baseline="0" dirty="0" err="1">
+                <a:ln>
+                  <a:noFill/>
+                </a:ln>
+                <a:solidFill>
+                  <a:schemeClr val="tx1"/>
+                </a:solidFill>
+                <a:effectLst/>
+                <a:latin typeface="Arial" panose="020B0604020202020204" pitchFamily="34" charset="0"/>
+              </a:rPr>
+              <a:t>most</a:t>
+            </a:r>
+            <a:r>
+              <a:rPr kumimoji="0" lang="es-ES" altLang="es-ES" sz="1800" b="0" i="0" u="none" strike="noStrike" cap="none" normalizeH="0" baseline="0" dirty="0">
+                <a:ln>
+                  <a:noFill/>
+                </a:ln>
+                <a:solidFill>
+                  <a:schemeClr val="tx1"/>
+                </a:solidFill>
+                <a:effectLst/>
+                <a:latin typeface="Arial" panose="020B0604020202020204" pitchFamily="34" charset="0"/>
+              </a:rPr>
+              <a:t> flexible </a:t>
+            </a:r>
+            <a:r>
+              <a:rPr kumimoji="0" lang="es-ES" altLang="es-ES" sz="1800" b="0" i="0" u="none" strike="noStrike" cap="none" normalizeH="0" baseline="0" dirty="0" err="1">
+                <a:ln>
+                  <a:noFill/>
+                </a:ln>
+                <a:solidFill>
+                  <a:schemeClr val="tx1"/>
+                </a:solidFill>
+                <a:effectLst/>
+                <a:latin typeface="Arial" panose="020B0604020202020204" pitchFamily="34" charset="0"/>
+              </a:rPr>
+              <a:t>approach</a:t>
+            </a:r>
+            <a:r>
+              <a:rPr kumimoji="0" lang="es-ES" altLang="es-ES" sz="1800" b="0" i="0" u="none" strike="noStrike" cap="none" normalizeH="0" baseline="0" dirty="0">
+                <a:ln>
+                  <a:noFill/>
+                </a:ln>
+                <a:solidFill>
+                  <a:schemeClr val="tx1"/>
+                </a:solidFill>
+                <a:effectLst/>
+                <a:latin typeface="Arial" panose="020B0604020202020204" pitchFamily="34" charset="0"/>
+              </a:rPr>
+              <a:t>, </a:t>
+            </a:r>
+            <a:r>
+              <a:rPr kumimoji="0" lang="es-ES" altLang="es-ES" sz="1800" b="0" i="0" u="none" strike="noStrike" cap="none" normalizeH="0" baseline="0" dirty="0" err="1">
+                <a:ln>
+                  <a:noFill/>
+                </a:ln>
+                <a:solidFill>
+                  <a:schemeClr val="tx1"/>
+                </a:solidFill>
+                <a:effectLst/>
+                <a:latin typeface="Arial" panose="020B0604020202020204" pitchFamily="34" charset="0"/>
+              </a:rPr>
+              <a:t>enabling</a:t>
+            </a:r>
+            <a:r>
+              <a:rPr kumimoji="0" lang="es-ES" altLang="es-ES" sz="1800" b="0" i="0" u="none" strike="noStrike" cap="none" normalizeH="0" baseline="0" dirty="0">
+                <a:ln>
+                  <a:noFill/>
+                </a:ln>
+                <a:solidFill>
+                  <a:schemeClr val="tx1"/>
+                </a:solidFill>
+                <a:effectLst/>
+                <a:latin typeface="Arial" panose="020B0604020202020204" pitchFamily="34" charset="0"/>
+              </a:rPr>
+              <a:t> </a:t>
+            </a:r>
+            <a:r>
+              <a:rPr kumimoji="0" lang="es-ES" altLang="es-ES" sz="1800" b="1" i="0" u="none" strike="noStrike" cap="none" normalizeH="0" baseline="0" dirty="0" err="1">
+                <a:ln>
+                  <a:noFill/>
+                </a:ln>
+                <a:solidFill>
+                  <a:schemeClr val="tx1"/>
+                </a:solidFill>
+                <a:effectLst/>
+                <a:latin typeface="Arial" panose="020B0604020202020204" pitchFamily="34" charset="0"/>
+              </a:rPr>
+              <a:t>zero-shot</a:t>
+            </a:r>
+            <a:r>
+              <a:rPr kumimoji="0" lang="es-ES" altLang="es-ES" sz="1800" b="1" i="0" u="none" strike="noStrike" cap="none" normalizeH="0" baseline="0" dirty="0">
+                <a:ln>
+                  <a:noFill/>
+                </a:ln>
+                <a:solidFill>
+                  <a:schemeClr val="tx1"/>
+                </a:solidFill>
+                <a:effectLst/>
+                <a:latin typeface="Arial" panose="020B0604020202020204" pitchFamily="34" charset="0"/>
+              </a:rPr>
+              <a:t> </a:t>
+            </a:r>
+            <a:r>
+              <a:rPr kumimoji="0" lang="es-ES" altLang="es-ES" sz="1800" b="1" i="0" u="none" strike="noStrike" cap="none" normalizeH="0" baseline="0" dirty="0" err="1">
+                <a:ln>
+                  <a:noFill/>
+                </a:ln>
+                <a:solidFill>
+                  <a:schemeClr val="tx1"/>
+                </a:solidFill>
+                <a:effectLst/>
+                <a:latin typeface="Arial" panose="020B0604020202020204" pitchFamily="34" charset="0"/>
+              </a:rPr>
+              <a:t>detection</a:t>
+            </a:r>
+            <a:r>
+              <a:rPr kumimoji="0" lang="es-ES" altLang="es-ES" sz="1800" b="1" i="0" u="none" strike="noStrike" cap="none" normalizeH="0" baseline="0" dirty="0">
+                <a:ln>
+                  <a:noFill/>
+                </a:ln>
+                <a:solidFill>
+                  <a:schemeClr val="tx1"/>
+                </a:solidFill>
+                <a:effectLst/>
+                <a:latin typeface="Arial" panose="020B0604020202020204" pitchFamily="34" charset="0"/>
+              </a:rPr>
+              <a:t> and </a:t>
+            </a:r>
+            <a:r>
+              <a:rPr kumimoji="0" lang="es-ES" altLang="es-ES" sz="1800" b="1" i="0" u="none" strike="noStrike" cap="none" normalizeH="0" baseline="0" dirty="0" err="1">
+                <a:ln>
+                  <a:noFill/>
+                </a:ln>
+                <a:solidFill>
+                  <a:schemeClr val="tx1"/>
+                </a:solidFill>
+                <a:effectLst/>
+                <a:latin typeface="Arial" panose="020B0604020202020204" pitchFamily="34" charset="0"/>
+              </a:rPr>
+              <a:t>segmentation</a:t>
+            </a:r>
+            <a:r>
+              <a:rPr kumimoji="0" lang="es-ES" altLang="es-ES" sz="1800" b="0" i="0" u="none" strike="noStrike" cap="none" normalizeH="0" baseline="0" dirty="0">
+                <a:ln>
+                  <a:noFill/>
+                </a:ln>
+                <a:solidFill>
+                  <a:schemeClr val="tx1"/>
+                </a:solidFill>
+                <a:effectLst/>
+                <a:latin typeface="Arial" panose="020B0604020202020204" pitchFamily="34" charset="0"/>
+              </a:rPr>
+              <a:t>, </a:t>
+            </a:r>
+            <a:r>
+              <a:rPr kumimoji="0" lang="es-ES" altLang="es-ES" sz="1800" b="0" i="0" u="none" strike="noStrike" cap="none" normalizeH="0" baseline="0" dirty="0" err="1">
+                <a:ln>
+                  <a:noFill/>
+                </a:ln>
+                <a:solidFill>
+                  <a:schemeClr val="tx1"/>
+                </a:solidFill>
+                <a:effectLst/>
+                <a:latin typeface="Arial" panose="020B0604020202020204" pitchFamily="34" charset="0"/>
+              </a:rPr>
+              <a:t>making</a:t>
+            </a:r>
+            <a:r>
+              <a:rPr kumimoji="0" lang="es-ES" altLang="es-ES" sz="1800" b="0" i="0" u="none" strike="noStrike" cap="none" normalizeH="0" baseline="0" dirty="0">
+                <a:ln>
+                  <a:noFill/>
+                </a:ln>
+                <a:solidFill>
+                  <a:schemeClr val="tx1"/>
+                </a:solidFill>
+                <a:effectLst/>
+                <a:latin typeface="Arial" panose="020B0604020202020204" pitchFamily="34" charset="0"/>
+              </a:rPr>
+              <a:t> </a:t>
+            </a:r>
+            <a:r>
+              <a:rPr kumimoji="0" lang="es-ES" altLang="es-ES" sz="1800" b="0" i="0" u="none" strike="noStrike" cap="none" normalizeH="0" baseline="0" dirty="0" err="1">
+                <a:ln>
+                  <a:noFill/>
+                </a:ln>
+                <a:solidFill>
+                  <a:schemeClr val="tx1"/>
+                </a:solidFill>
+                <a:effectLst/>
+                <a:latin typeface="Arial" panose="020B0604020202020204" pitchFamily="34" charset="0"/>
+              </a:rPr>
+              <a:t>it</a:t>
+            </a:r>
+            <a:r>
+              <a:rPr kumimoji="0" lang="es-ES" altLang="es-ES" sz="1800" b="0" i="0" u="none" strike="noStrike" cap="none" normalizeH="0" baseline="0" dirty="0">
+                <a:ln>
+                  <a:noFill/>
+                </a:ln>
+                <a:solidFill>
+                  <a:schemeClr val="tx1"/>
+                </a:solidFill>
+                <a:effectLst/>
+                <a:latin typeface="Arial" panose="020B0604020202020204" pitchFamily="34" charset="0"/>
+              </a:rPr>
+              <a:t> </a:t>
+            </a:r>
+            <a:r>
+              <a:rPr kumimoji="0" lang="es-ES" altLang="es-ES" sz="1800" b="0" i="0" u="none" strike="noStrike" cap="none" normalizeH="0" baseline="0" dirty="0" err="1">
+                <a:ln>
+                  <a:noFill/>
+                </a:ln>
+                <a:solidFill>
+                  <a:schemeClr val="tx1"/>
+                </a:solidFill>
+                <a:effectLst/>
+                <a:latin typeface="Arial" panose="020B0604020202020204" pitchFamily="34" charset="0"/>
+              </a:rPr>
+              <a:t>suitable</a:t>
+            </a:r>
+            <a:r>
+              <a:rPr kumimoji="0" lang="es-ES" altLang="es-ES" sz="1800" b="0" i="0" u="none" strike="noStrike" cap="none" normalizeH="0" baseline="0" dirty="0">
+                <a:ln>
+                  <a:noFill/>
+                </a:ln>
+                <a:solidFill>
+                  <a:schemeClr val="tx1"/>
+                </a:solidFill>
+                <a:effectLst/>
+                <a:latin typeface="Arial" panose="020B0604020202020204" pitchFamily="34" charset="0"/>
+              </a:rPr>
+              <a:t> </a:t>
+            </a:r>
+            <a:r>
+              <a:rPr kumimoji="0" lang="es-ES" altLang="es-ES" sz="1800" b="0" i="0" u="none" strike="noStrike" cap="none" normalizeH="0" baseline="0" dirty="0" err="1">
+                <a:ln>
+                  <a:noFill/>
+                </a:ln>
+                <a:solidFill>
+                  <a:schemeClr val="tx1"/>
+                </a:solidFill>
+                <a:effectLst/>
+                <a:latin typeface="Arial" panose="020B0604020202020204" pitchFamily="34" charset="0"/>
+              </a:rPr>
+              <a:t>when</a:t>
+            </a:r>
+            <a:r>
+              <a:rPr kumimoji="0" lang="es-ES" altLang="es-ES" sz="1800" b="0" i="0" u="none" strike="noStrike" cap="none" normalizeH="0" baseline="0" dirty="0">
+                <a:ln>
+                  <a:noFill/>
+                </a:ln>
+                <a:solidFill>
+                  <a:schemeClr val="tx1"/>
+                </a:solidFill>
+                <a:effectLst/>
+                <a:latin typeface="Arial" panose="020B0604020202020204" pitchFamily="34" charset="0"/>
+              </a:rPr>
+              <a:t> </a:t>
+            </a:r>
+            <a:r>
+              <a:rPr kumimoji="0" lang="es-ES" altLang="es-ES" sz="1800" b="0" i="0" u="none" strike="noStrike" cap="none" normalizeH="0" baseline="0" dirty="0" err="1">
+                <a:ln>
+                  <a:noFill/>
+                </a:ln>
+                <a:solidFill>
+                  <a:schemeClr val="tx1"/>
+                </a:solidFill>
+                <a:effectLst/>
+                <a:latin typeface="Arial" panose="020B0604020202020204" pitchFamily="34" charset="0"/>
+              </a:rPr>
+              <a:t>labeled</a:t>
+            </a:r>
+            <a:r>
+              <a:rPr kumimoji="0" lang="es-ES" altLang="es-ES" sz="1800" b="0" i="0" u="none" strike="noStrike" cap="none" normalizeH="0" baseline="0" dirty="0">
+                <a:ln>
+                  <a:noFill/>
+                </a:ln>
+                <a:solidFill>
+                  <a:schemeClr val="tx1"/>
+                </a:solidFill>
+                <a:effectLst/>
+                <a:latin typeface="Arial" panose="020B0604020202020204" pitchFamily="34" charset="0"/>
+              </a:rPr>
+              <a:t> data </a:t>
+            </a:r>
+            <a:r>
+              <a:rPr kumimoji="0" lang="es-ES" altLang="es-ES" sz="1800" b="0" i="0" u="none" strike="noStrike" cap="none" normalizeH="0" baseline="0" dirty="0" err="1">
+                <a:ln>
+                  <a:noFill/>
+                </a:ln>
+                <a:solidFill>
+                  <a:schemeClr val="tx1"/>
+                </a:solidFill>
+                <a:effectLst/>
+                <a:latin typeface="Arial" panose="020B0604020202020204" pitchFamily="34" charset="0"/>
+              </a:rPr>
+              <a:t>is</a:t>
+            </a:r>
+            <a:r>
+              <a:rPr kumimoji="0" lang="es-ES" altLang="es-ES" sz="1800" b="0" i="0" u="none" strike="noStrike" cap="none" normalizeH="0" baseline="0" dirty="0">
+                <a:ln>
+                  <a:noFill/>
+                </a:ln>
+                <a:solidFill>
+                  <a:schemeClr val="tx1"/>
+                </a:solidFill>
+                <a:effectLst/>
+                <a:latin typeface="Arial" panose="020B0604020202020204" pitchFamily="34" charset="0"/>
+              </a:rPr>
+              <a:t> </a:t>
+            </a:r>
+            <a:r>
+              <a:rPr kumimoji="0" lang="es-ES" altLang="es-ES" sz="1800" b="0" i="0" u="none" strike="noStrike" cap="none" normalizeH="0" baseline="0" dirty="0" err="1">
+                <a:ln>
+                  <a:noFill/>
+                </a:ln>
+                <a:solidFill>
+                  <a:schemeClr val="tx1"/>
+                </a:solidFill>
+                <a:effectLst/>
+                <a:latin typeface="Arial" panose="020B0604020202020204" pitchFamily="34" charset="0"/>
+              </a:rPr>
+              <a:t>unavailable</a:t>
+            </a:r>
+            <a:r>
+              <a:rPr kumimoji="0" lang="es-ES" altLang="es-ES" sz="1800" b="0" i="0" u="none" strike="noStrike" cap="none" normalizeH="0" baseline="0" dirty="0">
+                <a:ln>
+                  <a:noFill/>
+                </a:ln>
+                <a:solidFill>
+                  <a:schemeClr val="tx1"/>
+                </a:solidFill>
+                <a:effectLst/>
+                <a:latin typeface="Arial" panose="020B0604020202020204" pitchFamily="34" charset="0"/>
+              </a:rPr>
+              <a:t>. </a:t>
+            </a:r>
+          </a:p>
+          <a:p>
+            <a:pPr marL="0" marR="0" lvl="0" indent="0" algn="l" defTabSz="914400" rtl="0" eaLnBrk="0" fontAlgn="base" latinLnBrk="0" hangingPunct="0">
+              <a:lnSpc>
+                <a:spcPct val="100000"/>
+              </a:lnSpc>
               <a:spcBef>
-                <a:spcPts val="600"/>
+                <a:spcPct val="0"/>
               </a:spcBef>
               <a:spcAft>
-                <a:spcPts val="600"/>
+                <a:spcPct val="0"/>
               </a:spcAft>
-              <a:buFont typeface="Arial" panose="020B0604020202020204" pitchFamily="34" charset="0"/>
+              <a:buClrTx/>
+              <a:buSzTx/>
+              <a:buFontTx/>
               <a:buChar char="•"/>
+              <a:tabLst/>
             </a:pPr>
             <a:r>
-              <a:rPr lang="en-US" dirty="0">
-                <a:solidFill>
-                  <a:srgbClr val="002060"/>
-                </a:solidFill>
-                <a:latin typeface="+mj-lt"/>
-                <a:sym typeface="Tahoma" charset="0"/>
-              </a:rPr>
-              <a:t>….</a:t>
-            </a:r>
-          </a:p>
-          <a:p>
-            <a:pPr marL="285750" indent="-285750">
+              <a:rPr kumimoji="0" lang="es-ES" altLang="es-ES" sz="1800" b="1" i="0" u="none" strike="noStrike" cap="none" normalizeH="0" baseline="0" dirty="0">
+                <a:ln>
+                  <a:noFill/>
+                </a:ln>
+                <a:solidFill>
+                  <a:schemeClr val="tx1"/>
+                </a:solidFill>
+                <a:effectLst/>
+                <a:latin typeface="Arial" panose="020B0604020202020204" pitchFamily="34" charset="0"/>
+              </a:rPr>
+              <a:t>YOLOv9 + </a:t>
+            </a:r>
+            <a:r>
+              <a:rPr kumimoji="0" lang="es-ES" altLang="es-ES" sz="1800" b="1" i="0" u="none" strike="noStrike" cap="none" normalizeH="0" baseline="0" dirty="0" err="1">
+                <a:ln>
+                  <a:noFill/>
+                </a:ln>
+                <a:solidFill>
+                  <a:schemeClr val="tx1"/>
+                </a:solidFill>
+                <a:effectLst/>
+                <a:latin typeface="Arial" panose="020B0604020202020204" pitchFamily="34" charset="0"/>
+              </a:rPr>
+              <a:t>EfficientSAM</a:t>
+            </a:r>
+            <a:r>
+              <a:rPr kumimoji="0" lang="es-ES" altLang="es-ES" sz="1800" b="0" i="0" u="none" strike="noStrike" cap="none" normalizeH="0" baseline="0" dirty="0">
+                <a:ln>
+                  <a:noFill/>
+                </a:ln>
+                <a:solidFill>
+                  <a:schemeClr val="tx1"/>
+                </a:solidFill>
+                <a:effectLst/>
+                <a:latin typeface="Arial" panose="020B0604020202020204" pitchFamily="34" charset="0"/>
+              </a:rPr>
+              <a:t> </a:t>
+            </a:r>
+            <a:r>
+              <a:rPr kumimoji="0" lang="es-ES" altLang="es-ES" sz="1800" b="0" i="0" u="none" strike="noStrike" cap="none" normalizeH="0" baseline="0" dirty="0" err="1">
+                <a:ln>
+                  <a:noFill/>
+                </a:ln>
+                <a:solidFill>
+                  <a:schemeClr val="tx1"/>
+                </a:solidFill>
+                <a:effectLst/>
+                <a:latin typeface="Arial" panose="020B0604020202020204" pitchFamily="34" charset="0"/>
+              </a:rPr>
+              <a:t>provides</a:t>
+            </a:r>
+            <a:r>
+              <a:rPr kumimoji="0" lang="es-ES" altLang="es-ES" sz="1800" b="0" i="0" u="none" strike="noStrike" cap="none" normalizeH="0" baseline="0" dirty="0">
+                <a:ln>
+                  <a:noFill/>
+                </a:ln>
+                <a:solidFill>
+                  <a:schemeClr val="tx1"/>
+                </a:solidFill>
+                <a:effectLst/>
+                <a:latin typeface="Arial" panose="020B0604020202020204" pitchFamily="34" charset="0"/>
+              </a:rPr>
+              <a:t> </a:t>
+            </a:r>
+            <a:r>
+              <a:rPr kumimoji="0" lang="es-ES" altLang="es-ES" sz="1800" b="0" i="0" u="none" strike="noStrike" cap="none" normalizeH="0" baseline="0" dirty="0" err="1">
+                <a:ln>
+                  <a:noFill/>
+                </a:ln>
+                <a:solidFill>
+                  <a:schemeClr val="tx1"/>
+                </a:solidFill>
+                <a:effectLst/>
+                <a:latin typeface="Arial" panose="020B0604020202020204" pitchFamily="34" charset="0"/>
+              </a:rPr>
+              <a:t>the</a:t>
+            </a:r>
+            <a:r>
+              <a:rPr kumimoji="0" lang="es-ES" altLang="es-ES" sz="1800" b="0" i="0" u="none" strike="noStrike" cap="none" normalizeH="0" baseline="0" dirty="0">
+                <a:ln>
+                  <a:noFill/>
+                </a:ln>
+                <a:solidFill>
+                  <a:schemeClr val="tx1"/>
+                </a:solidFill>
+                <a:effectLst/>
+                <a:latin typeface="Arial" panose="020B0604020202020204" pitchFamily="34" charset="0"/>
+              </a:rPr>
+              <a:t> </a:t>
+            </a:r>
+            <a:r>
+              <a:rPr kumimoji="0" lang="es-ES" altLang="es-ES" sz="1800" b="0" i="0" u="none" strike="noStrike" cap="none" normalizeH="0" baseline="0" dirty="0" err="1">
+                <a:ln>
+                  <a:noFill/>
+                </a:ln>
+                <a:solidFill>
+                  <a:schemeClr val="tx1"/>
+                </a:solidFill>
+                <a:effectLst/>
+                <a:latin typeface="Arial" panose="020B0604020202020204" pitchFamily="34" charset="0"/>
+              </a:rPr>
+              <a:t>best</a:t>
+            </a:r>
+            <a:r>
+              <a:rPr kumimoji="0" lang="es-ES" altLang="es-ES" sz="1800" b="0" i="0" u="none" strike="noStrike" cap="none" normalizeH="0" baseline="0" dirty="0">
+                <a:ln>
+                  <a:noFill/>
+                </a:ln>
+                <a:solidFill>
+                  <a:schemeClr val="tx1"/>
+                </a:solidFill>
+                <a:effectLst/>
+                <a:latin typeface="Arial" panose="020B0604020202020204" pitchFamily="34" charset="0"/>
+              </a:rPr>
+              <a:t> </a:t>
+            </a:r>
+            <a:r>
+              <a:rPr kumimoji="0" lang="es-ES" altLang="es-ES" sz="1800" b="1" i="0" u="none" strike="noStrike" cap="none" normalizeH="0" baseline="0" dirty="0" err="1">
+                <a:ln>
+                  <a:noFill/>
+                </a:ln>
+                <a:solidFill>
+                  <a:schemeClr val="tx1"/>
+                </a:solidFill>
+                <a:effectLst/>
+                <a:latin typeface="Arial" panose="020B0604020202020204" pitchFamily="34" charset="0"/>
+              </a:rPr>
+              <a:t>accuracy</a:t>
+            </a:r>
+            <a:r>
+              <a:rPr kumimoji="0" lang="es-ES" altLang="es-ES" sz="1800" b="1" i="0" u="none" strike="noStrike" cap="none" normalizeH="0" baseline="0" dirty="0">
+                <a:ln>
+                  <a:noFill/>
+                </a:ln>
+                <a:solidFill>
+                  <a:schemeClr val="tx1"/>
+                </a:solidFill>
+                <a:effectLst/>
+                <a:latin typeface="Arial" panose="020B0604020202020204" pitchFamily="34" charset="0"/>
+              </a:rPr>
+              <a:t>–</a:t>
+            </a:r>
+            <a:r>
+              <a:rPr kumimoji="0" lang="es-ES" altLang="es-ES" sz="1800" b="1" i="0" u="none" strike="noStrike" cap="none" normalizeH="0" baseline="0" dirty="0" err="1">
+                <a:ln>
+                  <a:noFill/>
+                </a:ln>
+                <a:solidFill>
+                  <a:schemeClr val="tx1"/>
+                </a:solidFill>
+                <a:effectLst/>
+                <a:latin typeface="Arial" panose="020B0604020202020204" pitchFamily="34" charset="0"/>
+              </a:rPr>
+              <a:t>speed</a:t>
+            </a:r>
+            <a:r>
+              <a:rPr kumimoji="0" lang="es-ES" altLang="es-ES" sz="1800" b="1" i="0" u="none" strike="noStrike" cap="none" normalizeH="0" baseline="0" dirty="0">
+                <a:ln>
+                  <a:noFill/>
+                </a:ln>
+                <a:solidFill>
+                  <a:schemeClr val="tx1"/>
+                </a:solidFill>
+                <a:effectLst/>
+                <a:latin typeface="Arial" panose="020B0604020202020204" pitchFamily="34" charset="0"/>
+              </a:rPr>
+              <a:t> </a:t>
+            </a:r>
+            <a:r>
+              <a:rPr kumimoji="0" lang="es-ES" altLang="es-ES" sz="1800" b="1" i="0" u="none" strike="noStrike" cap="none" normalizeH="0" baseline="0" dirty="0" err="1">
+                <a:ln>
+                  <a:noFill/>
+                </a:ln>
+                <a:solidFill>
+                  <a:schemeClr val="tx1"/>
+                </a:solidFill>
+                <a:effectLst/>
+                <a:latin typeface="Arial" panose="020B0604020202020204" pitchFamily="34" charset="0"/>
+              </a:rPr>
+              <a:t>trade</a:t>
+            </a:r>
+            <a:r>
+              <a:rPr kumimoji="0" lang="es-ES" altLang="es-ES" sz="1800" b="1" i="0" u="none" strike="noStrike" cap="none" normalizeH="0" baseline="0" dirty="0">
+                <a:ln>
+                  <a:noFill/>
+                </a:ln>
+                <a:solidFill>
+                  <a:schemeClr val="tx1"/>
+                </a:solidFill>
+                <a:effectLst/>
+                <a:latin typeface="Arial" panose="020B0604020202020204" pitchFamily="34" charset="0"/>
+              </a:rPr>
+              <a:t>-off</a:t>
+            </a:r>
+            <a:r>
+              <a:rPr kumimoji="0" lang="es-ES" altLang="es-ES" sz="1800" b="0" i="0" u="none" strike="noStrike" cap="none" normalizeH="0" baseline="0" dirty="0">
+                <a:ln>
+                  <a:noFill/>
+                </a:ln>
+                <a:solidFill>
+                  <a:schemeClr val="tx1"/>
+                </a:solidFill>
+                <a:effectLst/>
+                <a:latin typeface="Arial" panose="020B0604020202020204" pitchFamily="34" charset="0"/>
+              </a:rPr>
+              <a:t>, </a:t>
+            </a:r>
+            <a:r>
+              <a:rPr kumimoji="0" lang="es-ES" altLang="es-ES" sz="1800" b="0" i="0" u="none" strike="noStrike" cap="none" normalizeH="0" baseline="0" dirty="0" err="1">
+                <a:ln>
+                  <a:noFill/>
+                </a:ln>
+                <a:solidFill>
+                  <a:schemeClr val="tx1"/>
+                </a:solidFill>
+                <a:effectLst/>
+                <a:latin typeface="Arial" panose="020B0604020202020204" pitchFamily="34" charset="0"/>
+              </a:rPr>
+              <a:t>but</a:t>
+            </a:r>
+            <a:r>
+              <a:rPr kumimoji="0" lang="es-ES" altLang="es-ES" sz="1800" b="0" i="0" u="none" strike="noStrike" cap="none" normalizeH="0" baseline="0" dirty="0">
+                <a:ln>
+                  <a:noFill/>
+                </a:ln>
+                <a:solidFill>
+                  <a:schemeClr val="tx1"/>
+                </a:solidFill>
+                <a:effectLst/>
+                <a:latin typeface="Arial" panose="020B0604020202020204" pitchFamily="34" charset="0"/>
+              </a:rPr>
+              <a:t> </a:t>
+            </a:r>
+            <a:r>
+              <a:rPr kumimoji="0" lang="es-ES" altLang="es-ES" sz="1800" b="0" i="0" u="none" strike="noStrike" cap="none" normalizeH="0" baseline="0" dirty="0" err="1">
+                <a:ln>
+                  <a:noFill/>
+                </a:ln>
+                <a:solidFill>
+                  <a:schemeClr val="tx1"/>
+                </a:solidFill>
+                <a:effectLst/>
+                <a:latin typeface="Arial" panose="020B0604020202020204" pitchFamily="34" charset="0"/>
+              </a:rPr>
+              <a:t>depends</a:t>
+            </a:r>
+            <a:r>
+              <a:rPr kumimoji="0" lang="es-ES" altLang="es-ES" sz="1800" b="0" i="0" u="none" strike="noStrike" cap="none" normalizeH="0" baseline="0" dirty="0">
+                <a:ln>
+                  <a:noFill/>
+                </a:ln>
+                <a:solidFill>
+                  <a:schemeClr val="tx1"/>
+                </a:solidFill>
+                <a:effectLst/>
+                <a:latin typeface="Arial" panose="020B0604020202020204" pitchFamily="34" charset="0"/>
+              </a:rPr>
+              <a:t> </a:t>
+            </a:r>
+            <a:r>
+              <a:rPr kumimoji="0" lang="es-ES" altLang="es-ES" sz="1800" b="0" i="0" u="none" strike="noStrike" cap="none" normalizeH="0" baseline="0" dirty="0" err="1">
+                <a:ln>
+                  <a:noFill/>
+                </a:ln>
+                <a:solidFill>
+                  <a:schemeClr val="tx1"/>
+                </a:solidFill>
+                <a:effectLst/>
+                <a:latin typeface="Arial" panose="020B0604020202020204" pitchFamily="34" charset="0"/>
+              </a:rPr>
+              <a:t>on</a:t>
+            </a:r>
+            <a:r>
+              <a:rPr kumimoji="0" lang="es-ES" altLang="es-ES" sz="1800" b="0" i="0" u="none" strike="noStrike" cap="none" normalizeH="0" baseline="0" dirty="0">
+                <a:ln>
+                  <a:noFill/>
+                </a:ln>
+                <a:solidFill>
+                  <a:schemeClr val="tx1"/>
+                </a:solidFill>
+                <a:effectLst/>
+                <a:latin typeface="Arial" panose="020B0604020202020204" pitchFamily="34" charset="0"/>
+              </a:rPr>
+              <a:t> </a:t>
+            </a:r>
+            <a:r>
+              <a:rPr kumimoji="0" lang="es-ES" altLang="es-ES" sz="1800" b="1" i="0" u="none" strike="noStrike" cap="none" normalizeH="0" baseline="0" dirty="0">
+                <a:ln>
+                  <a:noFill/>
+                </a:ln>
+                <a:solidFill>
+                  <a:schemeClr val="tx1"/>
+                </a:solidFill>
+                <a:effectLst/>
+                <a:latin typeface="Arial" panose="020B0604020202020204" pitchFamily="34" charset="0"/>
+              </a:rPr>
+              <a:t>fine-</a:t>
+            </a:r>
+            <a:r>
+              <a:rPr kumimoji="0" lang="es-ES" altLang="es-ES" sz="1800" b="1" i="0" u="none" strike="noStrike" cap="none" normalizeH="0" baseline="0" dirty="0" err="1">
+                <a:ln>
+                  <a:noFill/>
+                </a:ln>
+                <a:solidFill>
+                  <a:schemeClr val="tx1"/>
+                </a:solidFill>
+                <a:effectLst/>
+                <a:latin typeface="Arial" panose="020B0604020202020204" pitchFamily="34" charset="0"/>
+              </a:rPr>
+              <a:t>tuning</a:t>
+            </a:r>
+            <a:r>
+              <a:rPr kumimoji="0" lang="es-ES" altLang="es-ES" sz="1800" b="1" i="0" u="none" strike="noStrike" cap="none" normalizeH="0" baseline="0" dirty="0">
+                <a:ln>
+                  <a:noFill/>
+                </a:ln>
+                <a:solidFill>
+                  <a:schemeClr val="tx1"/>
+                </a:solidFill>
+                <a:effectLst/>
+                <a:latin typeface="Arial" panose="020B0604020202020204" pitchFamily="34" charset="0"/>
+              </a:rPr>
+              <a:t> and training data</a:t>
+            </a:r>
+            <a:r>
+              <a:rPr kumimoji="0" lang="es-ES" altLang="es-ES" sz="1800" b="0" i="0" u="none" strike="noStrike" cap="none" normalizeH="0" baseline="0" dirty="0">
+                <a:ln>
+                  <a:noFill/>
+                </a:ln>
+                <a:solidFill>
+                  <a:schemeClr val="tx1"/>
+                </a:solidFill>
+                <a:effectLst/>
+                <a:latin typeface="Arial" panose="020B0604020202020204" pitchFamily="34" charset="0"/>
+              </a:rPr>
+              <a:t>. </a:t>
+            </a:r>
+          </a:p>
+          <a:p>
+            <a:pPr marL="0" marR="0" lvl="0" indent="0" algn="l" defTabSz="914400" rtl="0" eaLnBrk="0" fontAlgn="base" latinLnBrk="0" hangingPunct="0">
+              <a:lnSpc>
+                <a:spcPct val="100000"/>
+              </a:lnSpc>
               <a:spcBef>
-                <a:spcPts val="600"/>
+                <a:spcPct val="0"/>
               </a:spcBef>
               <a:spcAft>
-                <a:spcPts val="600"/>
+                <a:spcPct val="0"/>
               </a:spcAft>
-              <a:buFont typeface="Arial" panose="020B0604020202020204" pitchFamily="34" charset="0"/>
+              <a:buClrTx/>
+              <a:buSzTx/>
+              <a:buFontTx/>
               <a:buChar char="•"/>
+              <a:tabLst/>
             </a:pPr>
             <a:r>
-              <a:rPr lang="en-US" dirty="0">
-                <a:solidFill>
-                  <a:srgbClr val="002060"/>
-                </a:solidFill>
-                <a:latin typeface="+mj-lt"/>
-                <a:sym typeface="Tahoma" charset="0"/>
-              </a:rPr>
-              <a:t>Using method XX may be better than method YY in … circumstances …</a:t>
-            </a:r>
-          </a:p>
-          <a:p>
-            <a:pPr marL="285750" indent="-285750">
+              <a:rPr kumimoji="0" lang="es-ES" altLang="es-ES" sz="1800" b="1" i="0" u="none" strike="noStrike" cap="none" normalizeH="0" baseline="0" dirty="0">
+                <a:ln>
+                  <a:noFill/>
+                </a:ln>
+                <a:solidFill>
+                  <a:schemeClr val="tx1"/>
+                </a:solidFill>
+                <a:effectLst/>
+                <a:latin typeface="Arial" panose="020B0604020202020204" pitchFamily="34" charset="0"/>
+              </a:rPr>
+              <a:t>MAMDD</a:t>
+            </a:r>
+            <a:r>
+              <a:rPr kumimoji="0" lang="es-ES" altLang="es-ES" sz="1800" b="0" i="0" u="none" strike="noStrike" cap="none" normalizeH="0" baseline="0" dirty="0">
+                <a:ln>
+                  <a:noFill/>
+                </a:ln>
+                <a:solidFill>
+                  <a:schemeClr val="tx1"/>
+                </a:solidFill>
+                <a:effectLst/>
+                <a:latin typeface="Arial" panose="020B0604020202020204" pitchFamily="34" charset="0"/>
+              </a:rPr>
+              <a:t> </a:t>
+            </a:r>
+            <a:r>
+              <a:rPr kumimoji="0" lang="es-ES" altLang="es-ES" sz="1800" b="0" i="0" u="none" strike="noStrike" cap="none" normalizeH="0" baseline="0" dirty="0" err="1">
+                <a:ln>
+                  <a:noFill/>
+                </a:ln>
+                <a:solidFill>
+                  <a:schemeClr val="tx1"/>
+                </a:solidFill>
+                <a:effectLst/>
+                <a:latin typeface="Arial" panose="020B0604020202020204" pitchFamily="34" charset="0"/>
+              </a:rPr>
+              <a:t>enhances</a:t>
+            </a:r>
+            <a:r>
+              <a:rPr kumimoji="0" lang="es-ES" altLang="es-ES" sz="1800" b="0" i="0" u="none" strike="noStrike" cap="none" normalizeH="0" baseline="0" dirty="0">
+                <a:ln>
+                  <a:noFill/>
+                </a:ln>
+                <a:solidFill>
+                  <a:schemeClr val="tx1"/>
+                </a:solidFill>
+                <a:effectLst/>
+                <a:latin typeface="Arial" panose="020B0604020202020204" pitchFamily="34" charset="0"/>
+              </a:rPr>
+              <a:t> </a:t>
+            </a:r>
+            <a:r>
+              <a:rPr kumimoji="0" lang="es-ES" altLang="es-ES" sz="1800" b="0" i="0" u="none" strike="noStrike" cap="none" normalizeH="0" baseline="0" dirty="0" err="1">
+                <a:ln>
+                  <a:noFill/>
+                </a:ln>
+                <a:solidFill>
+                  <a:schemeClr val="tx1"/>
+                </a:solidFill>
+                <a:effectLst/>
+                <a:latin typeface="Arial" panose="020B0604020202020204" pitchFamily="34" charset="0"/>
+              </a:rPr>
+              <a:t>classical</a:t>
+            </a:r>
+            <a:r>
+              <a:rPr kumimoji="0" lang="es-ES" altLang="es-ES" sz="1800" b="0" i="0" u="none" strike="noStrike" cap="none" normalizeH="0" baseline="0" dirty="0">
+                <a:ln>
+                  <a:noFill/>
+                </a:ln>
+                <a:solidFill>
+                  <a:schemeClr val="tx1"/>
+                </a:solidFill>
+                <a:effectLst/>
+                <a:latin typeface="Arial" panose="020B0604020202020204" pitchFamily="34" charset="0"/>
+              </a:rPr>
+              <a:t> </a:t>
+            </a:r>
+            <a:r>
+              <a:rPr kumimoji="0" lang="es-ES" altLang="es-ES" sz="1800" b="0" i="0" u="none" strike="noStrike" cap="none" normalizeH="0" baseline="0" dirty="0" err="1">
+                <a:ln>
+                  <a:noFill/>
+                </a:ln>
+                <a:solidFill>
+                  <a:schemeClr val="tx1"/>
+                </a:solidFill>
+                <a:effectLst/>
+                <a:latin typeface="Arial" panose="020B0604020202020204" pitchFamily="34" charset="0"/>
+              </a:rPr>
+              <a:t>edge</a:t>
+            </a:r>
+            <a:r>
+              <a:rPr kumimoji="0" lang="es-ES" altLang="es-ES" sz="1800" b="0" i="0" u="none" strike="noStrike" cap="none" normalizeH="0" baseline="0" dirty="0">
+                <a:ln>
+                  <a:noFill/>
+                </a:ln>
+                <a:solidFill>
+                  <a:schemeClr val="tx1"/>
+                </a:solidFill>
+                <a:effectLst/>
+                <a:latin typeface="Arial" panose="020B0604020202020204" pitchFamily="34" charset="0"/>
+              </a:rPr>
+              <a:t> </a:t>
+            </a:r>
+            <a:r>
+              <a:rPr kumimoji="0" lang="es-ES" altLang="es-ES" sz="1800" b="0" i="0" u="none" strike="noStrike" cap="none" normalizeH="0" baseline="0" dirty="0" err="1">
+                <a:ln>
+                  <a:noFill/>
+                </a:ln>
+                <a:solidFill>
+                  <a:schemeClr val="tx1"/>
+                </a:solidFill>
+                <a:effectLst/>
+                <a:latin typeface="Arial" panose="020B0604020202020204" pitchFamily="34" charset="0"/>
+              </a:rPr>
+              <a:t>detection</a:t>
+            </a:r>
+            <a:r>
+              <a:rPr kumimoji="0" lang="es-ES" altLang="es-ES" sz="1800" b="0" i="0" u="none" strike="noStrike" cap="none" normalizeH="0" baseline="0" dirty="0">
+                <a:ln>
+                  <a:noFill/>
+                </a:ln>
+                <a:solidFill>
+                  <a:schemeClr val="tx1"/>
+                </a:solidFill>
+                <a:effectLst/>
+                <a:latin typeface="Arial" panose="020B0604020202020204" pitchFamily="34" charset="0"/>
+              </a:rPr>
+              <a:t> </a:t>
+            </a:r>
+            <a:r>
+              <a:rPr kumimoji="0" lang="es-ES" altLang="es-ES" sz="1800" b="0" i="0" u="none" strike="noStrike" cap="none" normalizeH="0" baseline="0" dirty="0" err="1">
+                <a:ln>
+                  <a:noFill/>
+                </a:ln>
+                <a:solidFill>
+                  <a:schemeClr val="tx1"/>
+                </a:solidFill>
+                <a:effectLst/>
+                <a:latin typeface="Arial" panose="020B0604020202020204" pitchFamily="34" charset="0"/>
+              </a:rPr>
+              <a:t>with</a:t>
+            </a:r>
+            <a:r>
+              <a:rPr kumimoji="0" lang="es-ES" altLang="es-ES" sz="1800" b="0" i="0" u="none" strike="noStrike" cap="none" normalizeH="0" baseline="0" dirty="0">
+                <a:ln>
+                  <a:noFill/>
+                </a:ln>
+                <a:solidFill>
+                  <a:schemeClr val="tx1"/>
+                </a:solidFill>
+                <a:effectLst/>
+                <a:latin typeface="Arial" panose="020B0604020202020204" pitchFamily="34" charset="0"/>
+              </a:rPr>
+              <a:t> </a:t>
+            </a:r>
+            <a:r>
+              <a:rPr kumimoji="0" lang="es-ES" altLang="es-ES" sz="1800" b="1" i="0" u="none" strike="noStrike" cap="none" normalizeH="0" baseline="0" dirty="0" err="1">
+                <a:ln>
+                  <a:noFill/>
+                </a:ln>
+                <a:solidFill>
+                  <a:schemeClr val="tx1"/>
+                </a:solidFill>
+                <a:effectLst/>
+                <a:latin typeface="Arial" panose="020B0604020202020204" pitchFamily="34" charset="0"/>
+              </a:rPr>
+              <a:t>robustness</a:t>
+            </a:r>
+            <a:r>
+              <a:rPr kumimoji="0" lang="es-ES" altLang="es-ES" sz="1800" b="1" i="0" u="none" strike="noStrike" cap="none" normalizeH="0" baseline="0" dirty="0">
+                <a:ln>
+                  <a:noFill/>
+                </a:ln>
+                <a:solidFill>
+                  <a:schemeClr val="tx1"/>
+                </a:solidFill>
+                <a:effectLst/>
+                <a:latin typeface="Arial" panose="020B0604020202020204" pitchFamily="34" charset="0"/>
+              </a:rPr>
+              <a:t> </a:t>
+            </a:r>
+            <a:r>
+              <a:rPr kumimoji="0" lang="es-ES" altLang="es-ES" sz="1800" b="1" i="0" u="none" strike="noStrike" cap="none" normalizeH="0" baseline="0" dirty="0" err="1">
+                <a:ln>
+                  <a:noFill/>
+                </a:ln>
+                <a:solidFill>
+                  <a:schemeClr val="tx1"/>
+                </a:solidFill>
+                <a:effectLst/>
+                <a:latin typeface="Arial" panose="020B0604020202020204" pitchFamily="34" charset="0"/>
+              </a:rPr>
+              <a:t>to</a:t>
+            </a:r>
+            <a:r>
+              <a:rPr kumimoji="0" lang="es-ES" altLang="es-ES" sz="1800" b="1" i="0" u="none" strike="noStrike" cap="none" normalizeH="0" baseline="0" dirty="0">
+                <a:ln>
+                  <a:noFill/>
+                </a:ln>
+                <a:solidFill>
+                  <a:schemeClr val="tx1"/>
+                </a:solidFill>
+                <a:effectLst/>
+                <a:latin typeface="Arial" panose="020B0604020202020204" pitchFamily="34" charset="0"/>
+              </a:rPr>
+              <a:t> </a:t>
+            </a:r>
+            <a:r>
+              <a:rPr kumimoji="0" lang="es-ES" altLang="es-ES" sz="1800" b="1" i="0" u="none" strike="noStrike" cap="none" normalizeH="0" baseline="0" dirty="0" err="1">
+                <a:ln>
+                  <a:noFill/>
+                </a:ln>
+                <a:solidFill>
+                  <a:schemeClr val="tx1"/>
+                </a:solidFill>
+                <a:effectLst/>
+                <a:latin typeface="Arial" panose="020B0604020202020204" pitchFamily="34" charset="0"/>
+              </a:rPr>
+              <a:t>noise</a:t>
+            </a:r>
+            <a:r>
+              <a:rPr kumimoji="0" lang="es-ES" altLang="es-ES" sz="1800" b="1" i="0" u="none" strike="noStrike" cap="none" normalizeH="0" baseline="0" dirty="0">
+                <a:ln>
+                  <a:noFill/>
+                </a:ln>
+                <a:solidFill>
+                  <a:schemeClr val="tx1"/>
+                </a:solidFill>
+                <a:effectLst/>
+                <a:latin typeface="Arial" panose="020B0604020202020204" pitchFamily="34" charset="0"/>
+              </a:rPr>
+              <a:t> and </a:t>
+            </a:r>
+            <a:r>
+              <a:rPr kumimoji="0" lang="es-ES" altLang="es-ES" sz="1800" b="1" i="0" u="none" strike="noStrike" cap="none" normalizeH="0" baseline="0" dirty="0" err="1">
+                <a:ln>
+                  <a:noFill/>
+                </a:ln>
+                <a:solidFill>
+                  <a:schemeClr val="tx1"/>
+                </a:solidFill>
+                <a:effectLst/>
+                <a:latin typeface="Arial" panose="020B0604020202020204" pitchFamily="34" charset="0"/>
+              </a:rPr>
+              <a:t>low</a:t>
+            </a:r>
+            <a:r>
+              <a:rPr kumimoji="0" lang="es-ES" altLang="es-ES" sz="1800" b="1" i="0" u="none" strike="noStrike" cap="none" normalizeH="0" baseline="0" dirty="0">
+                <a:ln>
+                  <a:noFill/>
+                </a:ln>
+                <a:solidFill>
+                  <a:schemeClr val="tx1"/>
+                </a:solidFill>
+                <a:effectLst/>
+                <a:latin typeface="Arial" panose="020B0604020202020204" pitchFamily="34" charset="0"/>
+              </a:rPr>
+              <a:t> </a:t>
+            </a:r>
+            <a:r>
+              <a:rPr kumimoji="0" lang="es-ES" altLang="es-ES" sz="1800" b="1" i="0" u="none" strike="noStrike" cap="none" normalizeH="0" baseline="0" dirty="0" err="1">
+                <a:ln>
+                  <a:noFill/>
+                </a:ln>
+                <a:solidFill>
+                  <a:schemeClr val="tx1"/>
+                </a:solidFill>
+                <a:effectLst/>
+                <a:latin typeface="Arial" panose="020B0604020202020204" pitchFamily="34" charset="0"/>
+              </a:rPr>
+              <a:t>contrast</a:t>
+            </a:r>
+            <a:r>
+              <a:rPr kumimoji="0" lang="es-ES" altLang="es-ES" sz="1800" b="0" i="0" u="none" strike="noStrike" cap="none" normalizeH="0" baseline="0" dirty="0">
+                <a:ln>
+                  <a:noFill/>
+                </a:ln>
+                <a:solidFill>
+                  <a:schemeClr val="tx1"/>
+                </a:solidFill>
+                <a:effectLst/>
+                <a:latin typeface="Arial" panose="020B0604020202020204" pitchFamily="34" charset="0"/>
+              </a:rPr>
+              <a:t>, </a:t>
+            </a:r>
+            <a:r>
+              <a:rPr kumimoji="0" lang="es-ES" altLang="es-ES" sz="1800" b="0" i="0" u="none" strike="noStrike" cap="none" normalizeH="0" baseline="0" dirty="0" err="1">
+                <a:ln>
+                  <a:noFill/>
+                </a:ln>
+                <a:solidFill>
+                  <a:schemeClr val="tx1"/>
+                </a:solidFill>
+                <a:effectLst/>
+                <a:latin typeface="Arial" panose="020B0604020202020204" pitchFamily="34" charset="0"/>
+              </a:rPr>
+              <a:t>although</a:t>
+            </a:r>
+            <a:r>
+              <a:rPr kumimoji="0" lang="es-ES" altLang="es-ES" sz="1800" b="0" i="0" u="none" strike="noStrike" cap="none" normalizeH="0" baseline="0" dirty="0">
+                <a:ln>
+                  <a:noFill/>
+                </a:ln>
+                <a:solidFill>
+                  <a:schemeClr val="tx1"/>
+                </a:solidFill>
+                <a:effectLst/>
+                <a:latin typeface="Arial" panose="020B0604020202020204" pitchFamily="34" charset="0"/>
+              </a:rPr>
+              <a:t> </a:t>
+            </a:r>
+            <a:r>
+              <a:rPr kumimoji="0" lang="es-ES" altLang="es-ES" sz="1800" b="0" i="0" u="none" strike="noStrike" cap="none" normalizeH="0" baseline="0" dirty="0" err="1">
+                <a:ln>
+                  <a:noFill/>
+                </a:ln>
+                <a:solidFill>
+                  <a:schemeClr val="tx1"/>
+                </a:solidFill>
+                <a:effectLst/>
+                <a:latin typeface="Arial" panose="020B0604020202020204" pitchFamily="34" charset="0"/>
+              </a:rPr>
+              <a:t>it</a:t>
+            </a:r>
+            <a:r>
+              <a:rPr kumimoji="0" lang="es-ES" altLang="es-ES" sz="1800" b="0" i="0" u="none" strike="noStrike" cap="none" normalizeH="0" baseline="0" dirty="0">
+                <a:ln>
+                  <a:noFill/>
+                </a:ln>
+                <a:solidFill>
+                  <a:schemeClr val="tx1"/>
+                </a:solidFill>
+                <a:effectLst/>
+                <a:latin typeface="Arial" panose="020B0604020202020204" pitchFamily="34" charset="0"/>
+              </a:rPr>
+              <a:t> </a:t>
+            </a:r>
+            <a:r>
+              <a:rPr kumimoji="0" lang="es-ES" altLang="es-ES" sz="1800" b="0" i="0" u="none" strike="noStrike" cap="none" normalizeH="0" baseline="0" dirty="0" err="1">
+                <a:ln>
+                  <a:noFill/>
+                </a:ln>
+                <a:solidFill>
+                  <a:schemeClr val="tx1"/>
+                </a:solidFill>
+                <a:effectLst/>
+                <a:latin typeface="Arial" panose="020B0604020202020204" pitchFamily="34" charset="0"/>
+              </a:rPr>
+              <a:t>still</a:t>
+            </a:r>
+            <a:r>
+              <a:rPr kumimoji="0" lang="es-ES" altLang="es-ES" sz="1800" b="0" i="0" u="none" strike="noStrike" cap="none" normalizeH="0" baseline="0" dirty="0">
+                <a:ln>
+                  <a:noFill/>
+                </a:ln>
+                <a:solidFill>
+                  <a:schemeClr val="tx1"/>
+                </a:solidFill>
+                <a:effectLst/>
+                <a:latin typeface="Arial" panose="020B0604020202020204" pitchFamily="34" charset="0"/>
+              </a:rPr>
+              <a:t> </a:t>
+            </a:r>
+            <a:r>
+              <a:rPr kumimoji="0" lang="es-ES" altLang="es-ES" sz="1800" b="0" i="0" u="none" strike="noStrike" cap="none" normalizeH="0" baseline="0" dirty="0" err="1">
+                <a:ln>
+                  <a:noFill/>
+                </a:ln>
+                <a:solidFill>
+                  <a:schemeClr val="tx1"/>
+                </a:solidFill>
+                <a:effectLst/>
+                <a:latin typeface="Arial" panose="020B0604020202020204" pitchFamily="34" charset="0"/>
+              </a:rPr>
+              <a:t>relies</a:t>
+            </a:r>
+            <a:r>
+              <a:rPr kumimoji="0" lang="es-ES" altLang="es-ES" sz="1800" b="0" i="0" u="none" strike="noStrike" cap="none" normalizeH="0" baseline="0" dirty="0">
+                <a:ln>
+                  <a:noFill/>
+                </a:ln>
+                <a:solidFill>
+                  <a:schemeClr val="tx1"/>
+                </a:solidFill>
+                <a:effectLst/>
+                <a:latin typeface="Arial" panose="020B0604020202020204" pitchFamily="34" charset="0"/>
+              </a:rPr>
+              <a:t> </a:t>
+            </a:r>
+            <a:r>
+              <a:rPr kumimoji="0" lang="es-ES" altLang="es-ES" sz="1800" b="0" i="0" u="none" strike="noStrike" cap="none" normalizeH="0" baseline="0" dirty="0" err="1">
+                <a:ln>
+                  <a:noFill/>
+                </a:ln>
+                <a:solidFill>
+                  <a:schemeClr val="tx1"/>
+                </a:solidFill>
+                <a:effectLst/>
+                <a:latin typeface="Arial" panose="020B0604020202020204" pitchFamily="34" charset="0"/>
+              </a:rPr>
+              <a:t>on</a:t>
+            </a:r>
+            <a:r>
+              <a:rPr kumimoji="0" lang="es-ES" altLang="es-ES" sz="1800" b="0" i="0" u="none" strike="noStrike" cap="none" normalizeH="0" baseline="0" dirty="0">
+                <a:ln>
+                  <a:noFill/>
+                </a:ln>
+                <a:solidFill>
+                  <a:schemeClr val="tx1"/>
+                </a:solidFill>
+                <a:effectLst/>
+                <a:latin typeface="Arial" panose="020B0604020202020204" pitchFamily="34" charset="0"/>
+              </a:rPr>
+              <a:t> </a:t>
+            </a:r>
+            <a:r>
+              <a:rPr kumimoji="0" lang="es-ES" altLang="es-ES" sz="1800" b="0" i="0" u="none" strike="noStrike" cap="none" normalizeH="0" baseline="0" dirty="0" err="1">
+                <a:ln>
+                  <a:noFill/>
+                </a:ln>
+                <a:solidFill>
+                  <a:schemeClr val="tx1"/>
+                </a:solidFill>
+                <a:effectLst/>
+                <a:latin typeface="Arial" panose="020B0604020202020204" pitchFamily="34" charset="0"/>
+              </a:rPr>
+              <a:t>handcrafted</a:t>
+            </a:r>
+            <a:r>
+              <a:rPr kumimoji="0" lang="es-ES" altLang="es-ES" sz="1800" b="0" i="0" u="none" strike="noStrike" cap="none" normalizeH="0" baseline="0" dirty="0">
+                <a:ln>
+                  <a:noFill/>
+                </a:ln>
+                <a:solidFill>
+                  <a:schemeClr val="tx1"/>
+                </a:solidFill>
+                <a:effectLst/>
+                <a:latin typeface="Arial" panose="020B0604020202020204" pitchFamily="34" charset="0"/>
+              </a:rPr>
+              <a:t> </a:t>
+            </a:r>
+            <a:r>
+              <a:rPr kumimoji="0" lang="es-ES" altLang="es-ES" sz="1800" b="0" i="0" u="none" strike="noStrike" cap="none" normalizeH="0" baseline="0" dirty="0" err="1">
+                <a:ln>
+                  <a:noFill/>
+                </a:ln>
+                <a:solidFill>
+                  <a:schemeClr val="tx1"/>
+                </a:solidFill>
+                <a:effectLst/>
+                <a:latin typeface="Arial" panose="020B0604020202020204" pitchFamily="34" charset="0"/>
+              </a:rPr>
+              <a:t>processing</a:t>
+            </a:r>
+            <a:r>
+              <a:rPr kumimoji="0" lang="es-ES" altLang="es-ES" sz="1800" b="0" i="0" u="none" strike="noStrike" cap="none" normalizeH="0" baseline="0" dirty="0">
+                <a:ln>
+                  <a:noFill/>
+                </a:ln>
+                <a:solidFill>
+                  <a:schemeClr val="tx1"/>
+                </a:solidFill>
+                <a:effectLst/>
+                <a:latin typeface="Arial" panose="020B0604020202020204" pitchFamily="34" charset="0"/>
+              </a:rPr>
+              <a:t>. </a:t>
+            </a:r>
+          </a:p>
+          <a:p>
+            <a:pPr marL="0" marR="0" lvl="0" indent="0" algn="l" defTabSz="914400" rtl="0" eaLnBrk="0" fontAlgn="base" latinLnBrk="0" hangingPunct="0">
+              <a:lnSpc>
+                <a:spcPct val="100000"/>
+              </a:lnSpc>
               <a:spcBef>
-                <a:spcPts val="600"/>
+                <a:spcPct val="0"/>
               </a:spcBef>
               <a:spcAft>
-                <a:spcPts val="600"/>
+                <a:spcPct val="0"/>
               </a:spcAft>
-              <a:buFont typeface="Arial" panose="020B0604020202020204" pitchFamily="34" charset="0"/>
+              <a:buClrTx/>
+              <a:buSzTx/>
+              <a:buFontTx/>
               <a:buChar char="•"/>
+              <a:tabLst/>
             </a:pPr>
             <a:r>
-              <a:rPr lang="en-US" dirty="0">
-                <a:solidFill>
-                  <a:srgbClr val="002060"/>
-                </a:solidFill>
-                <a:latin typeface="+mj-lt"/>
-                <a:sym typeface="Tahoma" charset="0"/>
-              </a:rPr>
-              <a:t>…..</a:t>
-            </a:r>
-          </a:p>
-          <a:p>
-            <a:pPr marL="285750" indent="-285750">
-              <a:spcBef>
-                <a:spcPts val="600"/>
-              </a:spcBef>
-              <a:spcAft>
-                <a:spcPts val="600"/>
-              </a:spcAft>
-              <a:buFont typeface="Arial" panose="020B0604020202020204" pitchFamily="34" charset="0"/>
-              <a:buChar char="•"/>
-            </a:pPr>
-            <a:endParaRPr lang="en-US" dirty="0">
-              <a:solidFill>
-                <a:srgbClr val="002060"/>
-              </a:solidFill>
-              <a:latin typeface="+mj-lt"/>
-              <a:sym typeface="Tahoma" charset="0"/>
-            </a:endParaRPr>
-          </a:p>
-          <a:p>
-            <a:pPr marL="285750" indent="-285750">
-              <a:spcBef>
-                <a:spcPts val="600"/>
-              </a:spcBef>
-              <a:spcAft>
-                <a:spcPts val="600"/>
-              </a:spcAft>
-              <a:buFont typeface="Arial" panose="020B0604020202020204" pitchFamily="34" charset="0"/>
-              <a:buChar char="•"/>
-            </a:pPr>
-            <a:r>
-              <a:rPr lang="en-US" dirty="0">
-                <a:solidFill>
-                  <a:srgbClr val="002060"/>
-                </a:solidFill>
-                <a:latin typeface="+mj-lt"/>
-                <a:sym typeface="Tahoma" charset="0"/>
-              </a:rPr>
-              <a:t>The implementation evaluated requires a GPU for….</a:t>
-            </a:r>
-          </a:p>
-          <a:p>
-            <a:pPr marL="285750" indent="-285750">
-              <a:buFont typeface="Arial" panose="020B0604020202020204" pitchFamily="34" charset="0"/>
-              <a:buChar char="•"/>
-            </a:pPr>
-            <a:endParaRPr lang="en-US" dirty="0">
-              <a:solidFill>
-                <a:srgbClr val="002060"/>
-              </a:solidFill>
-              <a:latin typeface="+mj-lt"/>
-              <a:sym typeface="Tahoma" charset="0"/>
-            </a:endParaRPr>
+              <a:rPr kumimoji="0" lang="es-ES" altLang="es-ES" sz="1800" b="1" i="0" u="none" strike="noStrike" cap="none" normalizeH="0" baseline="0" dirty="0">
+                <a:ln>
+                  <a:noFill/>
+                </a:ln>
+                <a:solidFill>
+                  <a:schemeClr val="tx1"/>
+                </a:solidFill>
+                <a:effectLst/>
+                <a:latin typeface="Arial" panose="020B0604020202020204" pitchFamily="34" charset="0"/>
+              </a:rPr>
+              <a:t>Adaptive </a:t>
+            </a:r>
+            <a:r>
+              <a:rPr kumimoji="0" lang="es-ES" altLang="es-ES" sz="1800" b="1" i="0" u="none" strike="noStrike" cap="none" normalizeH="0" baseline="0" dirty="0" err="1">
+                <a:ln>
+                  <a:noFill/>
+                </a:ln>
+                <a:solidFill>
+                  <a:schemeClr val="tx1"/>
+                </a:solidFill>
+                <a:effectLst/>
+                <a:latin typeface="Arial" panose="020B0604020202020204" pitchFamily="34" charset="0"/>
+              </a:rPr>
+              <a:t>Canny</a:t>
+            </a:r>
+            <a:r>
+              <a:rPr kumimoji="0" lang="es-ES" altLang="es-ES" sz="1800" b="1" i="0" u="none" strike="noStrike" cap="none" normalizeH="0" baseline="0" dirty="0">
+                <a:ln>
+                  <a:noFill/>
+                </a:ln>
+                <a:solidFill>
+                  <a:schemeClr val="tx1"/>
+                </a:solidFill>
+                <a:effectLst/>
+                <a:latin typeface="Arial" panose="020B0604020202020204" pitchFamily="34" charset="0"/>
+              </a:rPr>
+              <a:t> pipeline</a:t>
+            </a:r>
+            <a:r>
+              <a:rPr kumimoji="0" lang="es-ES" altLang="es-ES" sz="1800" b="0" i="0" u="none" strike="noStrike" cap="none" normalizeH="0" baseline="0" dirty="0">
+                <a:ln>
+                  <a:noFill/>
+                </a:ln>
+                <a:solidFill>
+                  <a:schemeClr val="tx1"/>
+                </a:solidFill>
+                <a:effectLst/>
+                <a:latin typeface="Arial" panose="020B0604020202020204" pitchFamily="34" charset="0"/>
+              </a:rPr>
+              <a:t> </a:t>
+            </a:r>
+            <a:r>
+              <a:rPr kumimoji="0" lang="es-ES" altLang="es-ES" sz="1800" b="0" i="0" u="none" strike="noStrike" cap="none" normalizeH="0" baseline="0" dirty="0" err="1">
+                <a:ln>
+                  <a:noFill/>
+                </a:ln>
+                <a:solidFill>
+                  <a:schemeClr val="tx1"/>
+                </a:solidFill>
+                <a:effectLst/>
+                <a:latin typeface="Arial" panose="020B0604020202020204" pitchFamily="34" charset="0"/>
+              </a:rPr>
+              <a:t>is</a:t>
+            </a:r>
+            <a:r>
+              <a:rPr kumimoji="0" lang="es-ES" altLang="es-ES" sz="1800" b="0" i="0" u="none" strike="noStrike" cap="none" normalizeH="0" baseline="0" dirty="0">
+                <a:ln>
+                  <a:noFill/>
+                </a:ln>
+                <a:solidFill>
+                  <a:schemeClr val="tx1"/>
+                </a:solidFill>
+                <a:effectLst/>
+                <a:latin typeface="Arial" panose="020B0604020202020204" pitchFamily="34" charset="0"/>
+              </a:rPr>
+              <a:t> </a:t>
+            </a:r>
+            <a:r>
+              <a:rPr kumimoji="0" lang="es-ES" altLang="es-ES" sz="1800" b="0" i="0" u="none" strike="noStrike" cap="none" normalizeH="0" baseline="0" dirty="0" err="1">
+                <a:ln>
+                  <a:noFill/>
+                </a:ln>
+                <a:solidFill>
+                  <a:schemeClr val="tx1"/>
+                </a:solidFill>
+                <a:effectLst/>
+                <a:latin typeface="Arial" panose="020B0604020202020204" pitchFamily="34" charset="0"/>
+              </a:rPr>
+              <a:t>the</a:t>
+            </a:r>
+            <a:r>
+              <a:rPr kumimoji="0" lang="es-ES" altLang="es-ES" sz="1800" b="0" i="0" u="none" strike="noStrike" cap="none" normalizeH="0" baseline="0" dirty="0">
+                <a:ln>
+                  <a:noFill/>
+                </a:ln>
+                <a:solidFill>
+                  <a:schemeClr val="tx1"/>
+                </a:solidFill>
+                <a:effectLst/>
+                <a:latin typeface="Arial" panose="020B0604020202020204" pitchFamily="34" charset="0"/>
+              </a:rPr>
+              <a:t> </a:t>
+            </a:r>
+            <a:r>
+              <a:rPr kumimoji="0" lang="es-ES" altLang="es-ES" sz="1800" b="0" i="0" u="none" strike="noStrike" cap="none" normalizeH="0" baseline="0" dirty="0" err="1">
+                <a:ln>
+                  <a:noFill/>
+                </a:ln>
+                <a:solidFill>
+                  <a:schemeClr val="tx1"/>
+                </a:solidFill>
+                <a:effectLst/>
+                <a:latin typeface="Arial" panose="020B0604020202020204" pitchFamily="34" charset="0"/>
+              </a:rPr>
+              <a:t>most</a:t>
+            </a:r>
+            <a:r>
+              <a:rPr kumimoji="0" lang="es-ES" altLang="es-ES" sz="1800" b="0" i="0" u="none" strike="noStrike" cap="none" normalizeH="0" baseline="0" dirty="0">
+                <a:ln>
+                  <a:noFill/>
+                </a:ln>
+                <a:solidFill>
+                  <a:schemeClr val="tx1"/>
+                </a:solidFill>
+                <a:effectLst/>
+                <a:latin typeface="Arial" panose="020B0604020202020204" pitchFamily="34" charset="0"/>
+              </a:rPr>
+              <a:t> </a:t>
+            </a:r>
+            <a:r>
+              <a:rPr kumimoji="0" lang="es-ES" altLang="es-ES" sz="1800" b="1" i="0" u="none" strike="noStrike" cap="none" normalizeH="0" baseline="0" dirty="0" err="1">
+                <a:ln>
+                  <a:noFill/>
+                </a:ln>
+                <a:solidFill>
+                  <a:schemeClr val="tx1"/>
+                </a:solidFill>
+                <a:effectLst/>
+                <a:latin typeface="Arial" panose="020B0604020202020204" pitchFamily="34" charset="0"/>
+              </a:rPr>
+              <a:t>practical</a:t>
+            </a:r>
+            <a:r>
+              <a:rPr kumimoji="0" lang="es-ES" altLang="es-ES" sz="1800" b="1" i="0" u="none" strike="noStrike" cap="none" normalizeH="0" baseline="0" dirty="0">
+                <a:ln>
+                  <a:noFill/>
+                </a:ln>
+                <a:solidFill>
+                  <a:schemeClr val="tx1"/>
+                </a:solidFill>
+                <a:effectLst/>
+                <a:latin typeface="Arial" panose="020B0604020202020204" pitchFamily="34" charset="0"/>
+              </a:rPr>
+              <a:t> and </a:t>
+            </a:r>
+            <a:r>
+              <a:rPr kumimoji="0" lang="es-ES" altLang="es-ES" sz="1800" b="1" i="0" u="none" strike="noStrike" cap="none" normalizeH="0" baseline="0" dirty="0" err="1">
+                <a:ln>
+                  <a:noFill/>
+                </a:ln>
+                <a:solidFill>
+                  <a:schemeClr val="tx1"/>
+                </a:solidFill>
+                <a:effectLst/>
+                <a:latin typeface="Arial" panose="020B0604020202020204" pitchFamily="34" charset="0"/>
+              </a:rPr>
+              <a:t>deployable</a:t>
+            </a:r>
+            <a:r>
+              <a:rPr kumimoji="0" lang="es-ES" altLang="es-ES" sz="1800" b="1" i="0" u="none" strike="noStrike" cap="none" normalizeH="0" baseline="0" dirty="0">
+                <a:ln>
+                  <a:noFill/>
+                </a:ln>
+                <a:solidFill>
+                  <a:schemeClr val="tx1"/>
+                </a:solidFill>
+                <a:effectLst/>
+                <a:latin typeface="Arial" panose="020B0604020202020204" pitchFamily="34" charset="0"/>
+              </a:rPr>
+              <a:t> </a:t>
+            </a:r>
+            <a:r>
+              <a:rPr kumimoji="0" lang="es-ES" altLang="es-ES" sz="1800" b="1" i="0" u="none" strike="noStrike" cap="none" normalizeH="0" baseline="0" dirty="0" err="1">
+                <a:ln>
+                  <a:noFill/>
+                </a:ln>
+                <a:solidFill>
+                  <a:schemeClr val="tx1"/>
+                </a:solidFill>
+                <a:effectLst/>
+                <a:latin typeface="Arial" panose="020B0604020202020204" pitchFamily="34" charset="0"/>
+              </a:rPr>
+              <a:t>solution</a:t>
+            </a:r>
+            <a:r>
+              <a:rPr kumimoji="0" lang="es-ES" altLang="es-ES" sz="1800" b="0" i="0" u="none" strike="noStrike" cap="none" normalizeH="0" baseline="0" dirty="0">
+                <a:ln>
+                  <a:noFill/>
+                </a:ln>
+                <a:solidFill>
+                  <a:schemeClr val="tx1"/>
+                </a:solidFill>
+                <a:effectLst/>
+                <a:latin typeface="Arial" panose="020B0604020202020204" pitchFamily="34" charset="0"/>
+              </a:rPr>
+              <a:t>, </a:t>
+            </a:r>
+            <a:r>
+              <a:rPr kumimoji="0" lang="es-ES" altLang="es-ES" sz="1800" b="0" i="0" u="none" strike="noStrike" cap="none" normalizeH="0" baseline="0" dirty="0" err="1">
+                <a:ln>
+                  <a:noFill/>
+                </a:ln>
+                <a:solidFill>
+                  <a:schemeClr val="tx1"/>
+                </a:solidFill>
+                <a:effectLst/>
+                <a:latin typeface="Arial" panose="020B0604020202020204" pitchFamily="34" charset="0"/>
+              </a:rPr>
+              <a:t>requiring</a:t>
+            </a:r>
+            <a:r>
+              <a:rPr kumimoji="0" lang="es-ES" altLang="es-ES" sz="1800" b="0" i="0" u="none" strike="noStrike" cap="none" normalizeH="0" baseline="0" dirty="0">
+                <a:ln>
+                  <a:noFill/>
+                </a:ln>
+                <a:solidFill>
+                  <a:schemeClr val="tx1"/>
+                </a:solidFill>
+                <a:effectLst/>
+                <a:latin typeface="Arial" panose="020B0604020202020204" pitchFamily="34" charset="0"/>
+              </a:rPr>
+              <a:t> </a:t>
+            </a:r>
+            <a:r>
+              <a:rPr kumimoji="0" lang="es-ES" altLang="es-ES" sz="1800" b="1" i="0" u="none" strike="noStrike" cap="none" normalizeH="0" baseline="0" dirty="0">
+                <a:ln>
+                  <a:noFill/>
+                </a:ln>
+                <a:solidFill>
+                  <a:schemeClr val="tx1"/>
+                </a:solidFill>
+                <a:effectLst/>
+                <a:latin typeface="Arial" panose="020B0604020202020204" pitchFamily="34" charset="0"/>
+              </a:rPr>
+              <a:t>no training and </a:t>
+            </a:r>
+            <a:r>
+              <a:rPr kumimoji="0" lang="es-ES" altLang="es-ES" sz="1800" b="1" i="0" u="none" strike="noStrike" cap="none" normalizeH="0" baseline="0" dirty="0" err="1">
+                <a:ln>
+                  <a:noFill/>
+                </a:ln>
+                <a:solidFill>
+                  <a:schemeClr val="tx1"/>
+                </a:solidFill>
+                <a:effectLst/>
+                <a:latin typeface="Arial" panose="020B0604020202020204" pitchFamily="34" charset="0"/>
+              </a:rPr>
+              <a:t>only</a:t>
+            </a:r>
+            <a:r>
+              <a:rPr kumimoji="0" lang="es-ES" altLang="es-ES" sz="1800" b="1" i="0" u="none" strike="noStrike" cap="none" normalizeH="0" baseline="0" dirty="0">
+                <a:ln>
+                  <a:noFill/>
+                </a:ln>
+                <a:solidFill>
+                  <a:schemeClr val="tx1"/>
+                </a:solidFill>
+                <a:effectLst/>
+                <a:latin typeface="Arial" panose="020B0604020202020204" pitchFamily="34" charset="0"/>
+              </a:rPr>
+              <a:t> CPU</a:t>
+            </a:r>
+            <a:r>
+              <a:rPr kumimoji="0" lang="es-ES" altLang="es-ES" sz="1800" b="0" i="0" u="none" strike="noStrike" cap="none" normalizeH="0" baseline="0" dirty="0">
+                <a:ln>
+                  <a:noFill/>
+                </a:ln>
+                <a:solidFill>
+                  <a:schemeClr val="tx1"/>
+                </a:solidFill>
+                <a:effectLst/>
+                <a:latin typeface="Arial" panose="020B0604020202020204" pitchFamily="34" charset="0"/>
+              </a:rPr>
+              <a:t>, </a:t>
+            </a:r>
+            <a:r>
+              <a:rPr kumimoji="0" lang="es-ES" altLang="es-ES" sz="1800" b="0" i="0" u="none" strike="noStrike" cap="none" normalizeH="0" baseline="0" dirty="0" err="1">
+                <a:ln>
+                  <a:noFill/>
+                </a:ln>
+                <a:solidFill>
+                  <a:schemeClr val="tx1"/>
+                </a:solidFill>
+                <a:effectLst/>
+                <a:latin typeface="Arial" panose="020B0604020202020204" pitchFamily="34" charset="0"/>
+              </a:rPr>
+              <a:t>but</a:t>
+            </a:r>
+            <a:r>
+              <a:rPr kumimoji="0" lang="es-ES" altLang="es-ES" sz="1800" b="0" i="0" u="none" strike="noStrike" cap="none" normalizeH="0" baseline="0" dirty="0">
+                <a:ln>
+                  <a:noFill/>
+                </a:ln>
+                <a:solidFill>
+                  <a:schemeClr val="tx1"/>
+                </a:solidFill>
+                <a:effectLst/>
+                <a:latin typeface="Arial" panose="020B0604020202020204" pitchFamily="34" charset="0"/>
+              </a:rPr>
+              <a:t> </a:t>
+            </a:r>
+            <a:r>
+              <a:rPr kumimoji="0" lang="es-ES" altLang="es-ES" sz="1800" b="0" i="0" u="none" strike="noStrike" cap="none" normalizeH="0" baseline="0" dirty="0" err="1">
+                <a:ln>
+                  <a:noFill/>
+                </a:ln>
+                <a:solidFill>
+                  <a:schemeClr val="tx1"/>
+                </a:solidFill>
+                <a:effectLst/>
+                <a:latin typeface="Arial" panose="020B0604020202020204" pitchFamily="34" charset="0"/>
+              </a:rPr>
+              <a:t>with</a:t>
+            </a:r>
+            <a:r>
+              <a:rPr kumimoji="0" lang="es-ES" altLang="es-ES" sz="1800" b="0" i="0" u="none" strike="noStrike" cap="none" normalizeH="0" baseline="0" dirty="0">
+                <a:ln>
+                  <a:noFill/>
+                </a:ln>
+                <a:solidFill>
+                  <a:schemeClr val="tx1"/>
+                </a:solidFill>
+                <a:effectLst/>
+                <a:latin typeface="Arial" panose="020B0604020202020204" pitchFamily="34" charset="0"/>
+              </a:rPr>
+              <a:t> </a:t>
+            </a:r>
+            <a:r>
+              <a:rPr kumimoji="0" lang="es-ES" altLang="es-ES" sz="1800" b="0" i="0" u="none" strike="noStrike" cap="none" normalizeH="0" baseline="0" dirty="0" err="1">
+                <a:ln>
+                  <a:noFill/>
+                </a:ln>
+                <a:solidFill>
+                  <a:schemeClr val="tx1"/>
+                </a:solidFill>
+                <a:effectLst/>
+                <a:latin typeface="Arial" panose="020B0604020202020204" pitchFamily="34" charset="0"/>
+              </a:rPr>
+              <a:t>lower</a:t>
+            </a:r>
+            <a:r>
+              <a:rPr kumimoji="0" lang="es-ES" altLang="es-ES" sz="1800" b="0" i="0" u="none" strike="noStrike" cap="none" normalizeH="0" baseline="0" dirty="0">
+                <a:ln>
+                  <a:noFill/>
+                </a:ln>
+                <a:solidFill>
+                  <a:schemeClr val="tx1"/>
+                </a:solidFill>
+                <a:effectLst/>
+                <a:latin typeface="Arial" panose="020B0604020202020204" pitchFamily="34" charset="0"/>
+              </a:rPr>
+              <a:t> </a:t>
+            </a:r>
+            <a:r>
+              <a:rPr kumimoji="0" lang="es-ES" altLang="es-ES" sz="1800" b="0" i="0" u="none" strike="noStrike" cap="none" normalizeH="0" baseline="0" dirty="0" err="1">
+                <a:ln>
+                  <a:noFill/>
+                </a:ln>
+                <a:solidFill>
+                  <a:schemeClr val="tx1"/>
+                </a:solidFill>
+                <a:effectLst/>
+                <a:latin typeface="Arial" panose="020B0604020202020204" pitchFamily="34" charset="0"/>
+              </a:rPr>
+              <a:t>robustness</a:t>
+            </a:r>
+            <a:r>
+              <a:rPr kumimoji="0" lang="es-ES" altLang="es-ES" sz="1800" b="0" i="0" u="none" strike="noStrike" cap="none" normalizeH="0" baseline="0" dirty="0">
+                <a:ln>
+                  <a:noFill/>
+                </a:ln>
+                <a:solidFill>
+                  <a:schemeClr val="tx1"/>
+                </a:solidFill>
+                <a:effectLst/>
+                <a:latin typeface="Arial" panose="020B0604020202020204" pitchFamily="34" charset="0"/>
+              </a:rPr>
+              <a:t>. </a:t>
+            </a:r>
+          </a:p>
+        </p:txBody>
+      </p:sp>
+      <p:sp>
+        <p:nvSpPr>
+          <p:cNvPr id="8" name="CuadroTexto 7">
+            <a:extLst>
+              <a:ext uri="{FF2B5EF4-FFF2-40B4-BE49-F238E27FC236}">
+                <a16:creationId xmlns:a16="http://schemas.microsoft.com/office/drawing/2014/main" id="{F20D86B5-030A-2A1A-E3CD-E8306D9E88F4}"/>
+              </a:ext>
+            </a:extLst>
+          </p:cNvPr>
+          <p:cNvSpPr txBox="1"/>
+          <p:nvPr/>
+        </p:nvSpPr>
+        <p:spPr>
+          <a:xfrm>
+            <a:off x="1329397" y="3101926"/>
+            <a:ext cx="184731" cy="369332"/>
+          </a:xfrm>
+          <a:prstGeom prst="rect">
+            <a:avLst/>
+          </a:prstGeom>
+          <a:noFill/>
+        </p:spPr>
+        <p:txBody>
+          <a:bodyPr wrap="none" rtlCol="0">
+            <a:spAutoFit/>
+          </a:bodyPr>
+          <a:lstStyle/>
+          <a:p>
+            <a:endParaRPr lang="es-ES" dirty="0"/>
           </a:p>
         </p:txBody>
       </p:sp>
@@ -6230,6 +8087,128 @@
 </file>
 
 <file path=ppt/slides/slide15.xml><?xml version="1.0" encoding="utf-8"?>
+<p:sld xmlns:a="http://schemas.openxmlformats.org/drawingml/2006/main" xmlns:r="http://schemas.openxmlformats.org/officeDocument/2006/relationships" xmlns:p="http://schemas.openxmlformats.org/presentationml/2006/main">
+  <p:cSld>
+    <p:spTree>
+      <p:nvGrpSpPr>
+        <p:cNvPr id="1" name=""/>
+        <p:cNvGrpSpPr/>
+        <p:nvPr/>
+      </p:nvGrpSpPr>
+      <p:grpSpPr>
+        <a:xfrm>
+          <a:off x="0" y="0"/>
+          <a:ext cx="0" cy="0"/>
+          <a:chOff x="0" y="0"/>
+          <a:chExt cx="0" cy="0"/>
+        </a:xfrm>
+      </p:grpSpPr>
+      <p:sp>
+        <p:nvSpPr>
+          <p:cNvPr id="4" name="Rectangle 29"/>
+          <p:cNvSpPr>
+            <a:spLocks/>
+          </p:cNvSpPr>
+          <p:nvPr/>
+        </p:nvSpPr>
+        <p:spPr bwMode="auto">
+          <a:xfrm>
+            <a:off x="2023516" y="2763084"/>
+            <a:ext cx="5376520" cy="1432397"/>
+          </a:xfrm>
+          <a:prstGeom prst="rect">
+            <a:avLst/>
+          </a:prstGeom>
+          <a:noFill/>
+          <a:ln>
+            <a:noFill/>
+          </a:ln>
+          <a:extLst>
+            <a:ext uri="{909E8E84-426E-40dd-AFC4-6F175D3DCCD1}">
+              <a14:hiddenFill xmlns:a14="http://schemas.microsoft.com/office/drawing/2010/main" xmlns="">
+                <a:solidFill>
+                  <a:srgbClr val="FFFFFF"/>
+                </a:solidFill>
+              </a14:hiddenFill>
+            </a:ext>
+            <a:ext uri="{91240B29-F687-4f45-9708-019B960494DF}">
+              <a14:hiddenLine xmlns:a14="http://schemas.microsoft.com/office/drawing/2010/main" xmlns="" w="9525">
+                <a:solidFill>
+                  <a:srgbClr val="000000"/>
+                </a:solidFill>
+                <a:miter lim="800000"/>
+                <a:headEnd/>
+                <a:tailEnd/>
+              </a14:hiddenLine>
+            </a:ext>
+          </a:extLst>
+        </p:spPr>
+        <p:txBody>
+          <a:bodyPr lIns="38100" tIns="38100" rIns="38100" bIns="38100"/>
+          <a:lstStyle/>
+          <a:p>
+            <a:pPr algn="ctr">
+              <a:spcBef>
+                <a:spcPts val="425"/>
+              </a:spcBef>
+            </a:pPr>
+            <a:r>
+              <a:rPr lang="en-GB" sz="3600" b="1" dirty="0">
+                <a:solidFill>
+                  <a:srgbClr val="7F7F7F"/>
+                </a:solidFill>
+                <a:latin typeface="Tahoma" charset="0"/>
+                <a:sym typeface="Tahoma" charset="0"/>
+              </a:rPr>
+              <a:t>Thank you for your attention</a:t>
+            </a:r>
+          </a:p>
+        </p:txBody>
+      </p:sp>
+      <p:pic>
+        <p:nvPicPr>
+          <p:cNvPr id="5" name="Picture 4"/>
+          <p:cNvPicPr>
+            <a:picLocks noChangeAspect="1"/>
+          </p:cNvPicPr>
+          <p:nvPr/>
+        </p:nvPicPr>
+        <p:blipFill>
+          <a:blip r:embed="rId2">
+            <a:extLst>
+              <a:ext uri="{28A0092B-C50C-407E-A947-70E740481C1C}">
+                <a14:useLocalDpi xmlns:a14="http://schemas.microsoft.com/office/drawing/2010/main" val="0"/>
+              </a:ext>
+            </a:extLst>
+          </a:blip>
+          <a:stretch>
+            <a:fillRect/>
+          </a:stretch>
+        </p:blipFill>
+        <p:spPr>
+          <a:xfrm>
+            <a:off x="3846574" y="5127597"/>
+            <a:ext cx="1730403" cy="1730403"/>
+          </a:xfrm>
+          <a:prstGeom prst="rect">
+            <a:avLst/>
+          </a:prstGeom>
+        </p:spPr>
+      </p:pic>
+    </p:spTree>
+    <p:extLst>
+      <p:ext uri="{BB962C8B-B14F-4D97-AF65-F5344CB8AC3E}">
+        <p14:creationId xmlns:p14="http://schemas.microsoft.com/office/powerpoint/2010/main" val="36190654"/>
+      </p:ext>
+    </p:extLst>
+  </p:cSld>
+  <p:clrMapOvr>
+    <a:masterClrMapping/>
+  </p:clrMapOvr>
+</p:sld>
+</file>
+
+<file path=ppt/slides/slide16.xml><?xml version="1.0" encoding="utf-8"?>
 <p:sld xmlns:a="http://schemas.openxmlformats.org/drawingml/2006/main" xmlns:r="http://schemas.openxmlformats.org/officeDocument/2006/relationships" xmlns:p="http://schemas.openxmlformats.org/presentationml/2006/main">
   <p:cSld>
     <p:spTree>
@@ -6499,7 +8478,7 @@
 </p:sld>
 </file>
 
-<file path=ppt/slides/slide16.xml><?xml version="1.0" encoding="utf-8"?>
+<file path=ppt/slides/slide17.xml><?xml version="1.0" encoding="utf-8"?>
 <p:sld xmlns:a="http://schemas.openxmlformats.org/drawingml/2006/main" xmlns:r="http://schemas.openxmlformats.org/officeDocument/2006/relationships" xmlns:p="http://schemas.openxmlformats.org/presentationml/2006/main">
   <p:cSld>
     <p:spTree>
@@ -6773,7 +8752,7 @@
 </p:sld>
 </file>
 
-<file path=ppt/slides/slide17.xml><?xml version="1.0" encoding="utf-8"?>
+<file path=ppt/slides/slide18.xml><?xml version="1.0" encoding="utf-8"?>
 <p:sld xmlns:a="http://schemas.openxmlformats.org/drawingml/2006/main" xmlns:r="http://schemas.openxmlformats.org/officeDocument/2006/relationships" xmlns:p="http://schemas.openxmlformats.org/presentationml/2006/main">
   <p:cSld>
     <p:spTree>
@@ -6939,128 +8918,6 @@
     <p:extLst>
       <p:ext uri="{BB962C8B-B14F-4D97-AF65-F5344CB8AC3E}">
         <p14:creationId xmlns:p14="http://schemas.microsoft.com/office/powerpoint/2010/main" val="916036587"/>
-      </p:ext>
-    </p:extLst>
-  </p:cSld>
-  <p:clrMapOvr>
-    <a:masterClrMapping/>
-  </p:clrMapOvr>
-</p:sld>
-</file>
-
-<file path=ppt/slides/slide18.xml><?xml version="1.0" encoding="utf-8"?>
-<p:sld xmlns:a="http://schemas.openxmlformats.org/drawingml/2006/main" xmlns:r="http://schemas.openxmlformats.org/officeDocument/2006/relationships" xmlns:p="http://schemas.openxmlformats.org/presentationml/2006/main">
-  <p:cSld>
-    <p:spTree>
-      <p:nvGrpSpPr>
-        <p:cNvPr id="1" name=""/>
-        <p:cNvGrpSpPr/>
-        <p:nvPr/>
-      </p:nvGrpSpPr>
-      <p:grpSpPr>
-        <a:xfrm>
-          <a:off x="0" y="0"/>
-          <a:ext cx="0" cy="0"/>
-          <a:chOff x="0" y="0"/>
-          <a:chExt cx="0" cy="0"/>
-        </a:xfrm>
-      </p:grpSpPr>
-      <p:sp>
-        <p:nvSpPr>
-          <p:cNvPr id="4" name="Rectangle 29"/>
-          <p:cNvSpPr>
-            <a:spLocks/>
-          </p:cNvSpPr>
-          <p:nvPr/>
-        </p:nvSpPr>
-        <p:spPr bwMode="auto">
-          <a:xfrm>
-            <a:off x="2023516" y="2763084"/>
-            <a:ext cx="5376520" cy="1432397"/>
-          </a:xfrm>
-          <a:prstGeom prst="rect">
-            <a:avLst/>
-          </a:prstGeom>
-          <a:noFill/>
-          <a:ln>
-            <a:noFill/>
-          </a:ln>
-          <a:extLst>
-            <a:ext uri="{909E8E84-426E-40dd-AFC4-6F175D3DCCD1}">
-              <a14:hiddenFill xmlns="" xmlns:a14="http://schemas.microsoft.com/office/drawing/2010/main">
-                <a:solidFill>
-                  <a:srgbClr val="FFFFFF"/>
-                </a:solidFill>
-              </a14:hiddenFill>
-            </a:ext>
-            <a:ext uri="{91240B29-F687-4f45-9708-019B960494DF}">
-              <a14:hiddenLine xmlns="" xmlns:a14="http://schemas.microsoft.com/office/drawing/2010/main" w="9525">
-                <a:solidFill>
-                  <a:srgbClr val="000000"/>
-                </a:solidFill>
-                <a:miter lim="800000"/>
-                <a:headEnd/>
-                <a:tailEnd/>
-              </a14:hiddenLine>
-            </a:ext>
-          </a:extLst>
-        </p:spPr>
-        <p:txBody>
-          <a:bodyPr lIns="38100" tIns="38100" rIns="38100" bIns="38100"/>
-          <a:lstStyle/>
-          <a:p>
-            <a:pPr algn="ctr">
-              <a:spcBef>
-                <a:spcPts val="425"/>
-              </a:spcBef>
-            </a:pPr>
-            <a:r>
-              <a:rPr lang="en-GB" sz="3600" b="1" dirty="0">
-                <a:solidFill>
-                  <a:srgbClr val="7F7F7F"/>
-                </a:solidFill>
-                <a:latin typeface="Tahoma" charset="0"/>
-                <a:sym typeface="Tahoma" charset="0"/>
-              </a:rPr>
-              <a:t>Thank you for your attention</a:t>
-            </a:r>
-          </a:p>
-        </p:txBody>
-      </p:sp>
-      <p:pic>
-        <p:nvPicPr>
-          <p:cNvPr id="5" name="Picture 4"/>
-          <p:cNvPicPr>
-            <a:picLocks noChangeAspect="1"/>
-          </p:cNvPicPr>
-          <p:nvPr/>
-        </p:nvPicPr>
-        <p:blipFill>
-          <a:blip r:embed="rId2">
-            <a:extLst>
-              <a:ext uri="{28A0092B-C50C-407E-A947-70E740481C1C}">
-                <a14:useLocalDpi xmlns:a14="http://schemas.microsoft.com/office/drawing/2010/main" val="0"/>
-              </a:ext>
-            </a:extLst>
-          </a:blip>
-          <a:stretch>
-            <a:fillRect/>
-          </a:stretch>
-        </p:blipFill>
-        <p:spPr>
-          <a:xfrm>
-            <a:off x="3846574" y="5127597"/>
-            <a:ext cx="1730403" cy="1730403"/>
-          </a:xfrm>
-          <a:prstGeom prst="rect">
-            <a:avLst/>
-          </a:prstGeom>
-        </p:spPr>
-      </p:pic>
-    </p:spTree>
-    <p:extLst>
-      <p:ext uri="{BB962C8B-B14F-4D97-AF65-F5344CB8AC3E}">
-        <p14:creationId xmlns:p14="http://schemas.microsoft.com/office/powerpoint/2010/main" val="36190654"/>
       </p:ext>
     </p:extLst>
   </p:cSld>
@@ -7436,14 +9293,14 @@
           </a:ln>
           <a:extLst>
             <a:ext uri="{909E8E84-426E-40dd-AFC4-6F175D3DCCD1}">
-              <a14:hiddenFill xmlns:a14="http://schemas.microsoft.com/office/drawing/2010/main" xmlns="">
+              <a14:hiddenFill xmlns="" xmlns:a14="http://schemas.microsoft.com/office/drawing/2010/main">
                 <a:solidFill>
                   <a:srgbClr val="FFFFFF"/>
                 </a:solidFill>
               </a14:hiddenFill>
             </a:ext>
             <a:ext uri="{91240B29-F687-4f45-9708-019B960494DF}">
-              <a14:hiddenLine xmlns:a14="http://schemas.microsoft.com/office/drawing/2010/main" xmlns="" w="9525">
+              <a14:hiddenLine xmlns="" xmlns:a14="http://schemas.microsoft.com/office/drawing/2010/main" w="9525">
                 <a:solidFill>
                   <a:srgbClr val="000000"/>
                 </a:solidFill>
@@ -7730,14 +9587,14 @@
           </a:ln>
           <a:extLst>
             <a:ext uri="{909E8E84-426E-40dd-AFC4-6F175D3DCCD1}">
-              <a14:hiddenFill xmlns:a14="http://schemas.microsoft.com/office/drawing/2010/main" xmlns="">
+              <a14:hiddenFill xmlns="" xmlns:a14="http://schemas.microsoft.com/office/drawing/2010/main">
                 <a:solidFill>
                   <a:srgbClr val="FFFFFF"/>
                 </a:solidFill>
               </a14:hiddenFill>
             </a:ext>
             <a:ext uri="{91240B29-F687-4f45-9708-019B960494DF}">
-              <a14:hiddenLine xmlns:a14="http://schemas.microsoft.com/office/drawing/2010/main" xmlns="" w="9525">
+              <a14:hiddenLine xmlns="" xmlns:a14="http://schemas.microsoft.com/office/drawing/2010/main" w="9525">
                 <a:solidFill>
                   <a:srgbClr val="000000"/>
                 </a:solidFill>
@@ -7911,10 +9768,6 @@
               <a:buChar char="•"/>
             </a:pPr>
             <a:r>
-              <a:rPr lang="es-ES" dirty="0"/>
-              <a:t>📸 </a:t>
-            </a:r>
-            <a:r>
               <a:rPr lang="en-US" dirty="0">
                 <a:latin typeface="Trebuchet MS" panose="020B0603020202020204" pitchFamily="34" charset="0"/>
               </a:rPr>
@@ -7933,10 +9786,6 @@
               <a:buChar char="•"/>
             </a:pPr>
             <a:r>
-              <a:rPr lang="es-ES" dirty="0"/>
-              <a:t>📐 </a:t>
-            </a:r>
-            <a:r>
               <a:rPr lang="en-US" dirty="0">
                 <a:latin typeface="Trebuchet MS" panose="020B0603020202020204" pitchFamily="34" charset="0"/>
               </a:rPr>
@@ -7954,10 +9803,6 @@
               <a:buFont typeface="Arial" panose="020B0604020202020204" pitchFamily="34" charset="0"/>
               <a:buChar char="•"/>
             </a:pPr>
-            <a:r>
-              <a:rPr lang="es-ES" dirty="0"/>
-              <a:t>⚠️ </a:t>
-            </a:r>
             <a:r>
               <a:rPr lang="en-US" dirty="0">
                 <a:latin typeface="Trebuchet MS" panose="020B0603020202020204" pitchFamily="34" charset="0"/>
@@ -7995,13 +9840,6 @@
           </a:p>
           <a:p>
             <a:pPr algn="just"/>
-            <a:r>
-              <a:rPr lang="es-ES" altLang="es-ES" sz="2400" dirty="0">
-                <a:latin typeface="Times New Roman" panose="02020603050405020304" pitchFamily="18" charset="0"/>
-                <a:cs typeface="Times New Roman" panose="02020603050405020304" pitchFamily="18" charset="0"/>
-              </a:rPr>
-              <a:t>🤖 </a:t>
-            </a:r>
             <a:r>
               <a:rPr lang="es-ES" altLang="es-ES" sz="2400" b="1" dirty="0" err="1">
                 <a:solidFill>
@@ -8150,14 +9988,14 @@
           </a:ln>
           <a:extLst>
             <a:ext uri="{909E8E84-426E-40dd-AFC4-6F175D3DCCD1}">
-              <a14:hiddenFill xmlns="" xmlns:a14="http://schemas.microsoft.com/office/drawing/2010/main">
+              <a14:hiddenFill xmlns:a14="http://schemas.microsoft.com/office/drawing/2010/main" xmlns="">
                 <a:solidFill>
                   <a:srgbClr val="FFFFFF"/>
                 </a:solidFill>
               </a14:hiddenFill>
             </a:ext>
             <a:ext uri="{91240B29-F687-4f45-9708-019B960494DF}">
-              <a14:hiddenLine xmlns="" xmlns:a14="http://schemas.microsoft.com/office/drawing/2010/main" w="9525">
+              <a14:hiddenLine xmlns:a14="http://schemas.microsoft.com/office/drawing/2010/main" xmlns="" w="9525">
                 <a:solidFill>
                   <a:srgbClr val="000000"/>
                 </a:solidFill>
@@ -8711,9 +10549,9 @@
         <p:grpSpPr>
           <a:xfrm>
             <a:off x="1021783" y="3032277"/>
-            <a:ext cx="1676725" cy="1836445"/>
+            <a:ext cx="1758327" cy="1836445"/>
             <a:chOff x="1719783" y="3732939"/>
-            <a:chExt cx="1676725" cy="1836445"/>
+            <a:chExt cx="1758327" cy="1836445"/>
           </a:xfrm>
         </p:grpSpPr>
         <p:grpSp>
@@ -8730,10 +10568,10 @@
           </p:nvGrpSpPr>
           <p:grpSpPr>
             <a:xfrm>
-              <a:off x="2153648" y="3732939"/>
-              <a:ext cx="1242860" cy="1717526"/>
-              <a:chOff x="1860952" y="4649909"/>
-              <a:chExt cx="1163643" cy="1770468"/>
+              <a:off x="1827270" y="3732939"/>
+              <a:ext cx="1650840" cy="1717526"/>
+              <a:chOff x="1555377" y="4649909"/>
+              <a:chExt cx="1545619" cy="1770468"/>
             </a:xfrm>
           </p:grpSpPr>
           <p:sp>
@@ -8750,8 +10588,8 @@
             </p:nvSpPr>
             <p:spPr>
               <a:xfrm>
-                <a:off x="1860952" y="4649909"/>
-                <a:ext cx="890916" cy="380716"/>
+                <a:off x="1555377" y="4649909"/>
+                <a:ext cx="1545619" cy="380716"/>
               </a:xfrm>
               <a:prstGeom prst="rect">
                 <a:avLst/>
@@ -8766,14 +10604,14 @@
               <a:p>
                 <a:pPr algn="ctr"/>
                 <a:r>
-                  <a:rPr lang="es-ES" sz="1800" b="1" dirty="0" err="1">
+                  <a:rPr lang="es-ES" b="1" dirty="0" err="1">
                     <a:solidFill>
                       <a:srgbClr val="002060"/>
                     </a:solidFill>
                     <a:latin typeface="Trebuchet MS" panose="020B0603020202020204" pitchFamily="34" charset="0"/>
                     <a:cs typeface="Arial" panose="020B0604020202020204" pitchFamily="34" charset="0"/>
                   </a:rPr>
-                  <a:t>Lists</a:t>
+                  <a:t>Segmentation</a:t>
                 </a:r>
                 <a:endParaRPr lang="es-ES" sz="1800" b="1" dirty="0">
                   <a:solidFill>
@@ -8834,12 +10672,9 @@
                 <a:lstStyle/>
                 <a:p>
                   <a:pPr algn="ctr"/>
-                  <a:r>
-                    <a:rPr lang="es-ES" sz="1600" dirty="0">
-                      <a:latin typeface="Trebuchet MS" panose="020B0603020202020204" pitchFamily="34" charset="0"/>
-                    </a:rPr>
-                    <a:t>Whitelist</a:t>
-                  </a:r>
+                  <a:endParaRPr lang="es-ES" sz="1600" dirty="0">
+                    <a:latin typeface="Trebuchet MS" panose="020B0603020202020204" pitchFamily="34" charset="0"/>
+                  </a:endParaRPr>
                 </a:p>
               </p:txBody>
             </p:sp>
@@ -8872,13 +10707,10 @@
                 <a:lstStyle/>
                 <a:p>
                   <a:pPr algn="ctr"/>
-                  <a:r>
-                    <a:rPr lang="es-ES" sz="1600" dirty="0">
-                      <a:latin typeface="Trebuchet MS" panose="020B0603020202020204" pitchFamily="34" charset="0"/>
-                      <a:cs typeface="Arial" panose="020B0604020202020204" pitchFamily="34" charset="0"/>
-                    </a:rPr>
-                    <a:t>Blacklist</a:t>
-                  </a:r>
+                  <a:endParaRPr lang="es-ES" sz="1600" dirty="0">
+                    <a:latin typeface="Trebuchet MS" panose="020B0603020202020204" pitchFamily="34" charset="0"/>
+                    <a:cs typeface="Arial" panose="020B0604020202020204" pitchFamily="34" charset="0"/>
+                  </a:endParaRPr>
                 </a:p>
               </p:txBody>
             </p:sp>
@@ -9006,13 +10838,13 @@
             <a:lstStyle/>
             <a:p>
               <a:r>
-                <a:rPr lang="es-ES" sz="1800" b="1" dirty="0" err="1">
+                <a:rPr lang="es-ES" b="1" dirty="0" err="1">
                   <a:solidFill>
                     <a:srgbClr val="002060"/>
                   </a:solidFill>
                   <a:latin typeface="Trebuchet MS" panose="020B0603020202020204" pitchFamily="34" charset="0"/>
                 </a:rPr>
-                <a:t>Heuristics</a:t>
+                <a:t>Detection</a:t>
               </a:r>
               <a:endParaRPr lang="es-ES" sz="1800" b="1" dirty="0">
                 <a:solidFill>
@@ -9373,6 +11205,16 @@
                 <a:p>
                   <a:pPr algn="ctr"/>
                   <a:r>
+                    <a:rPr lang="es-ES" sz="1800" b="1" dirty="0" err="1">
+                      <a:solidFill>
+                        <a:srgbClr val="002060"/>
+                      </a:solidFill>
+                      <a:latin typeface="Trebuchet MS" panose="020B0603020202020204" pitchFamily="34" charset="0"/>
+                      <a:cs typeface="Arial" panose="020B0604020202020204" pitchFamily="34" charset="0"/>
+                    </a:rPr>
+                    <a:t>Anomaly</a:t>
+                  </a:r>
+                  <a:r>
                     <a:rPr lang="es-ES" sz="1800" b="1" dirty="0">
                       <a:solidFill>
                         <a:srgbClr val="002060"/>
@@ -9380,7 +11222,7 @@
                       <a:latin typeface="Trebuchet MS" panose="020B0603020202020204" pitchFamily="34" charset="0"/>
                       <a:cs typeface="Arial" panose="020B0604020202020204" pitchFamily="34" charset="0"/>
                     </a:rPr>
-                    <a:t>Artificial </a:t>
+                    <a:t> </a:t>
                   </a:r>
                   <a:r>
                     <a:rPr lang="es-ES" sz="1800" b="1" dirty="0" err="1">
@@ -9390,7 +11232,7 @@
                       <a:latin typeface="Trebuchet MS" panose="020B0603020202020204" pitchFamily="34" charset="0"/>
                       <a:cs typeface="Arial" panose="020B0604020202020204" pitchFamily="34" charset="0"/>
                     </a:rPr>
-                    <a:t>Intelligence</a:t>
+                    <a:t>Detection</a:t>
                   </a:r>
                   <a:endParaRPr lang="es-ES" sz="1800" b="1" dirty="0">
                     <a:solidFill>
@@ -9451,13 +11293,10 @@
                   <a:lstStyle/>
                   <a:p>
                     <a:pPr algn="ctr"/>
-                    <a:r>
-                      <a:rPr lang="es-ES" dirty="0">
-                        <a:latin typeface="Trebuchet MS" panose="020B0603020202020204" pitchFamily="34" charset="0"/>
-                        <a:cs typeface="Arial" panose="020B0604020202020204" pitchFamily="34" charset="0"/>
-                      </a:rPr>
-                      <a:t>Content</a:t>
-                    </a:r>
+                    <a:endParaRPr lang="es-ES" dirty="0">
+                      <a:latin typeface="Trebuchet MS" panose="020B0603020202020204" pitchFamily="34" charset="0"/>
+                      <a:cs typeface="Arial" panose="020B0604020202020204" pitchFamily="34" charset="0"/>
+                    </a:endParaRPr>
                   </a:p>
                 </p:txBody>
               </p:sp>
@@ -9490,13 +11329,6 @@
                   <a:lstStyle/>
                   <a:p>
                     <a:pPr algn="ctr"/>
-                    <a:r>
-                      <a:rPr lang="es-ES" dirty="0" err="1">
-                        <a:latin typeface="Trebuchet MS" panose="020B0603020202020204" pitchFamily="34" charset="0"/>
-                        <a:cs typeface="Arial" panose="020B0604020202020204" pitchFamily="34" charset="0"/>
-                      </a:rPr>
-                      <a:t>URLs</a:t>
-                    </a:r>
                     <a:endParaRPr lang="es-ES" dirty="0">
                       <a:latin typeface="Trebuchet MS" panose="020B0603020202020204" pitchFamily="34" charset="0"/>
                       <a:cs typeface="Arial" panose="020B0604020202020204" pitchFamily="34" charset="0"/>
@@ -9607,13 +11439,10 @@
               <a:lstStyle/>
               <a:p>
                 <a:pPr algn="ctr"/>
-                <a:r>
-                  <a:rPr lang="es-ES" sz="1800" dirty="0">
-                    <a:latin typeface="Trebuchet MS" panose="020B0603020202020204" pitchFamily="34" charset="0"/>
-                    <a:cs typeface="Arial" panose="020B0604020202020204" pitchFamily="34" charset="0"/>
-                  </a:rPr>
-                  <a:t>Visual</a:t>
-                </a:r>
+                <a:endParaRPr lang="es-ES" sz="1800" dirty="0">
+                  <a:latin typeface="Trebuchet MS" panose="020B0603020202020204" pitchFamily="34" charset="0"/>
+                  <a:cs typeface="Arial" panose="020B0604020202020204" pitchFamily="34" charset="0"/>
+                </a:endParaRPr>
               </a:p>
             </p:txBody>
           </p:sp>
@@ -9713,34 +11542,6 @@
             <a:lstStyle/>
             <a:p>
               <a:pPr algn="ctr"/>
-              <a:r>
-                <a:rPr lang="es-ES" sz="1800" dirty="0">
-                  <a:latin typeface="Trebuchet MS" panose="020B0603020202020204" pitchFamily="34" charset="0"/>
-                  <a:cs typeface="Arial" panose="020B0604020202020204" pitchFamily="34" charset="0"/>
-                </a:rPr>
-                <a:t>3</a:t>
-              </a:r>
-              <a:r>
-                <a:rPr lang="es-ES" sz="1800" baseline="30000" dirty="0">
-                  <a:latin typeface="Trebuchet MS" panose="020B0603020202020204" pitchFamily="34" charset="0"/>
-                  <a:cs typeface="Arial" panose="020B0604020202020204" pitchFamily="34" charset="0"/>
-                </a:rPr>
-                <a:t>rd</a:t>
-              </a:r>
-              <a:r>
-                <a:rPr lang="es-ES" sz="1800" dirty="0">
-                  <a:latin typeface="Trebuchet MS" panose="020B0603020202020204" pitchFamily="34" charset="0"/>
-                  <a:cs typeface="Arial" panose="020B0604020202020204" pitchFamily="34" charset="0"/>
-                </a:rPr>
-                <a:t> </a:t>
-              </a:r>
-              <a:r>
-                <a:rPr lang="es-ES" sz="1800" dirty="0" err="1">
-                  <a:latin typeface="Trebuchet MS" panose="020B0603020202020204" pitchFamily="34" charset="0"/>
-                  <a:cs typeface="Arial" panose="020B0604020202020204" pitchFamily="34" charset="0"/>
-                </a:rPr>
-                <a:t>party</a:t>
-              </a:r>
               <a:endParaRPr lang="es-ES" sz="1800" dirty="0">
                 <a:latin typeface="Trebuchet MS" panose="020B0603020202020204" pitchFamily="34" charset="0"/>
                 <a:cs typeface="Arial" panose="020B0604020202020204" pitchFamily="34" charset="0"/>
@@ -10880,10 +12681,6 @@
               <a:t> </a:t>
             </a:r>
             <a:r>
-              <a:rPr lang="es-ES" dirty="0"/>
-              <a:t>🔗</a:t>
-            </a:r>
-            <a:r>
               <a:rPr lang="es-ES" altLang="es-ES" dirty="0" err="1">
                 <a:latin typeface="Trebuchet MS" panose="020B0603020202020204" pitchFamily="34" charset="0"/>
               </a:rPr>
@@ -10943,10 +12740,6 @@
               <a:t> </a:t>
             </a:r>
             <a:r>
-              <a:rPr lang="es-ES" dirty="0"/>
-              <a:t>📝</a:t>
-            </a:r>
-            <a:r>
               <a:rPr kumimoji="0" lang="es-ES" altLang="es-ES" b="0" i="0" u="none" strike="noStrike" cap="none" normalizeH="0" baseline="0" dirty="0">
                 <a:ln>
                   <a:noFill/>
@@ -11001,10 +12794,6 @@
               <a:t> </a:t>
             </a:r>
             <a:r>
-              <a:rPr lang="es-ES" dirty="0"/>
-              <a:t>📦</a:t>
-            </a:r>
-            <a:r>
               <a:rPr kumimoji="0" lang="es-ES" altLang="es-ES" b="0" i="0" u="none" strike="noStrike" cap="none" normalizeH="0" baseline="0" dirty="0" err="1">
                 <a:ln>
                   <a:noFill/>
@@ -11079,10 +12868,6 @@
               <a:t> </a:t>
             </a:r>
             <a:r>
-              <a:rPr lang="es-ES" dirty="0"/>
-              <a:t>🎯</a:t>
-            </a:r>
-            <a:r>
               <a:rPr kumimoji="0" lang="es-ES" altLang="es-ES" b="0" i="0" u="none" strike="noStrike" cap="none" normalizeH="0" baseline="0" dirty="0">
                 <a:ln>
                   <a:noFill/>
@@ -11154,10 +12939,6 @@
                 <a:latin typeface="Arial" panose="020B0604020202020204" pitchFamily="34" charset="0"/>
               </a:rPr>
               <a:t> </a:t>
-            </a:r>
-            <a:r>
-              <a:rPr lang="es-ES" dirty="0"/>
-              <a:t>🚫</a:t>
             </a:r>
             <a:r>
               <a:rPr lang="es-ES" altLang="es-ES" dirty="0">

--- a/docs/GIDIA_VA_Course_Project_Presentations.pptx
+++ b/docs/GIDIA_VA_Course_Project_Presentations.pptx
@@ -5,30 +5,29 @@
     <p:sldMasterId id="2147483648" r:id="rId1"/>
   </p:sldMasterIdLst>
   <p:notesMasterIdLst>
-    <p:notesMasterId r:id="rId20"/>
+    <p:notesMasterId r:id="rId19"/>
   </p:notesMasterIdLst>
   <p:handoutMasterIdLst>
-    <p:handoutMasterId r:id="rId21"/>
+    <p:handoutMasterId r:id="rId20"/>
   </p:handoutMasterIdLst>
   <p:sldIdLst>
     <p:sldId id="257" r:id="rId2"/>
     <p:sldId id="283" r:id="rId3"/>
     <p:sldId id="348" r:id="rId4"/>
     <p:sldId id="403" r:id="rId5"/>
-    <p:sldId id="318" r:id="rId6"/>
+    <p:sldId id="414" r:id="rId6"/>
     <p:sldId id="411" r:id="rId7"/>
-    <p:sldId id="414" r:id="rId8"/>
+    <p:sldId id="409" r:id="rId8"/>
     <p:sldId id="405" r:id="rId9"/>
-    <p:sldId id="409" r:id="rId10"/>
-    <p:sldId id="412" r:id="rId11"/>
-    <p:sldId id="413" r:id="rId12"/>
-    <p:sldId id="415" r:id="rId13"/>
-    <p:sldId id="416" r:id="rId14"/>
-    <p:sldId id="383" r:id="rId15"/>
-    <p:sldId id="287" r:id="rId16"/>
-    <p:sldId id="404" r:id="rId17"/>
-    <p:sldId id="417" r:id="rId18"/>
-    <p:sldId id="419" r:id="rId19"/>
+    <p:sldId id="412" r:id="rId10"/>
+    <p:sldId id="413" r:id="rId11"/>
+    <p:sldId id="415" r:id="rId12"/>
+    <p:sldId id="416" r:id="rId13"/>
+    <p:sldId id="383" r:id="rId14"/>
+    <p:sldId id="287" r:id="rId15"/>
+    <p:sldId id="404" r:id="rId16"/>
+    <p:sldId id="417" r:id="rId17"/>
+    <p:sldId id="419" r:id="rId18"/>
   </p:sldIdLst>
   <p:sldSz cx="9144000" cy="6858000" type="screen4x3"/>
   <p:notesSz cx="6858000" cy="9144000"/>
@@ -772,121 +771,6 @@
         <p:cNvPr id="1" name="">
           <a:extLst>
             <a:ext uri="{FF2B5EF4-FFF2-40B4-BE49-F238E27FC236}">
-              <a16:creationId xmlns:a16="http://schemas.microsoft.com/office/drawing/2014/main" id="{A4F9270A-DA4B-D6B3-1A4F-AC85BE5F2D7E}"/>
-            </a:ext>
-          </a:extLst>
-        </p:cNvPr>
-        <p:cNvGrpSpPr/>
-        <p:nvPr/>
-      </p:nvGrpSpPr>
-      <p:grpSpPr>
-        <a:xfrm>
-          <a:off x="0" y="0"/>
-          <a:ext cx="0" cy="0"/>
-          <a:chOff x="0" y="0"/>
-          <a:chExt cx="0" cy="0"/>
-        </a:xfrm>
-      </p:grpSpPr>
-      <p:sp>
-        <p:nvSpPr>
-          <p:cNvPr id="2" name="Marcador de imagen de diapositiva 1">
-            <a:extLst>
-              <a:ext uri="{FF2B5EF4-FFF2-40B4-BE49-F238E27FC236}">
-                <a16:creationId xmlns:a16="http://schemas.microsoft.com/office/drawing/2014/main" id="{F00F5546-FA97-3766-B1FC-A47DE9795541}"/>
-              </a:ext>
-            </a:extLst>
-          </p:cNvPr>
-          <p:cNvSpPr>
-            <a:spLocks noGrp="1" noRot="1" noChangeAspect="1"/>
-          </p:cNvSpPr>
-          <p:nvPr>
-            <p:ph type="sldImg"/>
-          </p:nvPr>
-        </p:nvSpPr>
-        <p:spPr/>
-        <p:txBody>
-          <a:bodyPr/>
-          <a:lstStyle/>
-          <a:p>
-            <a:endParaRPr lang="es-ES" dirty="0"/>
-          </a:p>
-        </p:txBody>
-      </p:sp>
-      <p:sp>
-        <p:nvSpPr>
-          <p:cNvPr id="3" name="Marcador de notas 2">
-            <a:extLst>
-              <a:ext uri="{FF2B5EF4-FFF2-40B4-BE49-F238E27FC236}">
-                <a16:creationId xmlns:a16="http://schemas.microsoft.com/office/drawing/2014/main" id="{7D4517E9-EA07-54A2-DBB7-3635C5A646F4}"/>
-              </a:ext>
-            </a:extLst>
-          </p:cNvPr>
-          <p:cNvSpPr>
-            <a:spLocks noGrp="1"/>
-          </p:cNvSpPr>
-          <p:nvPr>
-            <p:ph type="body" idx="1"/>
-          </p:nvPr>
-        </p:nvSpPr>
-        <p:spPr/>
-        <p:txBody>
-          <a:bodyPr/>
-          <a:lstStyle/>
-          <a:p>
-            <a:endParaRPr lang="es-ES" dirty="0"/>
-          </a:p>
-        </p:txBody>
-      </p:sp>
-      <p:sp>
-        <p:nvSpPr>
-          <p:cNvPr id="4" name="Marcador de número de diapositiva 3">
-            <a:extLst>
-              <a:ext uri="{FF2B5EF4-FFF2-40B4-BE49-F238E27FC236}">
-                <a16:creationId xmlns:a16="http://schemas.microsoft.com/office/drawing/2014/main" id="{1974EE48-B9C3-3420-C006-3474E81EDC5E}"/>
-              </a:ext>
-            </a:extLst>
-          </p:cNvPr>
-          <p:cNvSpPr>
-            <a:spLocks noGrp="1"/>
-          </p:cNvSpPr>
-          <p:nvPr>
-            <p:ph type="sldNum" sz="quarter" idx="10"/>
-          </p:nvPr>
-        </p:nvSpPr>
-        <p:spPr/>
-        <p:txBody>
-          <a:bodyPr/>
-          <a:lstStyle/>
-          <a:p>
-            <a:fld id="{05D135E5-457A-4183-A722-09BD01DC1252}" type="slidenum">
-              <a:rPr lang="es-ES" smtClean="0"/>
-              <a:t>12</a:t>
-            </a:fld>
-            <a:endParaRPr lang="es-ES" dirty="0"/>
-          </a:p>
-        </p:txBody>
-      </p:sp>
-    </p:spTree>
-    <p:extLst>
-      <p:ext uri="{BB962C8B-B14F-4D97-AF65-F5344CB8AC3E}">
-        <p14:creationId xmlns:p14="http://schemas.microsoft.com/office/powerpoint/2010/main" val="2621593514"/>
-      </p:ext>
-    </p:extLst>
-  </p:cSld>
-  <p:clrMapOvr>
-    <a:masterClrMapping/>
-  </p:clrMapOvr>
-</p:notes>
-</file>
-
-<file path=ppt/notesSlides/notesSlide11.xml><?xml version="1.0" encoding="utf-8"?>
-<p:notes xmlns:a="http://schemas.openxmlformats.org/drawingml/2006/main" xmlns:r="http://schemas.openxmlformats.org/officeDocument/2006/relationships" xmlns:p="http://schemas.openxmlformats.org/presentationml/2006/main">
-  <p:cSld>
-    <p:spTree>
-      <p:nvGrpSpPr>
-        <p:cNvPr id="1" name="">
-          <a:extLst>
-            <a:ext uri="{FF2B5EF4-FFF2-40B4-BE49-F238E27FC236}">
               <a16:creationId xmlns:a16="http://schemas.microsoft.com/office/drawing/2014/main" id="{608E4D33-155B-BD0B-9082-931E380F7456}"/>
             </a:ext>
           </a:extLst>
@@ -975,7 +859,7 @@
           <a:p>
             <a:fld id="{05D135E5-457A-4183-A722-09BD01DC1252}" type="slidenum">
               <a:rPr lang="es-ES" smtClean="0"/>
-              <a:t>13</a:t>
+              <a:t>12</a:t>
             </a:fld>
             <a:endParaRPr lang="es-ES" dirty="0"/>
           </a:p>
@@ -985,6 +869,97 @@
     <p:extLst>
       <p:ext uri="{BB962C8B-B14F-4D97-AF65-F5344CB8AC3E}">
         <p14:creationId xmlns:p14="http://schemas.microsoft.com/office/powerpoint/2010/main" val="623444326"/>
+      </p:ext>
+    </p:extLst>
+  </p:cSld>
+  <p:clrMapOvr>
+    <a:masterClrMapping/>
+  </p:clrMapOvr>
+</p:notes>
+</file>
+
+<file path=ppt/notesSlides/notesSlide11.xml><?xml version="1.0" encoding="utf-8"?>
+<p:notes xmlns:a="http://schemas.openxmlformats.org/drawingml/2006/main" xmlns:r="http://schemas.openxmlformats.org/officeDocument/2006/relationships" xmlns:p="http://schemas.openxmlformats.org/presentationml/2006/main">
+  <p:cSld>
+    <p:spTree>
+      <p:nvGrpSpPr>
+        <p:cNvPr id="1" name=""/>
+        <p:cNvGrpSpPr/>
+        <p:nvPr/>
+      </p:nvGrpSpPr>
+      <p:grpSpPr>
+        <a:xfrm>
+          <a:off x="0" y="0"/>
+          <a:ext cx="0" cy="0"/>
+          <a:chOff x="0" y="0"/>
+          <a:chExt cx="0" cy="0"/>
+        </a:xfrm>
+      </p:grpSpPr>
+      <p:sp>
+        <p:nvSpPr>
+          <p:cNvPr id="2" name="Marcador de imagen de diapositiva 1"/>
+          <p:cNvSpPr>
+            <a:spLocks noGrp="1" noRot="1" noChangeAspect="1"/>
+          </p:cNvSpPr>
+          <p:nvPr>
+            <p:ph type="sldImg"/>
+          </p:nvPr>
+        </p:nvSpPr>
+        <p:spPr/>
+        <p:txBody>
+          <a:bodyPr/>
+          <a:lstStyle/>
+          <a:p>
+            <a:endParaRPr lang="es-ES" dirty="0"/>
+          </a:p>
+        </p:txBody>
+      </p:sp>
+      <p:sp>
+        <p:nvSpPr>
+          <p:cNvPr id="3" name="Marcador de notas 2"/>
+          <p:cNvSpPr>
+            <a:spLocks noGrp="1"/>
+          </p:cNvSpPr>
+          <p:nvPr>
+            <p:ph type="body" idx="1"/>
+          </p:nvPr>
+        </p:nvSpPr>
+        <p:spPr/>
+        <p:txBody>
+          <a:bodyPr/>
+          <a:lstStyle/>
+          <a:p>
+            <a:endParaRPr lang="es-ES" dirty="0"/>
+          </a:p>
+        </p:txBody>
+      </p:sp>
+      <p:sp>
+        <p:nvSpPr>
+          <p:cNvPr id="4" name="Marcador de número de diapositiva 3"/>
+          <p:cNvSpPr>
+            <a:spLocks noGrp="1"/>
+          </p:cNvSpPr>
+          <p:nvPr>
+            <p:ph type="sldNum" sz="quarter" idx="10"/>
+          </p:nvPr>
+        </p:nvSpPr>
+        <p:spPr/>
+        <p:txBody>
+          <a:bodyPr/>
+          <a:lstStyle/>
+          <a:p>
+            <a:fld id="{05D135E5-457A-4183-A722-09BD01DC1252}" type="slidenum">
+              <a:rPr lang="es-ES" smtClean="0"/>
+              <a:t>13</a:t>
+            </a:fld>
+            <a:endParaRPr lang="es-ES" dirty="0"/>
+          </a:p>
+        </p:txBody>
+      </p:sp>
+    </p:spTree>
+    <p:extLst>
+      <p:ext uri="{BB962C8B-B14F-4D97-AF65-F5344CB8AC3E}">
+        <p14:creationId xmlns:p14="http://schemas.microsoft.com/office/powerpoint/2010/main" val="556698752"/>
       </p:ext>
     </p:extLst>
   </p:cSld>
@@ -1066,98 +1041,7 @@
           <a:p>
             <a:fld id="{05D135E5-457A-4183-A722-09BD01DC1252}" type="slidenum">
               <a:rPr lang="es-ES" smtClean="0"/>
-              <a:t>14</a:t>
-            </a:fld>
-            <a:endParaRPr lang="es-ES" dirty="0"/>
-          </a:p>
-        </p:txBody>
-      </p:sp>
-    </p:spTree>
-    <p:extLst>
-      <p:ext uri="{BB962C8B-B14F-4D97-AF65-F5344CB8AC3E}">
-        <p14:creationId xmlns:p14="http://schemas.microsoft.com/office/powerpoint/2010/main" val="556698752"/>
-      </p:ext>
-    </p:extLst>
-  </p:cSld>
-  <p:clrMapOvr>
-    <a:masterClrMapping/>
-  </p:clrMapOvr>
-</p:notes>
-</file>
-
-<file path=ppt/notesSlides/notesSlide13.xml><?xml version="1.0" encoding="utf-8"?>
-<p:notes xmlns:a="http://schemas.openxmlformats.org/drawingml/2006/main" xmlns:r="http://schemas.openxmlformats.org/officeDocument/2006/relationships" xmlns:p="http://schemas.openxmlformats.org/presentationml/2006/main">
-  <p:cSld>
-    <p:spTree>
-      <p:nvGrpSpPr>
-        <p:cNvPr id="1" name=""/>
-        <p:cNvGrpSpPr/>
-        <p:nvPr/>
-      </p:nvGrpSpPr>
-      <p:grpSpPr>
-        <a:xfrm>
-          <a:off x="0" y="0"/>
-          <a:ext cx="0" cy="0"/>
-          <a:chOff x="0" y="0"/>
-          <a:chExt cx="0" cy="0"/>
-        </a:xfrm>
-      </p:grpSpPr>
-      <p:sp>
-        <p:nvSpPr>
-          <p:cNvPr id="2" name="Marcador de imagen de diapositiva 1"/>
-          <p:cNvSpPr>
-            <a:spLocks noGrp="1" noRot="1" noChangeAspect="1"/>
-          </p:cNvSpPr>
-          <p:nvPr>
-            <p:ph type="sldImg"/>
-          </p:nvPr>
-        </p:nvSpPr>
-        <p:spPr/>
-        <p:txBody>
-          <a:bodyPr/>
-          <a:lstStyle/>
-          <a:p>
-            <a:endParaRPr lang="es-ES" dirty="0"/>
-          </a:p>
-        </p:txBody>
-      </p:sp>
-      <p:sp>
-        <p:nvSpPr>
-          <p:cNvPr id="3" name="Marcador de notas 2"/>
-          <p:cNvSpPr>
-            <a:spLocks noGrp="1"/>
-          </p:cNvSpPr>
-          <p:nvPr>
-            <p:ph type="body" idx="1"/>
-          </p:nvPr>
-        </p:nvSpPr>
-        <p:spPr/>
-        <p:txBody>
-          <a:bodyPr/>
-          <a:lstStyle/>
-          <a:p>
-            <a:endParaRPr lang="es-ES" dirty="0"/>
-          </a:p>
-        </p:txBody>
-      </p:sp>
-      <p:sp>
-        <p:nvSpPr>
-          <p:cNvPr id="4" name="Marcador de número de diapositiva 3"/>
-          <p:cNvSpPr>
-            <a:spLocks noGrp="1"/>
-          </p:cNvSpPr>
-          <p:nvPr>
-            <p:ph type="sldNum" sz="quarter" idx="10"/>
-          </p:nvPr>
-        </p:nvSpPr>
-        <p:spPr/>
-        <p:txBody>
-          <a:bodyPr/>
-          <a:lstStyle/>
-          <a:p>
-            <a:fld id="{05D135E5-457A-4183-A722-09BD01DC1252}" type="slidenum">
-              <a:rPr lang="es-ES" smtClean="0"/>
-              <a:t>16</a:t>
+              <a:t>15</a:t>
             </a:fld>
             <a:endParaRPr lang="es-ES" dirty="0"/>
           </a:p>
@@ -1176,7 +1060,7 @@
 </p:notes>
 </file>
 
-<file path=ppt/notesSlides/notesSlide14.xml><?xml version="1.0" encoding="utf-8"?>
+<file path=ppt/notesSlides/notesSlide13.xml><?xml version="1.0" encoding="utf-8"?>
 <p:notes xmlns:a="http://schemas.openxmlformats.org/drawingml/2006/main" xmlns:r="http://schemas.openxmlformats.org/officeDocument/2006/relationships" xmlns:p="http://schemas.openxmlformats.org/presentationml/2006/main">
   <p:cSld>
     <p:spTree>
@@ -1272,7 +1156,7 @@
           <a:p>
             <a:fld id="{05D135E5-457A-4183-A722-09BD01DC1252}" type="slidenum">
               <a:rPr lang="es-ES" smtClean="0"/>
-              <a:t>17</a:t>
+              <a:t>16</a:t>
             </a:fld>
             <a:endParaRPr lang="es-ES" dirty="0"/>
           </a:p>
@@ -1291,7 +1175,7 @@
 </p:notes>
 </file>
 
-<file path=ppt/notesSlides/notesSlide15.xml><?xml version="1.0" encoding="utf-8"?>
+<file path=ppt/notesSlides/notesSlide14.xml><?xml version="1.0" encoding="utf-8"?>
 <p:notes xmlns:a="http://schemas.openxmlformats.org/drawingml/2006/main" xmlns:r="http://schemas.openxmlformats.org/officeDocument/2006/relationships" xmlns:p="http://schemas.openxmlformats.org/presentationml/2006/main">
   <p:cSld>
     <p:spTree>
@@ -1387,7 +1271,7 @@
           <a:p>
             <a:fld id="{05D135E5-457A-4183-A722-09BD01DC1252}" type="slidenum">
               <a:rPr lang="es-ES" smtClean="0"/>
-              <a:t>18</a:t>
+              <a:t>17</a:t>
             </a:fld>
             <a:endParaRPr lang="es-ES" dirty="0"/>
           </a:p>
@@ -1506,7 +1390,13 @@
   <p:cSld>
     <p:spTree>
       <p:nvGrpSpPr>
-        <p:cNvPr id="1" name=""/>
+        <p:cNvPr id="1" name="">
+          <a:extLst>
+            <a:ext uri="{FF2B5EF4-FFF2-40B4-BE49-F238E27FC236}">
+              <a16:creationId xmlns:a16="http://schemas.microsoft.com/office/drawing/2014/main" id="{1683E4B4-2AD9-5E21-26AB-66ABCDF3D719}"/>
+            </a:ext>
+          </a:extLst>
+        </p:cNvPr>
         <p:cNvGrpSpPr/>
         <p:nvPr/>
       </p:nvGrpSpPr>
@@ -1520,7 +1410,13 @@
       </p:grpSpPr>
       <p:sp>
         <p:nvSpPr>
-          <p:cNvPr id="2" name="Marcador de imagen de diapositiva 1"/>
+          <p:cNvPr id="2" name="Marcador de imagen de diapositiva 1">
+            <a:extLst>
+              <a:ext uri="{FF2B5EF4-FFF2-40B4-BE49-F238E27FC236}">
+                <a16:creationId xmlns:a16="http://schemas.microsoft.com/office/drawing/2014/main" id="{8DBB4248-D368-6261-88B3-E392ADDA03A9}"/>
+              </a:ext>
+            </a:extLst>
+          </p:cNvPr>
           <p:cNvSpPr>
             <a:spLocks noGrp="1" noRot="1" noChangeAspect="1"/>
           </p:cNvSpPr>
@@ -1533,13 +1429,19 @@
           <a:bodyPr/>
           <a:lstStyle/>
           <a:p>
-            <a:endParaRPr lang="es-ES"/>
+            <a:endParaRPr lang="es-ES" dirty="0"/>
           </a:p>
         </p:txBody>
       </p:sp>
       <p:sp>
         <p:nvSpPr>
-          <p:cNvPr id="3" name="Marcador de notas 2"/>
+          <p:cNvPr id="3" name="Marcador de notas 2">
+            <a:extLst>
+              <a:ext uri="{FF2B5EF4-FFF2-40B4-BE49-F238E27FC236}">
+                <a16:creationId xmlns:a16="http://schemas.microsoft.com/office/drawing/2014/main" id="{AB4BD80B-23D5-11C7-01A2-C039937E8D8E}"/>
+              </a:ext>
+            </a:extLst>
+          </p:cNvPr>
           <p:cNvSpPr>
             <a:spLocks noGrp="1"/>
           </p:cNvSpPr>
@@ -1552,35 +1454,19 @@
           <a:bodyPr/>
           <a:lstStyle/>
           <a:p>
-            <a:pPr marL="171450" indent="-171450">
-              <a:buFontTx/>
-              <a:buChar char="-"/>
-            </a:pPr>
-            <a:r>
-              <a:rPr lang="es-ES" dirty="0"/>
-              <a:t>Morado -&gt; Métodos Híbridos (Detección + Segmentación)</a:t>
-            </a:r>
-          </a:p>
-          <a:p>
-            <a:pPr marL="171450" indent="-171450">
-              <a:buFontTx/>
-              <a:buChar char="-"/>
-            </a:pPr>
-            <a:r>
-              <a:rPr lang="es-ES" dirty="0"/>
-              <a:t>Naranja -&gt; Calibración/</a:t>
-            </a:r>
-            <a:r>
-              <a:rPr lang="es-ES" dirty="0" err="1"/>
-              <a:t>Geomtería</a:t>
-            </a:r>
             <a:endParaRPr lang="es-ES" dirty="0"/>
           </a:p>
         </p:txBody>
       </p:sp>
       <p:sp>
         <p:nvSpPr>
-          <p:cNvPr id="4" name="Marcador de número de diapositiva 3"/>
+          <p:cNvPr id="4" name="Marcador de número de diapositiva 3">
+            <a:extLst>
+              <a:ext uri="{FF2B5EF4-FFF2-40B4-BE49-F238E27FC236}">
+                <a16:creationId xmlns:a16="http://schemas.microsoft.com/office/drawing/2014/main" id="{51570D81-D34D-8768-2617-AEB56BA0BB49}"/>
+              </a:ext>
+            </a:extLst>
+          </p:cNvPr>
           <p:cNvSpPr>
             <a:spLocks noGrp="1"/>
           </p:cNvSpPr>
@@ -1597,14 +1483,14 @@
               <a:rPr lang="es-ES" smtClean="0"/>
               <a:t>5</a:t>
             </a:fld>
-            <a:endParaRPr lang="es-ES"/>
+            <a:endParaRPr lang="es-ES" dirty="0"/>
           </a:p>
         </p:txBody>
       </p:sp>
     </p:spTree>
     <p:extLst>
       <p:ext uri="{BB962C8B-B14F-4D97-AF65-F5344CB8AC3E}">
-        <p14:creationId xmlns:p14="http://schemas.microsoft.com/office/powerpoint/2010/main" val="356198082"/>
+        <p14:creationId xmlns:p14="http://schemas.microsoft.com/office/powerpoint/2010/main" val="3525781236"/>
       </p:ext>
     </p:extLst>
   </p:cSld>
@@ -1737,7 +1623,7 @@
         <p:cNvPr id="1" name="">
           <a:extLst>
             <a:ext uri="{FF2B5EF4-FFF2-40B4-BE49-F238E27FC236}">
-              <a16:creationId xmlns:a16="http://schemas.microsoft.com/office/drawing/2014/main" id="{1683E4B4-2AD9-5E21-26AB-66ABCDF3D719}"/>
+              <a16:creationId xmlns:a16="http://schemas.microsoft.com/office/drawing/2014/main" id="{B0C77ABA-3E86-EECD-401B-31AADFCEC79C}"/>
             </a:ext>
           </a:extLst>
         </p:cNvPr>
@@ -1757,7 +1643,7 @@
           <p:cNvPr id="2" name="Marcador de imagen de diapositiva 1">
             <a:extLst>
               <a:ext uri="{FF2B5EF4-FFF2-40B4-BE49-F238E27FC236}">
-                <a16:creationId xmlns:a16="http://schemas.microsoft.com/office/drawing/2014/main" id="{8DBB4248-D368-6261-88B3-E392ADDA03A9}"/>
+                <a16:creationId xmlns:a16="http://schemas.microsoft.com/office/drawing/2014/main" id="{AFEA23A6-7687-F950-AF86-7BF998D2AD9D}"/>
               </a:ext>
             </a:extLst>
           </p:cNvPr>
@@ -1782,7 +1668,7 @@
           <p:cNvPr id="3" name="Marcador de notas 2">
             <a:extLst>
               <a:ext uri="{FF2B5EF4-FFF2-40B4-BE49-F238E27FC236}">
-                <a16:creationId xmlns:a16="http://schemas.microsoft.com/office/drawing/2014/main" id="{AB4BD80B-23D5-11C7-01A2-C039937E8D8E}"/>
+                <a16:creationId xmlns:a16="http://schemas.microsoft.com/office/drawing/2014/main" id="{2406A04D-79C9-0FE3-EAAE-A7CC777AC44C}"/>
               </a:ext>
             </a:extLst>
           </p:cNvPr>
@@ -1798,6 +1684,53 @@
           <a:bodyPr/>
           <a:lstStyle/>
           <a:p>
+            <a:pPr marL="171450" indent="-171450">
+              <a:buFontTx/>
+              <a:buChar char="-"/>
+            </a:pPr>
+            <a:r>
+              <a:rPr lang="es-ES" dirty="0" err="1"/>
+              <a:t>Grounding</a:t>
+            </a:r>
+            <a:r>
+              <a:rPr lang="es-ES" dirty="0"/>
+              <a:t> DINO -&gt; </a:t>
+            </a:r>
+            <a:r>
+              <a:rPr lang="es-ES" dirty="0" err="1"/>
+              <a:t>Object</a:t>
+            </a:r>
+            <a:r>
+              <a:rPr lang="es-ES" dirty="0"/>
+              <a:t> </a:t>
+            </a:r>
+            <a:r>
+              <a:rPr lang="es-ES" dirty="0" err="1"/>
+              <a:t>Detection</a:t>
+            </a:r>
+            <a:endParaRPr lang="es-ES" dirty="0"/>
+          </a:p>
+          <a:p>
+            <a:pPr marL="171450" indent="-171450">
+              <a:buFontTx/>
+              <a:buChar char="-"/>
+            </a:pPr>
+            <a:r>
+              <a:rPr lang="es-ES" dirty="0"/>
+              <a:t>SAM -&gt; precise </a:t>
+            </a:r>
+            <a:r>
+              <a:rPr lang="es-ES" dirty="0" err="1"/>
+              <a:t>segmentation</a:t>
+            </a:r>
+            <a:r>
+              <a:rPr lang="es-ES" dirty="0"/>
+              <a:t> </a:t>
+            </a:r>
+            <a:r>
+              <a:rPr lang="es-ES" dirty="0" err="1"/>
+              <a:t>masks</a:t>
+            </a:r>
             <a:endParaRPr lang="es-ES" dirty="0"/>
           </a:p>
         </p:txBody>
@@ -1807,7 +1740,7 @@
           <p:cNvPr id="4" name="Marcador de número de diapositiva 3">
             <a:extLst>
               <a:ext uri="{FF2B5EF4-FFF2-40B4-BE49-F238E27FC236}">
-                <a16:creationId xmlns:a16="http://schemas.microsoft.com/office/drawing/2014/main" id="{51570D81-D34D-8768-2617-AEB56BA0BB49}"/>
+                <a16:creationId xmlns:a16="http://schemas.microsoft.com/office/drawing/2014/main" id="{2309B82A-7C39-755B-1996-4031C35D32A5}"/>
               </a:ext>
             </a:extLst>
           </p:cNvPr>
@@ -1834,7 +1767,7 @@
     </p:spTree>
     <p:extLst>
       <p:ext uri="{BB962C8B-B14F-4D97-AF65-F5344CB8AC3E}">
-        <p14:creationId xmlns:p14="http://schemas.microsoft.com/office/powerpoint/2010/main" val="3525781236"/>
+        <p14:creationId xmlns:p14="http://schemas.microsoft.com/office/powerpoint/2010/main" val="279219857"/>
       </p:ext>
     </p:extLst>
   </p:cSld>
@@ -1936,168 +1869,6 @@
 </file>
 
 <file path=ppt/notesSlides/notesSlide7.xml><?xml version="1.0" encoding="utf-8"?>
-<p:notes xmlns:a="http://schemas.openxmlformats.org/drawingml/2006/main" xmlns:r="http://schemas.openxmlformats.org/officeDocument/2006/relationships" xmlns:p="http://schemas.openxmlformats.org/presentationml/2006/main">
-  <p:cSld>
-    <p:spTree>
-      <p:nvGrpSpPr>
-        <p:cNvPr id="1" name="">
-          <a:extLst>
-            <a:ext uri="{FF2B5EF4-FFF2-40B4-BE49-F238E27FC236}">
-              <a16:creationId xmlns:a16="http://schemas.microsoft.com/office/drawing/2014/main" id="{B0C77ABA-3E86-EECD-401B-31AADFCEC79C}"/>
-            </a:ext>
-          </a:extLst>
-        </p:cNvPr>
-        <p:cNvGrpSpPr/>
-        <p:nvPr/>
-      </p:nvGrpSpPr>
-      <p:grpSpPr>
-        <a:xfrm>
-          <a:off x="0" y="0"/>
-          <a:ext cx="0" cy="0"/>
-          <a:chOff x="0" y="0"/>
-          <a:chExt cx="0" cy="0"/>
-        </a:xfrm>
-      </p:grpSpPr>
-      <p:sp>
-        <p:nvSpPr>
-          <p:cNvPr id="2" name="Marcador de imagen de diapositiva 1">
-            <a:extLst>
-              <a:ext uri="{FF2B5EF4-FFF2-40B4-BE49-F238E27FC236}">
-                <a16:creationId xmlns:a16="http://schemas.microsoft.com/office/drawing/2014/main" id="{AFEA23A6-7687-F950-AF86-7BF998D2AD9D}"/>
-              </a:ext>
-            </a:extLst>
-          </p:cNvPr>
-          <p:cNvSpPr>
-            <a:spLocks noGrp="1" noRot="1" noChangeAspect="1"/>
-          </p:cNvSpPr>
-          <p:nvPr>
-            <p:ph type="sldImg"/>
-          </p:nvPr>
-        </p:nvSpPr>
-        <p:spPr/>
-        <p:txBody>
-          <a:bodyPr/>
-          <a:lstStyle/>
-          <a:p>
-            <a:endParaRPr lang="es-ES" dirty="0"/>
-          </a:p>
-        </p:txBody>
-      </p:sp>
-      <p:sp>
-        <p:nvSpPr>
-          <p:cNvPr id="3" name="Marcador de notas 2">
-            <a:extLst>
-              <a:ext uri="{FF2B5EF4-FFF2-40B4-BE49-F238E27FC236}">
-                <a16:creationId xmlns:a16="http://schemas.microsoft.com/office/drawing/2014/main" id="{2406A04D-79C9-0FE3-EAAE-A7CC777AC44C}"/>
-              </a:ext>
-            </a:extLst>
-          </p:cNvPr>
-          <p:cNvSpPr>
-            <a:spLocks noGrp="1"/>
-          </p:cNvSpPr>
-          <p:nvPr>
-            <p:ph type="body" idx="1"/>
-          </p:nvPr>
-        </p:nvSpPr>
-        <p:spPr/>
-        <p:txBody>
-          <a:bodyPr/>
-          <a:lstStyle/>
-          <a:p>
-            <a:pPr marL="171450" indent="-171450">
-              <a:buFontTx/>
-              <a:buChar char="-"/>
-            </a:pPr>
-            <a:r>
-              <a:rPr lang="es-ES" dirty="0" err="1"/>
-              <a:t>Grounding</a:t>
-            </a:r>
-            <a:r>
-              <a:rPr lang="es-ES" dirty="0"/>
-              <a:t> DINO -&gt; </a:t>
-            </a:r>
-            <a:r>
-              <a:rPr lang="es-ES" dirty="0" err="1"/>
-              <a:t>Object</a:t>
-            </a:r>
-            <a:r>
-              <a:rPr lang="es-ES" dirty="0"/>
-              <a:t> </a:t>
-            </a:r>
-            <a:r>
-              <a:rPr lang="es-ES" dirty="0" err="1"/>
-              <a:t>Detection</a:t>
-            </a:r>
-            <a:endParaRPr lang="es-ES" dirty="0"/>
-          </a:p>
-          <a:p>
-            <a:pPr marL="171450" indent="-171450">
-              <a:buFontTx/>
-              <a:buChar char="-"/>
-            </a:pPr>
-            <a:r>
-              <a:rPr lang="es-ES" dirty="0"/>
-              <a:t>SAM -&gt; precise </a:t>
-            </a:r>
-            <a:r>
-              <a:rPr lang="es-ES" dirty="0" err="1"/>
-              <a:t>segmentation</a:t>
-            </a:r>
-            <a:r>
-              <a:rPr lang="es-ES" dirty="0"/>
-              <a:t> </a:t>
-            </a:r>
-            <a:r>
-              <a:rPr lang="es-ES" dirty="0" err="1"/>
-              <a:t>masks</a:t>
-            </a:r>
-            <a:endParaRPr lang="es-ES" dirty="0"/>
-          </a:p>
-        </p:txBody>
-      </p:sp>
-      <p:sp>
-        <p:nvSpPr>
-          <p:cNvPr id="4" name="Marcador de número de diapositiva 3">
-            <a:extLst>
-              <a:ext uri="{FF2B5EF4-FFF2-40B4-BE49-F238E27FC236}">
-                <a16:creationId xmlns:a16="http://schemas.microsoft.com/office/drawing/2014/main" id="{2309B82A-7C39-755B-1996-4031C35D32A5}"/>
-              </a:ext>
-            </a:extLst>
-          </p:cNvPr>
-          <p:cNvSpPr>
-            <a:spLocks noGrp="1"/>
-          </p:cNvSpPr>
-          <p:nvPr>
-            <p:ph type="sldNum" sz="quarter" idx="10"/>
-          </p:nvPr>
-        </p:nvSpPr>
-        <p:spPr/>
-        <p:txBody>
-          <a:bodyPr/>
-          <a:lstStyle/>
-          <a:p>
-            <a:fld id="{05D135E5-457A-4183-A722-09BD01DC1252}" type="slidenum">
-              <a:rPr lang="es-ES" smtClean="0"/>
-              <a:t>9</a:t>
-            </a:fld>
-            <a:endParaRPr lang="es-ES" dirty="0"/>
-          </a:p>
-        </p:txBody>
-      </p:sp>
-    </p:spTree>
-    <p:extLst>
-      <p:ext uri="{BB962C8B-B14F-4D97-AF65-F5344CB8AC3E}">
-        <p14:creationId xmlns:p14="http://schemas.microsoft.com/office/powerpoint/2010/main" val="279219857"/>
-      </p:ext>
-    </p:extLst>
-  </p:cSld>
-  <p:clrMapOvr>
-    <a:masterClrMapping/>
-  </p:clrMapOvr>
-</p:notes>
-</file>
-
-<file path=ppt/notesSlides/notesSlide8.xml><?xml version="1.0" encoding="utf-8"?>
 <p:notes xmlns:a="http://schemas.openxmlformats.org/drawingml/2006/main" xmlns:r="http://schemas.openxmlformats.org/officeDocument/2006/relationships" xmlns:p="http://schemas.openxmlformats.org/presentationml/2006/main">
   <p:cSld>
     <p:spTree>
@@ -2193,7 +1964,7 @@
           <a:p>
             <a:fld id="{05D135E5-457A-4183-A722-09BD01DC1252}" type="slidenum">
               <a:rPr lang="es-ES" smtClean="0"/>
-              <a:t>10</a:t>
+              <a:t>9</a:t>
             </a:fld>
             <a:endParaRPr lang="es-ES" dirty="0"/>
           </a:p>
@@ -2212,7 +1983,7 @@
 </p:notes>
 </file>
 
-<file path=ppt/notesSlides/notesSlide9.xml><?xml version="1.0" encoding="utf-8"?>
+<file path=ppt/notesSlides/notesSlide8.xml><?xml version="1.0" encoding="utf-8"?>
 <p:notes xmlns:a="http://schemas.openxmlformats.org/drawingml/2006/main" xmlns:r="http://schemas.openxmlformats.org/officeDocument/2006/relationships" xmlns:p="http://schemas.openxmlformats.org/presentationml/2006/main">
   <p:cSld>
     <p:spTree>
@@ -2308,7 +2079,7 @@
           <a:p>
             <a:fld id="{05D135E5-457A-4183-A722-09BD01DC1252}" type="slidenum">
               <a:rPr lang="es-ES" smtClean="0"/>
-              <a:t>11</a:t>
+              <a:t>10</a:t>
             </a:fld>
             <a:endParaRPr lang="es-ES" dirty="0"/>
           </a:p>
@@ -2318,6 +2089,121 @@
     <p:extLst>
       <p:ext uri="{BB962C8B-B14F-4D97-AF65-F5344CB8AC3E}">
         <p14:creationId xmlns:p14="http://schemas.microsoft.com/office/powerpoint/2010/main" val="2030771114"/>
+      </p:ext>
+    </p:extLst>
+  </p:cSld>
+  <p:clrMapOvr>
+    <a:masterClrMapping/>
+  </p:clrMapOvr>
+</p:notes>
+</file>
+
+<file path=ppt/notesSlides/notesSlide9.xml><?xml version="1.0" encoding="utf-8"?>
+<p:notes xmlns:a="http://schemas.openxmlformats.org/drawingml/2006/main" xmlns:r="http://schemas.openxmlformats.org/officeDocument/2006/relationships" xmlns:p="http://schemas.openxmlformats.org/presentationml/2006/main">
+  <p:cSld>
+    <p:spTree>
+      <p:nvGrpSpPr>
+        <p:cNvPr id="1" name="">
+          <a:extLst>
+            <a:ext uri="{FF2B5EF4-FFF2-40B4-BE49-F238E27FC236}">
+              <a16:creationId xmlns:a16="http://schemas.microsoft.com/office/drawing/2014/main" id="{A4F9270A-DA4B-D6B3-1A4F-AC85BE5F2D7E}"/>
+            </a:ext>
+          </a:extLst>
+        </p:cNvPr>
+        <p:cNvGrpSpPr/>
+        <p:nvPr/>
+      </p:nvGrpSpPr>
+      <p:grpSpPr>
+        <a:xfrm>
+          <a:off x="0" y="0"/>
+          <a:ext cx="0" cy="0"/>
+          <a:chOff x="0" y="0"/>
+          <a:chExt cx="0" cy="0"/>
+        </a:xfrm>
+      </p:grpSpPr>
+      <p:sp>
+        <p:nvSpPr>
+          <p:cNvPr id="2" name="Marcador de imagen de diapositiva 1">
+            <a:extLst>
+              <a:ext uri="{FF2B5EF4-FFF2-40B4-BE49-F238E27FC236}">
+                <a16:creationId xmlns:a16="http://schemas.microsoft.com/office/drawing/2014/main" id="{F00F5546-FA97-3766-B1FC-A47DE9795541}"/>
+              </a:ext>
+            </a:extLst>
+          </p:cNvPr>
+          <p:cNvSpPr>
+            <a:spLocks noGrp="1" noRot="1" noChangeAspect="1"/>
+          </p:cNvSpPr>
+          <p:nvPr>
+            <p:ph type="sldImg"/>
+          </p:nvPr>
+        </p:nvSpPr>
+        <p:spPr/>
+        <p:txBody>
+          <a:bodyPr/>
+          <a:lstStyle/>
+          <a:p>
+            <a:endParaRPr lang="es-ES" dirty="0"/>
+          </a:p>
+        </p:txBody>
+      </p:sp>
+      <p:sp>
+        <p:nvSpPr>
+          <p:cNvPr id="3" name="Marcador de notas 2">
+            <a:extLst>
+              <a:ext uri="{FF2B5EF4-FFF2-40B4-BE49-F238E27FC236}">
+                <a16:creationId xmlns:a16="http://schemas.microsoft.com/office/drawing/2014/main" id="{7D4517E9-EA07-54A2-DBB7-3635C5A646F4}"/>
+              </a:ext>
+            </a:extLst>
+          </p:cNvPr>
+          <p:cNvSpPr>
+            <a:spLocks noGrp="1"/>
+          </p:cNvSpPr>
+          <p:nvPr>
+            <p:ph type="body" idx="1"/>
+          </p:nvPr>
+        </p:nvSpPr>
+        <p:spPr/>
+        <p:txBody>
+          <a:bodyPr/>
+          <a:lstStyle/>
+          <a:p>
+            <a:endParaRPr lang="es-ES" dirty="0"/>
+          </a:p>
+        </p:txBody>
+      </p:sp>
+      <p:sp>
+        <p:nvSpPr>
+          <p:cNvPr id="4" name="Marcador de número de diapositiva 3">
+            <a:extLst>
+              <a:ext uri="{FF2B5EF4-FFF2-40B4-BE49-F238E27FC236}">
+                <a16:creationId xmlns:a16="http://schemas.microsoft.com/office/drawing/2014/main" id="{1974EE48-B9C3-3420-C006-3474E81EDC5E}"/>
+              </a:ext>
+            </a:extLst>
+          </p:cNvPr>
+          <p:cNvSpPr>
+            <a:spLocks noGrp="1"/>
+          </p:cNvSpPr>
+          <p:nvPr>
+            <p:ph type="sldNum" sz="quarter" idx="10"/>
+          </p:nvPr>
+        </p:nvSpPr>
+        <p:spPr/>
+        <p:txBody>
+          <a:bodyPr/>
+          <a:lstStyle/>
+          <a:p>
+            <a:fld id="{05D135E5-457A-4183-A722-09BD01DC1252}" type="slidenum">
+              <a:rPr lang="es-ES" smtClean="0"/>
+              <a:t>11</a:t>
+            </a:fld>
+            <a:endParaRPr lang="es-ES" dirty="0"/>
+          </a:p>
+        </p:txBody>
+      </p:sp>
+    </p:spTree>
+    <p:extLst>
+      <p:ext uri="{BB962C8B-B14F-4D97-AF65-F5344CB8AC3E}">
+        <p14:creationId xmlns:p14="http://schemas.microsoft.com/office/powerpoint/2010/main" val="2621593514"/>
       </p:ext>
     </p:extLst>
   </p:cSld>
@@ -4066,140 +3952,6 @@
         <p:cNvPr id="1" name="">
           <a:extLst>
             <a:ext uri="{FF2B5EF4-FFF2-40B4-BE49-F238E27FC236}">
-              <a16:creationId xmlns:a16="http://schemas.microsoft.com/office/drawing/2014/main" id="{F4CD17D0-6AE0-335D-DCCB-779C22440197}"/>
-            </a:ext>
-          </a:extLst>
-        </p:cNvPr>
-        <p:cNvGrpSpPr/>
-        <p:nvPr/>
-      </p:nvGrpSpPr>
-      <p:grpSpPr>
-        <a:xfrm>
-          <a:off x="0" y="0"/>
-          <a:ext cx="0" cy="0"/>
-          <a:chOff x="0" y="0"/>
-          <a:chExt cx="0" cy="0"/>
-        </a:xfrm>
-      </p:grpSpPr>
-      <p:sp>
-        <p:nvSpPr>
-          <p:cNvPr id="2" name="Title 1">
-            <a:extLst>
-              <a:ext uri="{FF2B5EF4-FFF2-40B4-BE49-F238E27FC236}">
-                <a16:creationId xmlns:a16="http://schemas.microsoft.com/office/drawing/2014/main" id="{ABE9FD54-E3E9-1AA0-9DD9-0517F99B7216}"/>
-              </a:ext>
-            </a:extLst>
-          </p:cNvPr>
-          <p:cNvSpPr>
-            <a:spLocks noGrp="1"/>
-          </p:cNvSpPr>
-          <p:nvPr>
-            <p:ph type="title"/>
-          </p:nvPr>
-        </p:nvSpPr>
-        <p:spPr>
-          <a:xfrm>
-            <a:off x="457200" y="274638"/>
-            <a:ext cx="7302500" cy="788278"/>
-          </a:xfrm>
-        </p:spPr>
-        <p:txBody>
-          <a:bodyPr>
-            <a:normAutofit/>
-          </a:bodyPr>
-          <a:lstStyle/>
-          <a:p>
-            <a:pPr algn="l"/>
-            <a:r>
-              <a:rPr lang="en-GB" sz="2800" dirty="0"/>
-              <a:t>3. </a:t>
-            </a:r>
-            <a:r>
-              <a:rPr lang="en-GB" sz="2800" b="1" dirty="0"/>
-              <a:t>Selected method 03: ZZZZ</a:t>
-            </a:r>
-          </a:p>
-        </p:txBody>
-      </p:sp>
-      <p:sp>
-        <p:nvSpPr>
-          <p:cNvPr id="30" name="Rectangle 7">
-            <a:extLst>
-              <a:ext uri="{FF2B5EF4-FFF2-40B4-BE49-F238E27FC236}">
-                <a16:creationId xmlns:a16="http://schemas.microsoft.com/office/drawing/2014/main" id="{36C84E96-7653-5D12-E6C6-A76E4A341C6C}"/>
-              </a:ext>
-            </a:extLst>
-          </p:cNvPr>
-          <p:cNvSpPr/>
-          <p:nvPr/>
-        </p:nvSpPr>
-        <p:spPr>
-          <a:xfrm>
-            <a:off x="80137" y="66509"/>
-            <a:ext cx="6565636" cy="303085"/>
-          </a:xfrm>
-          <a:prstGeom prst="rect">
-            <a:avLst/>
-          </a:prstGeom>
-          <a:noFill/>
-          <a:ln>
-            <a:noFill/>
-          </a:ln>
-          <a:extLst>
-            <a:ext uri="{909E8E84-426E-40DD-AFC4-6F175D3DCCD1}">
-              <a14:hiddenFill xmlns:a14="http://schemas.microsoft.com/office/drawing/2010/main">
-                <a:solidFill>
-                  <a:srgbClr val="FFFFFF"/>
-                </a:solidFill>
-              </a14:hiddenFill>
-            </a:ext>
-            <a:ext uri="{91240B29-F687-4F45-9708-019B960494DF}">
-              <a14:hiddenLine xmlns:a14="http://schemas.microsoft.com/office/drawing/2010/main" w="9525" cap="flat">
-                <a:solidFill>
-                  <a:srgbClr val="000000"/>
-                </a:solidFill>
-                <a:miter lim="800000"/>
-                <a:headEnd type="none" w="med" len="med"/>
-                <a:tailEnd type="none" w="med" len="med"/>
-              </a14:hiddenLine>
-            </a:ext>
-          </a:extLst>
-        </p:spPr>
-        <p:txBody>
-          <a:bodyPr lIns="0" tIns="0" rIns="0" bIns="0"/>
-          <a:lstStyle/>
-          <a:p>
-            <a:endParaRPr lang="en-US" sz="800" b="1" dirty="0">
-              <a:solidFill>
-                <a:srgbClr val="535353"/>
-              </a:solidFill>
-              <a:latin typeface="Geneva" charset="0"/>
-              <a:cs typeface="Geneva" charset="0"/>
-            </a:endParaRPr>
-          </a:p>
-        </p:txBody>
-      </p:sp>
-    </p:spTree>
-    <p:extLst>
-      <p:ext uri="{BB962C8B-B14F-4D97-AF65-F5344CB8AC3E}">
-        <p14:creationId xmlns:p14="http://schemas.microsoft.com/office/powerpoint/2010/main" val="2985104822"/>
-      </p:ext>
-    </p:extLst>
-  </p:cSld>
-  <p:clrMapOvr>
-    <a:masterClrMapping/>
-  </p:clrMapOvr>
-</p:sld>
-</file>
-
-<file path=ppt/slides/slide11.xml><?xml version="1.0" encoding="utf-8"?>
-<p:sld xmlns:a="http://schemas.openxmlformats.org/drawingml/2006/main" xmlns:r="http://schemas.openxmlformats.org/officeDocument/2006/relationships" xmlns:p="http://schemas.openxmlformats.org/presentationml/2006/main">
-  <p:cSld>
-    <p:spTree>
-      <p:nvGrpSpPr>
-        <p:cNvPr id="1" name="">
-          <a:extLst>
-            <a:ext uri="{FF2B5EF4-FFF2-40B4-BE49-F238E27FC236}">
               <a16:creationId xmlns:a16="http://schemas.microsoft.com/office/drawing/2014/main" id="{B47EF38C-1117-7442-9501-12F9402F6EE5}"/>
             </a:ext>
           </a:extLst>
@@ -4326,7 +4078,7 @@
 </p:sld>
 </file>
 
-<file path=ppt/slides/slide12.xml><?xml version="1.0" encoding="utf-8"?>
+<file path=ppt/slides/slide11.xml><?xml version="1.0" encoding="utf-8"?>
 <p:sld xmlns:a="http://schemas.openxmlformats.org/drawingml/2006/main" xmlns:r="http://schemas.openxmlformats.org/officeDocument/2006/relationships" xmlns:p="http://schemas.openxmlformats.org/presentationml/2006/main">
   <p:cSld>
     <p:spTree>
@@ -4497,7 +4249,7 @@
         </p:nvPicPr>
         <p:blipFill>
           <a:blip r:embed="rId4">
-            <a:alphaModFix amt="25000"/>
+            <a:alphaModFix amt="20000"/>
           </a:blip>
           <a:stretch>
             <a:fillRect/>
@@ -4529,7 +4281,7 @@
         </p:nvPicPr>
         <p:blipFill>
           <a:blip r:embed="rId5">
-            <a:alphaModFix amt="25000"/>
+            <a:alphaModFix amt="20000"/>
           </a:blip>
           <a:stretch>
             <a:fillRect/>
@@ -4537,7 +4289,7 @@
         </p:blipFill>
         <p:spPr>
           <a:xfrm>
-            <a:off x="2211552" y="-1273662"/>
+            <a:off x="2211552" y="-1286231"/>
             <a:ext cx="3505689" cy="3496163"/>
           </a:xfrm>
           <a:prstGeom prst="rect">
@@ -4561,7 +4313,7 @@
         </p:nvPicPr>
         <p:blipFill>
           <a:blip r:embed="rId6">
-            <a:alphaModFix amt="25000"/>
+            <a:alphaModFix amt="20000"/>
           </a:blip>
           <a:stretch>
             <a:fillRect/>
@@ -4593,7 +4345,7 @@
         </p:nvPicPr>
         <p:blipFill>
           <a:blip r:embed="rId7">
-            <a:alphaModFix amt="25000"/>
+            <a:alphaModFix amt="20000"/>
           </a:blip>
           <a:stretch>
             <a:fillRect/>
@@ -4601,8 +4353,8 @@
         </p:blipFill>
         <p:spPr>
           <a:xfrm>
-            <a:off x="41840" y="2209932"/>
-            <a:ext cx="1811024" cy="2687065"/>
+            <a:off x="-44637" y="2209932"/>
+            <a:ext cx="1897501" cy="2687065"/>
           </a:xfrm>
           <a:prstGeom prst="rect">
             <a:avLst/>
@@ -4625,7 +4377,7 @@
         </p:nvPicPr>
         <p:blipFill>
           <a:blip r:embed="rId8">
-            <a:alphaModFix amt="25000"/>
+            <a:alphaModFix amt="20000"/>
           </a:blip>
           <a:stretch>
             <a:fillRect/>
@@ -4657,7 +4409,7 @@
         </p:nvPicPr>
         <p:blipFill>
           <a:blip r:embed="rId9">
-            <a:alphaModFix amt="25000"/>
+            <a:alphaModFix amt="20000"/>
           </a:blip>
           <a:stretch>
             <a:fillRect/>
@@ -4689,7 +4441,7 @@
         </p:nvPicPr>
         <p:blipFill>
           <a:blip r:embed="rId10">
-            <a:alphaModFix amt="25000"/>
+            <a:alphaModFix amt="20000"/>
           </a:blip>
           <a:stretch>
             <a:fillRect/>
@@ -4721,7 +4473,7 @@
         </p:nvPicPr>
         <p:blipFill>
           <a:blip r:embed="rId11">
-            <a:alphaModFix amt="25000"/>
+            <a:alphaModFix amt="20000"/>
           </a:blip>
           <a:stretch>
             <a:fillRect/>
@@ -4753,7 +4505,7 @@
         </p:nvPicPr>
         <p:blipFill>
           <a:blip r:embed="rId12">
-            <a:alphaModFix amt="25000"/>
+            <a:alphaModFix amt="20000"/>
           </a:blip>
           <a:stretch>
             <a:fillRect/>
@@ -4782,7 +4534,7 @@
 </p:sld>
 </file>
 
-<file path=ppt/slides/slide13.xml><?xml version="1.0" encoding="utf-8"?>
+<file path=ppt/slides/slide12.xml><?xml version="1.0" encoding="utf-8"?>
 <p:sld xmlns:a="http://schemas.openxmlformats.org/drawingml/2006/main" xmlns:r="http://schemas.openxmlformats.org/officeDocument/2006/relationships" xmlns:p="http://schemas.openxmlformats.org/presentationml/2006/main">
   <p:cSld>
     <p:spTree>
@@ -5876,7 +5628,7 @@
 </p:sld>
 </file>
 
-<file path=ppt/slides/slide14.xml><?xml version="1.0" encoding="utf-8"?>
+<file path=ppt/slides/slide13.xml><?xml version="1.0" encoding="utf-8"?>
 <p:sld xmlns:a="http://schemas.openxmlformats.org/drawingml/2006/main" xmlns:r="http://schemas.openxmlformats.org/officeDocument/2006/relationships" xmlns:p="http://schemas.openxmlformats.org/presentationml/2006/main">
   <p:cSld>
     <p:spTree>
@@ -5917,12 +5669,8 @@
           <a:p>
             <a:pPr algn="just"/>
             <a:r>
-              <a:rPr lang="en-GB" sz="2800" dirty="0"/>
-              <a:t>6. </a:t>
-            </a:r>
-            <a:r>
               <a:rPr lang="en-GB" sz="2800" b="1" dirty="0"/>
-              <a:t>Conclusions</a:t>
+              <a:t>6. Conclusions</a:t>
             </a:r>
           </a:p>
         </p:txBody>
@@ -5943,8 +5691,8 @@
         </p:nvSpPr>
         <p:spPr bwMode="auto">
           <a:xfrm>
-            <a:off x="457200" y="1438779"/>
-            <a:ext cx="8702062" cy="646331"/>
+            <a:off x="220969" y="1166846"/>
+            <a:ext cx="8971367" cy="4524315"/>
           </a:xfrm>
           <a:prstGeom prst="rect">
             <a:avLst/>
@@ -6009,6 +5757,32 @@
               <a:tabLst/>
             </a:pPr>
             <a:r>
+              <a:rPr kumimoji="0" lang="es-ES" altLang="es-ES" sz="1800" b="1" i="0" u="none" strike="noStrike" cap="none" normalizeH="0" baseline="0" dirty="0">
+                <a:ln>
+                  <a:noFill/>
+                </a:ln>
+                <a:solidFill>
+                  <a:schemeClr val="tx1"/>
+                </a:solidFill>
+                <a:effectLst/>
+                <a:latin typeface="Arial" panose="020B0604020202020204" pitchFamily="34" charset="0"/>
+              </a:rPr>
+              <a:t>Deep </a:t>
+            </a:r>
+            <a:r>
+              <a:rPr kumimoji="0" lang="es-ES" altLang="es-ES" sz="1800" b="1" i="0" u="none" strike="noStrike" cap="none" normalizeH="0" baseline="0" dirty="0" err="1">
+                <a:ln>
+                  <a:noFill/>
+                </a:ln>
+                <a:solidFill>
+                  <a:schemeClr val="tx1"/>
+                </a:solidFill>
+                <a:effectLst/>
+                <a:latin typeface="Arial" panose="020B0604020202020204" pitchFamily="34" charset="0"/>
+              </a:rPr>
+              <a:t>learning</a:t>
+            </a:r>
+            <a:r>
               <a:rPr kumimoji="0" lang="es-ES" altLang="es-ES" sz="1800" b="0" i="0" u="none" strike="noStrike" cap="none" normalizeH="0" baseline="0" dirty="0">
                 <a:ln>
                   <a:noFill/>
@@ -6019,7 +5793,7 @@
                 <a:effectLst/>
                 <a:latin typeface="Arial" panose="020B0604020202020204" pitchFamily="34" charset="0"/>
               </a:rPr>
-              <a:t>Deep </a:t>
+              <a:t> </a:t>
             </a:r>
             <a:r>
               <a:rPr kumimoji="0" lang="es-ES" altLang="es-ES" sz="1800" b="0" i="0" u="none" strike="noStrike" cap="none" normalizeH="0" baseline="0" dirty="0" err="1">
@@ -6032,7 +5806,7 @@
                 <a:effectLst/>
                 <a:latin typeface="Arial" panose="020B0604020202020204" pitchFamily="34" charset="0"/>
               </a:rPr>
-              <a:t>learning</a:t>
+              <a:t>highest</a:t>
             </a:r>
             <a:r>
               <a:rPr kumimoji="0" lang="es-ES" altLang="es-ES" sz="1800" b="0" i="0" u="none" strike="noStrike" cap="none" normalizeH="0" baseline="0" dirty="0">
@@ -6058,7 +5832,7 @@
                 <a:effectLst/>
                 <a:latin typeface="Arial" panose="020B0604020202020204" pitchFamily="34" charset="0"/>
               </a:rPr>
-              <a:t>highest</a:t>
+              <a:t>accuracy</a:t>
             </a:r>
             <a:r>
               <a:rPr kumimoji="0" lang="es-ES" altLang="es-ES" sz="1800" b="0" i="0" u="none" strike="noStrike" cap="none" normalizeH="0" baseline="0" dirty="0">
@@ -6071,7 +5845,7 @@
                 <a:effectLst/>
                 <a:latin typeface="Arial" panose="020B0604020202020204" pitchFamily="34" charset="0"/>
               </a:rPr>
-              <a:t> </a:t>
+              <a:t>, </a:t>
             </a:r>
             <a:r>
               <a:rPr kumimoji="0" lang="es-ES" altLang="es-ES" sz="1800" b="0" i="0" u="none" strike="noStrike" cap="none" normalizeH="0" baseline="0" dirty="0" err="1">
@@ -6084,7 +5858,7 @@
                 <a:effectLst/>
                 <a:latin typeface="Arial" panose="020B0604020202020204" pitchFamily="34" charset="0"/>
               </a:rPr>
-              <a:t>accuracy</a:t>
+              <a:t>but</a:t>
             </a:r>
             <a:r>
               <a:rPr kumimoji="0" lang="es-ES" altLang="es-ES" sz="1800" b="0" i="0" u="none" strike="noStrike" cap="none" normalizeH="0" baseline="0" dirty="0">
@@ -6097,7 +5871,7 @@
                 <a:effectLst/>
                 <a:latin typeface="Arial" panose="020B0604020202020204" pitchFamily="34" charset="0"/>
               </a:rPr>
-              <a:t>, </a:t>
+              <a:t> </a:t>
             </a:r>
             <a:r>
               <a:rPr kumimoji="0" lang="es-ES" altLang="es-ES" sz="1800" b="0" i="0" u="none" strike="noStrike" cap="none" normalizeH="0" baseline="0" dirty="0" err="1">
@@ -6110,7 +5884,7 @@
                 <a:effectLst/>
                 <a:latin typeface="Arial" panose="020B0604020202020204" pitchFamily="34" charset="0"/>
               </a:rPr>
-              <a:t>but</a:t>
+              <a:t>requires</a:t>
             </a:r>
             <a:r>
               <a:rPr kumimoji="0" lang="es-ES" altLang="es-ES" sz="1800" b="0" i="0" u="none" strike="noStrike" cap="none" normalizeH="0" baseline="0" dirty="0">
@@ -6126,7 +5900,7 @@
               <a:t> </a:t>
             </a:r>
             <a:r>
-              <a:rPr kumimoji="0" lang="es-ES" altLang="es-ES" sz="1800" b="0" i="0" u="none" strike="noStrike" cap="none" normalizeH="0" baseline="0" dirty="0" err="1">
+              <a:rPr kumimoji="0" lang="es-ES" altLang="es-ES" sz="1800" b="1" i="0" u="none" strike="noStrike" cap="none" normalizeH="0" baseline="0" dirty="0">
                 <a:ln>
                   <a:noFill/>
                 </a:ln>
@@ -6136,20 +5910,7 @@
                 <a:effectLst/>
                 <a:latin typeface="Arial" panose="020B0604020202020204" pitchFamily="34" charset="0"/>
               </a:rPr>
-              <a:t>requires</a:t>
-            </a:r>
-            <a:r>
-              <a:rPr kumimoji="0" lang="es-ES" altLang="es-ES" sz="1800" b="0" i="0" u="none" strike="noStrike" cap="none" normalizeH="0" baseline="0" dirty="0">
-                <a:ln>
-                  <a:noFill/>
-                </a:ln>
-                <a:solidFill>
-                  <a:schemeClr val="tx1"/>
-                </a:solidFill>
-                <a:effectLst/>
-                <a:latin typeface="Arial" panose="020B0604020202020204" pitchFamily="34" charset="0"/>
-              </a:rPr>
-              <a:t> data + GPU.</a:t>
+              <a:t>data + GPU.</a:t>
             </a:r>
           </a:p>
           <a:p>
@@ -6170,22 +5931,70 @@
               <a:tabLst/>
             </a:pPr>
             <a:r>
+              <a:rPr lang="es-ES" altLang="es-ES" b="1" dirty="0" err="1">
+                <a:latin typeface="Arial" panose="020B0604020202020204" pitchFamily="34" charset="0"/>
+              </a:rPr>
+              <a:t>Classical</a:t>
+            </a:r>
+            <a:r>
+              <a:rPr lang="es-ES" altLang="es-ES" b="1" dirty="0">
+                <a:latin typeface="Arial" panose="020B0604020202020204" pitchFamily="34" charset="0"/>
+              </a:rPr>
+              <a:t> </a:t>
+            </a:r>
+            <a:r>
+              <a:rPr lang="es-ES" altLang="es-ES" b="1" dirty="0" err="1">
+                <a:latin typeface="Arial" panose="020B0604020202020204" pitchFamily="34" charset="0"/>
+              </a:rPr>
+              <a:t>methods</a:t>
+            </a:r>
+            <a:r>
+              <a:rPr lang="es-ES" altLang="es-ES" dirty="0">
+                <a:latin typeface="Arial" panose="020B0604020202020204" pitchFamily="34" charset="0"/>
+              </a:rPr>
+              <a:t> </a:t>
+            </a:r>
+            <a:r>
               <a:rPr lang="es-ES" altLang="es-ES" dirty="0" err="1">
                 <a:latin typeface="Arial" panose="020B0604020202020204" pitchFamily="34" charset="0"/>
               </a:rPr>
-              <a:t>Classical</a:t>
+              <a:t>efficient</a:t>
             </a:r>
             <a:r>
               <a:rPr lang="es-ES" altLang="es-ES" dirty="0">
                 <a:latin typeface="Arial" panose="020B0604020202020204" pitchFamily="34" charset="0"/>
               </a:rPr>
+              <a:t> and no data </a:t>
+            </a:r>
+            <a:r>
+              <a:rPr lang="es-ES" altLang="es-ES" dirty="0" err="1">
+                <a:latin typeface="Arial" panose="020B0604020202020204" pitchFamily="34" charset="0"/>
+              </a:rPr>
+              <a:t>needde</a:t>
+            </a:r>
+            <a:r>
+              <a:rPr lang="es-ES" altLang="es-ES" dirty="0">
+                <a:latin typeface="Arial" panose="020B0604020202020204" pitchFamily="34" charset="0"/>
+              </a:rPr>
+              <a:t>, </a:t>
+            </a:r>
+            <a:r>
+              <a:rPr lang="es-ES" altLang="es-ES" dirty="0" err="1">
+                <a:latin typeface="Arial" panose="020B0604020202020204" pitchFamily="34" charset="0"/>
+              </a:rPr>
+              <a:t>but</a:t>
+            </a:r>
+            <a:r>
+              <a:rPr lang="es-ES" altLang="es-ES" dirty="0">
+                <a:latin typeface="Arial" panose="020B0604020202020204" pitchFamily="34" charset="0"/>
+              </a:rPr>
               <a:t> </a:t>
             </a:r>
             <a:r>
               <a:rPr lang="es-ES" altLang="es-ES" dirty="0" err="1">
                 <a:latin typeface="Arial" panose="020B0604020202020204" pitchFamily="34" charset="0"/>
               </a:rPr>
-              <a:t>methods</a:t>
+              <a:t>less</a:t>
             </a:r>
             <a:r>
               <a:rPr lang="es-ES" altLang="es-ES" dirty="0">
@@ -6197,153 +6006,41 @@
               <a:rPr lang="es-ES" altLang="es-ES" dirty="0" err="1">
                 <a:latin typeface="Arial" panose="020B0604020202020204" pitchFamily="34" charset="0"/>
               </a:rPr>
-              <a:t>efficient</a:t>
+              <a:t>robust</a:t>
             </a:r>
             <a:r>
               <a:rPr lang="es-ES" altLang="es-ES" dirty="0">
                 <a:latin typeface="Arial" panose="020B0604020202020204" pitchFamily="34" charset="0"/>
               </a:rPr>
-              <a:t> and no data </a:t>
+              <a:t> </a:t>
             </a:r>
             <a:r>
               <a:rPr lang="es-ES" altLang="es-ES" dirty="0" err="1">
                 <a:latin typeface="Arial" panose="020B0604020202020204" pitchFamily="34" charset="0"/>
               </a:rPr>
-              <a:t>needde</a:t>
+              <a:t>to</a:t>
             </a:r>
             <a:r>
               <a:rPr lang="es-ES" altLang="es-ES" dirty="0">
                 <a:latin typeface="Arial" panose="020B0604020202020204" pitchFamily="34" charset="0"/>
               </a:rPr>
-              <a:t>, </a:t>
+              <a:t> real </a:t>
             </a:r>
             <a:r>
               <a:rPr lang="es-ES" altLang="es-ES" dirty="0" err="1">
                 <a:latin typeface="Arial" panose="020B0604020202020204" pitchFamily="34" charset="0"/>
               </a:rPr>
-              <a:t>but</a:t>
+              <a:t>conditions</a:t>
             </a:r>
             <a:r>
               <a:rPr lang="es-ES" altLang="es-ES" dirty="0">
                 <a:latin typeface="Arial" panose="020B0604020202020204" pitchFamily="34" charset="0"/>
               </a:rPr>
-              <a:t> les </a:t>
-            </a:r>
-            <a:r>
-              <a:rPr lang="es-ES" altLang="es-ES" dirty="0" err="1">
-                <a:latin typeface="Arial" panose="020B0604020202020204" pitchFamily="34" charset="0"/>
-              </a:rPr>
-              <a:t>robust</a:t>
-            </a:r>
-            <a:r>
-              <a:rPr lang="es-ES" altLang="es-ES" dirty="0">
-                <a:latin typeface="Arial" panose="020B0604020202020204" pitchFamily="34" charset="0"/>
-              </a:rPr>
-              <a:t> </a:t>
-            </a:r>
-            <a:r>
-              <a:rPr lang="es-ES" altLang="es-ES" dirty="0" err="1">
-                <a:latin typeface="Arial" panose="020B0604020202020204" pitchFamily="34" charset="0"/>
-              </a:rPr>
-              <a:t>to</a:t>
-            </a:r>
-            <a:r>
-              <a:rPr lang="es-ES" altLang="es-ES" dirty="0">
-                <a:latin typeface="Arial" panose="020B0604020202020204" pitchFamily="34" charset="0"/>
-              </a:rPr>
-              <a:t> real </a:t>
-            </a:r>
-            <a:r>
-              <a:rPr lang="es-ES" altLang="es-ES" dirty="0" err="1">
-                <a:latin typeface="Arial" panose="020B0604020202020204" pitchFamily="34" charset="0"/>
-              </a:rPr>
-              <a:t>conditions</a:t>
-            </a:r>
-            <a:r>
-              <a:rPr lang="es-ES" altLang="es-ES" dirty="0">
-                <a:latin typeface="Arial" panose="020B0604020202020204" pitchFamily="34" charset="0"/>
-              </a:rPr>
               <a:t>.</a:t>
             </a:r>
-            <a:endParaRPr kumimoji="0" lang="es-ES" altLang="es-ES" sz="1800" b="0" i="0" u="none" strike="noStrike" cap="none" normalizeH="0" baseline="0" dirty="0">
-              <a:ln>
-                <a:noFill/>
-              </a:ln>
-              <a:solidFill>
-                <a:schemeClr val="tx1"/>
-              </a:solidFill>
-              <a:effectLst/>
-              <a:latin typeface="Arial" panose="020B0604020202020204" pitchFamily="34" charset="0"/>
-            </a:endParaRPr>
-          </a:p>
-        </p:txBody>
-      </p:sp>
-      <p:sp>
-        <p:nvSpPr>
-          <p:cNvPr id="6" name="Rectangle 4">
-            <a:extLst>
-              <a:ext uri="{FF2B5EF4-FFF2-40B4-BE49-F238E27FC236}">
-                <a16:creationId xmlns:a16="http://schemas.microsoft.com/office/drawing/2014/main" id="{44E711C2-834B-AC16-A55F-133C1422CB5C}"/>
-              </a:ext>
-            </a:extLst>
-          </p:cNvPr>
-          <p:cNvSpPr>
-            <a:spLocks noChangeArrowheads="1"/>
-          </p:cNvSpPr>
-          <p:nvPr/>
-        </p:nvSpPr>
-        <p:spPr bwMode="auto">
-          <a:xfrm>
-            <a:off x="0" y="0"/>
-            <a:ext cx="9144000" cy="0"/>
-          </a:xfrm>
-          <a:prstGeom prst="rect">
-            <a:avLst/>
-          </a:prstGeom>
-          <a:noFill/>
-          <a:ln>
-            <a:noFill/>
-          </a:ln>
-          <a:effectLst/>
-          <a:extLst>
-            <a:ext uri="{909E8E84-426E-40DD-AFC4-6F175D3DCCD1}">
-              <a14:hiddenFill xmlns:a14="http://schemas.microsoft.com/office/drawing/2010/main">
-                <a:solidFill>
-                  <a:schemeClr val="accent1"/>
-                </a:solidFill>
-              </a14:hiddenFill>
-            </a:ext>
-            <a:ext uri="{91240B29-F687-4F45-9708-019B960494DF}">
-              <a14:hiddenLine xmlns:a14="http://schemas.microsoft.com/office/drawing/2010/main" w="9525">
-                <a:solidFill>
-                  <a:schemeClr val="tx1"/>
-                </a:solidFill>
-                <a:miter lim="800000"/>
-                <a:headEnd/>
-                <a:tailEnd/>
-              </a14:hiddenLine>
-            </a:ext>
-            <a:ext uri="{AF507438-7753-43E0-B8FC-AC1667EBCBE1}">
-              <a14:hiddenEffects xmlns:a14="http://schemas.microsoft.com/office/drawing/2010/main">
-                <a:effectLst>
-                  <a:outerShdw dist="35921" dir="2700000" algn="ctr" rotWithShape="0">
-                    <a:schemeClr val="bg2"/>
-                  </a:outerShdw>
-                </a:effectLst>
-              </a14:hiddenEffects>
-            </a:ext>
-          </a:extLst>
-        </p:spPr>
-        <p:txBody>
-          <a:bodyPr vert="horz" wrap="none" lIns="91440" tIns="45720" rIns="91440" bIns="45720" numCol="1" anchor="ctr" anchorCtr="0" compatLnSpc="1">
-            <a:prstTxWarp prst="textNoShape">
-              <a:avLst/>
-            </a:prstTxWarp>
-            <a:spAutoFit/>
-          </a:bodyPr>
-          <a:lstStyle/>
-          <a:p>
-            <a:pPr marL="0" marR="0" lvl="0" indent="0" algn="l" defTabSz="914400" rtl="0" eaLnBrk="0" fontAlgn="base" latinLnBrk="0" hangingPunct="0">
+          </a:p>
+          <a:p>
+            <a:pPr marL="285750" marR="0" lvl="0" indent="-285750" algn="l" defTabSz="914400" rtl="0" eaLnBrk="0" fontAlgn="base" latinLnBrk="0" hangingPunct="0">
               <a:lnSpc>
                 <a:spcPct val="100000"/>
               </a:lnSpc>
@@ -6355,442 +6052,23 @@
               </a:spcAft>
               <a:buClrTx/>
               <a:buSzTx/>
-              <a:buFontTx/>
+              <a:buFont typeface="Arial" panose="020B0604020202020204" pitchFamily="34" charset="0"/>
               <a:buChar char="•"/>
               <a:tabLst/>
             </a:pPr>
-            <a:r>
-              <a:rPr kumimoji="0" lang="es-ES" altLang="es-ES" sz="1800" b="1" i="0" u="none" strike="noStrike" cap="none" normalizeH="0" baseline="0" dirty="0" err="1">
-                <a:ln>
-                  <a:noFill/>
-                </a:ln>
-                <a:solidFill>
-                  <a:schemeClr val="tx1"/>
-                </a:solidFill>
-                <a:effectLst/>
-                <a:latin typeface="Arial" panose="020B0604020202020204" pitchFamily="34" charset="0"/>
-              </a:rPr>
-              <a:t>Grounded</a:t>
-            </a:r>
-            <a:r>
-              <a:rPr kumimoji="0" lang="es-ES" altLang="es-ES" sz="1800" b="1" i="0" u="none" strike="noStrike" cap="none" normalizeH="0" baseline="0" dirty="0">
-                <a:ln>
-                  <a:noFill/>
-                </a:ln>
-                <a:solidFill>
-                  <a:schemeClr val="tx1"/>
-                </a:solidFill>
-                <a:effectLst/>
-                <a:latin typeface="Arial" panose="020B0604020202020204" pitchFamily="34" charset="0"/>
-              </a:rPr>
-              <a:t>-SAM</a:t>
-            </a:r>
-            <a:r>
-              <a:rPr kumimoji="0" lang="es-ES" altLang="es-ES" sz="1800" b="0" i="0" u="none" strike="noStrike" cap="none" normalizeH="0" baseline="0" dirty="0">
-                <a:ln>
-                  <a:noFill/>
-                </a:ln>
-                <a:solidFill>
-                  <a:schemeClr val="tx1"/>
-                </a:solidFill>
-                <a:effectLst/>
-                <a:latin typeface="Arial" panose="020B0604020202020204" pitchFamily="34" charset="0"/>
-              </a:rPr>
-              <a:t> </a:t>
-            </a:r>
-            <a:r>
-              <a:rPr kumimoji="0" lang="es-ES" altLang="es-ES" sz="1800" b="0" i="0" u="none" strike="noStrike" cap="none" normalizeH="0" baseline="0" dirty="0" err="1">
-                <a:ln>
-                  <a:noFill/>
-                </a:ln>
-                <a:solidFill>
-                  <a:schemeClr val="tx1"/>
-                </a:solidFill>
-                <a:effectLst/>
-                <a:latin typeface="Arial" panose="020B0604020202020204" pitchFamily="34" charset="0"/>
-              </a:rPr>
-              <a:t>is</a:t>
-            </a:r>
-            <a:r>
-              <a:rPr kumimoji="0" lang="es-ES" altLang="es-ES" sz="1800" b="0" i="0" u="none" strike="noStrike" cap="none" normalizeH="0" baseline="0" dirty="0">
-                <a:ln>
-                  <a:noFill/>
-                </a:ln>
-                <a:solidFill>
-                  <a:schemeClr val="tx1"/>
-                </a:solidFill>
-                <a:effectLst/>
-                <a:latin typeface="Arial" panose="020B0604020202020204" pitchFamily="34" charset="0"/>
-              </a:rPr>
-              <a:t> </a:t>
-            </a:r>
-            <a:r>
-              <a:rPr kumimoji="0" lang="es-ES" altLang="es-ES" sz="1800" b="0" i="0" u="none" strike="noStrike" cap="none" normalizeH="0" baseline="0" dirty="0" err="1">
-                <a:ln>
-                  <a:noFill/>
-                </a:ln>
-                <a:solidFill>
-                  <a:schemeClr val="tx1"/>
-                </a:solidFill>
-                <a:effectLst/>
-                <a:latin typeface="Arial" panose="020B0604020202020204" pitchFamily="34" charset="0"/>
-              </a:rPr>
-              <a:t>the</a:t>
-            </a:r>
-            <a:r>
-              <a:rPr kumimoji="0" lang="es-ES" altLang="es-ES" sz="1800" b="0" i="0" u="none" strike="noStrike" cap="none" normalizeH="0" baseline="0" dirty="0">
-                <a:ln>
-                  <a:noFill/>
-                </a:ln>
-                <a:solidFill>
-                  <a:schemeClr val="tx1"/>
-                </a:solidFill>
-                <a:effectLst/>
-                <a:latin typeface="Arial" panose="020B0604020202020204" pitchFamily="34" charset="0"/>
-              </a:rPr>
-              <a:t> </a:t>
-            </a:r>
-            <a:r>
-              <a:rPr kumimoji="0" lang="es-ES" altLang="es-ES" sz="1800" b="0" i="0" u="none" strike="noStrike" cap="none" normalizeH="0" baseline="0" dirty="0" err="1">
-                <a:ln>
-                  <a:noFill/>
-                </a:ln>
-                <a:solidFill>
-                  <a:schemeClr val="tx1"/>
-                </a:solidFill>
-                <a:effectLst/>
-                <a:latin typeface="Arial" panose="020B0604020202020204" pitchFamily="34" charset="0"/>
-              </a:rPr>
-              <a:t>most</a:t>
-            </a:r>
-            <a:r>
-              <a:rPr kumimoji="0" lang="es-ES" altLang="es-ES" sz="1800" b="0" i="0" u="none" strike="noStrike" cap="none" normalizeH="0" baseline="0" dirty="0">
-                <a:ln>
-                  <a:noFill/>
-                </a:ln>
-                <a:solidFill>
-                  <a:schemeClr val="tx1"/>
-                </a:solidFill>
-                <a:effectLst/>
-                <a:latin typeface="Arial" panose="020B0604020202020204" pitchFamily="34" charset="0"/>
-              </a:rPr>
-              <a:t> flexible </a:t>
-            </a:r>
-            <a:r>
-              <a:rPr kumimoji="0" lang="es-ES" altLang="es-ES" sz="1800" b="0" i="0" u="none" strike="noStrike" cap="none" normalizeH="0" baseline="0" dirty="0" err="1">
-                <a:ln>
-                  <a:noFill/>
-                </a:ln>
-                <a:solidFill>
-                  <a:schemeClr val="tx1"/>
-                </a:solidFill>
-                <a:effectLst/>
-                <a:latin typeface="Arial" panose="020B0604020202020204" pitchFamily="34" charset="0"/>
-              </a:rPr>
-              <a:t>approach</a:t>
-            </a:r>
-            <a:r>
-              <a:rPr kumimoji="0" lang="es-ES" altLang="es-ES" sz="1800" b="0" i="0" u="none" strike="noStrike" cap="none" normalizeH="0" baseline="0" dirty="0">
-                <a:ln>
-                  <a:noFill/>
-                </a:ln>
-                <a:solidFill>
-                  <a:schemeClr val="tx1"/>
-                </a:solidFill>
-                <a:effectLst/>
-                <a:latin typeface="Arial" panose="020B0604020202020204" pitchFamily="34" charset="0"/>
-              </a:rPr>
-              <a:t>, </a:t>
-            </a:r>
-            <a:r>
-              <a:rPr kumimoji="0" lang="es-ES" altLang="es-ES" sz="1800" b="0" i="0" u="none" strike="noStrike" cap="none" normalizeH="0" baseline="0" dirty="0" err="1">
-                <a:ln>
-                  <a:noFill/>
-                </a:ln>
-                <a:solidFill>
-                  <a:schemeClr val="tx1"/>
-                </a:solidFill>
-                <a:effectLst/>
-                <a:latin typeface="Arial" panose="020B0604020202020204" pitchFamily="34" charset="0"/>
-              </a:rPr>
-              <a:t>enabling</a:t>
-            </a:r>
-            <a:r>
-              <a:rPr kumimoji="0" lang="es-ES" altLang="es-ES" sz="1800" b="0" i="0" u="none" strike="noStrike" cap="none" normalizeH="0" baseline="0" dirty="0">
-                <a:ln>
-                  <a:noFill/>
-                </a:ln>
-                <a:solidFill>
-                  <a:schemeClr val="tx1"/>
-                </a:solidFill>
-                <a:effectLst/>
-                <a:latin typeface="Arial" panose="020B0604020202020204" pitchFamily="34" charset="0"/>
-              </a:rPr>
-              <a:t> </a:t>
-            </a:r>
-            <a:r>
-              <a:rPr kumimoji="0" lang="es-ES" altLang="es-ES" sz="1800" b="1" i="0" u="none" strike="noStrike" cap="none" normalizeH="0" baseline="0" dirty="0" err="1">
-                <a:ln>
-                  <a:noFill/>
-                </a:ln>
-                <a:solidFill>
-                  <a:schemeClr val="tx1"/>
-                </a:solidFill>
-                <a:effectLst/>
-                <a:latin typeface="Arial" panose="020B0604020202020204" pitchFamily="34" charset="0"/>
-              </a:rPr>
-              <a:t>zero-shot</a:t>
-            </a:r>
-            <a:r>
-              <a:rPr kumimoji="0" lang="es-ES" altLang="es-ES" sz="1800" b="1" i="0" u="none" strike="noStrike" cap="none" normalizeH="0" baseline="0" dirty="0">
-                <a:ln>
-                  <a:noFill/>
-                </a:ln>
-                <a:solidFill>
-                  <a:schemeClr val="tx1"/>
-                </a:solidFill>
-                <a:effectLst/>
-                <a:latin typeface="Arial" panose="020B0604020202020204" pitchFamily="34" charset="0"/>
-              </a:rPr>
-              <a:t> </a:t>
-            </a:r>
-            <a:r>
-              <a:rPr kumimoji="0" lang="es-ES" altLang="es-ES" sz="1800" b="1" i="0" u="none" strike="noStrike" cap="none" normalizeH="0" baseline="0" dirty="0" err="1">
-                <a:ln>
-                  <a:noFill/>
-                </a:ln>
-                <a:solidFill>
-                  <a:schemeClr val="tx1"/>
-                </a:solidFill>
-                <a:effectLst/>
-                <a:latin typeface="Arial" panose="020B0604020202020204" pitchFamily="34" charset="0"/>
-              </a:rPr>
-              <a:t>detection</a:t>
-            </a:r>
-            <a:r>
-              <a:rPr kumimoji="0" lang="es-ES" altLang="es-ES" sz="1800" b="1" i="0" u="none" strike="noStrike" cap="none" normalizeH="0" baseline="0" dirty="0">
-                <a:ln>
-                  <a:noFill/>
-                </a:ln>
-                <a:solidFill>
-                  <a:schemeClr val="tx1"/>
-                </a:solidFill>
-                <a:effectLst/>
-                <a:latin typeface="Arial" panose="020B0604020202020204" pitchFamily="34" charset="0"/>
-              </a:rPr>
-              <a:t> and </a:t>
-            </a:r>
-            <a:r>
-              <a:rPr kumimoji="0" lang="es-ES" altLang="es-ES" sz="1800" b="1" i="0" u="none" strike="noStrike" cap="none" normalizeH="0" baseline="0" dirty="0" err="1">
-                <a:ln>
-                  <a:noFill/>
-                </a:ln>
-                <a:solidFill>
-                  <a:schemeClr val="tx1"/>
-                </a:solidFill>
-                <a:effectLst/>
-                <a:latin typeface="Arial" panose="020B0604020202020204" pitchFamily="34" charset="0"/>
-              </a:rPr>
-              <a:t>segmentation</a:t>
-            </a:r>
-            <a:r>
-              <a:rPr kumimoji="0" lang="es-ES" altLang="es-ES" sz="1800" b="0" i="0" u="none" strike="noStrike" cap="none" normalizeH="0" baseline="0" dirty="0">
-                <a:ln>
-                  <a:noFill/>
-                </a:ln>
-                <a:solidFill>
-                  <a:schemeClr val="tx1"/>
-                </a:solidFill>
-                <a:effectLst/>
-                <a:latin typeface="Arial" panose="020B0604020202020204" pitchFamily="34" charset="0"/>
-              </a:rPr>
-              <a:t>, </a:t>
-            </a:r>
-            <a:r>
-              <a:rPr kumimoji="0" lang="es-ES" altLang="es-ES" sz="1800" b="0" i="0" u="none" strike="noStrike" cap="none" normalizeH="0" baseline="0" dirty="0" err="1">
-                <a:ln>
-                  <a:noFill/>
-                </a:ln>
-                <a:solidFill>
-                  <a:schemeClr val="tx1"/>
-                </a:solidFill>
-                <a:effectLst/>
-                <a:latin typeface="Arial" panose="020B0604020202020204" pitchFamily="34" charset="0"/>
-              </a:rPr>
-              <a:t>making</a:t>
-            </a:r>
-            <a:r>
-              <a:rPr kumimoji="0" lang="es-ES" altLang="es-ES" sz="1800" b="0" i="0" u="none" strike="noStrike" cap="none" normalizeH="0" baseline="0" dirty="0">
-                <a:ln>
-                  <a:noFill/>
-                </a:ln>
-                <a:solidFill>
-                  <a:schemeClr val="tx1"/>
-                </a:solidFill>
-                <a:effectLst/>
-                <a:latin typeface="Arial" panose="020B0604020202020204" pitchFamily="34" charset="0"/>
-              </a:rPr>
-              <a:t> </a:t>
-            </a:r>
-            <a:r>
-              <a:rPr kumimoji="0" lang="es-ES" altLang="es-ES" sz="1800" b="0" i="0" u="none" strike="noStrike" cap="none" normalizeH="0" baseline="0" dirty="0" err="1">
-                <a:ln>
-                  <a:noFill/>
-                </a:ln>
-                <a:solidFill>
-                  <a:schemeClr val="tx1"/>
-                </a:solidFill>
-                <a:effectLst/>
-                <a:latin typeface="Arial" panose="020B0604020202020204" pitchFamily="34" charset="0"/>
-              </a:rPr>
-              <a:t>it</a:t>
-            </a:r>
-            <a:r>
-              <a:rPr kumimoji="0" lang="es-ES" altLang="es-ES" sz="1800" b="0" i="0" u="none" strike="noStrike" cap="none" normalizeH="0" baseline="0" dirty="0">
-                <a:ln>
-                  <a:noFill/>
-                </a:ln>
-                <a:solidFill>
-                  <a:schemeClr val="tx1"/>
-                </a:solidFill>
-                <a:effectLst/>
-                <a:latin typeface="Arial" panose="020B0604020202020204" pitchFamily="34" charset="0"/>
-              </a:rPr>
-              <a:t> </a:t>
-            </a:r>
-            <a:r>
-              <a:rPr kumimoji="0" lang="es-ES" altLang="es-ES" sz="1800" b="0" i="0" u="none" strike="noStrike" cap="none" normalizeH="0" baseline="0" dirty="0" err="1">
-                <a:ln>
-                  <a:noFill/>
-                </a:ln>
-                <a:solidFill>
-                  <a:schemeClr val="tx1"/>
-                </a:solidFill>
-                <a:effectLst/>
-                <a:latin typeface="Arial" panose="020B0604020202020204" pitchFamily="34" charset="0"/>
-              </a:rPr>
-              <a:t>suitable</a:t>
-            </a:r>
-            <a:r>
-              <a:rPr kumimoji="0" lang="es-ES" altLang="es-ES" sz="1800" b="0" i="0" u="none" strike="noStrike" cap="none" normalizeH="0" baseline="0" dirty="0">
-                <a:ln>
-                  <a:noFill/>
-                </a:ln>
-                <a:solidFill>
-                  <a:schemeClr val="tx1"/>
-                </a:solidFill>
-                <a:effectLst/>
-                <a:latin typeface="Arial" panose="020B0604020202020204" pitchFamily="34" charset="0"/>
-              </a:rPr>
-              <a:t> </a:t>
-            </a:r>
-            <a:r>
-              <a:rPr kumimoji="0" lang="es-ES" altLang="es-ES" sz="1800" b="0" i="0" u="none" strike="noStrike" cap="none" normalizeH="0" baseline="0" dirty="0" err="1">
-                <a:ln>
-                  <a:noFill/>
-                </a:ln>
-                <a:solidFill>
-                  <a:schemeClr val="tx1"/>
-                </a:solidFill>
-                <a:effectLst/>
-                <a:latin typeface="Arial" panose="020B0604020202020204" pitchFamily="34" charset="0"/>
-              </a:rPr>
-              <a:t>when</a:t>
-            </a:r>
-            <a:r>
-              <a:rPr kumimoji="0" lang="es-ES" altLang="es-ES" sz="1800" b="0" i="0" u="none" strike="noStrike" cap="none" normalizeH="0" baseline="0" dirty="0">
-                <a:ln>
-                  <a:noFill/>
-                </a:ln>
-                <a:solidFill>
-                  <a:schemeClr val="tx1"/>
-                </a:solidFill>
-                <a:effectLst/>
-                <a:latin typeface="Arial" panose="020B0604020202020204" pitchFamily="34" charset="0"/>
-              </a:rPr>
-              <a:t> </a:t>
-            </a:r>
-            <a:r>
-              <a:rPr kumimoji="0" lang="es-ES" altLang="es-ES" sz="1800" b="0" i="0" u="none" strike="noStrike" cap="none" normalizeH="0" baseline="0" dirty="0" err="1">
-                <a:ln>
-                  <a:noFill/>
-                </a:ln>
-                <a:solidFill>
-                  <a:schemeClr val="tx1"/>
-                </a:solidFill>
-                <a:effectLst/>
-                <a:latin typeface="Arial" panose="020B0604020202020204" pitchFamily="34" charset="0"/>
-              </a:rPr>
-              <a:t>labeled</a:t>
-            </a:r>
-            <a:r>
-              <a:rPr kumimoji="0" lang="es-ES" altLang="es-ES" sz="1800" b="0" i="0" u="none" strike="noStrike" cap="none" normalizeH="0" baseline="0" dirty="0">
-                <a:ln>
-                  <a:noFill/>
-                </a:ln>
-                <a:solidFill>
-                  <a:schemeClr val="tx1"/>
-                </a:solidFill>
-                <a:effectLst/>
-                <a:latin typeface="Arial" panose="020B0604020202020204" pitchFamily="34" charset="0"/>
-              </a:rPr>
-              <a:t> data </a:t>
-            </a:r>
-            <a:r>
-              <a:rPr kumimoji="0" lang="es-ES" altLang="es-ES" sz="1800" b="0" i="0" u="none" strike="noStrike" cap="none" normalizeH="0" baseline="0" dirty="0" err="1">
-                <a:ln>
-                  <a:noFill/>
-                </a:ln>
-                <a:solidFill>
-                  <a:schemeClr val="tx1"/>
-                </a:solidFill>
-                <a:effectLst/>
-                <a:latin typeface="Arial" panose="020B0604020202020204" pitchFamily="34" charset="0"/>
-              </a:rPr>
-              <a:t>is</a:t>
-            </a:r>
-            <a:r>
-              <a:rPr kumimoji="0" lang="es-ES" altLang="es-ES" sz="1800" b="0" i="0" u="none" strike="noStrike" cap="none" normalizeH="0" baseline="0" dirty="0">
-                <a:ln>
-                  <a:noFill/>
-                </a:ln>
-                <a:solidFill>
-                  <a:schemeClr val="tx1"/>
-                </a:solidFill>
-                <a:effectLst/>
-                <a:latin typeface="Arial" panose="020B0604020202020204" pitchFamily="34" charset="0"/>
-              </a:rPr>
-              <a:t> </a:t>
-            </a:r>
-            <a:r>
-              <a:rPr kumimoji="0" lang="es-ES" altLang="es-ES" sz="1800" b="0" i="0" u="none" strike="noStrike" cap="none" normalizeH="0" baseline="0" dirty="0" err="1">
-                <a:ln>
-                  <a:noFill/>
-                </a:ln>
-                <a:solidFill>
-                  <a:schemeClr val="tx1"/>
-                </a:solidFill>
-                <a:effectLst/>
-                <a:latin typeface="Arial" panose="020B0604020202020204" pitchFamily="34" charset="0"/>
-              </a:rPr>
-              <a:t>unavailable</a:t>
-            </a:r>
-            <a:r>
-              <a:rPr kumimoji="0" lang="es-ES" altLang="es-ES" sz="1800" b="0" i="0" u="none" strike="noStrike" cap="none" normalizeH="0" baseline="0" dirty="0">
-                <a:ln>
-                  <a:noFill/>
-                </a:ln>
-                <a:solidFill>
-                  <a:schemeClr val="tx1"/>
-                </a:solidFill>
-                <a:effectLst/>
-                <a:latin typeface="Arial" panose="020B0604020202020204" pitchFamily="34" charset="0"/>
-              </a:rPr>
-              <a:t>. </a:t>
-            </a:r>
-          </a:p>
-          <a:p>
-            <a:pPr marL="0" marR="0" lvl="0" indent="0" algn="l" defTabSz="914400" rtl="0" eaLnBrk="0" fontAlgn="base" latinLnBrk="0" hangingPunct="0">
+            <a:endParaRPr kumimoji="0" lang="es-ES" altLang="es-ES" sz="1800" b="0" i="0" u="none" strike="noStrike" cap="none" normalizeH="0" baseline="0" dirty="0">
+              <a:ln>
+                <a:noFill/>
+              </a:ln>
+              <a:solidFill>
+                <a:schemeClr val="tx1"/>
+              </a:solidFill>
+              <a:effectLst/>
+              <a:latin typeface="Arial" panose="020B0604020202020204" pitchFamily="34" charset="0"/>
+            </a:endParaRPr>
+          </a:p>
+          <a:p>
+            <a:pPr marL="285750" marR="0" lvl="0" indent="-285750" algn="l" defTabSz="914400" rtl="0" eaLnBrk="0" fontAlgn="base" latinLnBrk="0" hangingPunct="0">
               <a:lnSpc>
                 <a:spcPct val="100000"/>
               </a:lnSpc>
@@ -6802,351 +6080,16 @@
               </a:spcAft>
               <a:buClrTx/>
               <a:buSzTx/>
-              <a:buFontTx/>
+              <a:buFont typeface="Arial" panose="020B0604020202020204" pitchFamily="34" charset="0"/>
               <a:buChar char="•"/>
               <a:tabLst/>
             </a:pPr>
-            <a:r>
-              <a:rPr kumimoji="0" lang="es-ES" altLang="es-ES" sz="1800" b="1" i="0" u="none" strike="noStrike" cap="none" normalizeH="0" baseline="0" dirty="0">
-                <a:ln>
-                  <a:noFill/>
-                </a:ln>
-                <a:solidFill>
-                  <a:schemeClr val="tx1"/>
-                </a:solidFill>
-                <a:effectLst/>
-                <a:latin typeface="Arial" panose="020B0604020202020204" pitchFamily="34" charset="0"/>
-              </a:rPr>
-              <a:t>YOLOv9 + </a:t>
-            </a:r>
-            <a:r>
-              <a:rPr kumimoji="0" lang="es-ES" altLang="es-ES" sz="1800" b="1" i="0" u="none" strike="noStrike" cap="none" normalizeH="0" baseline="0" dirty="0" err="1">
-                <a:ln>
-                  <a:noFill/>
-                </a:ln>
-                <a:solidFill>
-                  <a:schemeClr val="tx1"/>
-                </a:solidFill>
-                <a:effectLst/>
-                <a:latin typeface="Arial" panose="020B0604020202020204" pitchFamily="34" charset="0"/>
-              </a:rPr>
-              <a:t>EfficientSAM</a:t>
-            </a:r>
-            <a:r>
-              <a:rPr kumimoji="0" lang="es-ES" altLang="es-ES" sz="1800" b="0" i="0" u="none" strike="noStrike" cap="none" normalizeH="0" baseline="0" dirty="0">
-                <a:ln>
-                  <a:noFill/>
-                </a:ln>
-                <a:solidFill>
-                  <a:schemeClr val="tx1"/>
-                </a:solidFill>
-                <a:effectLst/>
-                <a:latin typeface="Arial" panose="020B0604020202020204" pitchFamily="34" charset="0"/>
-              </a:rPr>
-              <a:t> </a:t>
-            </a:r>
-            <a:r>
-              <a:rPr kumimoji="0" lang="es-ES" altLang="es-ES" sz="1800" b="0" i="0" u="none" strike="noStrike" cap="none" normalizeH="0" baseline="0" dirty="0" err="1">
-                <a:ln>
-                  <a:noFill/>
-                </a:ln>
-                <a:solidFill>
-                  <a:schemeClr val="tx1"/>
-                </a:solidFill>
-                <a:effectLst/>
-                <a:latin typeface="Arial" panose="020B0604020202020204" pitchFamily="34" charset="0"/>
-              </a:rPr>
-              <a:t>provides</a:t>
-            </a:r>
-            <a:r>
-              <a:rPr kumimoji="0" lang="es-ES" altLang="es-ES" sz="1800" b="0" i="0" u="none" strike="noStrike" cap="none" normalizeH="0" baseline="0" dirty="0">
-                <a:ln>
-                  <a:noFill/>
-                </a:ln>
-                <a:solidFill>
-                  <a:schemeClr val="tx1"/>
-                </a:solidFill>
-                <a:effectLst/>
-                <a:latin typeface="Arial" panose="020B0604020202020204" pitchFamily="34" charset="0"/>
-              </a:rPr>
-              <a:t> </a:t>
-            </a:r>
-            <a:r>
-              <a:rPr kumimoji="0" lang="es-ES" altLang="es-ES" sz="1800" b="0" i="0" u="none" strike="noStrike" cap="none" normalizeH="0" baseline="0" dirty="0" err="1">
-                <a:ln>
-                  <a:noFill/>
-                </a:ln>
-                <a:solidFill>
-                  <a:schemeClr val="tx1"/>
-                </a:solidFill>
-                <a:effectLst/>
-                <a:latin typeface="Arial" panose="020B0604020202020204" pitchFamily="34" charset="0"/>
-              </a:rPr>
-              <a:t>the</a:t>
-            </a:r>
-            <a:r>
-              <a:rPr kumimoji="0" lang="es-ES" altLang="es-ES" sz="1800" b="0" i="0" u="none" strike="noStrike" cap="none" normalizeH="0" baseline="0" dirty="0">
-                <a:ln>
-                  <a:noFill/>
-                </a:ln>
-                <a:solidFill>
-                  <a:schemeClr val="tx1"/>
-                </a:solidFill>
-                <a:effectLst/>
-                <a:latin typeface="Arial" panose="020B0604020202020204" pitchFamily="34" charset="0"/>
-              </a:rPr>
-              <a:t> </a:t>
-            </a:r>
-            <a:r>
-              <a:rPr kumimoji="0" lang="es-ES" altLang="es-ES" sz="1800" b="0" i="0" u="none" strike="noStrike" cap="none" normalizeH="0" baseline="0" dirty="0" err="1">
-                <a:ln>
-                  <a:noFill/>
-                </a:ln>
-                <a:solidFill>
-                  <a:schemeClr val="tx1"/>
-                </a:solidFill>
-                <a:effectLst/>
-                <a:latin typeface="Arial" panose="020B0604020202020204" pitchFamily="34" charset="0"/>
-              </a:rPr>
-              <a:t>best</a:t>
-            </a:r>
-            <a:r>
-              <a:rPr kumimoji="0" lang="es-ES" altLang="es-ES" sz="1800" b="0" i="0" u="none" strike="noStrike" cap="none" normalizeH="0" baseline="0" dirty="0">
-                <a:ln>
-                  <a:noFill/>
-                </a:ln>
-                <a:solidFill>
-                  <a:schemeClr val="tx1"/>
-                </a:solidFill>
-                <a:effectLst/>
-                <a:latin typeface="Arial" panose="020B0604020202020204" pitchFamily="34" charset="0"/>
-              </a:rPr>
-              <a:t> </a:t>
-            </a:r>
-            <a:r>
-              <a:rPr kumimoji="0" lang="es-ES" altLang="es-ES" sz="1800" b="1" i="0" u="none" strike="noStrike" cap="none" normalizeH="0" baseline="0" dirty="0" err="1">
-                <a:ln>
-                  <a:noFill/>
-                </a:ln>
-                <a:solidFill>
-                  <a:schemeClr val="tx1"/>
-                </a:solidFill>
-                <a:effectLst/>
-                <a:latin typeface="Arial" panose="020B0604020202020204" pitchFamily="34" charset="0"/>
-              </a:rPr>
-              <a:t>accuracy</a:t>
-            </a:r>
-            <a:r>
-              <a:rPr kumimoji="0" lang="es-ES" altLang="es-ES" sz="1800" b="1" i="0" u="none" strike="noStrike" cap="none" normalizeH="0" baseline="0" dirty="0">
-                <a:ln>
-                  <a:noFill/>
-                </a:ln>
-                <a:solidFill>
-                  <a:schemeClr val="tx1"/>
-                </a:solidFill>
-                <a:effectLst/>
-                <a:latin typeface="Arial" panose="020B0604020202020204" pitchFamily="34" charset="0"/>
-              </a:rPr>
-              <a:t>–</a:t>
-            </a:r>
-            <a:r>
-              <a:rPr kumimoji="0" lang="es-ES" altLang="es-ES" sz="1800" b="1" i="0" u="none" strike="noStrike" cap="none" normalizeH="0" baseline="0" dirty="0" err="1">
-                <a:ln>
-                  <a:noFill/>
-                </a:ln>
-                <a:solidFill>
-                  <a:schemeClr val="tx1"/>
-                </a:solidFill>
-                <a:effectLst/>
-                <a:latin typeface="Arial" panose="020B0604020202020204" pitchFamily="34" charset="0"/>
-              </a:rPr>
-              <a:t>speed</a:t>
-            </a:r>
-            <a:r>
-              <a:rPr kumimoji="0" lang="es-ES" altLang="es-ES" sz="1800" b="1" i="0" u="none" strike="noStrike" cap="none" normalizeH="0" baseline="0" dirty="0">
-                <a:ln>
-                  <a:noFill/>
-                </a:ln>
-                <a:solidFill>
-                  <a:schemeClr val="tx1"/>
-                </a:solidFill>
-                <a:effectLst/>
-                <a:latin typeface="Arial" panose="020B0604020202020204" pitchFamily="34" charset="0"/>
-              </a:rPr>
-              <a:t> </a:t>
-            </a:r>
-            <a:r>
-              <a:rPr kumimoji="0" lang="es-ES" altLang="es-ES" sz="1800" b="1" i="0" u="none" strike="noStrike" cap="none" normalizeH="0" baseline="0" dirty="0" err="1">
-                <a:ln>
-                  <a:noFill/>
-                </a:ln>
-                <a:solidFill>
-                  <a:schemeClr val="tx1"/>
-                </a:solidFill>
-                <a:effectLst/>
-                <a:latin typeface="Arial" panose="020B0604020202020204" pitchFamily="34" charset="0"/>
-              </a:rPr>
-              <a:t>trade</a:t>
-            </a:r>
-            <a:r>
-              <a:rPr kumimoji="0" lang="es-ES" altLang="es-ES" sz="1800" b="1" i="0" u="none" strike="noStrike" cap="none" normalizeH="0" baseline="0" dirty="0">
-                <a:ln>
-                  <a:noFill/>
-                </a:ln>
-                <a:solidFill>
-                  <a:schemeClr val="tx1"/>
-                </a:solidFill>
-                <a:effectLst/>
-                <a:latin typeface="Arial" panose="020B0604020202020204" pitchFamily="34" charset="0"/>
-              </a:rPr>
-              <a:t>-off</a:t>
-            </a:r>
-            <a:r>
-              <a:rPr kumimoji="0" lang="es-ES" altLang="es-ES" sz="1800" b="0" i="0" u="none" strike="noStrike" cap="none" normalizeH="0" baseline="0" dirty="0">
-                <a:ln>
-                  <a:noFill/>
-                </a:ln>
-                <a:solidFill>
-                  <a:schemeClr val="tx1"/>
-                </a:solidFill>
-                <a:effectLst/>
-                <a:latin typeface="Arial" panose="020B0604020202020204" pitchFamily="34" charset="0"/>
-              </a:rPr>
-              <a:t>, </a:t>
-            </a:r>
-            <a:r>
-              <a:rPr kumimoji="0" lang="es-ES" altLang="es-ES" sz="1800" b="0" i="0" u="none" strike="noStrike" cap="none" normalizeH="0" baseline="0" dirty="0" err="1">
-                <a:ln>
-                  <a:noFill/>
-                </a:ln>
-                <a:solidFill>
-                  <a:schemeClr val="tx1"/>
-                </a:solidFill>
-                <a:effectLst/>
-                <a:latin typeface="Arial" panose="020B0604020202020204" pitchFamily="34" charset="0"/>
-              </a:rPr>
-              <a:t>but</a:t>
-            </a:r>
-            <a:r>
-              <a:rPr kumimoji="0" lang="es-ES" altLang="es-ES" sz="1800" b="0" i="0" u="none" strike="noStrike" cap="none" normalizeH="0" baseline="0" dirty="0">
-                <a:ln>
-                  <a:noFill/>
-                </a:ln>
-                <a:solidFill>
-                  <a:schemeClr val="tx1"/>
-                </a:solidFill>
-                <a:effectLst/>
-                <a:latin typeface="Arial" panose="020B0604020202020204" pitchFamily="34" charset="0"/>
-              </a:rPr>
-              <a:t> </a:t>
-            </a:r>
-            <a:r>
-              <a:rPr kumimoji="0" lang="es-ES" altLang="es-ES" sz="1800" b="0" i="0" u="none" strike="noStrike" cap="none" normalizeH="0" baseline="0" dirty="0" err="1">
-                <a:ln>
-                  <a:noFill/>
-                </a:ln>
-                <a:solidFill>
-                  <a:schemeClr val="tx1"/>
-                </a:solidFill>
-                <a:effectLst/>
-                <a:latin typeface="Arial" panose="020B0604020202020204" pitchFamily="34" charset="0"/>
-              </a:rPr>
-              <a:t>depends</a:t>
-            </a:r>
-            <a:r>
-              <a:rPr kumimoji="0" lang="es-ES" altLang="es-ES" sz="1800" b="0" i="0" u="none" strike="noStrike" cap="none" normalizeH="0" baseline="0" dirty="0">
-                <a:ln>
-                  <a:noFill/>
-                </a:ln>
-                <a:solidFill>
-                  <a:schemeClr val="tx1"/>
-                </a:solidFill>
-                <a:effectLst/>
-                <a:latin typeface="Arial" panose="020B0604020202020204" pitchFamily="34" charset="0"/>
-              </a:rPr>
-              <a:t> </a:t>
-            </a:r>
-            <a:r>
-              <a:rPr kumimoji="0" lang="es-ES" altLang="es-ES" sz="1800" b="0" i="0" u="none" strike="noStrike" cap="none" normalizeH="0" baseline="0" dirty="0" err="1">
-                <a:ln>
-                  <a:noFill/>
-                </a:ln>
-                <a:solidFill>
-                  <a:schemeClr val="tx1"/>
-                </a:solidFill>
-                <a:effectLst/>
-                <a:latin typeface="Arial" panose="020B0604020202020204" pitchFamily="34" charset="0"/>
-              </a:rPr>
-              <a:t>on</a:t>
-            </a:r>
-            <a:r>
-              <a:rPr kumimoji="0" lang="es-ES" altLang="es-ES" sz="1800" b="0" i="0" u="none" strike="noStrike" cap="none" normalizeH="0" baseline="0" dirty="0">
-                <a:ln>
-                  <a:noFill/>
-                </a:ln>
-                <a:solidFill>
-                  <a:schemeClr val="tx1"/>
-                </a:solidFill>
-                <a:effectLst/>
-                <a:latin typeface="Arial" panose="020B0604020202020204" pitchFamily="34" charset="0"/>
-              </a:rPr>
-              <a:t> </a:t>
-            </a:r>
-            <a:r>
-              <a:rPr kumimoji="0" lang="es-ES" altLang="es-ES" sz="1800" b="1" i="0" u="none" strike="noStrike" cap="none" normalizeH="0" baseline="0" dirty="0">
-                <a:ln>
-                  <a:noFill/>
-                </a:ln>
-                <a:solidFill>
-                  <a:schemeClr val="tx1"/>
-                </a:solidFill>
-                <a:effectLst/>
-                <a:latin typeface="Arial" panose="020B0604020202020204" pitchFamily="34" charset="0"/>
-              </a:rPr>
-              <a:t>fine-</a:t>
-            </a:r>
-            <a:r>
-              <a:rPr kumimoji="0" lang="es-ES" altLang="es-ES" sz="1800" b="1" i="0" u="none" strike="noStrike" cap="none" normalizeH="0" baseline="0" dirty="0" err="1">
-                <a:ln>
-                  <a:noFill/>
-                </a:ln>
-                <a:solidFill>
-                  <a:schemeClr val="tx1"/>
-                </a:solidFill>
-                <a:effectLst/>
-                <a:latin typeface="Arial" panose="020B0604020202020204" pitchFamily="34" charset="0"/>
-              </a:rPr>
-              <a:t>tuning</a:t>
-            </a:r>
-            <a:r>
-              <a:rPr kumimoji="0" lang="es-ES" altLang="es-ES" sz="1800" b="1" i="0" u="none" strike="noStrike" cap="none" normalizeH="0" baseline="0" dirty="0">
-                <a:ln>
-                  <a:noFill/>
-                </a:ln>
-                <a:solidFill>
-                  <a:schemeClr val="tx1"/>
-                </a:solidFill>
-                <a:effectLst/>
-                <a:latin typeface="Arial" panose="020B0604020202020204" pitchFamily="34" charset="0"/>
-              </a:rPr>
-              <a:t> and training data</a:t>
-            </a:r>
-            <a:r>
-              <a:rPr kumimoji="0" lang="es-ES" altLang="es-ES" sz="1800" b="0" i="0" u="none" strike="noStrike" cap="none" normalizeH="0" baseline="0" dirty="0">
-                <a:ln>
-                  <a:noFill/>
-                </a:ln>
-                <a:solidFill>
-                  <a:schemeClr val="tx1"/>
-                </a:solidFill>
-                <a:effectLst/>
-                <a:latin typeface="Arial" panose="020B0604020202020204" pitchFamily="34" charset="0"/>
-              </a:rPr>
-              <a:t>. </a:t>
-            </a:r>
-          </a:p>
-          <a:p>
-            <a:pPr marL="0" marR="0" lvl="0" indent="0" algn="l" defTabSz="914400" rtl="0" eaLnBrk="0" fontAlgn="base" latinLnBrk="0" hangingPunct="0">
+            <a:endParaRPr lang="es-ES" altLang="es-ES" dirty="0">
+              <a:latin typeface="Arial" panose="020B0604020202020204" pitchFamily="34" charset="0"/>
+            </a:endParaRPr>
+          </a:p>
+          <a:p>
+            <a:pPr marL="285750" marR="0" lvl="0" indent="-285750" algn="l" defTabSz="914400" rtl="0" eaLnBrk="0" fontAlgn="base" latinLnBrk="0" hangingPunct="0">
               <a:lnSpc>
                 <a:spcPct val="100000"/>
               </a:lnSpc>
@@ -7158,10 +6101,23 @@
               </a:spcAft>
               <a:buClrTx/>
               <a:buSzTx/>
-              <a:buFontTx/>
+              <a:buFont typeface="Arial" panose="020B0604020202020204" pitchFamily="34" charset="0"/>
               <a:buChar char="•"/>
               <a:tabLst/>
             </a:pPr>
+            <a:r>
+              <a:rPr kumimoji="0" lang="es-ES" altLang="es-ES" sz="1800" b="1" i="0" u="none" strike="noStrike" cap="none" normalizeH="0" baseline="0" dirty="0" err="1">
+                <a:ln>
+                  <a:noFill/>
+                </a:ln>
+                <a:solidFill>
+                  <a:schemeClr val="tx1"/>
+                </a:solidFill>
+                <a:effectLst/>
+                <a:latin typeface="Arial" panose="020B0604020202020204" pitchFamily="34" charset="0"/>
+              </a:rPr>
+              <a:t>Grounded</a:t>
+            </a:r>
             <a:r>
               <a:rPr kumimoji="0" lang="es-ES" altLang="es-ES" sz="1800" b="1" i="0" u="none" strike="noStrike" cap="none" normalizeH="0" baseline="0" dirty="0">
                 <a:ln>
@@ -7173,7 +6129,7 @@
                 <a:effectLst/>
                 <a:latin typeface="Arial" panose="020B0604020202020204" pitchFamily="34" charset="0"/>
               </a:rPr>
-              <a:t>MAMDD</a:t>
+              <a:t>-SAM</a:t>
             </a:r>
             <a:r>
               <a:rPr kumimoji="0" lang="es-ES" altLang="es-ES" sz="1800" b="0" i="0" u="none" strike="noStrike" cap="none" normalizeH="0" baseline="0" dirty="0">
@@ -7199,7 +6155,7 @@
                 <a:effectLst/>
                 <a:latin typeface="Arial" panose="020B0604020202020204" pitchFamily="34" charset="0"/>
               </a:rPr>
-              <a:t>enhances</a:t>
+              <a:t>is</a:t>
             </a:r>
             <a:r>
               <a:rPr kumimoji="0" lang="es-ES" altLang="es-ES" sz="1800" b="0" i="0" u="none" strike="noStrike" cap="none" normalizeH="0" baseline="0" dirty="0">
@@ -7225,7 +6181,7 @@
                 <a:effectLst/>
                 <a:latin typeface="Arial" panose="020B0604020202020204" pitchFamily="34" charset="0"/>
               </a:rPr>
-              <a:t>classical</a:t>
+              <a:t>the</a:t>
             </a:r>
             <a:r>
               <a:rPr kumimoji="0" lang="es-ES" altLang="es-ES" sz="1800" b="0" i="0" u="none" strike="noStrike" cap="none" normalizeH="0" baseline="0" dirty="0">
@@ -7251,7 +6207,7 @@
                 <a:effectLst/>
                 <a:latin typeface="Arial" panose="020B0604020202020204" pitchFamily="34" charset="0"/>
               </a:rPr>
-              <a:t>edge</a:t>
+              <a:t>most</a:t>
             </a:r>
             <a:r>
               <a:rPr kumimoji="0" lang="es-ES" altLang="es-ES" sz="1800" b="0" i="0" u="none" strike="noStrike" cap="none" normalizeH="0" baseline="0" dirty="0">
@@ -7264,7 +6220,7 @@
                 <a:effectLst/>
                 <a:latin typeface="Arial" panose="020B0604020202020204" pitchFamily="34" charset="0"/>
               </a:rPr>
-              <a:t> </a:t>
+              <a:t> flexible </a:t>
             </a:r>
             <a:r>
               <a:rPr kumimoji="0" lang="es-ES" altLang="es-ES" sz="1800" b="0" i="0" u="none" strike="noStrike" cap="none" normalizeH="0" baseline="0" dirty="0" err="1">
@@ -7277,7 +6233,7 @@
                 <a:effectLst/>
                 <a:latin typeface="Arial" panose="020B0604020202020204" pitchFamily="34" charset="0"/>
               </a:rPr>
-              <a:t>detection</a:t>
+              <a:t>approach</a:t>
             </a:r>
             <a:r>
               <a:rPr kumimoji="0" lang="es-ES" altLang="es-ES" sz="1800" b="0" i="0" u="none" strike="noStrike" cap="none" normalizeH="0" baseline="0" dirty="0">
@@ -7290,7 +6246,7 @@
                 <a:effectLst/>
                 <a:latin typeface="Arial" panose="020B0604020202020204" pitchFamily="34" charset="0"/>
               </a:rPr>
-              <a:t> </a:t>
+              <a:t>, </a:t>
             </a:r>
             <a:r>
               <a:rPr kumimoji="0" lang="es-ES" altLang="es-ES" sz="1800" b="0" i="0" u="none" strike="noStrike" cap="none" normalizeH="0" baseline="0" dirty="0" err="1">
@@ -7303,7 +6259,7 @@
                 <a:effectLst/>
                 <a:latin typeface="Arial" panose="020B0604020202020204" pitchFamily="34" charset="0"/>
               </a:rPr>
-              <a:t>with</a:t>
+              <a:t>enabling</a:t>
             </a:r>
             <a:r>
               <a:rPr kumimoji="0" lang="es-ES" altLang="es-ES" sz="1800" b="0" i="0" u="none" strike="noStrike" cap="none" normalizeH="0" baseline="0" dirty="0">
@@ -7329,310 +6285,150 @@
                 <a:effectLst/>
                 <a:latin typeface="Arial" panose="020B0604020202020204" pitchFamily="34" charset="0"/>
               </a:rPr>
-              <a:t>robustness</a:t>
-            </a:r>
-            <a:r>
-              <a:rPr kumimoji="0" lang="es-ES" altLang="es-ES" sz="1800" b="1" i="0" u="none" strike="noStrike" cap="none" normalizeH="0" baseline="0" dirty="0">
-                <a:ln>
-                  <a:noFill/>
-                </a:ln>
-                <a:solidFill>
-                  <a:schemeClr val="tx1"/>
-                </a:solidFill>
-                <a:effectLst/>
+              <a:t>zero</a:t>
+            </a:r>
+            <a:r>
+              <a:rPr lang="es-ES" altLang="es-ES" b="1" dirty="0" err="1">
+                <a:latin typeface="Arial" panose="020B0604020202020204" pitchFamily="34" charset="0"/>
+              </a:rPr>
+              <a:t>-shot</a:t>
+            </a:r>
+            <a:r>
+              <a:rPr lang="es-ES" altLang="es-ES" b="1" dirty="0">
                 <a:latin typeface="Arial" panose="020B0604020202020204" pitchFamily="34" charset="0"/>
               </a:rPr>
               <a:t> </a:t>
             </a:r>
             <a:r>
-              <a:rPr kumimoji="0" lang="es-ES" altLang="es-ES" sz="1800" b="1" i="0" u="none" strike="noStrike" cap="none" normalizeH="0" baseline="0" dirty="0" err="1">
-                <a:ln>
-                  <a:noFill/>
-                </a:ln>
-                <a:solidFill>
-                  <a:schemeClr val="tx1"/>
-                </a:solidFill>
-                <a:effectLst/>
-                <a:latin typeface="Arial" panose="020B0604020202020204" pitchFamily="34" charset="0"/>
-              </a:rPr>
-              <a:t>to</a:t>
-            </a:r>
-            <a:r>
-              <a:rPr kumimoji="0" lang="es-ES" altLang="es-ES" sz="1800" b="1" i="0" u="none" strike="noStrike" cap="none" normalizeH="0" baseline="0" dirty="0">
-                <a:ln>
-                  <a:noFill/>
-                </a:ln>
-                <a:solidFill>
-                  <a:schemeClr val="tx1"/>
-                </a:solidFill>
-                <a:effectLst/>
+              <a:rPr lang="es-ES" altLang="es-ES" b="1" dirty="0" err="1">
+                <a:latin typeface="Arial" panose="020B0604020202020204" pitchFamily="34" charset="0"/>
+              </a:rPr>
+              <a:t>detection</a:t>
+            </a:r>
+            <a:r>
+              <a:rPr lang="es-ES" altLang="es-ES" dirty="0">
                 <a:latin typeface="Arial" panose="020B0604020202020204" pitchFamily="34" charset="0"/>
               </a:rPr>
               <a:t> </a:t>
             </a:r>
-            <a:r>
-              <a:rPr kumimoji="0" lang="es-ES" altLang="es-ES" sz="1800" b="1" i="0" u="none" strike="noStrike" cap="none" normalizeH="0" baseline="0" dirty="0" err="1">
-                <a:ln>
-                  <a:noFill/>
-                </a:ln>
-                <a:solidFill>
-                  <a:schemeClr val="tx1"/>
-                </a:solidFill>
-                <a:effectLst/>
-                <a:latin typeface="Arial" panose="020B0604020202020204" pitchFamily="34" charset="0"/>
-              </a:rPr>
-              <a:t>noise</a:t>
-            </a:r>
-            <a:r>
-              <a:rPr kumimoji="0" lang="es-ES" altLang="es-ES" sz="1800" b="1" i="0" u="none" strike="noStrike" cap="none" normalizeH="0" baseline="0" dirty="0">
-                <a:ln>
-                  <a:noFill/>
-                </a:ln>
-                <a:solidFill>
-                  <a:schemeClr val="tx1"/>
-                </a:solidFill>
-                <a:effectLst/>
-                <a:latin typeface="Arial" panose="020B0604020202020204" pitchFamily="34" charset="0"/>
-              </a:rPr>
-              <a:t> and </a:t>
-            </a:r>
-            <a:r>
-              <a:rPr kumimoji="0" lang="es-ES" altLang="es-ES" sz="1800" b="1" i="0" u="none" strike="noStrike" cap="none" normalizeH="0" baseline="0" dirty="0" err="1">
-                <a:ln>
-                  <a:noFill/>
-                </a:ln>
-                <a:solidFill>
-                  <a:schemeClr val="tx1"/>
-                </a:solidFill>
-                <a:effectLst/>
-                <a:latin typeface="Arial" panose="020B0604020202020204" pitchFamily="34" charset="0"/>
-              </a:rPr>
-              <a:t>low</a:t>
-            </a:r>
-            <a:r>
-              <a:rPr kumimoji="0" lang="es-ES" altLang="es-ES" sz="1800" b="1" i="0" u="none" strike="noStrike" cap="none" normalizeH="0" baseline="0" dirty="0">
-                <a:ln>
-                  <a:noFill/>
-                </a:ln>
-                <a:solidFill>
-                  <a:schemeClr val="tx1"/>
-                </a:solidFill>
-                <a:effectLst/>
+            <a:br>
+              <a:rPr lang="es-ES" altLang="es-ES" dirty="0">
+                <a:latin typeface="Arial" panose="020B0604020202020204" pitchFamily="34" charset="0"/>
+              </a:rPr>
+            </a:br>
+            <a:r>
+              <a:rPr lang="es-ES" altLang="es-ES" dirty="0">
+                <a:latin typeface="Arial" panose="020B0604020202020204" pitchFamily="34" charset="0"/>
+              </a:rPr>
+              <a:t>and </a:t>
+            </a:r>
+            <a:r>
+              <a:rPr lang="es-ES" altLang="es-ES" b="1" dirty="0" err="1">
+                <a:latin typeface="Arial" panose="020B0604020202020204" pitchFamily="34" charset="0"/>
+              </a:rPr>
+              <a:t>segmentation</a:t>
+            </a:r>
+            <a:r>
+              <a:rPr lang="es-ES" altLang="es-ES" dirty="0">
+                <a:latin typeface="Arial" panose="020B0604020202020204" pitchFamily="34" charset="0"/>
+              </a:rPr>
+              <a:t>, </a:t>
+            </a:r>
+            <a:r>
+              <a:rPr lang="es-ES" altLang="es-ES" dirty="0" err="1">
+                <a:latin typeface="Arial" panose="020B0604020202020204" pitchFamily="34" charset="0"/>
+              </a:rPr>
+              <a:t>making</a:t>
+            </a:r>
+            <a:r>
+              <a:rPr lang="es-ES" altLang="es-ES" dirty="0">
                 <a:latin typeface="Arial" panose="020B0604020202020204" pitchFamily="34" charset="0"/>
               </a:rPr>
               <a:t> </a:t>
             </a:r>
             <a:r>
-              <a:rPr kumimoji="0" lang="es-ES" altLang="es-ES" sz="1800" b="1" i="0" u="none" strike="noStrike" cap="none" normalizeH="0" baseline="0" dirty="0" err="1">
-                <a:ln>
-                  <a:noFill/>
-                </a:ln>
-                <a:solidFill>
-                  <a:schemeClr val="tx1"/>
-                </a:solidFill>
-                <a:effectLst/>
-                <a:latin typeface="Arial" panose="020B0604020202020204" pitchFamily="34" charset="0"/>
-              </a:rPr>
-              <a:t>contrast</a:t>
-            </a:r>
-            <a:r>
-              <a:rPr kumimoji="0" lang="es-ES" altLang="es-ES" sz="1800" b="0" i="0" u="none" strike="noStrike" cap="none" normalizeH="0" baseline="0" dirty="0">
-                <a:ln>
-                  <a:noFill/>
-                </a:ln>
-                <a:solidFill>
-                  <a:schemeClr val="tx1"/>
-                </a:solidFill>
-                <a:effectLst/>
-                <a:latin typeface="Arial" panose="020B0604020202020204" pitchFamily="34" charset="0"/>
-              </a:rPr>
-              <a:t>, </a:t>
-            </a:r>
-            <a:r>
-              <a:rPr kumimoji="0" lang="es-ES" altLang="es-ES" sz="1800" b="0" i="0" u="none" strike="noStrike" cap="none" normalizeH="0" baseline="0" dirty="0" err="1">
-                <a:ln>
-                  <a:noFill/>
-                </a:ln>
-                <a:solidFill>
-                  <a:schemeClr val="tx1"/>
-                </a:solidFill>
-                <a:effectLst/>
-                <a:latin typeface="Arial" panose="020B0604020202020204" pitchFamily="34" charset="0"/>
-              </a:rPr>
-              <a:t>although</a:t>
-            </a:r>
-            <a:r>
-              <a:rPr kumimoji="0" lang="es-ES" altLang="es-ES" sz="1800" b="0" i="0" u="none" strike="noStrike" cap="none" normalizeH="0" baseline="0" dirty="0">
-                <a:ln>
-                  <a:noFill/>
-                </a:ln>
-                <a:solidFill>
-                  <a:schemeClr val="tx1"/>
-                </a:solidFill>
-                <a:effectLst/>
+              <a:rPr lang="es-ES" altLang="es-ES" dirty="0" err="1">
+                <a:latin typeface="Arial" panose="020B0604020202020204" pitchFamily="34" charset="0"/>
+              </a:rPr>
+              <a:t>it</a:t>
+            </a:r>
+            <a:r>
+              <a:rPr lang="es-ES" altLang="es-ES" dirty="0">
                 <a:latin typeface="Arial" panose="020B0604020202020204" pitchFamily="34" charset="0"/>
               </a:rPr>
               <a:t> </a:t>
             </a:r>
             <a:r>
-              <a:rPr kumimoji="0" lang="es-ES" altLang="es-ES" sz="1800" b="0" i="0" u="none" strike="noStrike" cap="none" normalizeH="0" baseline="0" dirty="0" err="1">
-                <a:ln>
-                  <a:noFill/>
-                </a:ln>
-                <a:solidFill>
-                  <a:schemeClr val="tx1"/>
-                </a:solidFill>
-                <a:effectLst/>
-                <a:latin typeface="Arial" panose="020B0604020202020204" pitchFamily="34" charset="0"/>
-              </a:rPr>
-              <a:t>it</a:t>
-            </a:r>
-            <a:r>
-              <a:rPr kumimoji="0" lang="es-ES" altLang="es-ES" sz="1800" b="0" i="0" u="none" strike="noStrike" cap="none" normalizeH="0" baseline="0" dirty="0">
-                <a:ln>
-                  <a:noFill/>
-                </a:ln>
-                <a:solidFill>
-                  <a:schemeClr val="tx1"/>
-                </a:solidFill>
-                <a:effectLst/>
+              <a:rPr lang="es-ES" altLang="es-ES" dirty="0" err="1">
+                <a:latin typeface="Arial" panose="020B0604020202020204" pitchFamily="34" charset="0"/>
+              </a:rPr>
+              <a:t>suitable</a:t>
+            </a:r>
+            <a:r>
+              <a:rPr lang="es-ES" altLang="es-ES" dirty="0">
                 <a:latin typeface="Arial" panose="020B0604020202020204" pitchFamily="34" charset="0"/>
               </a:rPr>
               <a:t> </a:t>
             </a:r>
             <a:r>
-              <a:rPr kumimoji="0" lang="es-ES" altLang="es-ES" sz="1800" b="0" i="0" u="none" strike="noStrike" cap="none" normalizeH="0" baseline="0" dirty="0" err="1">
-                <a:ln>
-                  <a:noFill/>
-                </a:ln>
-                <a:solidFill>
-                  <a:schemeClr val="tx1"/>
-                </a:solidFill>
-                <a:effectLst/>
-                <a:latin typeface="Arial" panose="020B0604020202020204" pitchFamily="34" charset="0"/>
-              </a:rPr>
-              <a:t>still</a:t>
-            </a:r>
-            <a:r>
-              <a:rPr kumimoji="0" lang="es-ES" altLang="es-ES" sz="1800" b="0" i="0" u="none" strike="noStrike" cap="none" normalizeH="0" baseline="0" dirty="0">
-                <a:ln>
-                  <a:noFill/>
-                </a:ln>
-                <a:solidFill>
-                  <a:schemeClr val="tx1"/>
-                </a:solidFill>
-                <a:effectLst/>
+              <a:rPr lang="es-ES" altLang="es-ES" dirty="0" err="1">
+                <a:latin typeface="Arial" panose="020B0604020202020204" pitchFamily="34" charset="0"/>
+              </a:rPr>
+              <a:t>when</a:t>
+            </a:r>
+            <a:r>
+              <a:rPr lang="es-ES" altLang="es-ES" dirty="0">
                 <a:latin typeface="Arial" panose="020B0604020202020204" pitchFamily="34" charset="0"/>
               </a:rPr>
               <a:t> </a:t>
             </a:r>
             <a:r>
-              <a:rPr kumimoji="0" lang="es-ES" altLang="es-ES" sz="1800" b="0" i="0" u="none" strike="noStrike" cap="none" normalizeH="0" baseline="0" dirty="0" err="1">
-                <a:ln>
-                  <a:noFill/>
-                </a:ln>
-                <a:solidFill>
-                  <a:schemeClr val="tx1"/>
-                </a:solidFill>
-                <a:effectLst/>
-                <a:latin typeface="Arial" panose="020B0604020202020204" pitchFamily="34" charset="0"/>
-              </a:rPr>
-              <a:t>relies</a:t>
-            </a:r>
-            <a:r>
-              <a:rPr kumimoji="0" lang="es-ES" altLang="es-ES" sz="1800" b="0" i="0" u="none" strike="noStrike" cap="none" normalizeH="0" baseline="0" dirty="0">
-                <a:ln>
-                  <a:noFill/>
-                </a:ln>
-                <a:solidFill>
-                  <a:schemeClr val="tx1"/>
-                </a:solidFill>
-                <a:effectLst/>
+              <a:rPr lang="es-ES" altLang="es-ES" dirty="0" err="1">
+                <a:latin typeface="Arial" panose="020B0604020202020204" pitchFamily="34" charset="0"/>
+              </a:rPr>
+              <a:t>labeled</a:t>
+            </a:r>
+            <a:r>
+              <a:rPr lang="es-ES" altLang="es-ES" dirty="0">
+                <a:latin typeface="Arial" panose="020B0604020202020204" pitchFamily="34" charset="0"/>
+              </a:rPr>
+              <a:t> data </a:t>
+            </a:r>
+            <a:r>
+              <a:rPr lang="es-ES" altLang="es-ES" dirty="0" err="1">
+                <a:latin typeface="Arial" panose="020B0604020202020204" pitchFamily="34" charset="0"/>
+              </a:rPr>
+              <a:t>is</a:t>
+            </a:r>
+            <a:r>
+              <a:rPr lang="es-ES" altLang="es-ES" dirty="0">
                 <a:latin typeface="Arial" panose="020B0604020202020204" pitchFamily="34" charset="0"/>
               </a:rPr>
               <a:t> </a:t>
             </a:r>
             <a:r>
-              <a:rPr kumimoji="0" lang="es-ES" altLang="es-ES" sz="1800" b="0" i="0" u="none" strike="noStrike" cap="none" normalizeH="0" baseline="0" dirty="0" err="1">
-                <a:ln>
-                  <a:noFill/>
-                </a:ln>
-                <a:solidFill>
-                  <a:schemeClr val="tx1"/>
-                </a:solidFill>
-                <a:effectLst/>
-                <a:latin typeface="Arial" panose="020B0604020202020204" pitchFamily="34" charset="0"/>
-              </a:rPr>
-              <a:t>on</a:t>
-            </a:r>
-            <a:r>
-              <a:rPr kumimoji="0" lang="es-ES" altLang="es-ES" sz="1800" b="0" i="0" u="none" strike="noStrike" cap="none" normalizeH="0" baseline="0" dirty="0">
-                <a:ln>
-                  <a:noFill/>
-                </a:ln>
-                <a:solidFill>
-                  <a:schemeClr val="tx1"/>
-                </a:solidFill>
-                <a:effectLst/>
-                <a:latin typeface="Arial" panose="020B0604020202020204" pitchFamily="34" charset="0"/>
-              </a:rPr>
-              <a:t> </a:t>
-            </a:r>
-            <a:r>
-              <a:rPr kumimoji="0" lang="es-ES" altLang="es-ES" sz="1800" b="0" i="0" u="none" strike="noStrike" cap="none" normalizeH="0" baseline="0" dirty="0" err="1">
-                <a:ln>
-                  <a:noFill/>
-                </a:ln>
-                <a:solidFill>
-                  <a:schemeClr val="tx1"/>
-                </a:solidFill>
-                <a:effectLst/>
-                <a:latin typeface="Arial" panose="020B0604020202020204" pitchFamily="34" charset="0"/>
-              </a:rPr>
-              <a:t>handcrafted</a:t>
-            </a:r>
-            <a:r>
-              <a:rPr kumimoji="0" lang="es-ES" altLang="es-ES" sz="1800" b="0" i="0" u="none" strike="noStrike" cap="none" normalizeH="0" baseline="0" dirty="0">
-                <a:ln>
-                  <a:noFill/>
-                </a:ln>
-                <a:solidFill>
-                  <a:schemeClr val="tx1"/>
-                </a:solidFill>
-                <a:effectLst/>
-                <a:latin typeface="Arial" panose="020B0604020202020204" pitchFamily="34" charset="0"/>
-              </a:rPr>
-              <a:t> </a:t>
-            </a:r>
-            <a:r>
-              <a:rPr kumimoji="0" lang="es-ES" altLang="es-ES" sz="1800" b="0" i="0" u="none" strike="noStrike" cap="none" normalizeH="0" baseline="0" dirty="0" err="1">
-                <a:ln>
-                  <a:noFill/>
-                </a:ln>
-                <a:solidFill>
-                  <a:schemeClr val="tx1"/>
-                </a:solidFill>
-                <a:effectLst/>
-                <a:latin typeface="Arial" panose="020B0604020202020204" pitchFamily="34" charset="0"/>
-              </a:rPr>
-              <a:t>processing</a:t>
-            </a:r>
-            <a:r>
-              <a:rPr kumimoji="0" lang="es-ES" altLang="es-ES" sz="1800" b="0" i="0" u="none" strike="noStrike" cap="none" normalizeH="0" baseline="0" dirty="0">
-                <a:ln>
-                  <a:noFill/>
-                </a:ln>
-                <a:solidFill>
-                  <a:schemeClr val="tx1"/>
-                </a:solidFill>
-                <a:effectLst/>
-                <a:latin typeface="Arial" panose="020B0604020202020204" pitchFamily="34" charset="0"/>
-              </a:rPr>
-              <a:t>. </a:t>
-            </a:r>
-          </a:p>
-          <a:p>
-            <a:pPr marL="0" marR="0" lvl="0" indent="0" algn="l" defTabSz="914400" rtl="0" eaLnBrk="0" fontAlgn="base" latinLnBrk="0" hangingPunct="0">
+              <a:rPr lang="es-ES" altLang="es-ES" dirty="0" err="1">
+                <a:latin typeface="Arial" panose="020B0604020202020204" pitchFamily="34" charset="0"/>
+              </a:rPr>
+              <a:t>unavailable</a:t>
+            </a:r>
+            <a:r>
+              <a:rPr lang="es-ES" altLang="es-ES" dirty="0">
+                <a:latin typeface="Arial" panose="020B0604020202020204" pitchFamily="34" charset="0"/>
+              </a:rPr>
+              <a:t>.</a:t>
+            </a:r>
+            <a:br>
+              <a:rPr lang="es-ES" altLang="es-ES" dirty="0">
+                <a:latin typeface="Arial" panose="020B0604020202020204" pitchFamily="34" charset="0"/>
+              </a:rPr>
+            </a:br>
+            <a:endParaRPr lang="es-ES" altLang="es-ES" dirty="0">
+              <a:latin typeface="Arial" panose="020B0604020202020204" pitchFamily="34" charset="0"/>
+            </a:endParaRPr>
+          </a:p>
+          <a:p>
+            <a:pPr marL="285750" marR="0" lvl="0" indent="-285750" algn="l" defTabSz="914400" rtl="0" eaLnBrk="0" fontAlgn="base" latinLnBrk="0" hangingPunct="0">
               <a:lnSpc>
                 <a:spcPct val="100000"/>
               </a:lnSpc>
@@ -7644,7 +6440,7 @@
               </a:spcAft>
               <a:buClrTx/>
               <a:buSzTx/>
-              <a:buFontTx/>
+              <a:buFont typeface="Arial" panose="020B0604020202020204" pitchFamily="34" charset="0"/>
               <a:buChar char="•"/>
               <a:tabLst/>
             </a:pPr>
@@ -7659,7 +6455,7 @@
                 <a:effectLst/>
                 <a:latin typeface="Arial" panose="020B0604020202020204" pitchFamily="34" charset="0"/>
               </a:rPr>
-              <a:t>Adaptive </a:t>
+              <a:t>YOLOv9 + </a:t>
             </a:r>
             <a:r>
               <a:rPr kumimoji="0" lang="es-ES" altLang="es-ES" sz="1800" b="1" i="0" u="none" strike="noStrike" cap="none" normalizeH="0" baseline="0" dirty="0" err="1">
@@ -7672,7 +6468,111 @@
                 <a:effectLst/>
                 <a:latin typeface="Arial" panose="020B0604020202020204" pitchFamily="34" charset="0"/>
               </a:rPr>
-              <a:t>Canny</a:t>
+              <a:t>EfficientsSAM</a:t>
+            </a:r>
+            <a:r>
+              <a:rPr kumimoji="0" lang="es-ES" altLang="es-ES" sz="1800" b="0" i="0" u="none" strike="noStrike" cap="none" normalizeH="0" baseline="0" dirty="0">
+                <a:ln>
+                  <a:noFill/>
+                </a:ln>
+                <a:solidFill>
+                  <a:schemeClr val="tx1"/>
+                </a:solidFill>
+                <a:effectLst/>
+                <a:latin typeface="Arial" panose="020B0604020202020204" pitchFamily="34" charset="0"/>
+              </a:rPr>
+              <a:t> </a:t>
+            </a:r>
+            <a:r>
+              <a:rPr kumimoji="0" lang="es-ES" altLang="es-ES" sz="1800" b="0" i="0" u="none" strike="noStrike" cap="none" normalizeH="0" baseline="0" dirty="0" err="1">
+                <a:ln>
+                  <a:noFill/>
+                </a:ln>
+                <a:solidFill>
+                  <a:schemeClr val="tx1"/>
+                </a:solidFill>
+                <a:effectLst/>
+                <a:latin typeface="Arial" panose="020B0604020202020204" pitchFamily="34" charset="0"/>
+              </a:rPr>
+              <a:t>provides</a:t>
+            </a:r>
+            <a:r>
+              <a:rPr kumimoji="0" lang="es-ES" altLang="es-ES" sz="1800" b="0" i="0" u="none" strike="noStrike" cap="none" normalizeH="0" baseline="0" dirty="0">
+                <a:ln>
+                  <a:noFill/>
+                </a:ln>
+                <a:solidFill>
+                  <a:schemeClr val="tx1"/>
+                </a:solidFill>
+                <a:effectLst/>
+                <a:latin typeface="Arial" panose="020B0604020202020204" pitchFamily="34" charset="0"/>
+              </a:rPr>
+              <a:t> </a:t>
+            </a:r>
+            <a:r>
+              <a:rPr kumimoji="0" lang="es-ES" altLang="es-ES" sz="1800" b="0" i="0" u="none" strike="noStrike" cap="none" normalizeH="0" baseline="0" dirty="0" err="1">
+                <a:ln>
+                  <a:noFill/>
+                </a:ln>
+                <a:solidFill>
+                  <a:schemeClr val="tx1"/>
+                </a:solidFill>
+                <a:effectLst/>
+                <a:latin typeface="Arial" panose="020B0604020202020204" pitchFamily="34" charset="0"/>
+              </a:rPr>
+              <a:t>the</a:t>
+            </a:r>
+            <a:r>
+              <a:rPr kumimoji="0" lang="es-ES" altLang="es-ES" sz="1800" b="0" i="0" u="none" strike="noStrike" cap="none" normalizeH="0" baseline="0" dirty="0">
+                <a:ln>
+                  <a:noFill/>
+                </a:ln>
+                <a:solidFill>
+                  <a:schemeClr val="tx1"/>
+                </a:solidFill>
+                <a:effectLst/>
+                <a:latin typeface="Arial" panose="020B0604020202020204" pitchFamily="34" charset="0"/>
+              </a:rPr>
+              <a:t> </a:t>
+            </a:r>
+            <a:r>
+              <a:rPr kumimoji="0" lang="es-ES" altLang="es-ES" sz="1800" b="0" i="0" u="none" strike="noStrike" cap="none" normalizeH="0" baseline="0" dirty="0" err="1">
+                <a:ln>
+                  <a:noFill/>
+                </a:ln>
+                <a:solidFill>
+                  <a:schemeClr val="tx1"/>
+                </a:solidFill>
+                <a:effectLst/>
+                <a:latin typeface="Arial" panose="020B0604020202020204" pitchFamily="34" charset="0"/>
+              </a:rPr>
+              <a:t>best</a:t>
+            </a:r>
+            <a:r>
+              <a:rPr kumimoji="0" lang="es-ES" altLang="es-ES" sz="1800" b="0" i="0" u="none" strike="noStrike" cap="none" normalizeH="0" baseline="0" dirty="0">
+                <a:ln>
+                  <a:noFill/>
+                </a:ln>
+                <a:solidFill>
+                  <a:schemeClr val="tx1"/>
+                </a:solidFill>
+                <a:effectLst/>
+                <a:latin typeface="Arial" panose="020B0604020202020204" pitchFamily="34" charset="0"/>
+              </a:rPr>
+              <a:t> </a:t>
+            </a:r>
+            <a:r>
+              <a:rPr kumimoji="0" lang="es-ES" altLang="es-ES" sz="1800" b="1" i="0" u="none" strike="noStrike" cap="none" normalizeH="0" baseline="0" dirty="0" err="1">
+                <a:ln>
+                  <a:noFill/>
+                </a:ln>
+                <a:solidFill>
+                  <a:schemeClr val="tx1"/>
+                </a:solidFill>
+                <a:effectLst/>
+                <a:latin typeface="Arial" panose="020B0604020202020204" pitchFamily="34" charset="0"/>
+              </a:rPr>
+              <a:t>accuracy-speed</a:t>
             </a:r>
             <a:r>
               <a:rPr kumimoji="0" lang="es-ES" altLang="es-ES" sz="1800" b="1" i="0" u="none" strike="noStrike" cap="none" normalizeH="0" baseline="0" dirty="0">
@@ -7685,7 +6585,33 @@
                 <a:effectLst/>
                 <a:latin typeface="Arial" panose="020B0604020202020204" pitchFamily="34" charset="0"/>
               </a:rPr>
-              <a:t> pipeline</a:t>
+              <a:t> </a:t>
+            </a:r>
+            <a:r>
+              <a:rPr kumimoji="0" lang="es-ES" altLang="es-ES" sz="1800" b="1" i="0" u="none" strike="noStrike" cap="none" normalizeH="0" baseline="0" dirty="0" err="1">
+                <a:ln>
+                  <a:noFill/>
+                </a:ln>
+                <a:solidFill>
+                  <a:schemeClr val="tx1"/>
+                </a:solidFill>
+                <a:effectLst/>
+                <a:latin typeface="Arial" panose="020B0604020202020204" pitchFamily="34" charset="0"/>
+              </a:rPr>
+              <a:t>trade</a:t>
+            </a:r>
+            <a:r>
+              <a:rPr kumimoji="0" lang="es-ES" altLang="es-ES" sz="1800" b="1" i="0" u="none" strike="noStrike" cap="none" normalizeH="0" baseline="0" dirty="0">
+                <a:ln>
+                  <a:noFill/>
+                </a:ln>
+                <a:solidFill>
+                  <a:schemeClr val="tx1"/>
+                </a:solidFill>
+                <a:effectLst/>
+                <a:latin typeface="Arial" panose="020B0604020202020204" pitchFamily="34" charset="0"/>
+              </a:rPr>
+              <a:t>-off</a:t>
             </a:r>
             <a:r>
               <a:rPr kumimoji="0" lang="es-ES" altLang="es-ES" sz="1800" b="0" i="0" u="none" strike="noStrike" cap="none" normalizeH="0" baseline="0" dirty="0">
@@ -7698,8 +6624,20 @@
                 <a:effectLst/>
                 <a:latin typeface="Arial" panose="020B0604020202020204" pitchFamily="34" charset="0"/>
               </a:rPr>
-              <a:t> </a:t>
-            </a:r>
+              <a:t>, </a:t>
+            </a:r>
+            <a:br>
+              <a:rPr kumimoji="0" lang="es-ES" altLang="es-ES" sz="1800" b="0" i="0" u="none" strike="noStrike" cap="none" normalizeH="0" baseline="0" dirty="0">
+                <a:ln>
+                  <a:noFill/>
+                </a:ln>
+                <a:solidFill>
+                  <a:schemeClr val="tx1"/>
+                </a:solidFill>
+                <a:effectLst/>
+                <a:latin typeface="Arial" panose="020B0604020202020204" pitchFamily="34" charset="0"/>
+              </a:rPr>
+            </a:br>
             <a:r>
               <a:rPr kumimoji="0" lang="es-ES" altLang="es-ES" sz="1800" b="0" i="0" u="none" strike="noStrike" cap="none" normalizeH="0" baseline="0" dirty="0" err="1">
                 <a:ln>
@@ -7711,7 +6649,7 @@
                 <a:effectLst/>
                 <a:latin typeface="Arial" panose="020B0604020202020204" pitchFamily="34" charset="0"/>
               </a:rPr>
-              <a:t>is</a:t>
+              <a:t>but</a:t>
             </a:r>
             <a:r>
               <a:rPr kumimoji="0" lang="es-ES" altLang="es-ES" sz="1800" b="0" i="0" u="none" strike="noStrike" cap="none" normalizeH="0" baseline="0" dirty="0">
@@ -7737,7 +6675,7 @@
                 <a:effectLst/>
                 <a:latin typeface="Arial" panose="020B0604020202020204" pitchFamily="34" charset="0"/>
               </a:rPr>
-              <a:t>the</a:t>
+              <a:t>depends</a:t>
             </a:r>
             <a:r>
               <a:rPr kumimoji="0" lang="es-ES" altLang="es-ES" sz="1800" b="0" i="0" u="none" strike="noStrike" cap="none" normalizeH="0" baseline="0" dirty="0">
@@ -7763,7 +6701,7 @@
                 <a:effectLst/>
                 <a:latin typeface="Arial" panose="020B0604020202020204" pitchFamily="34" charset="0"/>
               </a:rPr>
-              <a:t>most</a:t>
+              <a:t>on</a:t>
             </a:r>
             <a:r>
               <a:rPr kumimoji="0" lang="es-ES" altLang="es-ES" sz="1800" b="0" i="0" u="none" strike="noStrike" cap="none" normalizeH="0" baseline="0" dirty="0">
@@ -7779,6 +6717,19 @@
               <a:t> </a:t>
             </a:r>
             <a:r>
+              <a:rPr kumimoji="0" lang="es-ES" altLang="es-ES" sz="1800" b="1" i="0" u="none" strike="noStrike" cap="none" normalizeH="0" baseline="0" dirty="0">
+                <a:ln>
+                  <a:noFill/>
+                </a:ln>
+                <a:solidFill>
+                  <a:schemeClr val="tx1"/>
+                </a:solidFill>
+                <a:effectLst/>
+                <a:latin typeface="Arial" panose="020B0604020202020204" pitchFamily="34" charset="0"/>
+              </a:rPr>
+              <a:t>fine-</a:t>
+            </a:r>
+            <a:r>
               <a:rPr kumimoji="0" lang="es-ES" altLang="es-ES" sz="1800" b="1" i="0" u="none" strike="noStrike" cap="none" normalizeH="0" baseline="0" dirty="0" err="1">
                 <a:ln>
                   <a:noFill/>
@@ -7789,7 +6740,20 @@
                 <a:effectLst/>
                 <a:latin typeface="Arial" panose="020B0604020202020204" pitchFamily="34" charset="0"/>
               </a:rPr>
-              <a:t>practical</a:t>
+              <a:t>tunning</a:t>
+            </a:r>
+            <a:r>
+              <a:rPr kumimoji="0" lang="es-ES" altLang="es-ES" sz="1800" b="0" i="0" u="none" strike="noStrike" cap="none" normalizeH="0" baseline="0" dirty="0">
+                <a:ln>
+                  <a:noFill/>
+                </a:ln>
+                <a:solidFill>
+                  <a:schemeClr val="tx1"/>
+                </a:solidFill>
+                <a:effectLst/>
+                <a:latin typeface="Arial" panose="020B0604020202020204" pitchFamily="34" charset="0"/>
+              </a:rPr>
+              <a:t> and </a:t>
             </a:r>
             <a:r>
               <a:rPr kumimoji="0" lang="es-ES" altLang="es-ES" sz="1800" b="1" i="0" u="none" strike="noStrike" cap="none" normalizeH="0" baseline="0" dirty="0">
@@ -7802,22 +6766,9 @@
                 <a:effectLst/>
                 <a:latin typeface="Arial" panose="020B0604020202020204" pitchFamily="34" charset="0"/>
               </a:rPr>
-              <a:t> and </a:t>
-            </a:r>
-            <a:r>
-              <a:rPr kumimoji="0" lang="es-ES" altLang="es-ES" sz="1800" b="1" i="0" u="none" strike="noStrike" cap="none" normalizeH="0" baseline="0" dirty="0" err="1">
-                <a:ln>
-                  <a:noFill/>
-                </a:ln>
-                <a:solidFill>
-                  <a:schemeClr val="tx1"/>
-                </a:solidFill>
-                <a:effectLst/>
-                <a:latin typeface="Arial" panose="020B0604020202020204" pitchFamily="34" charset="0"/>
-              </a:rPr>
-              <a:t>deployable</a:t>
-            </a:r>
-            <a:r>
+              <a:t>training data.</a:t>
+            </a:r>
+            <a:br>
               <a:rPr kumimoji="0" lang="es-ES" altLang="es-ES" sz="1800" b="1" i="0" u="none" strike="noStrike" cap="none" normalizeH="0" baseline="0" dirty="0">
                 <a:ln>
                   <a:noFill/>
@@ -7828,216 +6779,499 @@
                 <a:effectLst/>
                 <a:latin typeface="Arial" panose="020B0604020202020204" pitchFamily="34" charset="0"/>
               </a:rPr>
+            </a:br>
+            <a:endParaRPr kumimoji="0" lang="es-ES" altLang="es-ES" sz="1800" b="1" i="0" u="none" strike="noStrike" cap="none" normalizeH="0" baseline="0" dirty="0">
+              <a:ln>
+                <a:noFill/>
+              </a:ln>
+              <a:solidFill>
+                <a:schemeClr val="tx1"/>
+              </a:solidFill>
+              <a:effectLst/>
+              <a:latin typeface="Arial" panose="020B0604020202020204" pitchFamily="34" charset="0"/>
+            </a:endParaRPr>
+          </a:p>
+          <a:p>
+            <a:pPr marL="285750" lvl="0" indent="-285750" defTabSz="914400" eaLnBrk="0" fontAlgn="base" hangingPunct="0">
+              <a:spcBef>
+                <a:spcPct val="0"/>
+              </a:spcBef>
+              <a:spcAft>
+                <a:spcPct val="0"/>
+              </a:spcAft>
+              <a:buFont typeface="Arial" panose="020B0604020202020204" pitchFamily="34" charset="0"/>
+              <a:buChar char="•"/>
+            </a:pPr>
+            <a:r>
+              <a:rPr lang="es-ES" altLang="es-ES" b="1" dirty="0">
+                <a:latin typeface="Arial" panose="020B0604020202020204" pitchFamily="34" charset="0"/>
+              </a:rPr>
+              <a:t>MAMDD</a:t>
+            </a:r>
+            <a:r>
+              <a:rPr lang="es-ES" altLang="es-ES" dirty="0">
+                <a:latin typeface="Arial" panose="020B0604020202020204" pitchFamily="34" charset="0"/>
+              </a:rPr>
               <a:t> </a:t>
             </a:r>
             <a:r>
-              <a:rPr kumimoji="0" lang="es-ES" altLang="es-ES" sz="1800" b="1" i="0" u="none" strike="noStrike" cap="none" normalizeH="0" baseline="0" dirty="0" err="1">
-                <a:ln>
-                  <a:noFill/>
-                </a:ln>
-                <a:solidFill>
-                  <a:schemeClr val="tx1"/>
-                </a:solidFill>
-                <a:effectLst/>
+              <a:rPr lang="es-ES" altLang="es-ES" dirty="0" err="1">
+                <a:latin typeface="Arial" panose="020B0604020202020204" pitchFamily="34" charset="0"/>
+              </a:rPr>
+              <a:t>enhances</a:t>
+            </a:r>
+            <a:r>
+              <a:rPr lang="es-ES" altLang="es-ES" dirty="0">
+                <a:latin typeface="Arial" panose="020B0604020202020204" pitchFamily="34" charset="0"/>
+              </a:rPr>
+              <a:t> </a:t>
+            </a:r>
+            <a:r>
+              <a:rPr lang="es-ES" altLang="es-ES" dirty="0" err="1">
+                <a:latin typeface="Arial" panose="020B0604020202020204" pitchFamily="34" charset="0"/>
+              </a:rPr>
+              <a:t>classical</a:t>
+            </a:r>
+            <a:r>
+              <a:rPr lang="es-ES" altLang="es-ES" dirty="0">
+                <a:latin typeface="Arial" panose="020B0604020202020204" pitchFamily="34" charset="0"/>
+              </a:rPr>
+              <a:t> </a:t>
+            </a:r>
+            <a:r>
+              <a:rPr lang="es-ES" altLang="es-ES" dirty="0" err="1">
+                <a:latin typeface="Arial" panose="020B0604020202020204" pitchFamily="34" charset="0"/>
+              </a:rPr>
+              <a:t>edge</a:t>
+            </a:r>
+            <a:r>
+              <a:rPr lang="es-ES" altLang="es-ES" dirty="0">
+                <a:latin typeface="Arial" panose="020B0604020202020204" pitchFamily="34" charset="0"/>
+              </a:rPr>
+              <a:t> </a:t>
+            </a:r>
+            <a:r>
+              <a:rPr lang="es-ES" altLang="es-ES" dirty="0" err="1">
+                <a:latin typeface="Arial" panose="020B0604020202020204" pitchFamily="34" charset="0"/>
+              </a:rPr>
+              <a:t>detection</a:t>
+            </a:r>
+            <a:r>
+              <a:rPr lang="es-ES" altLang="es-ES" dirty="0">
+                <a:latin typeface="Arial" panose="020B0604020202020204" pitchFamily="34" charset="0"/>
+              </a:rPr>
+              <a:t> </a:t>
+            </a:r>
+            <a:r>
+              <a:rPr lang="es-ES" altLang="es-ES" dirty="0" err="1">
+                <a:latin typeface="Arial" panose="020B0604020202020204" pitchFamily="34" charset="0"/>
+              </a:rPr>
+              <a:t>with</a:t>
+            </a:r>
+            <a:r>
+              <a:rPr lang="es-ES" altLang="es-ES" dirty="0">
+                <a:latin typeface="Arial" panose="020B0604020202020204" pitchFamily="34" charset="0"/>
+              </a:rPr>
+              <a:t> </a:t>
+            </a:r>
+            <a:r>
+              <a:rPr lang="es-ES" altLang="es-ES" b="1" dirty="0" err="1">
+                <a:latin typeface="Arial" panose="020B0604020202020204" pitchFamily="34" charset="0"/>
+              </a:rPr>
+              <a:t>robustness</a:t>
+            </a:r>
+            <a:r>
+              <a:rPr lang="es-ES" altLang="es-ES" b="1" dirty="0">
+                <a:latin typeface="Arial" panose="020B0604020202020204" pitchFamily="34" charset="0"/>
+              </a:rPr>
+              <a:t> </a:t>
+            </a:r>
+            <a:r>
+              <a:rPr lang="es-ES" altLang="es-ES" b="1" dirty="0" err="1">
+                <a:latin typeface="Arial" panose="020B0604020202020204" pitchFamily="34" charset="0"/>
+              </a:rPr>
+              <a:t>to</a:t>
+            </a:r>
+            <a:r>
+              <a:rPr lang="es-ES" altLang="es-ES" b="1" dirty="0">
+                <a:latin typeface="Arial" panose="020B0604020202020204" pitchFamily="34" charset="0"/>
+              </a:rPr>
+              <a:t> </a:t>
+            </a:r>
+            <a:r>
+              <a:rPr lang="es-ES" altLang="es-ES" b="1" dirty="0" err="1">
+                <a:latin typeface="Arial" panose="020B0604020202020204" pitchFamily="34" charset="0"/>
+              </a:rPr>
+              <a:t>noise</a:t>
+            </a:r>
+            <a:r>
+              <a:rPr lang="es-ES" altLang="es-ES" b="1" dirty="0">
+                <a:latin typeface="Arial" panose="020B0604020202020204" pitchFamily="34" charset="0"/>
+              </a:rPr>
+              <a:t> and</a:t>
+            </a:r>
+            <a:br>
+              <a:rPr lang="es-ES" altLang="es-ES" b="1" dirty="0">
+                <a:latin typeface="Arial" panose="020B0604020202020204" pitchFamily="34" charset="0"/>
+              </a:rPr>
+            </a:br>
+            <a:r>
+              <a:rPr lang="es-ES" altLang="es-ES" b="1" dirty="0">
+                <a:latin typeface="Arial" panose="020B0604020202020204" pitchFamily="34" charset="0"/>
+              </a:rPr>
+              <a:t> </a:t>
+            </a:r>
+            <a:r>
+              <a:rPr lang="es-ES" altLang="es-ES" b="1" dirty="0" err="1">
+                <a:latin typeface="Arial" panose="020B0604020202020204" pitchFamily="34" charset="0"/>
+              </a:rPr>
+              <a:t>low</a:t>
+            </a:r>
+            <a:r>
+              <a:rPr lang="es-ES" altLang="es-ES" b="1" dirty="0">
+                <a:latin typeface="Arial" panose="020B0604020202020204" pitchFamily="34" charset="0"/>
+              </a:rPr>
+              <a:t> </a:t>
+            </a:r>
+            <a:r>
+              <a:rPr lang="es-ES" altLang="es-ES" b="1" dirty="0" err="1">
+                <a:latin typeface="Arial" panose="020B0604020202020204" pitchFamily="34" charset="0"/>
+              </a:rPr>
+              <a:t>contrast</a:t>
+            </a:r>
+            <a:r>
+              <a:rPr lang="es-ES" altLang="es-ES" dirty="0">
+                <a:latin typeface="Arial" panose="020B0604020202020204" pitchFamily="34" charset="0"/>
+              </a:rPr>
+              <a:t>, </a:t>
+            </a:r>
+            <a:r>
+              <a:rPr lang="es-ES" altLang="es-ES" dirty="0" err="1">
+                <a:latin typeface="Arial" panose="020B0604020202020204" pitchFamily="34" charset="0"/>
+              </a:rPr>
+              <a:t>although</a:t>
+            </a:r>
+            <a:r>
+              <a:rPr lang="es-ES" altLang="es-ES" dirty="0">
+                <a:latin typeface="Arial" panose="020B0604020202020204" pitchFamily="34" charset="0"/>
+              </a:rPr>
+              <a:t> </a:t>
+            </a:r>
+            <a:r>
+              <a:rPr lang="es-ES" altLang="es-ES" dirty="0" err="1">
+                <a:latin typeface="Arial" panose="020B0604020202020204" pitchFamily="34" charset="0"/>
+              </a:rPr>
+              <a:t>it</a:t>
+            </a:r>
+            <a:r>
+              <a:rPr lang="es-ES" altLang="es-ES" dirty="0">
+                <a:latin typeface="Arial" panose="020B0604020202020204" pitchFamily="34" charset="0"/>
+              </a:rPr>
+              <a:t> </a:t>
+            </a:r>
+            <a:r>
+              <a:rPr lang="es-ES" altLang="es-ES" dirty="0" err="1">
+                <a:latin typeface="Arial" panose="020B0604020202020204" pitchFamily="34" charset="0"/>
+              </a:rPr>
+              <a:t>still</a:t>
+            </a:r>
+            <a:r>
+              <a:rPr lang="es-ES" altLang="es-ES" dirty="0">
+                <a:latin typeface="Arial" panose="020B0604020202020204" pitchFamily="34" charset="0"/>
+              </a:rPr>
+              <a:t> </a:t>
+            </a:r>
+            <a:r>
+              <a:rPr lang="es-ES" altLang="es-ES" dirty="0" err="1">
+                <a:latin typeface="Arial" panose="020B0604020202020204" pitchFamily="34" charset="0"/>
+              </a:rPr>
+              <a:t>relies</a:t>
+            </a:r>
+            <a:r>
+              <a:rPr lang="es-ES" altLang="es-ES" dirty="0">
+                <a:latin typeface="Arial" panose="020B0604020202020204" pitchFamily="34" charset="0"/>
+              </a:rPr>
+              <a:t> </a:t>
+            </a:r>
+            <a:r>
+              <a:rPr lang="es-ES" altLang="es-ES" dirty="0" err="1">
+                <a:latin typeface="Arial" panose="020B0604020202020204" pitchFamily="34" charset="0"/>
+              </a:rPr>
+              <a:t>on</a:t>
+            </a:r>
+            <a:r>
+              <a:rPr lang="es-ES" altLang="es-ES" dirty="0">
+                <a:latin typeface="Arial" panose="020B0604020202020204" pitchFamily="34" charset="0"/>
+              </a:rPr>
+              <a:t> </a:t>
+            </a:r>
+            <a:r>
+              <a:rPr lang="es-ES" altLang="es-ES" dirty="0" err="1">
+                <a:latin typeface="Arial" panose="020B0604020202020204" pitchFamily="34" charset="0"/>
+              </a:rPr>
+              <a:t>handcrafted</a:t>
+            </a:r>
+            <a:r>
+              <a:rPr lang="es-ES" altLang="es-ES" dirty="0">
+                <a:latin typeface="Arial" panose="020B0604020202020204" pitchFamily="34" charset="0"/>
+              </a:rPr>
+              <a:t> </a:t>
+            </a:r>
+            <a:r>
+              <a:rPr lang="es-ES" altLang="es-ES" dirty="0" err="1">
+                <a:latin typeface="Arial" panose="020B0604020202020204" pitchFamily="34" charset="0"/>
+              </a:rPr>
+              <a:t>processing</a:t>
+            </a:r>
+            <a:r>
+              <a:rPr lang="es-ES" altLang="es-ES" dirty="0">
+                <a:latin typeface="Arial" panose="020B0604020202020204" pitchFamily="34" charset="0"/>
+              </a:rPr>
+              <a:t>.</a:t>
+            </a:r>
+            <a:br>
+              <a:rPr lang="es-ES" altLang="es-ES" dirty="0">
+                <a:latin typeface="Arial" panose="020B0604020202020204" pitchFamily="34" charset="0"/>
+              </a:rPr>
+            </a:br>
+            <a:endParaRPr lang="es-ES" altLang="es-ES" dirty="0">
+              <a:latin typeface="Arial" panose="020B0604020202020204" pitchFamily="34" charset="0"/>
+            </a:endParaRPr>
+          </a:p>
+          <a:p>
+            <a:pPr marL="285750" lvl="0" indent="-285750" defTabSz="914400" eaLnBrk="0" fontAlgn="base" hangingPunct="0">
+              <a:spcBef>
+                <a:spcPct val="0"/>
+              </a:spcBef>
+              <a:spcAft>
+                <a:spcPct val="0"/>
+              </a:spcAft>
+              <a:buFont typeface="Arial" panose="020B0604020202020204" pitchFamily="34" charset="0"/>
+              <a:buChar char="•"/>
+            </a:pPr>
+            <a:r>
+              <a:rPr lang="es-ES" altLang="es-ES" b="1" dirty="0">
+                <a:latin typeface="Arial" panose="020B0604020202020204" pitchFamily="34" charset="0"/>
+              </a:rPr>
+              <a:t>Adaptive </a:t>
+            </a:r>
+            <a:r>
+              <a:rPr lang="es-ES" altLang="es-ES" b="1" dirty="0" err="1">
+                <a:latin typeface="Arial" panose="020B0604020202020204" pitchFamily="34" charset="0"/>
+              </a:rPr>
+              <a:t>Canny</a:t>
+            </a:r>
+            <a:r>
+              <a:rPr lang="es-ES" altLang="es-ES" b="1" dirty="0">
+                <a:latin typeface="Arial" panose="020B0604020202020204" pitchFamily="34" charset="0"/>
+              </a:rPr>
+              <a:t> pipeline</a:t>
+            </a:r>
+            <a:r>
+              <a:rPr lang="es-ES" altLang="es-ES" dirty="0">
+                <a:latin typeface="Arial" panose="020B0604020202020204" pitchFamily="34" charset="0"/>
+              </a:rPr>
+              <a:t> </a:t>
+            </a:r>
+            <a:r>
+              <a:rPr lang="es-ES" altLang="es-ES" dirty="0" err="1">
+                <a:latin typeface="Arial" panose="020B0604020202020204" pitchFamily="34" charset="0"/>
+              </a:rPr>
+              <a:t>is</a:t>
+            </a:r>
+            <a:r>
+              <a:rPr lang="es-ES" altLang="es-ES" dirty="0">
+                <a:latin typeface="Arial" panose="020B0604020202020204" pitchFamily="34" charset="0"/>
+              </a:rPr>
+              <a:t> </a:t>
+            </a:r>
+            <a:r>
+              <a:rPr lang="es-ES" altLang="es-ES" dirty="0" err="1">
+                <a:latin typeface="Arial" panose="020B0604020202020204" pitchFamily="34" charset="0"/>
+              </a:rPr>
+              <a:t>the</a:t>
+            </a:r>
+            <a:r>
+              <a:rPr lang="es-ES" altLang="es-ES" dirty="0">
+                <a:latin typeface="Arial" panose="020B0604020202020204" pitchFamily="34" charset="0"/>
+              </a:rPr>
+              <a:t> </a:t>
+            </a:r>
+            <a:r>
+              <a:rPr lang="es-ES" altLang="es-ES" dirty="0" err="1">
+                <a:latin typeface="Arial" panose="020B0604020202020204" pitchFamily="34" charset="0"/>
+              </a:rPr>
+              <a:t>most</a:t>
+            </a:r>
+            <a:r>
+              <a:rPr lang="es-ES" altLang="es-ES" dirty="0">
+                <a:latin typeface="Arial" panose="020B0604020202020204" pitchFamily="34" charset="0"/>
+              </a:rPr>
+              <a:t> </a:t>
+            </a:r>
+            <a:r>
+              <a:rPr lang="es-ES" altLang="es-ES" b="1" dirty="0" err="1">
+                <a:latin typeface="Arial" panose="020B0604020202020204" pitchFamily="34" charset="0"/>
+              </a:rPr>
+              <a:t>practical</a:t>
+            </a:r>
+            <a:r>
+              <a:rPr lang="es-ES" altLang="es-ES" b="1" dirty="0">
+                <a:latin typeface="Arial" panose="020B0604020202020204" pitchFamily="34" charset="0"/>
+              </a:rPr>
+              <a:t> and </a:t>
+            </a:r>
+            <a:r>
+              <a:rPr lang="es-ES" altLang="es-ES" b="1" dirty="0" err="1">
+                <a:latin typeface="Arial" panose="020B0604020202020204" pitchFamily="34" charset="0"/>
+              </a:rPr>
+              <a:t>deployable</a:t>
+            </a:r>
+            <a:r>
+              <a:rPr lang="es-ES" altLang="es-ES" b="1" dirty="0">
+                <a:latin typeface="Arial" panose="020B0604020202020204" pitchFamily="34" charset="0"/>
+              </a:rPr>
+              <a:t> </a:t>
+            </a:r>
+            <a:r>
+              <a:rPr lang="es-ES" altLang="es-ES" b="1" dirty="0" err="1">
                 <a:latin typeface="Arial" panose="020B0604020202020204" pitchFamily="34" charset="0"/>
               </a:rPr>
               <a:t>solution</a:t>
             </a:r>
             <a:r>
-              <a:rPr kumimoji="0" lang="es-ES" altLang="es-ES" sz="1800" b="0" i="0" u="none" strike="noStrike" cap="none" normalizeH="0" baseline="0" dirty="0">
-                <a:ln>
-                  <a:noFill/>
-                </a:ln>
-                <a:solidFill>
-                  <a:schemeClr val="tx1"/>
-                </a:solidFill>
-                <a:effectLst/>
+              <a:rPr lang="es-ES" altLang="es-ES" dirty="0">
                 <a:latin typeface="Arial" panose="020B0604020202020204" pitchFamily="34" charset="0"/>
               </a:rPr>
               <a:t>, </a:t>
             </a:r>
-            <a:r>
-              <a:rPr kumimoji="0" lang="es-ES" altLang="es-ES" sz="1800" b="0" i="0" u="none" strike="noStrike" cap="none" normalizeH="0" baseline="0" dirty="0" err="1">
-                <a:ln>
-                  <a:noFill/>
-                </a:ln>
-                <a:solidFill>
-                  <a:schemeClr val="tx1"/>
-                </a:solidFill>
-                <a:effectLst/>
+            <a:br>
+              <a:rPr lang="es-ES" altLang="es-ES" dirty="0">
+                <a:latin typeface="Arial" panose="020B0604020202020204" pitchFamily="34" charset="0"/>
+              </a:rPr>
+            </a:br>
+            <a:r>
+              <a:rPr lang="es-ES" altLang="es-ES" dirty="0" err="1">
                 <a:latin typeface="Arial" panose="020B0604020202020204" pitchFamily="34" charset="0"/>
               </a:rPr>
               <a:t>requiring</a:t>
             </a:r>
             <a:r>
-              <a:rPr kumimoji="0" lang="es-ES" altLang="es-ES" sz="1800" b="0" i="0" u="none" strike="noStrike" cap="none" normalizeH="0" baseline="0" dirty="0">
-                <a:ln>
-                  <a:noFill/>
-                </a:ln>
-                <a:solidFill>
-                  <a:schemeClr val="tx1"/>
-                </a:solidFill>
-                <a:effectLst/>
+              <a:rPr lang="es-ES" altLang="es-ES" dirty="0">
                 <a:latin typeface="Arial" panose="020B0604020202020204" pitchFamily="34" charset="0"/>
               </a:rPr>
               <a:t> </a:t>
             </a:r>
             <a:r>
-              <a:rPr kumimoji="0" lang="es-ES" altLang="es-ES" sz="1800" b="1" i="0" u="none" strike="noStrike" cap="none" normalizeH="0" baseline="0" dirty="0">
-                <a:ln>
-                  <a:noFill/>
-                </a:ln>
-                <a:solidFill>
-                  <a:schemeClr val="tx1"/>
-                </a:solidFill>
-                <a:effectLst/>
+              <a:rPr lang="es-ES" altLang="es-ES" b="1" dirty="0">
                 <a:latin typeface="Arial" panose="020B0604020202020204" pitchFamily="34" charset="0"/>
               </a:rPr>
               <a:t>no training and </a:t>
             </a:r>
             <a:r>
-              <a:rPr kumimoji="0" lang="es-ES" altLang="es-ES" sz="1800" b="1" i="0" u="none" strike="noStrike" cap="none" normalizeH="0" baseline="0" dirty="0" err="1">
-                <a:ln>
-                  <a:noFill/>
-                </a:ln>
-                <a:solidFill>
-                  <a:schemeClr val="tx1"/>
-                </a:solidFill>
-                <a:effectLst/>
+              <a:rPr lang="es-ES" altLang="es-ES" b="1" dirty="0" err="1">
                 <a:latin typeface="Arial" panose="020B0604020202020204" pitchFamily="34" charset="0"/>
               </a:rPr>
               <a:t>only</a:t>
             </a:r>
             <a:r>
-              <a:rPr kumimoji="0" lang="es-ES" altLang="es-ES" sz="1800" b="1" i="0" u="none" strike="noStrike" cap="none" normalizeH="0" baseline="0" dirty="0">
-                <a:ln>
-                  <a:noFill/>
-                </a:ln>
-                <a:solidFill>
-                  <a:schemeClr val="tx1"/>
-                </a:solidFill>
-                <a:effectLst/>
+              <a:rPr lang="es-ES" altLang="es-ES" b="1" dirty="0">
                 <a:latin typeface="Arial" panose="020B0604020202020204" pitchFamily="34" charset="0"/>
               </a:rPr>
               <a:t> CPU</a:t>
             </a:r>
             <a:r>
-              <a:rPr kumimoji="0" lang="es-ES" altLang="es-ES" sz="1800" b="0" i="0" u="none" strike="noStrike" cap="none" normalizeH="0" baseline="0" dirty="0">
-                <a:ln>
-                  <a:noFill/>
-                </a:ln>
-                <a:solidFill>
-                  <a:schemeClr val="tx1"/>
-                </a:solidFill>
-                <a:effectLst/>
+              <a:rPr lang="es-ES" altLang="es-ES" dirty="0">
                 <a:latin typeface="Arial" panose="020B0604020202020204" pitchFamily="34" charset="0"/>
               </a:rPr>
               <a:t>, </a:t>
             </a:r>
             <a:r>
-              <a:rPr kumimoji="0" lang="es-ES" altLang="es-ES" sz="1800" b="0" i="0" u="none" strike="noStrike" cap="none" normalizeH="0" baseline="0" dirty="0" err="1">
-                <a:ln>
-                  <a:noFill/>
-                </a:ln>
-                <a:solidFill>
-                  <a:schemeClr val="tx1"/>
-                </a:solidFill>
-                <a:effectLst/>
+              <a:rPr lang="es-ES" altLang="es-ES" dirty="0" err="1">
                 <a:latin typeface="Arial" panose="020B0604020202020204" pitchFamily="34" charset="0"/>
               </a:rPr>
               <a:t>but</a:t>
             </a:r>
             <a:r>
-              <a:rPr kumimoji="0" lang="es-ES" altLang="es-ES" sz="1800" b="0" i="0" u="none" strike="noStrike" cap="none" normalizeH="0" baseline="0" dirty="0">
-                <a:ln>
-                  <a:noFill/>
-                </a:ln>
-                <a:solidFill>
-                  <a:schemeClr val="tx1"/>
-                </a:solidFill>
-                <a:effectLst/>
+              <a:rPr lang="es-ES" altLang="es-ES" dirty="0">
                 <a:latin typeface="Arial" panose="020B0604020202020204" pitchFamily="34" charset="0"/>
               </a:rPr>
               <a:t> </a:t>
             </a:r>
             <a:r>
-              <a:rPr kumimoji="0" lang="es-ES" altLang="es-ES" sz="1800" b="0" i="0" u="none" strike="noStrike" cap="none" normalizeH="0" baseline="0" dirty="0" err="1">
-                <a:ln>
-                  <a:noFill/>
-                </a:ln>
-                <a:solidFill>
-                  <a:schemeClr val="tx1"/>
-                </a:solidFill>
-                <a:effectLst/>
+              <a:rPr lang="es-ES" altLang="es-ES" dirty="0" err="1">
                 <a:latin typeface="Arial" panose="020B0604020202020204" pitchFamily="34" charset="0"/>
               </a:rPr>
               <a:t>with</a:t>
             </a:r>
             <a:r>
-              <a:rPr kumimoji="0" lang="es-ES" altLang="es-ES" sz="1800" b="0" i="0" u="none" strike="noStrike" cap="none" normalizeH="0" baseline="0" dirty="0">
-                <a:ln>
-                  <a:noFill/>
-                </a:ln>
-                <a:solidFill>
-                  <a:schemeClr val="tx1"/>
-                </a:solidFill>
-                <a:effectLst/>
+              <a:rPr lang="es-ES" altLang="es-ES" dirty="0">
                 <a:latin typeface="Arial" panose="020B0604020202020204" pitchFamily="34" charset="0"/>
               </a:rPr>
               <a:t> </a:t>
             </a:r>
             <a:r>
-              <a:rPr kumimoji="0" lang="es-ES" altLang="es-ES" sz="1800" b="0" i="0" u="none" strike="noStrike" cap="none" normalizeH="0" baseline="0" dirty="0" err="1">
-                <a:ln>
-                  <a:noFill/>
-                </a:ln>
-                <a:solidFill>
-                  <a:schemeClr val="tx1"/>
-                </a:solidFill>
-                <a:effectLst/>
+              <a:rPr lang="es-ES" altLang="es-ES" dirty="0" err="1">
                 <a:latin typeface="Arial" panose="020B0604020202020204" pitchFamily="34" charset="0"/>
               </a:rPr>
               <a:t>lower</a:t>
             </a:r>
             <a:r>
-              <a:rPr kumimoji="0" lang="es-ES" altLang="es-ES" sz="1800" b="0" i="0" u="none" strike="noStrike" cap="none" normalizeH="0" baseline="0" dirty="0">
-                <a:ln>
-                  <a:noFill/>
-                </a:ln>
-                <a:solidFill>
-                  <a:schemeClr val="tx1"/>
-                </a:solidFill>
-                <a:effectLst/>
+              <a:rPr lang="es-ES" altLang="es-ES" dirty="0">
                 <a:latin typeface="Arial" panose="020B0604020202020204" pitchFamily="34" charset="0"/>
               </a:rPr>
               <a:t> </a:t>
             </a:r>
             <a:r>
-              <a:rPr kumimoji="0" lang="es-ES" altLang="es-ES" sz="1800" b="0" i="0" u="none" strike="noStrike" cap="none" normalizeH="0" baseline="0" dirty="0" err="1">
-                <a:ln>
-                  <a:noFill/>
-                </a:ln>
-                <a:solidFill>
-                  <a:schemeClr val="tx1"/>
-                </a:solidFill>
-                <a:effectLst/>
+              <a:rPr lang="es-ES" altLang="es-ES" dirty="0" err="1">
                 <a:latin typeface="Arial" panose="020B0604020202020204" pitchFamily="34" charset="0"/>
               </a:rPr>
               <a:t>robustness</a:t>
             </a:r>
             <a:r>
-              <a:rPr kumimoji="0" lang="es-ES" altLang="es-ES" sz="1800" b="0" i="0" u="none" strike="noStrike" cap="none" normalizeH="0" baseline="0" dirty="0">
-                <a:ln>
-                  <a:noFill/>
-                </a:ln>
-                <a:solidFill>
-                  <a:schemeClr val="tx1"/>
-                </a:solidFill>
-                <a:effectLst/>
-                <a:latin typeface="Arial" panose="020B0604020202020204" pitchFamily="34" charset="0"/>
-              </a:rPr>
-              <a:t>. </a:t>
-            </a:r>
+              <a:rPr lang="es-ES" altLang="es-ES" dirty="0">
+                <a:latin typeface="Arial" panose="020B0604020202020204" pitchFamily="34" charset="0"/>
+              </a:rPr>
+              <a:t>.</a:t>
+            </a:r>
+            <a:endParaRPr kumimoji="0" lang="es-ES" altLang="es-ES" sz="1800" b="1" i="0" u="none" strike="noStrike" cap="none" normalizeH="0" baseline="0" dirty="0">
+              <a:ln>
+                <a:noFill/>
+              </a:ln>
+              <a:solidFill>
+                <a:schemeClr val="tx1"/>
+              </a:solidFill>
+              <a:effectLst/>
+              <a:latin typeface="Arial" panose="020B0604020202020204" pitchFamily="34" charset="0"/>
+            </a:endParaRPr>
+          </a:p>
+          <a:p>
+            <a:pPr marL="285750" marR="0" lvl="0" indent="-285750" algn="l" defTabSz="914400" rtl="0" eaLnBrk="0" fontAlgn="base" latinLnBrk="0" hangingPunct="0">
+              <a:lnSpc>
+                <a:spcPct val="100000"/>
+              </a:lnSpc>
+              <a:spcBef>
+                <a:spcPct val="0"/>
+              </a:spcBef>
+              <a:spcAft>
+                <a:spcPct val="0"/>
+              </a:spcAft>
+              <a:buClrTx/>
+              <a:buSzTx/>
+              <a:buFont typeface="Arial" panose="020B0604020202020204" pitchFamily="34" charset="0"/>
+              <a:buChar char="•"/>
+              <a:tabLst/>
+            </a:pPr>
+            <a:endParaRPr kumimoji="0" lang="es-ES" altLang="es-ES" sz="1800" b="1" i="0" u="none" strike="noStrike" cap="none" normalizeH="0" baseline="0" dirty="0">
+              <a:ln>
+                <a:noFill/>
+              </a:ln>
+              <a:solidFill>
+                <a:schemeClr val="tx1"/>
+              </a:solidFill>
+              <a:effectLst/>
+              <a:latin typeface="Arial" panose="020B0604020202020204" pitchFamily="34" charset="0"/>
+            </a:endParaRPr>
           </a:p>
         </p:txBody>
       </p:sp>
@@ -8086,7 +7320,7 @@
 </p:sld>
 </file>
 
-<file path=ppt/slides/slide15.xml><?xml version="1.0" encoding="utf-8"?>
+<file path=ppt/slides/slide14.xml><?xml version="1.0" encoding="utf-8"?>
 <p:sld xmlns:a="http://schemas.openxmlformats.org/drawingml/2006/main" xmlns:r="http://schemas.openxmlformats.org/officeDocument/2006/relationships" xmlns:p="http://schemas.openxmlformats.org/presentationml/2006/main">
   <p:cSld>
     <p:spTree>
@@ -8125,14 +7359,14 @@
           </a:ln>
           <a:extLst>
             <a:ext uri="{909E8E84-426E-40dd-AFC4-6F175D3DCCD1}">
-              <a14:hiddenFill xmlns:a14="http://schemas.microsoft.com/office/drawing/2010/main" xmlns="">
+              <a14:hiddenFill xmlns="" xmlns:a14="http://schemas.microsoft.com/office/drawing/2010/main">
                 <a:solidFill>
                   <a:srgbClr val="FFFFFF"/>
                 </a:solidFill>
               </a14:hiddenFill>
             </a:ext>
             <a:ext uri="{91240B29-F687-4f45-9708-019B960494DF}">
-              <a14:hiddenLine xmlns:a14="http://schemas.microsoft.com/office/drawing/2010/main" xmlns="" w="9525">
+              <a14:hiddenLine xmlns="" xmlns:a14="http://schemas.microsoft.com/office/drawing/2010/main" w="9525">
                 <a:solidFill>
                   <a:srgbClr val="000000"/>
                 </a:solidFill>
@@ -8208,7 +7442,7 @@
 </p:sld>
 </file>
 
-<file path=ppt/slides/slide16.xml><?xml version="1.0" encoding="utf-8"?>
+<file path=ppt/slides/slide15.xml><?xml version="1.0" encoding="utf-8"?>
 <p:sld xmlns:a="http://schemas.openxmlformats.org/drawingml/2006/main" xmlns:r="http://schemas.openxmlformats.org/officeDocument/2006/relationships" xmlns:p="http://schemas.openxmlformats.org/presentationml/2006/main">
   <p:cSld>
     <p:spTree>
@@ -8478,7 +7712,7 @@
 </p:sld>
 </file>
 
-<file path=ppt/slides/slide17.xml><?xml version="1.0" encoding="utf-8"?>
+<file path=ppt/slides/slide16.xml><?xml version="1.0" encoding="utf-8"?>
 <p:sld xmlns:a="http://schemas.openxmlformats.org/drawingml/2006/main" xmlns:r="http://schemas.openxmlformats.org/officeDocument/2006/relationships" xmlns:p="http://schemas.openxmlformats.org/presentationml/2006/main">
   <p:cSld>
     <p:spTree>
@@ -8752,7 +7986,7 @@
 </p:sld>
 </file>
 
-<file path=ppt/slides/slide18.xml><?xml version="1.0" encoding="utf-8"?>
+<file path=ppt/slides/slide17.xml><?xml version="1.0" encoding="utf-8"?>
 <p:sld xmlns:a="http://schemas.openxmlformats.org/drawingml/2006/main" xmlns:r="http://schemas.openxmlformats.org/officeDocument/2006/relationships" xmlns:p="http://schemas.openxmlformats.org/presentationml/2006/main">
   <p:cSld>
     <p:spTree>
@@ -9293,14 +8527,14 @@
           </a:ln>
           <a:extLst>
             <a:ext uri="{909E8E84-426E-40dd-AFC4-6F175D3DCCD1}">
-              <a14:hiddenFill xmlns="" xmlns:a14="http://schemas.microsoft.com/office/drawing/2010/main">
+              <a14:hiddenFill xmlns:a14="http://schemas.microsoft.com/office/drawing/2010/main" xmlns="">
                 <a:solidFill>
                   <a:srgbClr val="FFFFFF"/>
                 </a:solidFill>
               </a14:hiddenFill>
             </a:ext>
             <a:ext uri="{91240B29-F687-4f45-9708-019B960494DF}">
-              <a14:hiddenLine xmlns="" xmlns:a14="http://schemas.microsoft.com/office/drawing/2010/main" w="9525">
+              <a14:hiddenLine xmlns:a14="http://schemas.microsoft.com/office/drawing/2010/main" xmlns="" w="9525">
                 <a:solidFill>
                   <a:srgbClr val="000000"/>
                 </a:solidFill>
@@ -9587,14 +8821,14 @@
           </a:ln>
           <a:extLst>
             <a:ext uri="{909E8E84-426E-40dd-AFC4-6F175D3DCCD1}">
-              <a14:hiddenFill xmlns="" xmlns:a14="http://schemas.microsoft.com/office/drawing/2010/main">
+              <a14:hiddenFill xmlns:a14="http://schemas.microsoft.com/office/drawing/2010/main" xmlns="">
                 <a:solidFill>
                   <a:srgbClr val="FFFFFF"/>
                 </a:solidFill>
               </a14:hiddenFill>
             </a:ext>
             <a:ext uri="{91240B29-F687-4f45-9708-019B960494DF}">
-              <a14:hiddenLine xmlns="" xmlns:a14="http://schemas.microsoft.com/office/drawing/2010/main" w="9525">
+              <a14:hiddenLine xmlns:a14="http://schemas.microsoft.com/office/drawing/2010/main" xmlns="" w="9525">
                 <a:solidFill>
                   <a:srgbClr val="000000"/>
                 </a:solidFill>
@@ -9988,14 +9222,14 @@
           </a:ln>
           <a:extLst>
             <a:ext uri="{909E8E84-426E-40dd-AFC4-6F175D3DCCD1}">
-              <a14:hiddenFill xmlns:a14="http://schemas.microsoft.com/office/drawing/2010/main" xmlns="">
+              <a14:hiddenFill xmlns="" xmlns:a14="http://schemas.microsoft.com/office/drawing/2010/main">
                 <a:solidFill>
                   <a:srgbClr val="FFFFFF"/>
                 </a:solidFill>
               </a14:hiddenFill>
             </a:ext>
             <a:ext uri="{91240B29-F687-4f45-9708-019B960494DF}">
-              <a14:hiddenLine xmlns:a14="http://schemas.microsoft.com/office/drawing/2010/main" xmlns="" w="9525">
+              <a14:hiddenLine xmlns="" xmlns:a14="http://schemas.microsoft.com/office/drawing/2010/main" w="9525">
                 <a:solidFill>
                   <a:srgbClr val="000000"/>
                 </a:solidFill>
@@ -10404,7 +9638,13 @@
   <p:cSld>
     <p:spTree>
       <p:nvGrpSpPr>
-        <p:cNvPr id="1" name=""/>
+        <p:cNvPr id="1" name="">
+          <a:extLst>
+            <a:ext uri="{FF2B5EF4-FFF2-40B4-BE49-F238E27FC236}">
+              <a16:creationId xmlns:a16="http://schemas.microsoft.com/office/drawing/2014/main" id="{DFE16D71-5974-0503-CBCB-9203F0549B41}"/>
+            </a:ext>
+          </a:extLst>
+        </p:cNvPr>
         <p:cNvGrpSpPr/>
         <p:nvPr/>
       </p:nvGrpSpPr>
@@ -10418,7 +9658,13 @@
       </p:grpSpPr>
       <p:sp>
         <p:nvSpPr>
-          <p:cNvPr id="2" name="Title 1"/>
+          <p:cNvPr id="2" name="Title 1">
+            <a:extLst>
+              <a:ext uri="{FF2B5EF4-FFF2-40B4-BE49-F238E27FC236}">
+                <a16:creationId xmlns:a16="http://schemas.microsoft.com/office/drawing/2014/main" id="{971E8495-DCDD-44BF-A761-F1C09DFC7E67}"/>
+              </a:ext>
+            </a:extLst>
+          </p:cNvPr>
           <p:cNvSpPr>
             <a:spLocks noGrp="1"/>
           </p:cNvSpPr>
@@ -10434,57 +9680,27 @@
         </p:spPr>
         <p:txBody>
           <a:bodyPr>
-            <a:normAutofit fontScale="90000"/>
+            <a:normAutofit/>
           </a:bodyPr>
           <a:lstStyle/>
           <a:p>
             <a:pPr algn="l"/>
             <a:r>
-              <a:rPr lang="en-GB" sz="2800" dirty="0"/>
-              <a:t>2</a:t>
-            </a:r>
-            <a:r>
               <a:rPr lang="en-GB" sz="2800" b="1" dirty="0"/>
-              <a:t>. Literature review (Una </a:t>
-            </a:r>
-            <a:r>
-              <a:rPr lang="en-GB" sz="2800" b="1" dirty="0" err="1"/>
-              <a:t>vez</a:t>
-            </a:r>
-            <a:r>
-              <a:rPr lang="en-GB" sz="2800" b="1" dirty="0"/>
-              <a:t> </a:t>
-            </a:r>
-            <a:r>
-              <a:rPr lang="en-GB" sz="2800" b="1" dirty="0" err="1"/>
-              <a:t>añadidos</a:t>
-            </a:r>
-            <a:r>
-              <a:rPr lang="en-GB" sz="2800" b="1" dirty="0"/>
-              <a:t> </a:t>
-            </a:r>
-            <a:r>
-              <a:rPr lang="en-GB" sz="2800" b="1" dirty="0" err="1"/>
-              <a:t>todos</a:t>
-            </a:r>
-            <a:r>
-              <a:rPr lang="en-GB" sz="2800" b="1" dirty="0"/>
-              <a:t> lo </a:t>
-            </a:r>
-            <a:r>
-              <a:rPr lang="en-GB" sz="2800" b="1" dirty="0" err="1"/>
-              <a:t>ajustamos</a:t>
-            </a:r>
-            <a:r>
-              <a:rPr lang="en-GB" sz="2800" b="1" dirty="0"/>
-              <a:t>)</a:t>
+              <a:t>2. Literature review – Deep Learning</a:t>
             </a:r>
           </a:p>
         </p:txBody>
       </p:sp>
       <p:sp>
         <p:nvSpPr>
-          <p:cNvPr id="30" name="Rectangle 7"/>
+          <p:cNvPr id="30" name="Rectangle 7">
+            <a:extLst>
+              <a:ext uri="{FF2B5EF4-FFF2-40B4-BE49-F238E27FC236}">
+                <a16:creationId xmlns:a16="http://schemas.microsoft.com/office/drawing/2014/main" id="{E2998411-BBE1-1077-A886-49B61CE6AF93}"/>
+              </a:ext>
+            </a:extLst>
+          </p:cNvPr>
           <p:cNvSpPr/>
           <p:nvPr/>
         </p:nvSpPr>
@@ -10534,370 +9750,12 @@
           </a:p>
         </p:txBody>
       </p:sp>
-      <p:grpSp>
-        <p:nvGrpSpPr>
-          <p:cNvPr id="13" name="Grupo 12">
+      <p:sp>
+        <p:nvSpPr>
+          <p:cNvPr id="32" name="CuadroTexto 31">
             <a:extLst>
               <a:ext uri="{FF2B5EF4-FFF2-40B4-BE49-F238E27FC236}">
-                <a16:creationId xmlns:a16="http://schemas.microsoft.com/office/drawing/2014/main" id="{FFB3AFAE-265D-4C6E-B580-8A6A7C527BB1}"/>
-              </a:ext>
-            </a:extLst>
-          </p:cNvPr>
-          <p:cNvGrpSpPr/>
-          <p:nvPr/>
-        </p:nvGrpSpPr>
-        <p:grpSpPr>
-          <a:xfrm>
-            <a:off x="1021783" y="3032277"/>
-            <a:ext cx="1758327" cy="1836445"/>
-            <a:chOff x="1719783" y="3732939"/>
-            <a:chExt cx="1758327" cy="1836445"/>
-          </a:xfrm>
-        </p:grpSpPr>
-        <p:grpSp>
-          <p:nvGrpSpPr>
-            <p:cNvPr id="14" name="Grupo 13">
-              <a:extLst>
-                <a:ext uri="{FF2B5EF4-FFF2-40B4-BE49-F238E27FC236}">
-                  <a16:creationId xmlns:a16="http://schemas.microsoft.com/office/drawing/2014/main" id="{7180B0AD-6593-415F-9B6D-15E2273B2827}"/>
-                </a:ext>
-              </a:extLst>
-            </p:cNvPr>
-            <p:cNvGrpSpPr/>
-            <p:nvPr/>
-          </p:nvGrpSpPr>
-          <p:grpSpPr>
-            <a:xfrm>
-              <a:off x="1827270" y="3732939"/>
-              <a:ext cx="1650840" cy="1717526"/>
-              <a:chOff x="1555377" y="4649909"/>
-              <a:chExt cx="1545619" cy="1770468"/>
-            </a:xfrm>
-          </p:grpSpPr>
-          <p:sp>
-            <p:nvSpPr>
-              <p:cNvPr id="17" name="CuadroTexto 16">
-                <a:extLst>
-                  <a:ext uri="{FF2B5EF4-FFF2-40B4-BE49-F238E27FC236}">
-                    <a16:creationId xmlns:a16="http://schemas.microsoft.com/office/drawing/2014/main" id="{545A733E-B96C-4242-9ED5-74067C9B4313}"/>
-                  </a:ext>
-                </a:extLst>
-              </p:cNvPr>
-              <p:cNvSpPr txBox="1"/>
-              <p:nvPr/>
-            </p:nvSpPr>
-            <p:spPr>
-              <a:xfrm>
-                <a:off x="1555377" y="4649909"/>
-                <a:ext cx="1545619" cy="380716"/>
-              </a:xfrm>
-              <a:prstGeom prst="rect">
-                <a:avLst/>
-              </a:prstGeom>
-              <a:noFill/>
-            </p:spPr>
-            <p:txBody>
-              <a:bodyPr wrap="square" rtlCol="0">
-                <a:spAutoFit/>
-              </a:bodyPr>
-              <a:lstStyle/>
-              <a:p>
-                <a:pPr algn="ctr"/>
-                <a:r>
-                  <a:rPr lang="es-ES" b="1" dirty="0" err="1">
-                    <a:solidFill>
-                      <a:srgbClr val="002060"/>
-                    </a:solidFill>
-                    <a:latin typeface="Trebuchet MS" panose="020B0603020202020204" pitchFamily="34" charset="0"/>
-                    <a:cs typeface="Arial" panose="020B0604020202020204" pitchFamily="34" charset="0"/>
-                  </a:rPr>
-                  <a:t>Segmentation</a:t>
-                </a:r>
-                <a:endParaRPr lang="es-ES" sz="1800" b="1" dirty="0">
-                  <a:solidFill>
-                    <a:srgbClr val="002060"/>
-                  </a:solidFill>
-                  <a:latin typeface="Trebuchet MS" panose="020B0603020202020204" pitchFamily="34" charset="0"/>
-                  <a:cs typeface="Arial" panose="020B0604020202020204" pitchFamily="34" charset="0"/>
-                </a:endParaRPr>
-              </a:p>
-            </p:txBody>
-          </p:sp>
-          <p:grpSp>
-            <p:nvGrpSpPr>
-              <p:cNvPr id="18" name="Grupo 17">
-                <a:extLst>
-                  <a:ext uri="{FF2B5EF4-FFF2-40B4-BE49-F238E27FC236}">
-                    <a16:creationId xmlns:a16="http://schemas.microsoft.com/office/drawing/2014/main" id="{39DDF6E7-F022-4E3A-B66F-B960B4B660AF}"/>
-                  </a:ext>
-                </a:extLst>
-              </p:cNvPr>
-              <p:cNvGrpSpPr/>
-              <p:nvPr/>
-            </p:nvGrpSpPr>
-            <p:grpSpPr>
-              <a:xfrm>
-                <a:off x="1975435" y="5383070"/>
-                <a:ext cx="1049160" cy="1037307"/>
-                <a:chOff x="1975435" y="5383070"/>
-                <a:chExt cx="1049160" cy="1037307"/>
-              </a:xfrm>
-            </p:grpSpPr>
-            <p:sp>
-              <p:nvSpPr>
-                <p:cNvPr id="19" name="CuadroTexto 18">
-                  <a:extLst>
-                    <a:ext uri="{FF2B5EF4-FFF2-40B4-BE49-F238E27FC236}">
-                      <a16:creationId xmlns:a16="http://schemas.microsoft.com/office/drawing/2014/main" id="{5B1B2DEE-AF2E-4B77-A680-329D4EC1B363}"/>
-                    </a:ext>
-                  </a:extLst>
-                </p:cNvPr>
-                <p:cNvSpPr txBox="1"/>
-                <p:nvPr/>
-              </p:nvSpPr>
-              <p:spPr>
-                <a:xfrm>
-                  <a:off x="1975435" y="5383070"/>
-                  <a:ext cx="1049160" cy="348990"/>
-                </a:xfrm>
-                <a:prstGeom prst="rect">
-                  <a:avLst/>
-                </a:prstGeom>
-                <a:noFill/>
-              </p:spPr>
-              <p:txBody>
-                <a:bodyPr wrap="square" rtlCol="0">
-                  <a:spAutoFit/>
-                </a:bodyPr>
-                <a:lstStyle/>
-                <a:p>
-                  <a:pPr algn="ctr"/>
-                  <a:endParaRPr lang="es-ES" sz="1600" dirty="0">
-                    <a:latin typeface="Trebuchet MS" panose="020B0603020202020204" pitchFamily="34" charset="0"/>
-                  </a:endParaRPr>
-                </a:p>
-              </p:txBody>
-            </p:sp>
-            <p:sp>
-              <p:nvSpPr>
-                <p:cNvPr id="20" name="CuadroTexto 19">
-                  <a:extLst>
-                    <a:ext uri="{FF2B5EF4-FFF2-40B4-BE49-F238E27FC236}">
-                      <a16:creationId xmlns:a16="http://schemas.microsoft.com/office/drawing/2014/main" id="{2792D8AC-0F15-479C-9B17-E91452DB2E67}"/>
-                    </a:ext>
-                  </a:extLst>
-                </p:cNvPr>
-                <p:cNvSpPr txBox="1"/>
-                <p:nvPr/>
-              </p:nvSpPr>
-              <p:spPr>
-                <a:xfrm>
-                  <a:off x="1984894" y="6071387"/>
-                  <a:ext cx="1030244" cy="348990"/>
-                </a:xfrm>
-                <a:prstGeom prst="rect">
-                  <a:avLst/>
-                </a:prstGeom>
-                <a:noFill/>
-              </p:spPr>
-              <p:txBody>
-                <a:bodyPr wrap="square" rtlCol="0">
-                  <a:spAutoFit/>
-                </a:bodyPr>
-                <a:lstStyle/>
-                <a:p>
-                  <a:pPr algn="ctr"/>
-                  <a:endParaRPr lang="es-ES" sz="1600" dirty="0">
-                    <a:latin typeface="Trebuchet MS" panose="020B0603020202020204" pitchFamily="34" charset="0"/>
-                    <a:cs typeface="Arial" panose="020B0604020202020204" pitchFamily="34" charset="0"/>
-                  </a:endParaRPr>
-                </a:p>
-              </p:txBody>
-            </p:sp>
-          </p:grpSp>
-        </p:grpSp>
-        <p:pic>
-          <p:nvPicPr>
-            <p:cNvPr id="15" name="Imagen 14">
-              <a:extLst>
-                <a:ext uri="{FF2B5EF4-FFF2-40B4-BE49-F238E27FC236}">
-                  <a16:creationId xmlns:a16="http://schemas.microsoft.com/office/drawing/2014/main" id="{C4FC2959-91F3-4AEA-8B51-C5AF65F10AFB}"/>
-                </a:ext>
-              </a:extLst>
-            </p:cNvPr>
-            <p:cNvPicPr>
-              <a:picLocks noChangeAspect="1"/>
-            </p:cNvPicPr>
-            <p:nvPr/>
-          </p:nvPicPr>
-          <p:blipFill>
-            <a:blip r:embed="rId3">
-              <a:extLst>
-                <a:ext uri="{28A0092B-C50C-407E-A947-70E740481C1C}">
-                  <a14:useLocalDpi xmlns:a14="http://schemas.microsoft.com/office/drawing/2010/main" val="0"/>
-                </a:ext>
-              </a:extLst>
-            </a:blip>
-            <a:stretch>
-              <a:fillRect/>
-            </a:stretch>
-          </p:blipFill>
-          <p:spPr>
-            <a:xfrm>
-              <a:off x="1719783" y="4315085"/>
-              <a:ext cx="577347" cy="577347"/>
-            </a:xfrm>
-            <a:prstGeom prst="rect">
-              <a:avLst/>
-            </a:prstGeom>
-          </p:spPr>
-        </p:pic>
-        <p:pic>
-          <p:nvPicPr>
-            <p:cNvPr id="16" name="Imagen 15">
-              <a:extLst>
-                <a:ext uri="{FF2B5EF4-FFF2-40B4-BE49-F238E27FC236}">
-                  <a16:creationId xmlns:a16="http://schemas.microsoft.com/office/drawing/2014/main" id="{DDEBF5DA-E621-45D6-B760-C89D7F3C898B}"/>
-                </a:ext>
-              </a:extLst>
-            </p:cNvPr>
-            <p:cNvPicPr>
-              <a:picLocks noChangeAspect="1"/>
-            </p:cNvPicPr>
-            <p:nvPr/>
-          </p:nvPicPr>
-          <p:blipFill>
-            <a:blip r:embed="rId4">
-              <a:extLst>
-                <a:ext uri="{28A0092B-C50C-407E-A947-70E740481C1C}">
-                  <a14:useLocalDpi xmlns:a14="http://schemas.microsoft.com/office/drawing/2010/main" val="0"/>
-                </a:ext>
-              </a:extLst>
-            </a:blip>
-            <a:stretch>
-              <a:fillRect/>
-            </a:stretch>
-          </p:blipFill>
-          <p:spPr>
-            <a:xfrm>
-              <a:off x="1719783" y="4992036"/>
-              <a:ext cx="577348" cy="577348"/>
-            </a:xfrm>
-            <a:prstGeom prst="rect">
-              <a:avLst/>
-            </a:prstGeom>
-          </p:spPr>
-        </p:pic>
-      </p:grpSp>
-      <p:grpSp>
-        <p:nvGrpSpPr>
-          <p:cNvPr id="21" name="Grupo 20">
-            <a:extLst>
-              <a:ext uri="{FF2B5EF4-FFF2-40B4-BE49-F238E27FC236}">
-                <a16:creationId xmlns:a16="http://schemas.microsoft.com/office/drawing/2014/main" id="{2130A9BE-4670-442B-A8BB-E38CCAD44C4C}"/>
-              </a:ext>
-            </a:extLst>
-          </p:cNvPr>
-          <p:cNvGrpSpPr/>
-          <p:nvPr/>
-        </p:nvGrpSpPr>
-        <p:grpSpPr>
-          <a:xfrm>
-            <a:off x="3675613" y="3052899"/>
-            <a:ext cx="1250448" cy="1099433"/>
-            <a:chOff x="9336835" y="3044017"/>
-            <a:chExt cx="971149" cy="1099433"/>
-          </a:xfrm>
-        </p:grpSpPr>
-        <p:sp>
-          <p:nvSpPr>
-            <p:cNvPr id="22" name="CuadroTexto 21">
-              <a:extLst>
-                <a:ext uri="{FF2B5EF4-FFF2-40B4-BE49-F238E27FC236}">
-                  <a16:creationId xmlns:a16="http://schemas.microsoft.com/office/drawing/2014/main" id="{4F5255EA-8536-4C3C-BEDC-8986989C6F86}"/>
-                </a:ext>
-              </a:extLst>
-            </p:cNvPr>
-            <p:cNvSpPr txBox="1"/>
-            <p:nvPr/>
-          </p:nvSpPr>
-          <p:spPr>
-            <a:xfrm>
-              <a:off x="9336835" y="3044017"/>
-              <a:ext cx="971149" cy="369332"/>
-            </a:xfrm>
-            <a:prstGeom prst="rect">
-              <a:avLst/>
-            </a:prstGeom>
-            <a:noFill/>
-          </p:spPr>
-          <p:txBody>
-            <a:bodyPr wrap="square" rtlCol="0">
-              <a:spAutoFit/>
-            </a:bodyPr>
-            <a:lstStyle/>
-            <a:p>
-              <a:r>
-                <a:rPr lang="es-ES" b="1" dirty="0" err="1">
-                  <a:solidFill>
-                    <a:srgbClr val="002060"/>
-                  </a:solidFill>
-                  <a:latin typeface="Trebuchet MS" panose="020B0603020202020204" pitchFamily="34" charset="0"/>
-                </a:rPr>
-                <a:t>Detection</a:t>
-              </a:r>
-              <a:endParaRPr lang="es-ES" sz="1800" b="1" dirty="0">
-                <a:solidFill>
-                  <a:srgbClr val="002060"/>
-                </a:solidFill>
-                <a:latin typeface="Trebuchet MS" panose="020B0603020202020204" pitchFamily="34" charset="0"/>
-              </a:endParaRPr>
-            </a:p>
-          </p:txBody>
-        </p:sp>
-        <p:pic>
-          <p:nvPicPr>
-            <p:cNvPr id="23" name="Imagen 22">
-              <a:extLst>
-                <a:ext uri="{FF2B5EF4-FFF2-40B4-BE49-F238E27FC236}">
-                  <a16:creationId xmlns:a16="http://schemas.microsoft.com/office/drawing/2014/main" id="{898C6ED8-79D2-4B23-AE54-50BC566B6A2E}"/>
-                </a:ext>
-              </a:extLst>
-            </p:cNvPr>
-            <p:cNvPicPr>
-              <a:picLocks noChangeAspect="1"/>
-            </p:cNvPicPr>
-            <p:nvPr/>
-          </p:nvPicPr>
-          <p:blipFill>
-            <a:blip r:embed="rId5">
-              <a:extLst>
-                <a:ext uri="{28A0092B-C50C-407E-A947-70E740481C1C}">
-                  <a14:useLocalDpi xmlns:a14="http://schemas.microsoft.com/office/drawing/2010/main" val="0"/>
-                </a:ext>
-              </a:extLst>
-            </a:blip>
-            <a:stretch>
-              <a:fillRect/>
-            </a:stretch>
-          </p:blipFill>
-          <p:spPr>
-            <a:xfrm>
-              <a:off x="9492733" y="3530628"/>
-              <a:ext cx="612822" cy="612822"/>
-            </a:xfrm>
-            <a:prstGeom prst="rect">
-              <a:avLst/>
-            </a:prstGeom>
-          </p:spPr>
-        </p:pic>
-      </p:grpSp>
-      <p:sp>
-        <p:nvSpPr>
-          <p:cNvPr id="24" name="CuadroTexto 23">
-            <a:extLst>
-              <a:ext uri="{FF2B5EF4-FFF2-40B4-BE49-F238E27FC236}">
-                <a16:creationId xmlns:a16="http://schemas.microsoft.com/office/drawing/2014/main" id="{D70DF145-9971-4A95-BD69-E4ABE0122FDF}"/>
+                <a16:creationId xmlns:a16="http://schemas.microsoft.com/office/drawing/2014/main" id="{F2551BD6-4841-68EE-055C-26F68C85CC3F}"/>
               </a:ext>
             </a:extLst>
           </p:cNvPr>
@@ -10906,8 +9764,8 @@
         </p:nvSpPr>
         <p:spPr>
           <a:xfrm>
-            <a:off x="2467255" y="1643907"/>
-            <a:ext cx="3756010" cy="523220"/>
+            <a:off x="423164" y="1271045"/>
+            <a:ext cx="8172430" cy="369332"/>
           </a:xfrm>
           <a:prstGeom prst="rect">
             <a:avLst/>
@@ -10915,884 +9773,172 @@
           <a:noFill/>
         </p:spPr>
         <p:txBody>
-          <a:bodyPr wrap="square" rtlCol="0">
+          <a:bodyPr wrap="none" rtlCol="0">
             <a:spAutoFit/>
           </a:bodyPr>
           <a:lstStyle/>
           <a:p>
-            <a:pPr algn="ctr"/>
-            <a:r>
-              <a:rPr lang="en-AU" sz="2800" b="1">
-                <a:solidFill>
-                  <a:srgbClr val="002060"/>
-                </a:solidFill>
+            <a:r>
+              <a:rPr lang="es-ES" b="1" dirty="0">
                 <a:latin typeface="Trebuchet MS" panose="020B0603020202020204" pitchFamily="34" charset="0"/>
-                <a:cs typeface="Arial" panose="020B0604020202020204" pitchFamily="34" charset="0"/>
-              </a:rPr>
-              <a:t>Software detection</a:t>
-            </a:r>
+              </a:rPr>
+              <a:t>Main method categories: </a:t>
+            </a:r>
+            <a:r>
+              <a:rPr lang="es-ES" b="1" dirty="0">
+                <a:solidFill>
+                  <a:schemeClr val="accent3">
+                    <a:lumMod val="75000"/>
+                  </a:schemeClr>
+                </a:solidFill>
+                <a:latin typeface="Trebuchet MS" panose="020B0603020202020204" pitchFamily="34" charset="0"/>
+              </a:rPr>
+              <a:t>Segmentation</a:t>
+            </a:r>
+            <a:r>
+              <a:rPr lang="es-ES" dirty="0">
+                <a:latin typeface="Trebuchet MS" panose="020B0603020202020204" pitchFamily="34" charset="0"/>
+              </a:rPr>
+              <a:t>,</a:t>
+            </a:r>
+            <a:r>
+              <a:rPr lang="es-ES" dirty="0">
+                <a:solidFill>
+                  <a:schemeClr val="tx2">
+                    <a:lumMod val="60000"/>
+                    <a:lumOff val="40000"/>
+                  </a:schemeClr>
+                </a:solidFill>
+                <a:latin typeface="Trebuchet MS" panose="020B0603020202020204" pitchFamily="34" charset="0"/>
+              </a:rPr>
+              <a:t> </a:t>
+            </a:r>
+            <a:r>
+              <a:rPr lang="es-ES" b="1" dirty="0">
+                <a:solidFill>
+                  <a:schemeClr val="tx2">
+                    <a:lumMod val="60000"/>
+                    <a:lumOff val="40000"/>
+                  </a:schemeClr>
+                </a:solidFill>
+                <a:latin typeface="Trebuchet MS" panose="020B0603020202020204" pitchFamily="34" charset="0"/>
+              </a:rPr>
+              <a:t>Detection </a:t>
+            </a:r>
+            <a:r>
+              <a:rPr lang="es-ES" b="1" dirty="0">
+                <a:latin typeface="Trebuchet MS" panose="020B0603020202020204" pitchFamily="34" charset="0"/>
+              </a:rPr>
+              <a:t>and</a:t>
+            </a:r>
+            <a:r>
+              <a:rPr lang="es-ES" dirty="0">
+                <a:latin typeface="Trebuchet MS" panose="020B0603020202020204" pitchFamily="34" charset="0"/>
+              </a:rPr>
+              <a:t> </a:t>
+            </a:r>
+            <a:r>
+              <a:rPr lang="es-ES" b="1" dirty="0">
+                <a:solidFill>
+                  <a:schemeClr val="accent1">
+                    <a:lumMod val="75000"/>
+                  </a:schemeClr>
+                </a:solidFill>
+                <a:latin typeface="Trebuchet MS" panose="020B0603020202020204" pitchFamily="34" charset="0"/>
+              </a:rPr>
+              <a:t>Anomaly Detection</a:t>
+            </a:r>
+            <a:endParaRPr lang="es-ES" b="1" dirty="0">
+              <a:latin typeface="Trebuchet MS" panose="020B0603020202020204" pitchFamily="34" charset="0"/>
+            </a:endParaRPr>
           </a:p>
         </p:txBody>
       </p:sp>
-      <p:cxnSp>
-        <p:nvCxnSpPr>
-          <p:cNvPr id="25" name="Conector: angular 24">
+      <p:sp>
+        <p:nvSpPr>
+          <p:cNvPr id="3" name="AutoShape 2">
             <a:extLst>
               <a:ext uri="{FF2B5EF4-FFF2-40B4-BE49-F238E27FC236}">
-                <a16:creationId xmlns:a16="http://schemas.microsoft.com/office/drawing/2014/main" id="{A2F9FFB5-3F7F-4FFD-838D-87072AC8D5A9}"/>
+                <a16:creationId xmlns:a16="http://schemas.microsoft.com/office/drawing/2014/main" id="{E4014664-BCB9-9774-26A6-1444E36CBB75}"/>
               </a:ext>
             </a:extLst>
           </p:cNvPr>
-          <p:cNvCxnSpPr>
-            <a:cxnSpLocks/>
-          </p:cNvCxnSpPr>
-          <p:nvPr/>
-        </p:nvCxnSpPr>
-        <p:spPr>
-          <a:xfrm>
-            <a:off x="1953459" y="2375728"/>
-            <a:ext cx="5260896" cy="540161"/>
-          </a:xfrm>
-          <a:prstGeom prst="bentConnector3">
-            <a:avLst>
-              <a:gd name="adj1" fmla="val 99971"/>
-            </a:avLst>
-          </a:prstGeom>
-          <a:ln w="38100">
-            <a:tailEnd type="triangle"/>
-          </a:ln>
-        </p:spPr>
-        <p:style>
-          <a:lnRef idx="1">
-            <a:schemeClr val="accent1"/>
-          </a:lnRef>
-          <a:fillRef idx="0">
-            <a:schemeClr val="accent1"/>
-          </a:fillRef>
-          <a:effectRef idx="0">
-            <a:schemeClr val="accent1"/>
-          </a:effectRef>
-          <a:fontRef idx="minor">
-            <a:schemeClr val="tx1"/>
-          </a:fontRef>
-        </p:style>
-      </p:cxnSp>
-      <p:cxnSp>
-        <p:nvCxnSpPr>
-          <p:cNvPr id="26" name="Conector: angular 25">
-            <a:extLst>
-              <a:ext uri="{FF2B5EF4-FFF2-40B4-BE49-F238E27FC236}">
-                <a16:creationId xmlns:a16="http://schemas.microsoft.com/office/drawing/2014/main" id="{8211793F-DA4A-4B2D-BC5F-E86074F8E3FF}"/>
-              </a:ext>
-            </a:extLst>
-          </p:cNvPr>
-          <p:cNvCxnSpPr>
-            <a:cxnSpLocks/>
-          </p:cNvCxnSpPr>
-          <p:nvPr/>
-        </p:nvCxnSpPr>
-        <p:spPr>
-          <a:xfrm rot="10800000" flipV="1">
-            <a:off x="1953459" y="2375255"/>
-            <a:ext cx="3756010" cy="478284"/>
-          </a:xfrm>
-          <a:prstGeom prst="bentConnector2">
-            <a:avLst/>
-          </a:prstGeom>
-          <a:ln w="38100">
-            <a:tailEnd type="triangle"/>
-          </a:ln>
-        </p:spPr>
-        <p:style>
-          <a:lnRef idx="1">
-            <a:schemeClr val="accent1"/>
-          </a:lnRef>
-          <a:fillRef idx="0">
-            <a:schemeClr val="accent1"/>
-          </a:fillRef>
-          <a:effectRef idx="0">
-            <a:schemeClr val="accent1"/>
-          </a:effectRef>
-          <a:fontRef idx="minor">
-            <a:schemeClr val="tx1"/>
-          </a:fontRef>
-        </p:style>
-      </p:cxnSp>
-      <p:cxnSp>
-        <p:nvCxnSpPr>
-          <p:cNvPr id="27" name="Conector recto de flecha 26">
-            <a:extLst>
-              <a:ext uri="{FF2B5EF4-FFF2-40B4-BE49-F238E27FC236}">
-                <a16:creationId xmlns:a16="http://schemas.microsoft.com/office/drawing/2014/main" id="{71700A71-0659-4F8D-A60C-AD26F7DCF41A}"/>
-              </a:ext>
-            </a:extLst>
-          </p:cNvPr>
-          <p:cNvCxnSpPr>
-            <a:cxnSpLocks/>
-          </p:cNvCxnSpPr>
-          <p:nvPr/>
-        </p:nvCxnSpPr>
-        <p:spPr>
-          <a:xfrm>
-            <a:off x="4291978" y="2389523"/>
-            <a:ext cx="0" cy="532338"/>
-          </a:xfrm>
-          <a:prstGeom prst="straightConnector1">
-            <a:avLst/>
-          </a:prstGeom>
-          <a:ln w="38100">
-            <a:tailEnd type="triangle"/>
-          </a:ln>
-        </p:spPr>
-        <p:style>
-          <a:lnRef idx="1">
-            <a:schemeClr val="accent1"/>
-          </a:lnRef>
-          <a:fillRef idx="0">
-            <a:schemeClr val="accent1"/>
-          </a:fillRef>
-          <a:effectRef idx="0">
-            <a:schemeClr val="accent1"/>
-          </a:effectRef>
-          <a:fontRef idx="minor">
-            <a:schemeClr val="tx1"/>
-          </a:fontRef>
-        </p:style>
-      </p:cxnSp>
-      <p:sp>
-        <p:nvSpPr>
-          <p:cNvPr id="39" name="Rectángulo 38">
-            <a:extLst>
-              <a:ext uri="{FF2B5EF4-FFF2-40B4-BE49-F238E27FC236}">
-                <a16:creationId xmlns:a16="http://schemas.microsoft.com/office/drawing/2014/main" id="{ECDFAFAA-759D-4FEE-B66E-32C81FDF4CFF}"/>
-              </a:ext>
-            </a:extLst>
-          </p:cNvPr>
-          <p:cNvSpPr/>
+          <p:cNvSpPr>
+            <a:spLocks noChangeAspect="1" noChangeArrowheads="1"/>
+          </p:cNvSpPr>
           <p:nvPr/>
         </p:nvSpPr>
-        <p:spPr>
+        <p:spPr bwMode="auto">
           <a:xfrm>
-            <a:off x="5555754" y="2583508"/>
-            <a:ext cx="2924152" cy="3883967"/>
+            <a:off x="4419599" y="164805"/>
+            <a:ext cx="3416595" cy="3416595"/>
           </a:xfrm>
           <a:prstGeom prst="rect">
             <a:avLst/>
           </a:prstGeom>
           <a:noFill/>
-          <a:ln w="76200" cap="flat" cmpd="sng" algn="ctr">
-            <a:solidFill>
-              <a:srgbClr val="0070C0"/>
-            </a:solidFill>
-            <a:prstDash val="solid"/>
-            <a:round/>
-            <a:headEnd type="none" w="med" len="med"/>
-            <a:tailEnd type="none" w="med" len="med"/>
-          </a:ln>
+          <a:extLst>
+            <a:ext uri="{909E8E84-426E-40DD-AFC4-6F175D3DCCD1}">
+              <a14:hiddenFill xmlns:a14="http://schemas.microsoft.com/office/drawing/2010/main">
+                <a:solidFill>
+                  <a:srgbClr val="FFFFFF"/>
+                </a:solidFill>
+              </a14:hiddenFill>
+            </a:ext>
+          </a:extLst>
         </p:spPr>
-        <p:style>
-          <a:lnRef idx="0">
-            <a:scrgbClr r="0" g="0" b="0"/>
-          </a:lnRef>
-          <a:fillRef idx="0">
-            <a:scrgbClr r="0" g="0" b="0"/>
-          </a:fillRef>
-          <a:effectRef idx="0">
-            <a:scrgbClr r="0" g="0" b="0"/>
-          </a:effectRef>
-          <a:fontRef idx="minor">
-            <a:schemeClr val="accent1"/>
-          </a:fontRef>
-        </p:style>
         <p:txBody>
-          <a:bodyPr rtlCol="0" anchor="ctr"/>
+          <a:bodyPr vert="horz" wrap="square" lIns="91440" tIns="45720" rIns="91440" bIns="45720" numCol="1" anchor="t" anchorCtr="0" compatLnSpc="1">
+            <a:prstTxWarp prst="textNoShape">
+              <a:avLst/>
+            </a:prstTxWarp>
+          </a:bodyPr>
           <a:lstStyle/>
           <a:p>
-            <a:pPr algn="ctr"/>
-            <a:endParaRPr lang="en-US">
-              <a:latin typeface="Trebuchet MS" panose="020B0603020202020204" pitchFamily="34" charset="0"/>
-            </a:endParaRPr>
+            <a:endParaRPr lang="es-ES"/>
           </a:p>
         </p:txBody>
       </p:sp>
-      <p:grpSp>
-        <p:nvGrpSpPr>
-          <p:cNvPr id="43" name="Grupo 42">
+      <p:pic>
+        <p:nvPicPr>
+          <p:cNvPr id="7" name="Imagen 6">
             <a:extLst>
               <a:ext uri="{FF2B5EF4-FFF2-40B4-BE49-F238E27FC236}">
-                <a16:creationId xmlns:a16="http://schemas.microsoft.com/office/drawing/2014/main" id="{0779138B-8C20-4222-8245-C9BD0E7095A5}"/>
+                <a16:creationId xmlns:a16="http://schemas.microsoft.com/office/drawing/2014/main" id="{09EA1990-2F13-A99A-49E8-620D246CD864}"/>
               </a:ext>
             </a:extLst>
           </p:cNvPr>
-          <p:cNvGrpSpPr/>
+          <p:cNvPicPr>
+            <a:picLocks noChangeAspect="1"/>
+          </p:cNvPicPr>
           <p:nvPr/>
-        </p:nvGrpSpPr>
-        <p:grpSpPr>
-          <a:xfrm>
-            <a:off x="5695920" y="3001388"/>
-            <a:ext cx="2643816" cy="3171394"/>
-            <a:chOff x="5695920" y="3001388"/>
-            <a:chExt cx="2643816" cy="3171394"/>
-          </a:xfrm>
-        </p:grpSpPr>
-        <p:grpSp>
-          <p:nvGrpSpPr>
-            <p:cNvPr id="33" name="Grupo 32">
-              <a:extLst>
-                <a:ext uri="{FF2B5EF4-FFF2-40B4-BE49-F238E27FC236}">
-                  <a16:creationId xmlns:a16="http://schemas.microsoft.com/office/drawing/2014/main" id="{2D63005F-0EC0-4A87-B885-1CDC093FF0C6}"/>
-                </a:ext>
-              </a:extLst>
-            </p:cNvPr>
-            <p:cNvGrpSpPr/>
-            <p:nvPr/>
-          </p:nvGrpSpPr>
-          <p:grpSpPr>
-            <a:xfrm>
-              <a:off x="5695920" y="3001388"/>
-              <a:ext cx="2643816" cy="2538186"/>
-              <a:chOff x="6330049" y="3030664"/>
-              <a:chExt cx="2643816" cy="2538186"/>
-            </a:xfrm>
-          </p:grpSpPr>
-          <p:grpSp>
-            <p:nvGrpSpPr>
-              <p:cNvPr id="6" name="Grupo 5">
-                <a:extLst>
-                  <a:ext uri="{FF2B5EF4-FFF2-40B4-BE49-F238E27FC236}">
-                    <a16:creationId xmlns:a16="http://schemas.microsoft.com/office/drawing/2014/main" id="{7E7AA841-1355-4980-A72A-A7D4504CA693}"/>
-                  </a:ext>
-                </a:extLst>
-              </p:cNvPr>
-              <p:cNvGrpSpPr/>
-              <p:nvPr/>
-            </p:nvGrpSpPr>
-            <p:grpSpPr>
-              <a:xfrm>
-                <a:off x="6330049" y="3030664"/>
-                <a:ext cx="2643816" cy="1900689"/>
-                <a:chOff x="2661345" y="2159288"/>
-                <a:chExt cx="2476870" cy="1827414"/>
-              </a:xfrm>
-            </p:grpSpPr>
-            <p:sp>
-              <p:nvSpPr>
-                <p:cNvPr id="7" name="CuadroTexto 6">
-                  <a:extLst>
-                    <a:ext uri="{FF2B5EF4-FFF2-40B4-BE49-F238E27FC236}">
-                      <a16:creationId xmlns:a16="http://schemas.microsoft.com/office/drawing/2014/main" id="{CE8E6761-5A9C-4D71-8042-7BFDCA018672}"/>
-                    </a:ext>
-                  </a:extLst>
-                </p:cNvPr>
-                <p:cNvSpPr txBox="1"/>
-                <p:nvPr/>
-              </p:nvSpPr>
-              <p:spPr>
-                <a:xfrm>
-                  <a:off x="2661345" y="2159288"/>
-                  <a:ext cx="2476870" cy="355094"/>
-                </a:xfrm>
-                <a:prstGeom prst="rect">
-                  <a:avLst/>
-                </a:prstGeom>
-                <a:noFill/>
-              </p:spPr>
-              <p:txBody>
-                <a:bodyPr wrap="square" rtlCol="0">
-                  <a:spAutoFit/>
-                </a:bodyPr>
-                <a:lstStyle/>
-                <a:p>
-                  <a:pPr algn="ctr"/>
-                  <a:r>
-                    <a:rPr lang="es-ES" sz="1800" b="1" dirty="0" err="1">
-                      <a:solidFill>
-                        <a:srgbClr val="002060"/>
-                      </a:solidFill>
-                      <a:latin typeface="Trebuchet MS" panose="020B0603020202020204" pitchFamily="34" charset="0"/>
-                      <a:cs typeface="Arial" panose="020B0604020202020204" pitchFamily="34" charset="0"/>
-                    </a:rPr>
-                    <a:t>Anomaly</a:t>
-                  </a:r>
-                  <a:r>
-                    <a:rPr lang="es-ES" sz="1800" b="1" dirty="0">
-                      <a:solidFill>
-                        <a:srgbClr val="002060"/>
-                      </a:solidFill>
-                      <a:latin typeface="Trebuchet MS" panose="020B0603020202020204" pitchFamily="34" charset="0"/>
-                      <a:cs typeface="Arial" panose="020B0604020202020204" pitchFamily="34" charset="0"/>
-                    </a:rPr>
-                    <a:t> </a:t>
-                  </a:r>
-                  <a:r>
-                    <a:rPr lang="es-ES" sz="1800" b="1" dirty="0" err="1">
-                      <a:solidFill>
-                        <a:srgbClr val="002060"/>
-                      </a:solidFill>
-                      <a:latin typeface="Trebuchet MS" panose="020B0603020202020204" pitchFamily="34" charset="0"/>
-                      <a:cs typeface="Arial" panose="020B0604020202020204" pitchFamily="34" charset="0"/>
-                    </a:rPr>
-                    <a:t>Detection</a:t>
-                  </a:r>
-                  <a:endParaRPr lang="es-ES" sz="1800" b="1" dirty="0">
-                    <a:solidFill>
-                      <a:srgbClr val="002060"/>
-                    </a:solidFill>
-                    <a:latin typeface="Trebuchet MS" panose="020B0603020202020204" pitchFamily="34" charset="0"/>
-                    <a:cs typeface="Arial" panose="020B0604020202020204" pitchFamily="34" charset="0"/>
-                  </a:endParaRPr>
-                </a:p>
-              </p:txBody>
-            </p:sp>
-            <p:grpSp>
-              <p:nvGrpSpPr>
-                <p:cNvPr id="8" name="Grupo 7">
-                  <a:extLst>
-                    <a:ext uri="{FF2B5EF4-FFF2-40B4-BE49-F238E27FC236}">
-                      <a16:creationId xmlns:a16="http://schemas.microsoft.com/office/drawing/2014/main" id="{6BED224B-C832-4538-B134-ED1F64EED682}"/>
-                    </a:ext>
-                  </a:extLst>
-                </p:cNvPr>
-                <p:cNvGrpSpPr/>
-                <p:nvPr/>
-              </p:nvGrpSpPr>
-              <p:grpSpPr>
-                <a:xfrm>
-                  <a:off x="3077355" y="2811272"/>
-                  <a:ext cx="1778705" cy="1175430"/>
-                  <a:chOff x="3077355" y="2811272"/>
-                  <a:chExt cx="1778705" cy="1175430"/>
-                </a:xfrm>
-              </p:grpSpPr>
-              <p:sp>
-                <p:nvSpPr>
-                  <p:cNvPr id="9" name="CuadroTexto 8">
-                    <a:extLst>
-                      <a:ext uri="{FF2B5EF4-FFF2-40B4-BE49-F238E27FC236}">
-                        <a16:creationId xmlns:a16="http://schemas.microsoft.com/office/drawing/2014/main" id="{BEA50637-12DC-4CAC-AE3A-54D9D116F173}"/>
-                      </a:ext>
-                    </a:extLst>
-                  </p:cNvPr>
-                  <p:cNvSpPr txBox="1"/>
-                  <p:nvPr/>
-                </p:nvSpPr>
-                <p:spPr>
-                  <a:xfrm>
-                    <a:off x="3587392" y="3469536"/>
-                    <a:ext cx="1268668" cy="355094"/>
-                  </a:xfrm>
-                  <a:prstGeom prst="rect">
-                    <a:avLst/>
-                  </a:prstGeom>
-                  <a:noFill/>
-                </p:spPr>
-                <p:txBody>
-                  <a:bodyPr wrap="square" rtlCol="0">
-                    <a:spAutoFit/>
-                  </a:bodyPr>
-                  <a:lstStyle/>
-                  <a:p>
-                    <a:pPr algn="ctr"/>
-                    <a:endParaRPr lang="es-ES" dirty="0">
-                      <a:latin typeface="Trebuchet MS" panose="020B0603020202020204" pitchFamily="34" charset="0"/>
-                      <a:cs typeface="Arial" panose="020B0604020202020204" pitchFamily="34" charset="0"/>
-                    </a:endParaRPr>
-                  </a:p>
-                </p:txBody>
-              </p:sp>
-              <p:sp>
-                <p:nvSpPr>
-                  <p:cNvPr id="10" name="CuadroTexto 9">
-                    <a:extLst>
-                      <a:ext uri="{FF2B5EF4-FFF2-40B4-BE49-F238E27FC236}">
-                        <a16:creationId xmlns:a16="http://schemas.microsoft.com/office/drawing/2014/main" id="{79A3BFD8-2BF6-416B-B806-B69576C3D16F}"/>
-                      </a:ext>
-                    </a:extLst>
-                  </p:cNvPr>
-                  <p:cNvSpPr txBox="1"/>
-                  <p:nvPr/>
-                </p:nvSpPr>
-                <p:spPr>
-                  <a:xfrm>
-                    <a:off x="3800040" y="2875331"/>
-                    <a:ext cx="748249" cy="355094"/>
-                  </a:xfrm>
-                  <a:prstGeom prst="rect">
-                    <a:avLst/>
-                  </a:prstGeom>
-                  <a:noFill/>
-                </p:spPr>
-                <p:txBody>
-                  <a:bodyPr wrap="square" rtlCol="0">
-                    <a:spAutoFit/>
-                  </a:bodyPr>
-                  <a:lstStyle/>
-                  <a:p>
-                    <a:pPr algn="ctr"/>
-                    <a:endParaRPr lang="es-ES" dirty="0">
-                      <a:latin typeface="Trebuchet MS" panose="020B0603020202020204" pitchFamily="34" charset="0"/>
-                      <a:cs typeface="Arial" panose="020B0604020202020204" pitchFamily="34" charset="0"/>
-                    </a:endParaRPr>
-                  </a:p>
-                </p:txBody>
-              </p:sp>
-              <p:pic>
-                <p:nvPicPr>
-                  <p:cNvPr id="11" name="Imagen 10">
-                    <a:extLst>
-                      <a:ext uri="{FF2B5EF4-FFF2-40B4-BE49-F238E27FC236}">
-                        <a16:creationId xmlns:a16="http://schemas.microsoft.com/office/drawing/2014/main" id="{91F52B6E-23D2-4E92-8CE7-BE86F768399B}"/>
-                      </a:ext>
-                    </a:extLst>
-                  </p:cNvPr>
-                  <p:cNvPicPr>
-                    <a:picLocks noChangeAspect="1"/>
-                  </p:cNvPicPr>
-                  <p:nvPr/>
-                </p:nvPicPr>
-                <p:blipFill>
-                  <a:blip r:embed="rId6">
-                    <a:extLst>
-                      <a:ext uri="{28A0092B-C50C-407E-A947-70E740481C1C}">
-                        <a14:useLocalDpi xmlns:a14="http://schemas.microsoft.com/office/drawing/2010/main" val="0"/>
-                      </a:ext>
-                    </a:extLst>
-                  </a:blip>
-                  <a:stretch>
-                    <a:fillRect/>
-                  </a:stretch>
-                </p:blipFill>
-                <p:spPr>
-                  <a:xfrm>
-                    <a:off x="3077355" y="3397505"/>
-                    <a:ext cx="589197" cy="589197"/>
-                  </a:xfrm>
-                  <a:prstGeom prst="rect">
-                    <a:avLst/>
-                  </a:prstGeom>
-                </p:spPr>
-              </p:pic>
-              <p:pic>
-                <p:nvPicPr>
-                  <p:cNvPr id="12" name="Imagen 11">
-                    <a:extLst>
-                      <a:ext uri="{FF2B5EF4-FFF2-40B4-BE49-F238E27FC236}">
-                        <a16:creationId xmlns:a16="http://schemas.microsoft.com/office/drawing/2014/main" id="{59C7D827-82BE-4697-8519-2CF7ED35AA35}"/>
-                      </a:ext>
-                    </a:extLst>
-                  </p:cNvPr>
-                  <p:cNvPicPr>
-                    <a:picLocks noChangeAspect="1"/>
-                  </p:cNvPicPr>
-                  <p:nvPr/>
-                </p:nvPicPr>
-                <p:blipFill>
-                  <a:blip r:embed="rId7">
-                    <a:extLst>
-                      <a:ext uri="{28A0092B-C50C-407E-A947-70E740481C1C}">
-                        <a14:useLocalDpi xmlns:a14="http://schemas.microsoft.com/office/drawing/2010/main" val="0"/>
-                      </a:ext>
-                    </a:extLst>
-                  </a:blip>
-                  <a:stretch>
-                    <a:fillRect/>
-                  </a:stretch>
-                </p:blipFill>
-                <p:spPr>
-                  <a:xfrm>
-                    <a:off x="3125661" y="2811272"/>
-                    <a:ext cx="509332" cy="509330"/>
-                  </a:xfrm>
-                  <a:prstGeom prst="rect">
-                    <a:avLst/>
-                  </a:prstGeom>
-                </p:spPr>
-              </p:pic>
-            </p:grpSp>
-          </p:grpSp>
-          <p:sp>
-            <p:nvSpPr>
-              <p:cNvPr id="29" name="CuadroTexto 28">
-                <a:extLst>
-                  <a:ext uri="{FF2B5EF4-FFF2-40B4-BE49-F238E27FC236}">
-                    <a16:creationId xmlns:a16="http://schemas.microsoft.com/office/drawing/2014/main" id="{41EAD90A-CEDE-4B25-AAC2-8A989C9D9EE6}"/>
-                  </a:ext>
-                </a:extLst>
-              </p:cNvPr>
-              <p:cNvSpPr txBox="1"/>
-              <p:nvPr/>
-            </p:nvSpPr>
-            <p:spPr>
-              <a:xfrm>
-                <a:off x="7505171" y="5076650"/>
-                <a:ext cx="879327" cy="369332"/>
-              </a:xfrm>
-              <a:prstGeom prst="rect">
-                <a:avLst/>
-              </a:prstGeom>
-              <a:noFill/>
-            </p:spPr>
-            <p:txBody>
-              <a:bodyPr wrap="square" rtlCol="0">
-                <a:spAutoFit/>
-              </a:bodyPr>
-              <a:lstStyle/>
-              <a:p>
-                <a:pPr algn="ctr"/>
-                <a:endParaRPr lang="es-ES" sz="1800" dirty="0">
-                  <a:latin typeface="Trebuchet MS" panose="020B0603020202020204" pitchFamily="34" charset="0"/>
-                  <a:cs typeface="Arial" panose="020B0604020202020204" pitchFamily="34" charset="0"/>
-                </a:endParaRPr>
-              </a:p>
-            </p:txBody>
-          </p:sp>
-          <p:pic>
-            <p:nvPicPr>
-              <p:cNvPr id="31" name="Imagen 30">
-                <a:extLst>
-                  <a:ext uri="{FF2B5EF4-FFF2-40B4-BE49-F238E27FC236}">
-                    <a16:creationId xmlns:a16="http://schemas.microsoft.com/office/drawing/2014/main" id="{99943494-5C8F-45C6-AC4B-6CD8E93CCDB9}"/>
-                  </a:ext>
-                </a:extLst>
-              </p:cNvPr>
-              <p:cNvPicPr>
-                <a:picLocks noChangeAspect="1"/>
-              </p:cNvPicPr>
-              <p:nvPr/>
-            </p:nvPicPr>
-            <p:blipFill>
-              <a:blip r:embed="rId8">
-                <a:extLst>
-                  <a:ext uri="{28A0092B-C50C-407E-A947-70E740481C1C}">
-                    <a14:useLocalDpi xmlns:a14="http://schemas.microsoft.com/office/drawing/2010/main" val="0"/>
-                  </a:ext>
-                </a:extLst>
-              </a:blip>
-              <a:stretch>
-                <a:fillRect/>
-              </a:stretch>
-            </p:blipFill>
-            <p:spPr>
-              <a:xfrm>
-                <a:off x="6825661" y="5006272"/>
-                <a:ext cx="577347" cy="562578"/>
-              </a:xfrm>
-              <a:prstGeom prst="rect">
-                <a:avLst/>
-              </a:prstGeom>
-            </p:spPr>
-          </p:pic>
-        </p:grpSp>
-        <p:pic>
-          <p:nvPicPr>
-            <p:cNvPr id="41" name="Imagen 40">
-              <a:extLst>
-                <a:ext uri="{FF2B5EF4-FFF2-40B4-BE49-F238E27FC236}">
-                  <a16:creationId xmlns:a16="http://schemas.microsoft.com/office/drawing/2014/main" id="{639BFB31-94B9-4599-AE0E-BC2B1CC5524A}"/>
-                </a:ext>
-              </a:extLst>
-            </p:cNvPr>
-            <p:cNvPicPr>
-              <a:picLocks noChangeAspect="1"/>
-            </p:cNvPicPr>
-            <p:nvPr/>
-          </p:nvPicPr>
-          <p:blipFill>
-            <a:blip r:embed="rId9"/>
-            <a:stretch>
-              <a:fillRect/>
-            </a:stretch>
-          </p:blipFill>
-          <p:spPr>
-            <a:xfrm>
-              <a:off x="6223265" y="5618280"/>
-              <a:ext cx="554502" cy="554502"/>
-            </a:xfrm>
-            <a:prstGeom prst="rect">
-              <a:avLst/>
-            </a:prstGeom>
-          </p:spPr>
-        </p:pic>
-        <p:sp>
-          <p:nvSpPr>
-            <p:cNvPr id="42" name="CuadroTexto 41">
-              <a:extLst>
-                <a:ext uri="{FF2B5EF4-FFF2-40B4-BE49-F238E27FC236}">
-                  <a16:creationId xmlns:a16="http://schemas.microsoft.com/office/drawing/2014/main" id="{0B321083-8B9E-4E91-A00A-7DBD8D517E81}"/>
-                </a:ext>
-              </a:extLst>
-            </p:cNvPr>
-            <p:cNvSpPr txBox="1"/>
-            <p:nvPr/>
-          </p:nvSpPr>
-          <p:spPr>
-            <a:xfrm>
-              <a:off x="6797081" y="5710865"/>
-              <a:ext cx="1249655" cy="369332"/>
-            </a:xfrm>
-            <a:prstGeom prst="rect">
-              <a:avLst/>
-            </a:prstGeom>
-            <a:noFill/>
-          </p:spPr>
-          <p:txBody>
-            <a:bodyPr wrap="square" rtlCol="0">
-              <a:spAutoFit/>
-            </a:bodyPr>
-            <a:lstStyle/>
-            <a:p>
-              <a:pPr algn="ctr"/>
-              <a:endParaRPr lang="es-ES" sz="1800" dirty="0">
-                <a:latin typeface="Trebuchet MS" panose="020B0603020202020204" pitchFamily="34" charset="0"/>
-                <a:cs typeface="Arial" panose="020B0604020202020204" pitchFamily="34" charset="0"/>
-              </a:endParaRPr>
-            </a:p>
-          </p:txBody>
-        </p:sp>
-      </p:grpSp>
-      <p:sp>
-        <p:nvSpPr>
-          <p:cNvPr id="35" name="Content Placeholder 2">
-            <a:extLst>
-              <a:ext uri="{FF2B5EF4-FFF2-40B4-BE49-F238E27FC236}">
-                <a16:creationId xmlns:a16="http://schemas.microsoft.com/office/drawing/2014/main" id="{F6C6C6F5-6254-1148-A7BB-A1C030BB0646}"/>
-              </a:ext>
-            </a:extLst>
-          </p:cNvPr>
-          <p:cNvSpPr txBox="1">
-            <a:spLocks/>
-          </p:cNvSpPr>
-          <p:nvPr/>
-        </p:nvSpPr>
+        </p:nvPicPr>
+        <p:blipFill>
+          <a:blip r:embed="rId3"/>
+          <a:stretch>
+            <a:fillRect/>
+          </a:stretch>
+        </p:blipFill>
         <p:spPr>
           <a:xfrm>
-            <a:off x="1091262" y="959882"/>
-            <a:ext cx="6913398" cy="496313"/>
+            <a:off x="233916" y="2014854"/>
+            <a:ext cx="8676167" cy="3352757"/>
           </a:xfrm>
           <a:prstGeom prst="rect">
             <a:avLst/>
           </a:prstGeom>
         </p:spPr>
-        <p:txBody>
-          <a:bodyPr vert="horz" lIns="91440" tIns="45720" rIns="91440" bIns="45720" rtlCol="0">
-            <a:noAutofit/>
-          </a:bodyPr>
-          <a:lstStyle>
-            <a:defPPr>
-              <a:defRPr lang="en-US"/>
-            </a:defPPr>
-            <a:lvl1pPr marL="0" algn="l" defTabSz="457200" rtl="0" eaLnBrk="1" latinLnBrk="0" hangingPunct="1">
-              <a:defRPr sz="1800" kern="1200">
-                <a:solidFill>
-                  <a:schemeClr val="tx1"/>
-                </a:solidFill>
-                <a:latin typeface="+mn-lt"/>
-                <a:ea typeface="+mn-ea"/>
-                <a:cs typeface="+mn-cs"/>
-              </a:defRPr>
-            </a:lvl1pPr>
-            <a:lvl2pPr marL="457200" algn="l" defTabSz="457200" rtl="0" eaLnBrk="1" latinLnBrk="0" hangingPunct="1">
-              <a:defRPr sz="1800" kern="1200">
-                <a:solidFill>
-                  <a:schemeClr val="tx1"/>
-                </a:solidFill>
-                <a:latin typeface="+mn-lt"/>
-                <a:ea typeface="+mn-ea"/>
-                <a:cs typeface="+mn-cs"/>
-              </a:defRPr>
-            </a:lvl2pPr>
-            <a:lvl3pPr marL="914400" algn="l" defTabSz="457200" rtl="0" eaLnBrk="1" latinLnBrk="0" hangingPunct="1">
-              <a:defRPr sz="1800" kern="1200">
-                <a:solidFill>
-                  <a:schemeClr val="tx1"/>
-                </a:solidFill>
-                <a:latin typeface="+mn-lt"/>
-                <a:ea typeface="+mn-ea"/>
-                <a:cs typeface="+mn-cs"/>
-              </a:defRPr>
-            </a:lvl3pPr>
-            <a:lvl4pPr marL="1371600" algn="l" defTabSz="457200" rtl="0" eaLnBrk="1" latinLnBrk="0" hangingPunct="1">
-              <a:defRPr sz="1800" kern="1200">
-                <a:solidFill>
-                  <a:schemeClr val="tx1"/>
-                </a:solidFill>
-                <a:latin typeface="+mn-lt"/>
-                <a:ea typeface="+mn-ea"/>
-                <a:cs typeface="+mn-cs"/>
-              </a:defRPr>
-            </a:lvl4pPr>
-            <a:lvl5pPr marL="1828800" algn="l" defTabSz="457200" rtl="0" eaLnBrk="1" latinLnBrk="0" hangingPunct="1">
-              <a:defRPr sz="1800" kern="1200">
-                <a:solidFill>
-                  <a:schemeClr val="tx1"/>
-                </a:solidFill>
-                <a:latin typeface="+mn-lt"/>
-                <a:ea typeface="+mn-ea"/>
-                <a:cs typeface="+mn-cs"/>
-              </a:defRPr>
-            </a:lvl5pPr>
-            <a:lvl6pPr marL="2286000" algn="l" defTabSz="457200" rtl="0" eaLnBrk="1" latinLnBrk="0" hangingPunct="1">
-              <a:defRPr sz="1800" kern="1200">
-                <a:solidFill>
-                  <a:schemeClr val="tx1"/>
-                </a:solidFill>
-                <a:latin typeface="+mn-lt"/>
-                <a:ea typeface="+mn-ea"/>
-                <a:cs typeface="+mn-cs"/>
-              </a:defRPr>
-            </a:lvl6pPr>
-            <a:lvl7pPr marL="2743200" algn="l" defTabSz="457200" rtl="0" eaLnBrk="1" latinLnBrk="0" hangingPunct="1">
-              <a:defRPr sz="1800" kern="1200">
-                <a:solidFill>
-                  <a:schemeClr val="tx1"/>
-                </a:solidFill>
-                <a:latin typeface="+mn-lt"/>
-                <a:ea typeface="+mn-ea"/>
-                <a:cs typeface="+mn-cs"/>
-              </a:defRPr>
-            </a:lvl7pPr>
-            <a:lvl8pPr marL="3200400" algn="l" defTabSz="457200" rtl="0" eaLnBrk="1" latinLnBrk="0" hangingPunct="1">
-              <a:defRPr sz="1800" kern="1200">
-                <a:solidFill>
-                  <a:schemeClr val="tx1"/>
-                </a:solidFill>
-                <a:latin typeface="+mn-lt"/>
-                <a:ea typeface="+mn-ea"/>
-                <a:cs typeface="+mn-cs"/>
-              </a:defRPr>
-            </a:lvl8pPr>
-            <a:lvl9pPr marL="3657600" algn="l" defTabSz="457200" rtl="0" eaLnBrk="1" latinLnBrk="0" hangingPunct="1">
-              <a:defRPr sz="1800" kern="1200">
-                <a:solidFill>
-                  <a:schemeClr val="tx1"/>
-                </a:solidFill>
-                <a:latin typeface="+mn-lt"/>
-                <a:ea typeface="+mn-ea"/>
-                <a:cs typeface="+mn-cs"/>
-              </a:defRPr>
-            </a:lvl9pPr>
-          </a:lstStyle>
-          <a:p>
-            <a:pPr algn="just">
-              <a:spcBef>
-                <a:spcPts val="600"/>
-              </a:spcBef>
-              <a:spcAft>
-                <a:spcPts val="600"/>
-              </a:spcAft>
-            </a:pPr>
-            <a:r>
-              <a:rPr lang="en-US" sz="1400" dirty="0">
-                <a:latin typeface="Trebuchet MS" panose="020B0603020202020204" pitchFamily="34" charset="0"/>
-              </a:rPr>
-              <a:t>Typically it is the ”state-of-the-art”. Just one slide containing a summary of the state of the art in this problem. A table summarizing multiple papers/results would be OK</a:t>
-            </a:r>
-          </a:p>
-          <a:p>
-            <a:pPr algn="just"/>
-            <a:endParaRPr lang="en-US" sz="1600" dirty="0">
-              <a:latin typeface="Trebuchet MS" panose="020B0603020202020204" pitchFamily="34" charset="0"/>
-            </a:endParaRPr>
-          </a:p>
-          <a:p>
-            <a:pPr marL="285750" indent="-285750" algn="just">
-              <a:buFont typeface="Arial" panose="020B0604020202020204" pitchFamily="34" charset="0"/>
-              <a:buChar char="•"/>
-            </a:pPr>
-            <a:endParaRPr lang="en-GB" sz="900" dirty="0">
-              <a:latin typeface="Trebuchet MS" panose="020B0603020202020204" pitchFamily="34" charset="0"/>
-            </a:endParaRPr>
-          </a:p>
-        </p:txBody>
-      </p:sp>
+      </p:pic>
     </p:spTree>
     <p:extLst>
       <p:ext uri="{BB962C8B-B14F-4D97-AF65-F5344CB8AC3E}">
-        <p14:creationId xmlns:p14="http://schemas.microsoft.com/office/powerpoint/2010/main" val="1021184358"/>
+        <p14:creationId xmlns:p14="http://schemas.microsoft.com/office/powerpoint/2010/main" val="3733304673"/>
       </p:ext>
     </p:extLst>
   </p:cSld>
   <p:clrMapOvr>
     <a:masterClrMapping/>
   </p:clrMapOvr>
-  <p:timing>
-    <p:tnLst>
-      <p:par>
-        <p:cTn id="1" dur="indefinite" restart="never" nodeType="tmRoot">
-          <p:childTnLst>
-            <p:seq concurrent="1" nextAc="seek">
-              <p:cTn id="2" dur="indefinite" nodeType="mainSeq">
-                <p:childTnLst>
-                  <p:par>
-                    <p:cTn id="3" fill="hold">
-                      <p:stCondLst>
-                        <p:cond delay="indefinite"/>
-                      </p:stCondLst>
-                      <p:childTnLst>
-                        <p:par>
-                          <p:cTn id="4" fill="hold">
-                            <p:stCondLst>
-                              <p:cond delay="0"/>
-                            </p:stCondLst>
-                            <p:childTnLst>
-                              <p:par>
-                                <p:cTn id="5" presetID="1" presetClass="entr" presetSubtype="0" fill="hold" grpId="0" nodeType="clickEffect">
-                                  <p:stCondLst>
-                                    <p:cond delay="0"/>
-                                  </p:stCondLst>
-                                  <p:childTnLst>
-                                    <p:set>
-                                      <p:cBhvr>
-                                        <p:cTn id="6" dur="1" fill="hold">
-                                          <p:stCondLst>
-                                            <p:cond delay="0"/>
-                                          </p:stCondLst>
-                                        </p:cTn>
-                                        <p:tgtEl>
-                                          <p:spTgt spid="39"/>
-                                        </p:tgtEl>
-                                        <p:attrNameLst>
-                                          <p:attrName>style.visibility</p:attrName>
-                                        </p:attrNameLst>
-                                      </p:cBhvr>
-                                      <p:to>
-                                        <p:strVal val="visible"/>
-                                      </p:to>
-                                    </p:set>
-                                  </p:childTnLst>
-                                </p:cTn>
-                              </p:par>
-                            </p:childTnLst>
-                          </p:cTn>
-                        </p:par>
-                      </p:childTnLst>
-                    </p:cTn>
-                  </p:par>
-                </p:childTnLst>
-              </p:cTn>
-              <p:prevCondLst>
-                <p:cond evt="onPrev" delay="0">
-                  <p:tgtEl>
-                    <p:sldTgt/>
-                  </p:tgtEl>
-                </p:cond>
-              </p:prevCondLst>
-              <p:nextCondLst>
-                <p:cond evt="onNext" delay="0">
-                  <p:tgtEl>
-                    <p:sldTgt/>
-                  </p:tgtEl>
-                </p:cond>
-              </p:nextCondLst>
-            </p:seq>
-          </p:childTnLst>
-        </p:cTn>
-      </p:par>
-    </p:tnLst>
-    <p:bldLst>
-      <p:bldP spid="39" grpId="0" animBg="1"/>
-    </p:bldLst>
-  </p:timing>
 </p:sld>
 </file>
 
@@ -11850,7 +9996,7 @@
             <a:pPr algn="l"/>
             <a:r>
               <a:rPr lang="en-GB" sz="2800" b="1" dirty="0"/>
-              <a:t>2. Literature review – Deep Learning (Jaime)</a:t>
+              <a:t>2. Literature review – Deep Learning</a:t>
             </a:r>
           </a:p>
         </p:txBody>
@@ -12069,386 +10215,6 @@
         <p:cNvPr id="1" name="">
           <a:extLst>
             <a:ext uri="{FF2B5EF4-FFF2-40B4-BE49-F238E27FC236}">
-              <a16:creationId xmlns:a16="http://schemas.microsoft.com/office/drawing/2014/main" id="{DFE16D71-5974-0503-CBCB-9203F0549B41}"/>
-            </a:ext>
-          </a:extLst>
-        </p:cNvPr>
-        <p:cNvGrpSpPr/>
-        <p:nvPr/>
-      </p:nvGrpSpPr>
-      <p:grpSpPr>
-        <a:xfrm>
-          <a:off x="0" y="0"/>
-          <a:ext cx="0" cy="0"/>
-          <a:chOff x="0" y="0"/>
-          <a:chExt cx="0" cy="0"/>
-        </a:xfrm>
-      </p:grpSpPr>
-      <p:sp>
-        <p:nvSpPr>
-          <p:cNvPr id="2" name="Title 1">
-            <a:extLst>
-              <a:ext uri="{FF2B5EF4-FFF2-40B4-BE49-F238E27FC236}">
-                <a16:creationId xmlns:a16="http://schemas.microsoft.com/office/drawing/2014/main" id="{971E8495-DCDD-44BF-A761-F1C09DFC7E67}"/>
-              </a:ext>
-            </a:extLst>
-          </p:cNvPr>
-          <p:cNvSpPr>
-            <a:spLocks noGrp="1"/>
-          </p:cNvSpPr>
-          <p:nvPr>
-            <p:ph type="title"/>
-          </p:nvPr>
-        </p:nvSpPr>
-        <p:spPr>
-          <a:xfrm>
-            <a:off x="457200" y="274638"/>
-            <a:ext cx="7302500" cy="788278"/>
-          </a:xfrm>
-        </p:spPr>
-        <p:txBody>
-          <a:bodyPr>
-            <a:normAutofit/>
-          </a:bodyPr>
-          <a:lstStyle/>
-          <a:p>
-            <a:pPr algn="l"/>
-            <a:r>
-              <a:rPr lang="en-GB" sz="2800" b="1" dirty="0"/>
-              <a:t>2. Literature review – Deep Learning (Pablo)</a:t>
-            </a:r>
-          </a:p>
-        </p:txBody>
-      </p:sp>
-      <p:sp>
-        <p:nvSpPr>
-          <p:cNvPr id="30" name="Rectangle 7">
-            <a:extLst>
-              <a:ext uri="{FF2B5EF4-FFF2-40B4-BE49-F238E27FC236}">
-                <a16:creationId xmlns:a16="http://schemas.microsoft.com/office/drawing/2014/main" id="{E2998411-BBE1-1077-A886-49B61CE6AF93}"/>
-              </a:ext>
-            </a:extLst>
-          </p:cNvPr>
-          <p:cNvSpPr/>
-          <p:nvPr/>
-        </p:nvSpPr>
-        <p:spPr>
-          <a:xfrm>
-            <a:off x="80137" y="66509"/>
-            <a:ext cx="6565636" cy="303085"/>
-          </a:xfrm>
-          <a:prstGeom prst="rect">
-            <a:avLst/>
-          </a:prstGeom>
-          <a:noFill/>
-          <a:ln>
-            <a:noFill/>
-          </a:ln>
-          <a:extLst>
-            <a:ext uri="{909E8E84-426E-40DD-AFC4-6F175D3DCCD1}">
-              <a14:hiddenFill xmlns:a14="http://schemas.microsoft.com/office/drawing/2010/main">
-                <a:solidFill>
-                  <a:srgbClr val="FFFFFF"/>
-                </a:solidFill>
-              </a14:hiddenFill>
-            </a:ext>
-            <a:ext uri="{91240B29-F687-4F45-9708-019B960494DF}">
-              <a14:hiddenLine xmlns:a14="http://schemas.microsoft.com/office/drawing/2010/main" w="9525" cap="flat">
-                <a:solidFill>
-                  <a:srgbClr val="000000"/>
-                </a:solidFill>
-                <a:miter lim="800000"/>
-                <a:headEnd type="none" w="med" len="med"/>
-                <a:tailEnd type="none" w="med" len="med"/>
-              </a14:hiddenLine>
-            </a:ext>
-          </a:extLst>
-        </p:spPr>
-        <p:txBody>
-          <a:bodyPr lIns="0" tIns="0" rIns="0" bIns="0"/>
-          <a:lstStyle/>
-          <a:p>
-            <a:endParaRPr lang="en-US" sz="800" b="1" dirty="0">
-              <a:solidFill>
-                <a:srgbClr val="535353"/>
-              </a:solidFill>
-              <a:latin typeface="Geneva" charset="0"/>
-              <a:cs typeface="Geneva" charset="0"/>
-            </a:endParaRPr>
-          </a:p>
-        </p:txBody>
-      </p:sp>
-      <p:sp>
-        <p:nvSpPr>
-          <p:cNvPr id="32" name="CuadroTexto 31">
-            <a:extLst>
-              <a:ext uri="{FF2B5EF4-FFF2-40B4-BE49-F238E27FC236}">
-                <a16:creationId xmlns:a16="http://schemas.microsoft.com/office/drawing/2014/main" id="{F2551BD6-4841-68EE-055C-26F68C85CC3F}"/>
-              </a:ext>
-            </a:extLst>
-          </p:cNvPr>
-          <p:cNvSpPr txBox="1"/>
-          <p:nvPr/>
-        </p:nvSpPr>
-        <p:spPr>
-          <a:xfrm>
-            <a:off x="423164" y="1271045"/>
-            <a:ext cx="8172430" cy="369332"/>
-          </a:xfrm>
-          <a:prstGeom prst="rect">
-            <a:avLst/>
-          </a:prstGeom>
-          <a:noFill/>
-        </p:spPr>
-        <p:txBody>
-          <a:bodyPr wrap="none" rtlCol="0">
-            <a:spAutoFit/>
-          </a:bodyPr>
-          <a:lstStyle/>
-          <a:p>
-            <a:r>
-              <a:rPr lang="es-ES" b="1" dirty="0">
-                <a:latin typeface="Trebuchet MS" panose="020B0603020202020204" pitchFamily="34" charset="0"/>
-              </a:rPr>
-              <a:t>Main method categories: </a:t>
-            </a:r>
-            <a:r>
-              <a:rPr lang="es-ES" b="1" dirty="0">
-                <a:solidFill>
-                  <a:schemeClr val="accent3">
-                    <a:lumMod val="75000"/>
-                  </a:schemeClr>
-                </a:solidFill>
-                <a:latin typeface="Trebuchet MS" panose="020B0603020202020204" pitchFamily="34" charset="0"/>
-              </a:rPr>
-              <a:t>Segmentation</a:t>
-            </a:r>
-            <a:r>
-              <a:rPr lang="es-ES" dirty="0">
-                <a:latin typeface="Trebuchet MS" panose="020B0603020202020204" pitchFamily="34" charset="0"/>
-              </a:rPr>
-              <a:t>,</a:t>
-            </a:r>
-            <a:r>
-              <a:rPr lang="es-ES" dirty="0">
-                <a:solidFill>
-                  <a:schemeClr val="tx2">
-                    <a:lumMod val="60000"/>
-                    <a:lumOff val="40000"/>
-                  </a:schemeClr>
-                </a:solidFill>
-                <a:latin typeface="Trebuchet MS" panose="020B0603020202020204" pitchFamily="34" charset="0"/>
-              </a:rPr>
-              <a:t> </a:t>
-            </a:r>
-            <a:r>
-              <a:rPr lang="es-ES" b="1" dirty="0">
-                <a:solidFill>
-                  <a:schemeClr val="tx2">
-                    <a:lumMod val="60000"/>
-                    <a:lumOff val="40000"/>
-                  </a:schemeClr>
-                </a:solidFill>
-                <a:latin typeface="Trebuchet MS" panose="020B0603020202020204" pitchFamily="34" charset="0"/>
-              </a:rPr>
-              <a:t>Detection </a:t>
-            </a:r>
-            <a:r>
-              <a:rPr lang="es-ES" b="1" dirty="0">
-                <a:latin typeface="Trebuchet MS" panose="020B0603020202020204" pitchFamily="34" charset="0"/>
-              </a:rPr>
-              <a:t>and</a:t>
-            </a:r>
-            <a:r>
-              <a:rPr lang="es-ES" dirty="0">
-                <a:latin typeface="Trebuchet MS" panose="020B0603020202020204" pitchFamily="34" charset="0"/>
-              </a:rPr>
-              <a:t> </a:t>
-            </a:r>
-            <a:r>
-              <a:rPr lang="es-ES" b="1" dirty="0">
-                <a:solidFill>
-                  <a:schemeClr val="accent1">
-                    <a:lumMod val="75000"/>
-                  </a:schemeClr>
-                </a:solidFill>
-                <a:latin typeface="Trebuchet MS" panose="020B0603020202020204" pitchFamily="34" charset="0"/>
-              </a:rPr>
-              <a:t>Anomaly Detection</a:t>
-            </a:r>
-            <a:endParaRPr lang="es-ES" b="1" dirty="0">
-              <a:latin typeface="Trebuchet MS" panose="020B0603020202020204" pitchFamily="34" charset="0"/>
-            </a:endParaRPr>
-          </a:p>
-        </p:txBody>
-      </p:sp>
-      <p:pic>
-        <p:nvPicPr>
-          <p:cNvPr id="4" name="Imagen 3">
-            <a:extLst>
-              <a:ext uri="{FF2B5EF4-FFF2-40B4-BE49-F238E27FC236}">
-                <a16:creationId xmlns:a16="http://schemas.microsoft.com/office/drawing/2014/main" id="{B5CB8C1D-6036-4D0A-EAE0-E0042920700E}"/>
-              </a:ext>
-            </a:extLst>
-          </p:cNvPr>
-          <p:cNvPicPr>
-            <a:picLocks noChangeAspect="1"/>
-          </p:cNvPicPr>
-          <p:nvPr/>
-        </p:nvPicPr>
-        <p:blipFill>
-          <a:blip r:embed="rId3"/>
-          <a:stretch>
-            <a:fillRect/>
-          </a:stretch>
-        </p:blipFill>
-        <p:spPr>
-          <a:xfrm>
-            <a:off x="323872" y="1964367"/>
-            <a:ext cx="8496255" cy="3314785"/>
-          </a:xfrm>
-          <a:prstGeom prst="rect">
-            <a:avLst/>
-          </a:prstGeom>
-        </p:spPr>
-      </p:pic>
-    </p:spTree>
-    <p:extLst>
-      <p:ext uri="{BB962C8B-B14F-4D97-AF65-F5344CB8AC3E}">
-        <p14:creationId xmlns:p14="http://schemas.microsoft.com/office/powerpoint/2010/main" val="3733304673"/>
-      </p:ext>
-    </p:extLst>
-  </p:cSld>
-  <p:clrMapOvr>
-    <a:masterClrMapping/>
-  </p:clrMapOvr>
-</p:sld>
-</file>
-
-<file path=ppt/slides/slide8.xml><?xml version="1.0" encoding="utf-8"?>
-<p:sld xmlns:a="http://schemas.openxmlformats.org/drawingml/2006/main" xmlns:r="http://schemas.openxmlformats.org/officeDocument/2006/relationships" xmlns:p="http://schemas.openxmlformats.org/presentationml/2006/main">
-  <p:cSld>
-    <p:spTree>
-      <p:nvGrpSpPr>
-        <p:cNvPr id="1" name=""/>
-        <p:cNvGrpSpPr/>
-        <p:nvPr/>
-      </p:nvGrpSpPr>
-      <p:grpSpPr>
-        <a:xfrm>
-          <a:off x="0" y="0"/>
-          <a:ext cx="0" cy="0"/>
-          <a:chOff x="0" y="0"/>
-          <a:chExt cx="0" cy="0"/>
-        </a:xfrm>
-      </p:grpSpPr>
-      <p:sp>
-        <p:nvSpPr>
-          <p:cNvPr id="2" name="Title 1"/>
-          <p:cNvSpPr>
-            <a:spLocks noGrp="1"/>
-          </p:cNvSpPr>
-          <p:nvPr>
-            <p:ph type="title"/>
-          </p:nvPr>
-        </p:nvSpPr>
-        <p:spPr>
-          <a:xfrm>
-            <a:off x="457200" y="274638"/>
-            <a:ext cx="7302500" cy="788278"/>
-          </a:xfrm>
-        </p:spPr>
-        <p:txBody>
-          <a:bodyPr>
-            <a:normAutofit/>
-          </a:bodyPr>
-          <a:lstStyle/>
-          <a:p>
-            <a:pPr algn="l"/>
-            <a:r>
-              <a:rPr lang="en-GB" sz="2800" dirty="0"/>
-              <a:t>3. </a:t>
-            </a:r>
-            <a:r>
-              <a:rPr lang="en-GB" sz="2800" b="1" dirty="0"/>
-              <a:t>Selected method 01: XXXX</a:t>
-            </a:r>
-          </a:p>
-        </p:txBody>
-      </p:sp>
-      <p:sp>
-        <p:nvSpPr>
-          <p:cNvPr id="30" name="Rectangle 7"/>
-          <p:cNvSpPr/>
-          <p:nvPr/>
-        </p:nvSpPr>
-        <p:spPr>
-          <a:xfrm>
-            <a:off x="80137" y="66509"/>
-            <a:ext cx="6565636" cy="303085"/>
-          </a:xfrm>
-          <a:prstGeom prst="rect">
-            <a:avLst/>
-          </a:prstGeom>
-          <a:noFill/>
-          <a:ln>
-            <a:noFill/>
-          </a:ln>
-          <a:extLst>
-            <a:ext uri="{909E8E84-426E-40DD-AFC4-6F175D3DCCD1}">
-              <a14:hiddenFill xmlns:a14="http://schemas.microsoft.com/office/drawing/2010/main">
-                <a:solidFill>
-                  <a:srgbClr val="FFFFFF"/>
-                </a:solidFill>
-              </a14:hiddenFill>
-            </a:ext>
-            <a:ext uri="{91240B29-F687-4F45-9708-019B960494DF}">
-              <a14:hiddenLine xmlns:a14="http://schemas.microsoft.com/office/drawing/2010/main" w="9525" cap="flat">
-                <a:solidFill>
-                  <a:srgbClr val="000000"/>
-                </a:solidFill>
-                <a:miter lim="800000"/>
-                <a:headEnd type="none" w="med" len="med"/>
-                <a:tailEnd type="none" w="med" len="med"/>
-              </a14:hiddenLine>
-            </a:ext>
-          </a:extLst>
-        </p:spPr>
-        <p:txBody>
-          <a:bodyPr lIns="0" tIns="0" rIns="0" bIns="0"/>
-          <a:lstStyle/>
-          <a:p>
-            <a:endParaRPr lang="en-US" sz="800" b="1" dirty="0">
-              <a:solidFill>
-                <a:srgbClr val="535353"/>
-              </a:solidFill>
-              <a:latin typeface="Geneva" charset="0"/>
-              <a:cs typeface="Geneva" charset="0"/>
-            </a:endParaRPr>
-          </a:p>
-        </p:txBody>
-      </p:sp>
-    </p:spTree>
-    <p:extLst>
-      <p:ext uri="{BB962C8B-B14F-4D97-AF65-F5344CB8AC3E}">
-        <p14:creationId xmlns:p14="http://schemas.microsoft.com/office/powerpoint/2010/main" val="569968867"/>
-      </p:ext>
-    </p:extLst>
-  </p:cSld>
-  <p:clrMapOvr>
-    <a:masterClrMapping/>
-  </p:clrMapOvr>
-</p:sld>
-</file>
-
-<file path=ppt/slides/slide9.xml><?xml version="1.0" encoding="utf-8"?>
-<p:sld xmlns:a="http://schemas.openxmlformats.org/drawingml/2006/main" xmlns:r="http://schemas.openxmlformats.org/officeDocument/2006/relationships" xmlns:p="http://schemas.openxmlformats.org/presentationml/2006/main">
-  <p:cSld>
-    <p:spTree>
-      <p:nvGrpSpPr>
-        <p:cNvPr id="1" name="">
-          <a:extLst>
-            <a:ext uri="{FF2B5EF4-FFF2-40B4-BE49-F238E27FC236}">
               <a16:creationId xmlns:a16="http://schemas.microsoft.com/office/drawing/2014/main" id="{BEF586A0-698D-1681-4144-157F9E6AF8EC}"/>
             </a:ext>
           </a:extLst>
@@ -12499,7 +10265,7 @@
             </a:r>
             <a:r>
               <a:rPr lang="en-GB" sz="2800" b="1" dirty="0"/>
-              <a:t>Selected method (Deep 02): Grounded-SAM</a:t>
+              <a:t>Selected method (Deep 1): Grounded-SAM</a:t>
             </a:r>
           </a:p>
         </p:txBody>
@@ -12681,30 +10447,30 @@
               <a:t> </a:t>
             </a:r>
             <a:r>
-              <a:rPr lang="es-ES" altLang="es-ES" dirty="0" err="1">
-                <a:latin typeface="Trebuchet MS" panose="020B0603020202020204" pitchFamily="34" charset="0"/>
+              <a:rPr lang="es-ES" altLang="es-ES" b="1" dirty="0" err="1">
+                <a:latin typeface="+mj-lt"/>
               </a:rPr>
               <a:t>Detection</a:t>
             </a:r>
             <a:r>
-              <a:rPr lang="es-ES" altLang="es-ES" dirty="0">
-                <a:latin typeface="Trebuchet MS" panose="020B0603020202020204" pitchFamily="34" charset="0"/>
+              <a:rPr lang="es-ES" altLang="es-ES" b="1" dirty="0">
+                <a:latin typeface="+mj-lt"/>
               </a:rPr>
               <a:t> + </a:t>
             </a:r>
             <a:r>
-              <a:rPr lang="es-ES" altLang="es-ES" dirty="0" err="1">
-                <a:latin typeface="Trebuchet MS" panose="020B0603020202020204" pitchFamily="34" charset="0"/>
+              <a:rPr lang="es-ES" altLang="es-ES" b="1" dirty="0" err="1">
+                <a:latin typeface="+mj-lt"/>
               </a:rPr>
               <a:t>segmentation</a:t>
             </a:r>
             <a:r>
-              <a:rPr lang="es-ES" altLang="es-ES" dirty="0">
-                <a:latin typeface="Trebuchet MS" panose="020B0603020202020204" pitchFamily="34" charset="0"/>
+              <a:rPr lang="es-ES" altLang="es-ES" b="1" dirty="0">
+                <a:latin typeface="+mj-lt"/>
               </a:rPr>
               <a:t> pipeline (2-stage)</a:t>
             </a:r>
-            <a:endParaRPr kumimoji="0" lang="es-ES" altLang="es-ES" b="0" i="0" u="none" strike="noStrike" cap="none" normalizeH="0" baseline="0" dirty="0">
+            <a:endParaRPr kumimoji="0" lang="es-ES" altLang="es-ES" b="1" i="0" u="none" strike="noStrike" cap="none" normalizeH="0" baseline="0" dirty="0">
               <a:ln>
                 <a:noFill/>
               </a:ln>
@@ -12712,7 +10478,7 @@
                 <a:schemeClr val="tx1"/>
               </a:solidFill>
               <a:effectLst/>
-              <a:latin typeface="Trebuchet MS" panose="020B0603020202020204" pitchFamily="34" charset="0"/>
+              <a:latin typeface="+mj-lt"/>
             </a:endParaRPr>
           </a:p>
           <a:p>
@@ -12727,7 +10493,7 @@
               <a:buChar char="•"/>
             </a:pPr>
             <a:r>
-              <a:rPr kumimoji="0" lang="es-ES" altLang="es-ES" sz="2000" b="0" i="0" u="none" strike="noStrike" cap="none" normalizeH="0" baseline="0" dirty="0">
+              <a:rPr kumimoji="0" lang="es-ES" altLang="es-ES" sz="2000" b="1" i="0" u="none" strike="noStrike" cap="none" normalizeH="0" baseline="0" dirty="0">
                 <a:ln>
                   <a:noFill/>
                 </a:ln>
@@ -12735,12 +10501,12 @@
                   <a:schemeClr val="tx1"/>
                 </a:solidFill>
                 <a:effectLst/>
-                <a:latin typeface="Arial" panose="020B0604020202020204" pitchFamily="34" charset="0"/>
+                <a:latin typeface="+mj-lt"/>
               </a:rPr>
               <a:t> </a:t>
             </a:r>
             <a:r>
-              <a:rPr kumimoji="0" lang="es-ES" altLang="es-ES" b="0" i="0" u="none" strike="noStrike" cap="none" normalizeH="0" baseline="0" dirty="0">
+              <a:rPr kumimoji="0" lang="es-ES" altLang="es-ES" b="1" i="0" u="none" strike="noStrike" cap="none" normalizeH="0" baseline="0" dirty="0">
                 <a:ln>
                   <a:noFill/>
                 </a:ln>
@@ -12748,12 +10514,12 @@
                   <a:schemeClr val="tx1"/>
                 </a:solidFill>
                 <a:effectLst/>
-                <a:latin typeface="Trebuchet MS" panose="020B0603020202020204" pitchFamily="34" charset="0"/>
+                <a:latin typeface="+mj-lt"/>
               </a:rPr>
               <a:t>Open-</a:t>
             </a:r>
             <a:r>
-              <a:rPr kumimoji="0" lang="es-ES" altLang="es-ES" b="0" i="0" u="none" strike="noStrike" cap="none" normalizeH="0" baseline="0" dirty="0" err="1">
+              <a:rPr kumimoji="0" lang="es-ES" altLang="es-ES" b="1" i="0" u="none" strike="noStrike" cap="none" normalizeH="0" baseline="0" dirty="0" err="1">
                 <a:ln>
                   <a:noFill/>
                 </a:ln>
@@ -12761,12 +10527,12 @@
                   <a:schemeClr val="tx1"/>
                 </a:solidFill>
                 <a:effectLst/>
-                <a:latin typeface="Trebuchet MS" panose="020B0603020202020204" pitchFamily="34" charset="0"/>
+                <a:latin typeface="+mj-lt"/>
               </a:rPr>
               <a:t>vocabulary</a:t>
             </a:r>
-            <a:endParaRPr lang="es-ES" altLang="es-ES" dirty="0">
-              <a:latin typeface="Trebuchet MS" panose="020B0603020202020204" pitchFamily="34" charset="0"/>
+            <a:endParaRPr lang="es-ES" altLang="es-ES" b="1" dirty="0">
+              <a:latin typeface="+mj-lt"/>
             </a:endParaRPr>
           </a:p>
           <a:p>
@@ -12781,7 +10547,7 @@
               <a:buChar char="•"/>
             </a:pPr>
             <a:r>
-              <a:rPr kumimoji="0" lang="es-ES" altLang="es-ES" sz="2000" b="0" i="0" u="none" strike="noStrike" cap="none" normalizeH="0" baseline="0" dirty="0">
+              <a:rPr kumimoji="0" lang="es-ES" altLang="es-ES" sz="2000" b="1" i="0" u="none" strike="noStrike" cap="none" normalizeH="0" baseline="0" dirty="0">
                 <a:ln>
                   <a:noFill/>
                 </a:ln>
@@ -12789,12 +10555,12 @@
                   <a:schemeClr val="tx1"/>
                 </a:solidFill>
                 <a:effectLst/>
-                <a:latin typeface="Arial" panose="020B0604020202020204" pitchFamily="34" charset="0"/>
+                <a:latin typeface="+mj-lt"/>
               </a:rPr>
               <a:t> </a:t>
             </a:r>
             <a:r>
-              <a:rPr kumimoji="0" lang="es-ES" altLang="es-ES" b="0" i="0" u="none" strike="noStrike" cap="none" normalizeH="0" baseline="0" dirty="0" err="1">
+              <a:rPr kumimoji="0" lang="es-ES" altLang="es-ES" b="1" i="0" u="none" strike="noStrike" cap="none" normalizeH="0" baseline="0" dirty="0" err="1">
                 <a:ln>
                   <a:noFill/>
                 </a:ln>
@@ -12802,12 +10568,12 @@
                   <a:schemeClr val="tx1"/>
                 </a:solidFill>
                 <a:effectLst/>
-                <a:latin typeface="Trebuchet MS" panose="020B0603020202020204" pitchFamily="34" charset="0"/>
+                <a:latin typeface="+mj-lt"/>
               </a:rPr>
               <a:t>Object</a:t>
             </a:r>
             <a:r>
-              <a:rPr kumimoji="0" lang="es-ES" altLang="es-ES" b="0" i="0" u="none" strike="noStrike" cap="none" normalizeH="0" baseline="0" dirty="0">
+              <a:rPr kumimoji="0" lang="es-ES" altLang="es-ES" b="1" i="0" u="none" strike="noStrike" cap="none" normalizeH="0" baseline="0" dirty="0">
                 <a:ln>
                   <a:noFill/>
                 </a:ln>
@@ -12815,12 +10581,12 @@
                   <a:schemeClr val="tx1"/>
                 </a:solidFill>
                 <a:effectLst/>
-                <a:latin typeface="Trebuchet MS" panose="020B0603020202020204" pitchFamily="34" charset="0"/>
+                <a:latin typeface="+mj-lt"/>
               </a:rPr>
               <a:t> </a:t>
             </a:r>
             <a:r>
-              <a:rPr kumimoji="0" lang="es-ES" altLang="es-ES" b="0" i="0" u="none" strike="noStrike" cap="none" normalizeH="0" baseline="0" dirty="0" err="1">
+              <a:rPr kumimoji="0" lang="es-ES" altLang="es-ES" b="1" i="0" u="none" strike="noStrike" cap="none" normalizeH="0" baseline="0" dirty="0" err="1">
                 <a:ln>
                   <a:noFill/>
                 </a:ln>
@@ -12828,11 +10594,11 @@
                   <a:schemeClr val="tx1"/>
                 </a:solidFill>
                 <a:effectLst/>
-                <a:latin typeface="Trebuchet MS" panose="020B0603020202020204" pitchFamily="34" charset="0"/>
+                <a:latin typeface="+mj-lt"/>
               </a:rPr>
               <a:t>detection</a:t>
             </a:r>
-            <a:endParaRPr kumimoji="0" lang="es-ES" altLang="es-ES" b="0" i="0" u="none" strike="noStrike" cap="none" normalizeH="0" baseline="0" dirty="0">
+            <a:endParaRPr kumimoji="0" lang="es-ES" altLang="es-ES" b="1" i="0" u="none" strike="noStrike" cap="none" normalizeH="0" baseline="0" dirty="0">
               <a:ln>
                 <a:noFill/>
               </a:ln>
@@ -12840,7 +10606,7 @@
                 <a:schemeClr val="tx1"/>
               </a:solidFill>
               <a:effectLst/>
-              <a:latin typeface="Trebuchet MS" panose="020B0603020202020204" pitchFamily="34" charset="0"/>
+              <a:latin typeface="+mj-lt"/>
             </a:endParaRPr>
           </a:p>
           <a:p>
@@ -12855,7 +10621,7 @@
               <a:buChar char="•"/>
             </a:pPr>
             <a:r>
-              <a:rPr kumimoji="0" lang="es-ES" altLang="es-ES" sz="2000" b="0" i="0" u="none" strike="noStrike" cap="none" normalizeH="0" baseline="0" dirty="0">
+              <a:rPr kumimoji="0" lang="es-ES" altLang="es-ES" sz="2000" b="1" i="0" u="none" strike="noStrike" cap="none" normalizeH="0" baseline="0" dirty="0">
                 <a:ln>
                   <a:noFill/>
                 </a:ln>
@@ -12863,12 +10629,12 @@
                   <a:schemeClr val="tx1"/>
                 </a:solidFill>
                 <a:effectLst/>
-                <a:latin typeface="Arial" panose="020B0604020202020204" pitchFamily="34" charset="0"/>
+                <a:latin typeface="+mj-lt"/>
               </a:rPr>
               <a:t> </a:t>
             </a:r>
             <a:r>
-              <a:rPr kumimoji="0" lang="es-ES" altLang="es-ES" b="0" i="0" u="none" strike="noStrike" cap="none" normalizeH="0" baseline="0" dirty="0">
+              <a:rPr kumimoji="0" lang="es-ES" altLang="es-ES" b="1" i="0" u="none" strike="noStrike" cap="none" normalizeH="0" baseline="0" dirty="0">
                 <a:ln>
                   <a:noFill/>
                 </a:ln>
@@ -12876,12 +10642,12 @@
                   <a:schemeClr val="tx1"/>
                 </a:solidFill>
                 <a:effectLst/>
-                <a:latin typeface="Trebuchet MS" panose="020B0603020202020204" pitchFamily="34" charset="0"/>
+                <a:latin typeface="+mj-lt"/>
               </a:rPr>
               <a:t>Precise </a:t>
             </a:r>
             <a:r>
-              <a:rPr kumimoji="0" lang="es-ES" altLang="es-ES" b="0" i="0" u="none" strike="noStrike" cap="none" normalizeH="0" baseline="0" dirty="0" err="1">
+              <a:rPr kumimoji="0" lang="es-ES" altLang="es-ES" b="1" i="0" u="none" strike="noStrike" cap="none" normalizeH="0" baseline="0" dirty="0" err="1">
                 <a:ln>
                   <a:noFill/>
                 </a:ln>
@@ -12889,12 +10655,12 @@
                   <a:schemeClr val="tx1"/>
                 </a:solidFill>
                 <a:effectLst/>
-                <a:latin typeface="Trebuchet MS" panose="020B0603020202020204" pitchFamily="34" charset="0"/>
+                <a:latin typeface="+mj-lt"/>
               </a:rPr>
               <a:t>segmentation</a:t>
             </a:r>
             <a:r>
-              <a:rPr kumimoji="0" lang="es-ES" altLang="es-ES" b="0" i="0" u="none" strike="noStrike" cap="none" normalizeH="0" baseline="0" dirty="0">
+              <a:rPr kumimoji="0" lang="es-ES" altLang="es-ES" b="1" i="0" u="none" strike="noStrike" cap="none" normalizeH="0" baseline="0" dirty="0">
                 <a:ln>
                   <a:noFill/>
                 </a:ln>
@@ -12902,12 +10668,12 @@
                   <a:schemeClr val="tx1"/>
                 </a:solidFill>
                 <a:effectLst/>
-                <a:latin typeface="Trebuchet MS" panose="020B0603020202020204" pitchFamily="34" charset="0"/>
+                <a:latin typeface="+mj-lt"/>
               </a:rPr>
               <a:t> </a:t>
             </a:r>
             <a:r>
-              <a:rPr kumimoji="0" lang="es-ES" altLang="es-ES" b="0" i="0" u="none" strike="noStrike" cap="none" normalizeH="0" baseline="0" dirty="0" err="1">
+              <a:rPr kumimoji="0" lang="es-ES" altLang="es-ES" b="1" i="0" u="none" strike="noStrike" cap="none" normalizeH="0" baseline="0" dirty="0" err="1">
                 <a:ln>
                   <a:noFill/>
                 </a:ln>
@@ -12915,12 +10681,12 @@
                   <a:schemeClr val="tx1"/>
                 </a:solidFill>
                 <a:effectLst/>
-                <a:latin typeface="Trebuchet MS" panose="020B0603020202020204" pitchFamily="34" charset="0"/>
+                <a:latin typeface="+mj-lt"/>
               </a:rPr>
               <a:t>masks</a:t>
             </a:r>
-            <a:endParaRPr lang="es-ES" altLang="es-ES" dirty="0">
-              <a:latin typeface="Trebuchet MS" panose="020B0603020202020204" pitchFamily="34" charset="0"/>
+            <a:endParaRPr lang="es-ES" altLang="es-ES" b="1" dirty="0">
+              <a:latin typeface="+mj-lt"/>
             </a:endParaRPr>
           </a:p>
           <a:p>
@@ -12935,24 +10701,24 @@
               <a:buChar char="•"/>
             </a:pPr>
             <a:r>
-              <a:rPr lang="es-ES" altLang="es-ES" sz="2000" dirty="0">
-                <a:latin typeface="Arial" panose="020B0604020202020204" pitchFamily="34" charset="0"/>
+              <a:rPr lang="es-ES" altLang="es-ES" sz="2000" b="1" dirty="0">
+                <a:latin typeface="+mj-lt"/>
               </a:rPr>
               <a:t> </a:t>
             </a:r>
             <a:r>
-              <a:rPr lang="es-ES" altLang="es-ES" dirty="0">
-                <a:latin typeface="Trebuchet MS" panose="020B0603020202020204" pitchFamily="34" charset="0"/>
+              <a:rPr lang="es-ES" altLang="es-ES" b="1" dirty="0">
+                <a:latin typeface="+mj-lt"/>
               </a:rPr>
               <a:t>Zero-</a:t>
             </a:r>
             <a:r>
-              <a:rPr lang="es-ES" altLang="es-ES" dirty="0" err="1">
-                <a:latin typeface="Trebuchet MS" panose="020B0603020202020204" pitchFamily="34" charset="0"/>
+              <a:rPr lang="es-ES" altLang="es-ES" b="1" dirty="0" err="1">
+                <a:latin typeface="+mj-lt"/>
               </a:rPr>
               <a:t>shot</a:t>
             </a:r>
-            <a:endParaRPr kumimoji="0" lang="es-ES" altLang="es-ES" sz="2000" b="0" i="0" u="none" strike="noStrike" cap="none" normalizeH="0" baseline="0" dirty="0">
+            <a:endParaRPr kumimoji="0" lang="es-ES" altLang="es-ES" sz="2000" b="1" i="0" u="none" strike="noStrike" cap="none" normalizeH="0" baseline="0" dirty="0">
               <a:ln>
                 <a:noFill/>
               </a:ln>
@@ -12960,7 +10726,7 @@
                 <a:schemeClr val="tx1"/>
               </a:solidFill>
               <a:effectLst/>
-              <a:latin typeface="Trebuchet MS" panose="020B0603020202020204" pitchFamily="34" charset="0"/>
+              <a:latin typeface="+mj-lt"/>
             </a:endParaRPr>
           </a:p>
         </p:txBody>
@@ -12969,6 +10735,492 @@
     <p:extLst>
       <p:ext uri="{BB962C8B-B14F-4D97-AF65-F5344CB8AC3E}">
         <p14:creationId xmlns:p14="http://schemas.microsoft.com/office/powerpoint/2010/main" val="3050205436"/>
+      </p:ext>
+    </p:extLst>
+  </p:cSld>
+  <p:clrMapOvr>
+    <a:masterClrMapping/>
+  </p:clrMapOvr>
+</p:sld>
+</file>
+
+<file path=ppt/slides/slide8.xml><?xml version="1.0" encoding="utf-8"?>
+<p:sld xmlns:a="http://schemas.openxmlformats.org/drawingml/2006/main" xmlns:r="http://schemas.openxmlformats.org/officeDocument/2006/relationships" xmlns:p="http://schemas.openxmlformats.org/presentationml/2006/main">
+  <p:cSld>
+    <p:spTree>
+      <p:nvGrpSpPr>
+        <p:cNvPr id="1" name=""/>
+        <p:cNvGrpSpPr/>
+        <p:nvPr/>
+      </p:nvGrpSpPr>
+      <p:grpSpPr>
+        <a:xfrm>
+          <a:off x="0" y="0"/>
+          <a:ext cx="0" cy="0"/>
+          <a:chOff x="0" y="0"/>
+          <a:chExt cx="0" cy="0"/>
+        </a:xfrm>
+      </p:grpSpPr>
+      <p:sp>
+        <p:nvSpPr>
+          <p:cNvPr id="2" name="Title 1"/>
+          <p:cNvSpPr>
+            <a:spLocks noGrp="1"/>
+          </p:cNvSpPr>
+          <p:nvPr>
+            <p:ph type="title"/>
+          </p:nvPr>
+        </p:nvSpPr>
+        <p:spPr>
+          <a:xfrm>
+            <a:off x="457199" y="274638"/>
+            <a:ext cx="8417859" cy="788278"/>
+          </a:xfrm>
+        </p:spPr>
+        <p:txBody>
+          <a:bodyPr>
+            <a:normAutofit/>
+          </a:bodyPr>
+          <a:lstStyle/>
+          <a:p>
+            <a:pPr algn="l"/>
+            <a:r>
+              <a:rPr lang="en-GB" sz="2800" b="1" dirty="0"/>
+              <a:t>3</a:t>
+            </a:r>
+            <a:r>
+              <a:rPr lang="en-GB" sz="2800" dirty="0"/>
+              <a:t>. </a:t>
+            </a:r>
+            <a:r>
+              <a:rPr lang="en-GB" sz="2800" b="1" dirty="0"/>
+              <a:t>Selected method (Deep 2): YOLOv9 + </a:t>
+            </a:r>
+            <a:r>
+              <a:rPr lang="en-GB" sz="2800" b="1" dirty="0" err="1"/>
+              <a:t>EfficientSAM</a:t>
+            </a:r>
+            <a:endParaRPr lang="en-GB" sz="2800" b="1" dirty="0"/>
+          </a:p>
+        </p:txBody>
+      </p:sp>
+      <p:sp>
+        <p:nvSpPr>
+          <p:cNvPr id="30" name="Rectangle 7"/>
+          <p:cNvSpPr/>
+          <p:nvPr/>
+        </p:nvSpPr>
+        <p:spPr>
+          <a:xfrm>
+            <a:off x="80137" y="66509"/>
+            <a:ext cx="6565636" cy="303085"/>
+          </a:xfrm>
+          <a:prstGeom prst="rect">
+            <a:avLst/>
+          </a:prstGeom>
+          <a:noFill/>
+          <a:ln>
+            <a:noFill/>
+          </a:ln>
+          <a:extLst>
+            <a:ext uri="{909E8E84-426E-40DD-AFC4-6F175D3DCCD1}">
+              <a14:hiddenFill xmlns:a14="http://schemas.microsoft.com/office/drawing/2010/main">
+                <a:solidFill>
+                  <a:srgbClr val="FFFFFF"/>
+                </a:solidFill>
+              </a14:hiddenFill>
+            </a:ext>
+            <a:ext uri="{91240B29-F687-4F45-9708-019B960494DF}">
+              <a14:hiddenLine xmlns:a14="http://schemas.microsoft.com/office/drawing/2010/main" w="9525" cap="flat">
+                <a:solidFill>
+                  <a:srgbClr val="000000"/>
+                </a:solidFill>
+                <a:miter lim="800000"/>
+                <a:headEnd type="none" w="med" len="med"/>
+                <a:tailEnd type="none" w="med" len="med"/>
+              </a14:hiddenLine>
+            </a:ext>
+          </a:extLst>
+        </p:spPr>
+        <p:txBody>
+          <a:bodyPr lIns="0" tIns="0" rIns="0" bIns="0"/>
+          <a:lstStyle/>
+          <a:p>
+            <a:endParaRPr lang="en-US" sz="800" b="1" dirty="0">
+              <a:solidFill>
+                <a:srgbClr val="535353"/>
+              </a:solidFill>
+              <a:latin typeface="Geneva" charset="0"/>
+              <a:cs typeface="Geneva" charset="0"/>
+            </a:endParaRPr>
+          </a:p>
+        </p:txBody>
+      </p:sp>
+      <p:sp>
+        <p:nvSpPr>
+          <p:cNvPr id="4" name="CuadroTexto 3">
+            <a:extLst>
+              <a:ext uri="{FF2B5EF4-FFF2-40B4-BE49-F238E27FC236}">
+                <a16:creationId xmlns:a16="http://schemas.microsoft.com/office/drawing/2014/main" id="{FEBEBC6F-D661-5B46-7539-43DB6B7696D2}"/>
+              </a:ext>
+            </a:extLst>
+          </p:cNvPr>
+          <p:cNvSpPr txBox="1"/>
+          <p:nvPr/>
+        </p:nvSpPr>
+        <p:spPr>
+          <a:xfrm>
+            <a:off x="457199" y="1097961"/>
+            <a:ext cx="4648452" cy="1754326"/>
+          </a:xfrm>
+          <a:prstGeom prst="rect">
+            <a:avLst/>
+          </a:prstGeom>
+          <a:noFill/>
+        </p:spPr>
+        <p:txBody>
+          <a:bodyPr wrap="none" rtlCol="0">
+            <a:spAutoFit/>
+          </a:bodyPr>
+          <a:lstStyle/>
+          <a:p>
+            <a:pPr marL="285750" indent="-285750">
+              <a:buFont typeface="Arial" panose="020B0604020202020204" pitchFamily="34" charset="0"/>
+              <a:buChar char="•"/>
+            </a:pPr>
+            <a:r>
+              <a:rPr lang="es-ES" b="1" dirty="0" err="1"/>
+              <a:t>Detection</a:t>
+            </a:r>
+            <a:r>
+              <a:rPr lang="es-ES" b="1" dirty="0"/>
+              <a:t> + </a:t>
+            </a:r>
+            <a:r>
+              <a:rPr lang="es-ES" b="1" dirty="0" err="1"/>
+              <a:t>segmentation</a:t>
+            </a:r>
+            <a:r>
+              <a:rPr lang="es-ES" b="1" dirty="0"/>
+              <a:t> pipeline (2-stage)</a:t>
+            </a:r>
+          </a:p>
+          <a:p>
+            <a:pPr marL="285750" indent="-285750">
+              <a:buFont typeface="Arial" panose="020B0604020202020204" pitchFamily="34" charset="0"/>
+              <a:buChar char="•"/>
+            </a:pPr>
+            <a:r>
+              <a:rPr lang="es-ES" b="1" dirty="0"/>
+              <a:t>Real-time </a:t>
+            </a:r>
+            <a:r>
+              <a:rPr lang="es-ES" b="1" dirty="0" err="1"/>
+              <a:t>object</a:t>
+            </a:r>
+            <a:r>
+              <a:rPr lang="es-ES" b="1" dirty="0"/>
+              <a:t> </a:t>
+            </a:r>
+            <a:r>
+              <a:rPr lang="es-ES" b="1" dirty="0" err="1"/>
+              <a:t>detection</a:t>
+            </a:r>
+            <a:r>
+              <a:rPr lang="es-ES" b="1" dirty="0"/>
+              <a:t> (YOLOv9)</a:t>
+            </a:r>
+          </a:p>
+          <a:p>
+            <a:pPr marL="285750" indent="-285750">
+              <a:buFont typeface="Arial" panose="020B0604020202020204" pitchFamily="34" charset="0"/>
+              <a:buChar char="•"/>
+            </a:pPr>
+            <a:r>
+              <a:rPr lang="es-ES" b="1" dirty="0" err="1"/>
+              <a:t>Lightweight</a:t>
+            </a:r>
+            <a:r>
+              <a:rPr lang="es-ES" b="1" dirty="0"/>
+              <a:t> </a:t>
+            </a:r>
+            <a:r>
+              <a:rPr lang="es-ES" b="1" dirty="0" err="1"/>
+              <a:t>segmentation</a:t>
+            </a:r>
+            <a:r>
+              <a:rPr lang="es-ES" b="1" dirty="0"/>
+              <a:t> (</a:t>
+            </a:r>
+            <a:r>
+              <a:rPr lang="es-ES" b="1" dirty="0" err="1"/>
+              <a:t>EfficientSAM</a:t>
+            </a:r>
+            <a:r>
+              <a:rPr lang="es-ES" b="1" dirty="0"/>
+              <a:t>)</a:t>
+            </a:r>
+          </a:p>
+          <a:p>
+            <a:pPr marL="285750" indent="-285750">
+              <a:buFont typeface="Arial" panose="020B0604020202020204" pitchFamily="34" charset="0"/>
+              <a:buChar char="•"/>
+            </a:pPr>
+            <a:r>
+              <a:rPr lang="es-ES" b="1" dirty="0"/>
+              <a:t>QR-</a:t>
+            </a:r>
+            <a:r>
+              <a:rPr lang="es-ES" b="1" dirty="0" err="1"/>
+              <a:t>based</a:t>
+            </a:r>
+            <a:r>
+              <a:rPr lang="es-ES" b="1" dirty="0"/>
+              <a:t> </a:t>
+            </a:r>
+            <a:r>
+              <a:rPr lang="es-ES" b="1" dirty="0" err="1"/>
+              <a:t>calibration</a:t>
+            </a:r>
+            <a:r>
+              <a:rPr lang="es-ES" b="1" dirty="0"/>
+              <a:t> + </a:t>
+            </a:r>
+            <a:r>
+              <a:rPr lang="es-ES" b="1" dirty="0" err="1"/>
+              <a:t>homography</a:t>
+            </a:r>
+            <a:endParaRPr lang="es-ES" b="1" dirty="0"/>
+          </a:p>
+          <a:p>
+            <a:pPr marL="285750" indent="-285750">
+              <a:buFont typeface="Arial" panose="020B0604020202020204" pitchFamily="34" charset="0"/>
+              <a:buChar char="•"/>
+            </a:pPr>
+            <a:r>
+              <a:rPr lang="es-ES" b="1" dirty="0"/>
+              <a:t>Precise Edge </a:t>
+            </a:r>
+            <a:r>
+              <a:rPr lang="es-ES" b="1" dirty="0" err="1"/>
+              <a:t>localization</a:t>
+            </a:r>
+            <a:r>
+              <a:rPr lang="es-ES" b="1" dirty="0"/>
+              <a:t> and </a:t>
+            </a:r>
+            <a:r>
+              <a:rPr lang="es-ES" b="1" dirty="0" err="1"/>
+              <a:t>measurement</a:t>
+            </a:r>
+            <a:endParaRPr lang="es-ES" b="1" dirty="0"/>
+          </a:p>
+          <a:p>
+            <a:pPr marL="285750" indent="-285750">
+              <a:buFont typeface="Arial" panose="020B0604020202020204" pitchFamily="34" charset="0"/>
+              <a:buChar char="•"/>
+            </a:pPr>
+            <a:r>
+              <a:rPr lang="es-ES" b="1" dirty="0" err="1"/>
+              <a:t>Robust</a:t>
+            </a:r>
+            <a:r>
+              <a:rPr lang="es-ES" b="1" dirty="0"/>
+              <a:t> </a:t>
+            </a:r>
+            <a:r>
+              <a:rPr lang="es-ES" b="1" dirty="0" err="1"/>
+              <a:t>to</a:t>
+            </a:r>
+            <a:r>
+              <a:rPr lang="es-ES" b="1" dirty="0"/>
+              <a:t> real-</a:t>
+            </a:r>
+            <a:r>
+              <a:rPr lang="es-ES" b="1" dirty="0" err="1"/>
+              <a:t>world</a:t>
+            </a:r>
+            <a:r>
+              <a:rPr lang="es-ES" b="1" dirty="0"/>
+              <a:t> </a:t>
+            </a:r>
+            <a:r>
+              <a:rPr lang="es-ES" b="1" dirty="0" err="1"/>
+              <a:t>conditions</a:t>
+            </a:r>
+            <a:endParaRPr lang="es-ES" b="1" dirty="0"/>
+          </a:p>
+        </p:txBody>
+      </p:sp>
+      <p:pic>
+        <p:nvPicPr>
+          <p:cNvPr id="6" name="Imagen 5">
+            <a:extLst>
+              <a:ext uri="{FF2B5EF4-FFF2-40B4-BE49-F238E27FC236}">
+                <a16:creationId xmlns:a16="http://schemas.microsoft.com/office/drawing/2014/main" id="{295A306A-3247-0863-2D92-4BF070204B11}"/>
+              </a:ext>
+            </a:extLst>
+          </p:cNvPr>
+          <p:cNvPicPr>
+            <a:picLocks noChangeAspect="1"/>
+          </p:cNvPicPr>
+          <p:nvPr/>
+        </p:nvPicPr>
+        <p:blipFill>
+          <a:blip r:embed="rId3"/>
+          <a:srcRect l="1882" t="36270" b="16250"/>
+          <a:stretch>
+            <a:fillRect/>
+          </a:stretch>
+        </p:blipFill>
+        <p:spPr>
+          <a:xfrm>
+            <a:off x="471535" y="3429000"/>
+            <a:ext cx="8200930" cy="2645629"/>
+          </a:xfrm>
+          <a:prstGeom prst="rect">
+            <a:avLst/>
+          </a:prstGeom>
+        </p:spPr>
+      </p:pic>
+    </p:spTree>
+    <p:extLst>
+      <p:ext uri="{BB962C8B-B14F-4D97-AF65-F5344CB8AC3E}">
+        <p14:creationId xmlns:p14="http://schemas.microsoft.com/office/powerpoint/2010/main" val="569968867"/>
+      </p:ext>
+    </p:extLst>
+  </p:cSld>
+  <p:clrMapOvr>
+    <a:masterClrMapping/>
+  </p:clrMapOvr>
+</p:sld>
+</file>
+
+<file path=ppt/slides/slide9.xml><?xml version="1.0" encoding="utf-8"?>
+<p:sld xmlns:a="http://schemas.openxmlformats.org/drawingml/2006/main" xmlns:r="http://schemas.openxmlformats.org/officeDocument/2006/relationships" xmlns:p="http://schemas.openxmlformats.org/presentationml/2006/main">
+  <p:cSld>
+    <p:spTree>
+      <p:nvGrpSpPr>
+        <p:cNvPr id="1" name="">
+          <a:extLst>
+            <a:ext uri="{FF2B5EF4-FFF2-40B4-BE49-F238E27FC236}">
+              <a16:creationId xmlns:a16="http://schemas.microsoft.com/office/drawing/2014/main" id="{F4CD17D0-6AE0-335D-DCCB-779C22440197}"/>
+            </a:ext>
+          </a:extLst>
+        </p:cNvPr>
+        <p:cNvGrpSpPr/>
+        <p:nvPr/>
+      </p:nvGrpSpPr>
+      <p:grpSpPr>
+        <a:xfrm>
+          <a:off x="0" y="0"/>
+          <a:ext cx="0" cy="0"/>
+          <a:chOff x="0" y="0"/>
+          <a:chExt cx="0" cy="0"/>
+        </a:xfrm>
+      </p:grpSpPr>
+      <p:sp>
+        <p:nvSpPr>
+          <p:cNvPr id="2" name="Title 1">
+            <a:extLst>
+              <a:ext uri="{FF2B5EF4-FFF2-40B4-BE49-F238E27FC236}">
+                <a16:creationId xmlns:a16="http://schemas.microsoft.com/office/drawing/2014/main" id="{ABE9FD54-E3E9-1AA0-9DD9-0517F99B7216}"/>
+              </a:ext>
+            </a:extLst>
+          </p:cNvPr>
+          <p:cNvSpPr>
+            <a:spLocks noGrp="1"/>
+          </p:cNvSpPr>
+          <p:nvPr>
+            <p:ph type="title"/>
+          </p:nvPr>
+        </p:nvSpPr>
+        <p:spPr>
+          <a:xfrm>
+            <a:off x="457200" y="274638"/>
+            <a:ext cx="7302500" cy="788278"/>
+          </a:xfrm>
+        </p:spPr>
+        <p:txBody>
+          <a:bodyPr>
+            <a:normAutofit/>
+          </a:bodyPr>
+          <a:lstStyle/>
+          <a:p>
+            <a:pPr algn="l"/>
+            <a:r>
+              <a:rPr lang="en-GB" sz="2800" dirty="0"/>
+              <a:t>3. </a:t>
+            </a:r>
+            <a:r>
+              <a:rPr lang="en-GB" sz="2800" b="1" dirty="0"/>
+              <a:t>Selected method 03: ZZZZ</a:t>
+            </a:r>
+          </a:p>
+        </p:txBody>
+      </p:sp>
+      <p:sp>
+        <p:nvSpPr>
+          <p:cNvPr id="30" name="Rectangle 7">
+            <a:extLst>
+              <a:ext uri="{FF2B5EF4-FFF2-40B4-BE49-F238E27FC236}">
+                <a16:creationId xmlns:a16="http://schemas.microsoft.com/office/drawing/2014/main" id="{36C84E96-7653-5D12-E6C6-A76E4A341C6C}"/>
+              </a:ext>
+            </a:extLst>
+          </p:cNvPr>
+          <p:cNvSpPr/>
+          <p:nvPr/>
+        </p:nvSpPr>
+        <p:spPr>
+          <a:xfrm>
+            <a:off x="80137" y="66509"/>
+            <a:ext cx="6565636" cy="303085"/>
+          </a:xfrm>
+          <a:prstGeom prst="rect">
+            <a:avLst/>
+          </a:prstGeom>
+          <a:noFill/>
+          <a:ln>
+            <a:noFill/>
+          </a:ln>
+          <a:extLst>
+            <a:ext uri="{909E8E84-426E-40DD-AFC4-6F175D3DCCD1}">
+              <a14:hiddenFill xmlns:a14="http://schemas.microsoft.com/office/drawing/2010/main">
+                <a:solidFill>
+                  <a:srgbClr val="FFFFFF"/>
+                </a:solidFill>
+              </a14:hiddenFill>
+            </a:ext>
+            <a:ext uri="{91240B29-F687-4F45-9708-019B960494DF}">
+              <a14:hiddenLine xmlns:a14="http://schemas.microsoft.com/office/drawing/2010/main" w="9525" cap="flat">
+                <a:solidFill>
+                  <a:srgbClr val="000000"/>
+                </a:solidFill>
+                <a:miter lim="800000"/>
+                <a:headEnd type="none" w="med" len="med"/>
+                <a:tailEnd type="none" w="med" len="med"/>
+              </a14:hiddenLine>
+            </a:ext>
+          </a:extLst>
+        </p:spPr>
+        <p:txBody>
+          <a:bodyPr lIns="0" tIns="0" rIns="0" bIns="0"/>
+          <a:lstStyle/>
+          <a:p>
+            <a:endParaRPr lang="en-US" sz="800" b="1" dirty="0">
+              <a:solidFill>
+                <a:srgbClr val="535353"/>
+              </a:solidFill>
+              <a:latin typeface="Geneva" charset="0"/>
+              <a:cs typeface="Geneva" charset="0"/>
+            </a:endParaRPr>
+          </a:p>
+        </p:txBody>
+      </p:sp>
+    </p:spTree>
+    <p:extLst>
+      <p:ext uri="{BB962C8B-B14F-4D97-AF65-F5344CB8AC3E}">
+        <p14:creationId xmlns:p14="http://schemas.microsoft.com/office/powerpoint/2010/main" val="2985104822"/>
       </p:ext>
     </p:extLst>
   </p:cSld>
